--- a/Ipsen.pptx
+++ b/Ipsen.pptx
@@ -3573,7 +3573,23 @@
                   <a:srgbClr val="163B5A"/>
                 </a:solidFill>
               </a:rPr>
-              <a:t>Oncology is the group cash cow, drives revenue while allow the emergence of neuroscience and rare diseases products</a:t>
+              <a:t>Oncology is the group cash cow, drives revenue while </a:t>
+            </a:r>
+            <a:r>
+              <a:rPr lang="en-AU" sz="1400" dirty="0" err="1">
+                <a:solidFill>
+                  <a:srgbClr val="163B5A"/>
+                </a:solidFill>
+              </a:rPr>
+              <a:t>fueling</a:t>
+            </a:r>
+            <a:r>
+              <a:rPr lang="en-AU" sz="1400" dirty="0">
+                <a:solidFill>
+                  <a:srgbClr val="163B5A"/>
+                </a:solidFill>
+              </a:rPr>
+              <a:t> the emergence of neuroscience and rare diseases products</a:t>
             </a:r>
           </a:p>
         </p:txBody>
@@ -3683,8 +3699,8 @@
         </p:nvSpPr>
         <p:spPr>
           <a:xfrm>
-            <a:off x="451104" y="1608530"/>
-            <a:ext cx="6336698" cy="2677656"/>
+            <a:off x="451104" y="1534679"/>
+            <a:ext cx="4500275" cy="2862322"/>
           </a:xfrm>
           <a:prstGeom prst="rect">
             <a:avLst/>
@@ -3772,6 +3788,37 @@
               <a:buChar char="•"/>
             </a:pPr>
             <a:r>
+              <a:rPr lang="en-GB" sz="1200" b="1" dirty="0"/>
+              <a:t>Controlling shareholder</a:t>
+            </a:r>
+            <a:r>
+              <a:rPr lang="en-GB" sz="1200" dirty="0"/>
+              <a:t>: </a:t>
+            </a:r>
+            <a:r>
+              <a:rPr lang="en-GB" sz="1200" dirty="0" err="1"/>
+              <a:t>Beaufour</a:t>
+            </a:r>
+            <a:r>
+              <a:rPr lang="en-GB" sz="1200" dirty="0"/>
+              <a:t> family (~57% via </a:t>
+            </a:r>
+            <a:r>
+              <a:rPr lang="en-GB" sz="1200" dirty="0" err="1"/>
+              <a:t>Mayroy</a:t>
+            </a:r>
+            <a:r>
+              <a:rPr lang="en-GB" sz="1200" dirty="0"/>
+              <a:t>)</a:t>
+            </a:r>
+            <a:endParaRPr lang="en-FR" sz="1200" dirty="0"/>
+          </a:p>
+          <a:p>
+            <a:pPr marL="285750" indent="-285750">
+              <a:buFont typeface="Arial" panose="020B0604020202020204" pitchFamily="34" charset="0"/>
+              <a:buChar char="•"/>
+            </a:pPr>
+            <a:r>
               <a:rPr lang="en-FR" sz="1200" b="1" dirty="0"/>
               <a:t>Geography sales 2025</a:t>
             </a:r>
@@ -3823,15 +3870,21 @@
             </a:r>
           </a:p>
           <a:p>
+            <a:pPr marL="742950" lvl="1" indent="-285750">
+              <a:buFont typeface="Arial" panose="020B0604020202020204" pitchFamily="34" charset="0"/>
+              <a:buChar char="•"/>
+            </a:pPr>
+            <a:endParaRPr lang="en-FR" sz="1200" dirty="0"/>
+          </a:p>
+          <a:p>
             <a:pPr marL="285750" indent="-285750">
               <a:buFont typeface="Arial" panose="020B0604020202020204" pitchFamily="34" charset="0"/>
               <a:buChar char="•"/>
             </a:pPr>
             <a:r>
-              <a:rPr lang="en-FR" sz="1200" b="1" dirty="0"/>
-              <a:t>Key takeaways</a:t>
-            </a:r>
-            <a:endParaRPr lang="en-FR" sz="1200" dirty="0"/>
+              <a:rPr lang="en-GB" sz="1200" b="1" dirty="0"/>
+              <a:t>Financial highlights:</a:t>
+            </a:r>
           </a:p>
           <a:p>
             <a:pPr marL="742950" lvl="1" indent="-285750">
@@ -3839,54 +3892,10 @@
               <a:buChar char="•"/>
             </a:pPr>
             <a:r>
-              <a:rPr lang="en-FR" sz="1200" b="1" dirty="0"/>
-              <a:t>Oncology as the group’s economic core</a:t>
-            </a:r>
-            <a:r>
-              <a:rPr lang="en-FR" sz="1200" dirty="0"/>
-              <a:t> (largest TA &amp; main revenue contributor)</a:t>
-            </a:r>
-          </a:p>
-          <a:p>
-            <a:pPr marL="742950" lvl="1" indent="-285750">
-              <a:buFont typeface="Arial" panose="020B0604020202020204" pitchFamily="34" charset="0"/>
-              <a:buChar char="•"/>
-            </a:pPr>
-            <a:r>
-              <a:rPr lang="en-GB" sz="1200" b="1" dirty="0"/>
-              <a:t>Neurosciences: </a:t>
-            </a:r>
-            <a:r>
-              <a:rPr lang="en-GB" sz="1200" i="1" dirty="0"/>
-              <a:t>Dysport</a:t>
-            </a:r>
-            <a:r>
               <a:rPr lang="en-GB" sz="1200" dirty="0"/>
-              <a:t>-led business, with </a:t>
-            </a:r>
-            <a:r>
-              <a:rPr lang="en-GB" sz="1200" i="1" dirty="0" err="1"/>
-              <a:t>corabotase</a:t>
-            </a:r>
-            <a:r>
-              <a:rPr lang="en-GB" sz="1200" dirty="0"/>
-              <a:t> as next-generation growth relay</a:t>
-            </a:r>
-          </a:p>
-          <a:p>
-            <a:pPr marL="742950" lvl="1" indent="-285750">
-              <a:buFont typeface="Arial" panose="020B0604020202020204" pitchFamily="34" charset="0"/>
-              <a:buChar char="•"/>
-            </a:pPr>
-            <a:r>
-              <a:rPr lang="en-FR" sz="1200" b="1" dirty="0"/>
-              <a:t>Rare diseases </a:t>
-            </a:r>
-            <a:r>
-              <a:rPr lang="en-FR" sz="1200" dirty="0"/>
-              <a:t>as portfolio diversification</a:t>
-            </a:r>
-            <a:endParaRPr lang="en-AU" sz="1200" dirty="0"/>
+              <a:t>Net cash position: +€560M (FY25): strong bolt-on M&amp;A firepower</a:t>
+            </a:r>
+            <a:endParaRPr lang="en-FR" sz="1200" dirty="0"/>
           </a:p>
         </p:txBody>
       </p:sp>
@@ -3940,42 +3949,42 @@
           <p:nvPr>
             <p:extLst>
               <p:ext uri="{D42A27DB-BD31-4B8C-83A1-F6EECF244321}">
-                <p14:modId xmlns:p14="http://schemas.microsoft.com/office/powerpoint/2010/main" val="1178206680"/>
+                <p14:modId xmlns:p14="http://schemas.microsoft.com/office/powerpoint/2010/main" val="2648005757"/>
               </p:ext>
             </p:extLst>
           </p:nvPr>
         </p:nvGraphicFramePr>
         <p:xfrm>
-          <a:off x="6874867" y="2112944"/>
-          <a:ext cx="5232065" cy="3720465"/>
+          <a:off x="6235431" y="1608530"/>
+          <a:ext cx="5871503" cy="3221355"/>
         </p:xfrm>
         <a:graphic>
           <a:graphicData uri="http://schemas.openxmlformats.org/drawingml/2006/table">
             <a:tbl>
               <a:tblPr/>
               <a:tblGrid>
-                <a:gridCol w="2685103">
+                <a:gridCol w="3013263">
                   <a:extLst>
                     <a:ext uri="{9D8B030D-6E8A-4147-A177-3AD203B41FA5}">
                       <a16:colId xmlns:a16="http://schemas.microsoft.com/office/drawing/2014/main" val="1086495563"/>
                     </a:ext>
                   </a:extLst>
                 </a:gridCol>
-                <a:gridCol w="966982">
+                <a:gridCol w="1085162">
                   <a:extLst>
                     <a:ext uri="{9D8B030D-6E8A-4147-A177-3AD203B41FA5}">
                       <a16:colId xmlns:a16="http://schemas.microsoft.com/office/drawing/2014/main" val="3095386841"/>
                     </a:ext>
                   </a:extLst>
                 </a:gridCol>
-                <a:gridCol w="966982">
+                <a:gridCol w="1085162">
                   <a:extLst>
                     <a:ext uri="{9D8B030D-6E8A-4147-A177-3AD203B41FA5}">
                       <a16:colId xmlns:a16="http://schemas.microsoft.com/office/drawing/2014/main" val="2581013858"/>
                     </a:ext>
                   </a:extLst>
                 </a:gridCol>
-                <a:gridCol w="612998">
+                <a:gridCol w="687916">
                   <a:extLst>
                     <a:ext uri="{9D8B030D-6E8A-4147-A177-3AD203B41FA5}">
                       <a16:colId xmlns:a16="http://schemas.microsoft.com/office/drawing/2014/main" val="1447243760"/>
@@ -5163,7 +5172,7 @@
                         <a:buNone/>
                       </a:pPr>
                       <a:r>
-                        <a:rPr lang="en-FR" sz="1050" b="0" i="0" u="none" strike="noStrike">
+                        <a:rPr lang="en-FR" sz="1050" b="0" i="0" u="none" strike="noStrike" dirty="0">
                           <a:effectLst/>
                           <a:latin typeface="Arial" panose="020B0604020202020204" pitchFamily="34" charset="0"/>
                         </a:rPr>
@@ -5196,7 +5205,7 @@
                         <a:buNone/>
                       </a:pPr>
                       <a:r>
-                        <a:rPr lang="en-FR" sz="1050" b="0" i="0" u="none" strike="noStrike">
+                        <a:rPr lang="en-FR" sz="1050" b="0" i="0" u="none" strike="noStrike" dirty="0">
                           <a:effectLst/>
                           <a:latin typeface="Arial" panose="020B0604020202020204" pitchFamily="34" charset="0"/>
                         </a:rPr>
@@ -6708,7 +6717,7 @@
                         <a:buNone/>
                       </a:pPr>
                       <a:r>
-                        <a:rPr lang="en-FR" sz="1050" b="1" i="0" u="none" strike="noStrike">
+                        <a:rPr lang="en-FR" sz="1050" b="1" i="0" u="none" strike="noStrike" dirty="0">
                           <a:effectLst/>
                           <a:latin typeface="Arial" panose="020B0604020202020204" pitchFamily="34" charset="0"/>
                         </a:rPr>
@@ -6737,288 +6746,6 @@
                 <a:extLst>
                   <a:ext uri="{0D108BD9-81ED-4DB2-BD59-A6C34878D82A}">
                     <a16:rowId xmlns:a16="http://schemas.microsoft.com/office/drawing/2014/main" val="639691924"/>
-                  </a:ext>
-                </a:extLst>
-              </a:tr>
-              <a:tr h="109474">
-                <a:tc>
-                  <a:txBody>
-                    <a:bodyPr/>
-                    <a:lstStyle/>
-                    <a:p>
-                      <a:pPr algn="l" fontAlgn="b">
-                        <a:buNone/>
-                      </a:pPr>
-                      <a:r>
-                        <a:rPr lang="en-FR" sz="1050" b="1" i="0" u="none" strike="noStrike">
-                          <a:effectLst/>
-                          <a:latin typeface="Arial" panose="020B0604020202020204" pitchFamily="34" charset="0"/>
-                        </a:rPr>
-                        <a:t>Basic Earnings Per Share (in euros)</a:t>
-                      </a:r>
-                    </a:p>
-                  </a:txBody>
-                  <a:tcPr marL="85725" marR="9525" marT="9525" marB="0" anchor="b">
-                    <a:lnL>
-                      <a:noFill/>
-                    </a:lnL>
-                    <a:lnR>
-                      <a:noFill/>
-                    </a:lnR>
-                    <a:lnT>
-                      <a:noFill/>
-                    </a:lnT>
-                    <a:lnB>
-                      <a:noFill/>
-                    </a:lnB>
-                    <a:noFill/>
-                  </a:tcPr>
-                </a:tc>
-                <a:tc>
-                  <a:txBody>
-                    <a:bodyPr/>
-                    <a:lstStyle/>
-                    <a:p>
-                      <a:pPr algn="l" fontAlgn="b">
-                        <a:buNone/>
-                      </a:pPr>
-                      <a:r>
-                        <a:rPr lang="en-FR" sz="1050" b="1" i="0" u="none" strike="noStrike">
-                          <a:effectLst/>
-                          <a:latin typeface="Arial" panose="020B0604020202020204" pitchFamily="34" charset="0"/>
-                        </a:rPr>
-                        <a:t> $                    5 </a:t>
-                      </a:r>
-                    </a:p>
-                  </a:txBody>
-                  <a:tcPr marL="9525" marR="9525" marT="9525" marB="0" anchor="b">
-                    <a:lnL>
-                      <a:noFill/>
-                    </a:lnL>
-                    <a:lnR>
-                      <a:noFill/>
-                    </a:lnR>
-                    <a:lnT>
-                      <a:noFill/>
-                    </a:lnT>
-                    <a:lnB>
-                      <a:noFill/>
-                    </a:lnB>
-                    <a:noFill/>
-                  </a:tcPr>
-                </a:tc>
-                <a:tc>
-                  <a:txBody>
-                    <a:bodyPr/>
-                    <a:lstStyle/>
-                    <a:p>
-                      <a:pPr algn="l" fontAlgn="b">
-                        <a:buNone/>
-                      </a:pPr>
-                      <a:r>
-                        <a:rPr lang="en-FR" sz="1050" b="1" i="0" u="none" strike="noStrike">
-                          <a:effectLst/>
-                          <a:latin typeface="Arial" panose="020B0604020202020204" pitchFamily="34" charset="0"/>
-                        </a:rPr>
-                        <a:t> $                    4 </a:t>
-                      </a:r>
-                    </a:p>
-                  </a:txBody>
-                  <a:tcPr marL="9525" marR="9525" marT="9525" marB="0" anchor="b">
-                    <a:lnL>
-                      <a:noFill/>
-                    </a:lnL>
-                    <a:lnR>
-                      <a:noFill/>
-                    </a:lnR>
-                    <a:lnT>
-                      <a:noFill/>
-                    </a:lnT>
-                    <a:lnB>
-                      <a:noFill/>
-                    </a:lnB>
-                    <a:noFill/>
-                  </a:tcPr>
-                </a:tc>
-                <a:tc>
-                  <a:txBody>
-                    <a:bodyPr/>
-                    <a:lstStyle/>
-                    <a:p>
-                      <a:pPr algn="ctr" fontAlgn="b">
-                        <a:buNone/>
-                      </a:pPr>
-                      <a:r>
-                        <a:rPr lang="en-FR" sz="1050" b="0" i="0" u="none" strike="noStrike">
-                          <a:effectLst/>
-                          <a:latin typeface="Arial" panose="020B0604020202020204" pitchFamily="34" charset="0"/>
-                        </a:rPr>
-                        <a:t> </a:t>
-                      </a:r>
-                    </a:p>
-                  </a:txBody>
-                  <a:tcPr marL="9525" marR="9525" marT="9525" marB="0" anchor="b">
-                    <a:lnL>
-                      <a:noFill/>
-                    </a:lnL>
-                    <a:lnR>
-                      <a:noFill/>
-                    </a:lnR>
-                    <a:lnT>
-                      <a:noFill/>
-                    </a:lnT>
-                    <a:lnB>
-                      <a:noFill/>
-                    </a:lnB>
-                    <a:solidFill>
-                      <a:srgbClr val="FFFFFF"/>
-                    </a:solidFill>
-                  </a:tcPr>
-                </a:tc>
-                <a:extLst>
-                  <a:ext uri="{0D108BD9-81ED-4DB2-BD59-A6C34878D82A}">
-                    <a16:rowId xmlns:a16="http://schemas.microsoft.com/office/drawing/2014/main" val="2364795604"/>
-                  </a:ext>
-                </a:extLst>
-              </a:tr>
-              <a:tr h="109474">
-                <a:tc>
-                  <a:txBody>
-                    <a:bodyPr/>
-                    <a:lstStyle/>
-                    <a:p>
-                      <a:pPr algn="l" fontAlgn="b">
-                        <a:buNone/>
-                      </a:pPr>
-                      <a:r>
-                        <a:rPr lang="en-FR" sz="1050" b="1" i="0" u="none" strike="noStrike">
-                          <a:effectLst/>
-                          <a:latin typeface="Arial" panose="020B0604020202020204" pitchFamily="34" charset="0"/>
-                        </a:rPr>
-                        <a:t>Diluted Earnings Per Share (in euros)</a:t>
-                      </a:r>
-                    </a:p>
-                  </a:txBody>
-                  <a:tcPr marL="85725" marR="9525" marT="9525" marB="0" anchor="b">
-                    <a:lnL>
-                      <a:noFill/>
-                    </a:lnL>
-                    <a:lnR>
-                      <a:noFill/>
-                    </a:lnR>
-                    <a:lnT>
-                      <a:noFill/>
-                    </a:lnT>
-                    <a:lnB>
-                      <a:noFill/>
-                    </a:lnB>
-                    <a:noFill/>
-                  </a:tcPr>
-                </a:tc>
-                <a:tc>
-                  <a:txBody>
-                    <a:bodyPr/>
-                    <a:lstStyle/>
-                    <a:p>
-                      <a:pPr algn="l" fontAlgn="b">
-                        <a:buNone/>
-                      </a:pPr>
-                      <a:r>
-                        <a:rPr lang="en-FR" sz="1050" b="1" i="0" u="none" strike="noStrike">
-                          <a:effectLst/>
-                          <a:latin typeface="Arial" panose="020B0604020202020204" pitchFamily="34" charset="0"/>
-                        </a:rPr>
-                        <a:t> $                    5 </a:t>
-                      </a:r>
-                    </a:p>
-                  </a:txBody>
-                  <a:tcPr marL="9525" marR="9525" marT="9525" marB="0" anchor="b">
-                    <a:lnL>
-                      <a:noFill/>
-                    </a:lnL>
-                    <a:lnR>
-                      <a:noFill/>
-                    </a:lnR>
-                    <a:lnT>
-                      <a:noFill/>
-                    </a:lnT>
-                    <a:lnB>
-                      <a:noFill/>
-                    </a:lnB>
-                    <a:noFill/>
-                  </a:tcPr>
-                </a:tc>
-                <a:tc>
-                  <a:txBody>
-                    <a:bodyPr/>
-                    <a:lstStyle/>
-                    <a:p>
-                      <a:pPr algn="l" fontAlgn="b">
-                        <a:buNone/>
-                      </a:pPr>
-                      <a:r>
-                        <a:rPr lang="en-FR" sz="1050" b="1" i="0" u="none" strike="noStrike">
-                          <a:effectLst/>
-                          <a:latin typeface="Arial" panose="020B0604020202020204" pitchFamily="34" charset="0"/>
-                        </a:rPr>
-                        <a:t> $                    4 </a:t>
-                      </a:r>
-                    </a:p>
-                  </a:txBody>
-                  <a:tcPr marL="9525" marR="9525" marT="9525" marB="0" anchor="b">
-                    <a:lnL>
-                      <a:noFill/>
-                    </a:lnL>
-                    <a:lnR>
-                      <a:noFill/>
-                    </a:lnR>
-                    <a:lnT>
-                      <a:noFill/>
-                    </a:lnT>
-                    <a:lnB>
-                      <a:noFill/>
-                    </a:lnB>
-                    <a:noFill/>
-                  </a:tcPr>
-                </a:tc>
-                <a:tc>
-                  <a:txBody>
-                    <a:bodyPr/>
-                    <a:lstStyle/>
-                    <a:p>
-                      <a:pPr algn="ctr" fontAlgn="b">
-                        <a:buNone/>
-                      </a:pPr>
-                      <a:r>
-                        <a:rPr lang="en-FR" sz="1050" b="0" i="0" u="none" strike="noStrike" dirty="0">
-                          <a:effectLst/>
-                          <a:latin typeface="Arial" panose="020B0604020202020204" pitchFamily="34" charset="0"/>
-                        </a:rPr>
-                        <a:t> </a:t>
-                      </a:r>
-                    </a:p>
-                  </a:txBody>
-                  <a:tcPr marL="9525" marR="9525" marT="9525" marB="0" anchor="b">
-                    <a:lnL>
-                      <a:noFill/>
-                    </a:lnL>
-                    <a:lnR>
-                      <a:noFill/>
-                    </a:lnR>
-                    <a:lnT>
-                      <a:noFill/>
-                    </a:lnT>
-                    <a:lnB>
-                      <a:noFill/>
-                    </a:lnB>
-                    <a:solidFill>
-                      <a:srgbClr val="FFFFFF"/>
-                    </a:solidFill>
-                  </a:tcPr>
-                </a:tc>
-                <a:extLst>
-                  <a:ext uri="{0D108BD9-81ED-4DB2-BD59-A6C34878D82A}">
-                    <a16:rowId xmlns:a16="http://schemas.microsoft.com/office/drawing/2014/main" val="640954918"/>
                   </a:ext>
                 </a:extLst>
               </a:tr>
@@ -7040,7 +6767,7 @@
         </p:nvSpPr>
         <p:spPr>
           <a:xfrm>
-            <a:off x="6863648" y="1912951"/>
+            <a:off x="6261845" y="1456815"/>
             <a:ext cx="2900922" cy="45719"/>
           </a:xfrm>
           <a:prstGeom prst="rect">
@@ -7092,7 +6819,7 @@
         </p:nvSpPr>
         <p:spPr>
           <a:xfrm>
-            <a:off x="6787802" y="1566478"/>
+            <a:off x="6185999" y="1110342"/>
             <a:ext cx="1265475" cy="369332"/>
           </a:xfrm>
           <a:prstGeom prst="rect">
@@ -7131,7 +6858,7 @@
         </p:nvSpPr>
         <p:spPr>
           <a:xfrm>
-            <a:off x="526950" y="4632659"/>
+            <a:off x="526950" y="4992464"/>
             <a:ext cx="2900922" cy="45719"/>
           </a:xfrm>
           <a:prstGeom prst="rect">
@@ -7183,7 +6910,7 @@
         </p:nvSpPr>
         <p:spPr>
           <a:xfrm>
-            <a:off x="451104" y="4286186"/>
+            <a:off x="451104" y="4645991"/>
             <a:ext cx="1133324" cy="369332"/>
           </a:xfrm>
           <a:prstGeom prst="rect">
@@ -7223,14 +6950,14 @@
           <p:nvPr>
             <p:extLst>
               <p:ext uri="{D42A27DB-BD31-4B8C-83A1-F6EECF244321}">
-                <p14:modId xmlns:p14="http://schemas.microsoft.com/office/powerpoint/2010/main" val="54218955"/>
+                <p14:modId xmlns:p14="http://schemas.microsoft.com/office/powerpoint/2010/main" val="561119692"/>
               </p:ext>
             </p:extLst>
           </p:nvPr>
         </p:nvGraphicFramePr>
         <p:xfrm>
-          <a:off x="526950" y="4765380"/>
-          <a:ext cx="6118293" cy="1964554"/>
+          <a:off x="526950" y="5166831"/>
+          <a:ext cx="9898900" cy="1582479"/>
         </p:xfrm>
         <a:graphic>
           <a:graphicData uri="http://schemas.openxmlformats.org/drawingml/2006/table">
@@ -7239,42 +6966,49 @@
                 <a:tableStyleId>{6E25E649-3F16-4E02-A733-19D2CDBF48F0}</a:tableStyleId>
               </a:tblPr>
               <a:tblGrid>
-                <a:gridCol w="1247529">
+                <a:gridCol w="848058">
                   <a:extLst>
                     <a:ext uri="{9D8B030D-6E8A-4147-A177-3AD203B41FA5}">
                       <a16:colId xmlns:a16="http://schemas.microsoft.com/office/drawing/2014/main" val="1755445364"/>
                     </a:ext>
                   </a:extLst>
                 </a:gridCol>
-                <a:gridCol w="986828">
+                <a:gridCol w="1174595">
                   <a:extLst>
                     <a:ext uri="{9D8B030D-6E8A-4147-A177-3AD203B41FA5}">
                       <a16:colId xmlns:a16="http://schemas.microsoft.com/office/drawing/2014/main" val="1116672927"/>
                     </a:ext>
                   </a:extLst>
                 </a:gridCol>
-                <a:gridCol w="959667">
+                <a:gridCol w="1865971">
+                  <a:extLst>
+                    <a:ext uri="{9D8B030D-6E8A-4147-A177-3AD203B41FA5}">
+                      <a16:colId xmlns:a16="http://schemas.microsoft.com/office/drawing/2014/main" val="356679497"/>
+                    </a:ext>
+                  </a:extLst>
+                </a:gridCol>
+                <a:gridCol w="3113088">
+                  <a:extLst>
+                    <a:ext uri="{9D8B030D-6E8A-4147-A177-3AD203B41FA5}">
+                      <a16:colId xmlns:a16="http://schemas.microsoft.com/office/drawing/2014/main" val="853823028"/>
+                    </a:ext>
+                  </a:extLst>
+                </a:gridCol>
+                <a:gridCol w="1454150">
                   <a:extLst>
                     <a:ext uri="{9D8B030D-6E8A-4147-A177-3AD203B41FA5}">
                       <a16:colId xmlns:a16="http://schemas.microsoft.com/office/drawing/2014/main" val="4258530580"/>
                     </a:ext>
                   </a:extLst>
                 </a:gridCol>
-                <a:gridCol w="1013988">
-                  <a:extLst>
-                    <a:ext uri="{9D8B030D-6E8A-4147-A177-3AD203B41FA5}">
-                      <a16:colId xmlns:a16="http://schemas.microsoft.com/office/drawing/2014/main" val="3265045297"/>
-                    </a:ext>
-                  </a:extLst>
-                </a:gridCol>
-                <a:gridCol w="876745">
+                <a:gridCol w="560388">
                   <a:extLst>
                     <a:ext uri="{9D8B030D-6E8A-4147-A177-3AD203B41FA5}">
                       <a16:colId xmlns:a16="http://schemas.microsoft.com/office/drawing/2014/main" val="4174490988"/>
                     </a:ext>
                   </a:extLst>
                 </a:gridCol>
-                <a:gridCol w="1033536">
+                <a:gridCol w="882650">
                   <a:extLst>
                     <a:ext uri="{9D8B030D-6E8A-4147-A177-3AD203B41FA5}">
                       <a16:colId xmlns:a16="http://schemas.microsoft.com/office/drawing/2014/main" val="1289759013"/>
@@ -7320,41 +7054,13 @@
                         <a:buNone/>
                       </a:pPr>
                       <a:r>
-                        <a:rPr lang="en-FR" sz="1000" b="1" u="none" strike="noStrike">
-                          <a:solidFill>
-                            <a:schemeClr val="bg1"/>
-                          </a:solidFill>
-                          <a:effectLst/>
-                        </a:rPr>
-                        <a:t>TA</a:t>
-                      </a:r>
-                      <a:endParaRPr lang="en-FR" sz="1000" b="1" i="0" u="none" strike="noStrike">
-                        <a:solidFill>
-                          <a:schemeClr val="bg1"/>
-                        </a:solidFill>
-                        <a:effectLst/>
-                        <a:latin typeface="Arial" panose="020B0604020202020204" pitchFamily="34" charset="0"/>
-                      </a:endParaRPr>
-                    </a:p>
-                  </a:txBody>
-                  <a:tcPr marL="9525" marR="9525" marT="9525" marB="0" anchor="ctr"/>
-                </a:tc>
-                <a:tc>
-                  <a:txBody>
-                    <a:bodyPr/>
-                    <a:lstStyle/>
-                    <a:p>
-                      <a:pPr algn="ctr" fontAlgn="ctr">
-                        <a:buNone/>
-                      </a:pPr>
-                      <a:r>
                         <a:rPr lang="en-FR" sz="1000" b="1" u="none" strike="noStrike" dirty="0">
                           <a:solidFill>
                             <a:schemeClr val="bg1"/>
                           </a:solidFill>
                           <a:effectLst/>
                         </a:rPr>
-                        <a:t>Rev 2025 (€M)</a:t>
+                        <a:t>TA</a:t>
                       </a:r>
                       <a:endParaRPr lang="en-FR" sz="1000" b="1" i="0" u="none" strike="noStrike" dirty="0">
                         <a:solidFill>
@@ -7376,13 +7082,57 @@
                         <a:buNone/>
                       </a:pPr>
                       <a:r>
+                        <a:rPr lang="en-FR" sz="1000" b="1" i="0" u="none" strike="noStrike" dirty="0">
+                          <a:solidFill>
+                            <a:schemeClr val="bg1"/>
+                          </a:solidFill>
+                          <a:effectLst/>
+                          <a:latin typeface="Arial" panose="020B0604020202020204" pitchFamily="34" charset="0"/>
+                        </a:rPr>
+                        <a:t>MoA</a:t>
+                      </a:r>
+                    </a:p>
+                  </a:txBody>
+                  <a:tcPr marL="9525" marR="9525" marT="9525" marB="0" anchor="ctr"/>
+                </a:tc>
+                <a:tc>
+                  <a:txBody>
+                    <a:bodyPr/>
+                    <a:lstStyle/>
+                    <a:p>
+                      <a:pPr algn="ctr" fontAlgn="ctr">
+                        <a:buNone/>
+                      </a:pPr>
+                      <a:r>
+                        <a:rPr lang="en-FR" sz="1000" b="1" i="0" u="none" strike="noStrike" dirty="0">
+                          <a:solidFill>
+                            <a:schemeClr val="bg1"/>
+                          </a:solidFill>
+                          <a:effectLst/>
+                          <a:latin typeface="Arial" panose="020B0604020202020204" pitchFamily="34" charset="0"/>
+                        </a:rPr>
+                        <a:t>Indication</a:t>
+                      </a:r>
+                    </a:p>
+                  </a:txBody>
+                  <a:tcPr marL="9525" marR="9525" marT="9525" marB="0" anchor="ctr"/>
+                </a:tc>
+                <a:tc>
+                  <a:txBody>
+                    <a:bodyPr/>
+                    <a:lstStyle/>
+                    <a:p>
+                      <a:pPr algn="ctr" fontAlgn="ctr">
+                        <a:buNone/>
+                      </a:pPr>
+                      <a:r>
                         <a:rPr lang="en-FR" sz="1000" b="1" u="none" strike="noStrike" dirty="0">
                           <a:solidFill>
                             <a:schemeClr val="bg1"/>
                           </a:solidFill>
                           <a:effectLst/>
                         </a:rPr>
-                        <a:t>Variation 2024</a:t>
+                        <a:t>Rev 2025 (€M)</a:t>
                       </a:r>
                       <a:endParaRPr lang="en-FR" sz="1000" b="1" i="0" u="none" strike="noStrike" dirty="0">
                         <a:solidFill>
@@ -7523,7 +7273,7 @@
                         <a:buNone/>
                       </a:pPr>
                       <a:r>
-                        <a:rPr lang="en-FR" sz="1000" b="0" u="none" strike="noStrike">
+                        <a:rPr lang="en-GB" sz="1000" b="0" i="0" u="none" strike="noStrike" dirty="0">
                           <a:solidFill>
                             <a:srgbClr val="000000"/>
                           </a:solidFill>
@@ -7531,9 +7281,31 @@
                           <a:latin typeface="Arial" panose="020B0604020202020204" pitchFamily="34" charset="0"/>
                           <a:cs typeface="Arial" panose="020B0604020202020204" pitchFamily="34" charset="0"/>
                         </a:rPr>
-                        <a:t> $         1 135 </a:t>
-                      </a:r>
-                      <a:endParaRPr lang="en-FR" sz="1000" b="0" i="0" u="none" strike="noStrike">
+                        <a:t>Somatostatin </a:t>
+                      </a:r>
+                      <a:r>
+                        <a:rPr lang="en-GB" sz="1000" b="0" i="0" u="none" strike="noStrike" dirty="0" err="1">
+                          <a:solidFill>
+                            <a:srgbClr val="000000"/>
+                          </a:solidFill>
+                          <a:effectLst/>
+                          <a:latin typeface="Arial" panose="020B0604020202020204" pitchFamily="34" charset="0"/>
+                          <a:cs typeface="Arial" panose="020B0604020202020204" pitchFamily="34" charset="0"/>
+                        </a:rPr>
+                        <a:t>analog</a:t>
+                      </a:r>
+                      <a:r>
+                        <a:rPr lang="en-GB" sz="1000" b="0" i="0" u="none" strike="noStrike" dirty="0">
+                          <a:solidFill>
+                            <a:srgbClr val="000000"/>
+                          </a:solidFill>
+                          <a:effectLst/>
+                          <a:latin typeface="Arial" panose="020B0604020202020204" pitchFamily="34" charset="0"/>
+                          <a:cs typeface="Arial" panose="020B0604020202020204" pitchFamily="34" charset="0"/>
+                        </a:rPr>
+                        <a:t> (SSA)</a:t>
+                      </a:r>
+                      <a:endParaRPr lang="en-FR" sz="1000" b="0" i="0" u="none" strike="noStrike" dirty="0">
                         <a:solidFill>
                           <a:srgbClr val="000000"/>
                         </a:solidFill>
@@ -7550,11 +7322,11 @@
                     <a:bodyPr/>
                     <a:lstStyle/>
                     <a:p>
-                      <a:pPr algn="ctr" fontAlgn="b">
-                        <a:buNone/>
-                      </a:pPr>
-                      <a:r>
-                        <a:rPr lang="en-FR" sz="1000" b="0" u="none" strike="noStrike">
+                      <a:pPr algn="l" fontAlgn="b">
+                        <a:buNone/>
+                      </a:pPr>
+                      <a:r>
+                        <a:rPr lang="en-GB" sz="1000" b="0" i="0" u="none" strike="noStrike" dirty="0">
                           <a:solidFill>
                             <a:srgbClr val="000000"/>
                           </a:solidFill>
@@ -7562,9 +7334,31 @@
                           <a:latin typeface="Arial" panose="020B0604020202020204" pitchFamily="34" charset="0"/>
                           <a:cs typeface="Arial" panose="020B0604020202020204" pitchFamily="34" charset="0"/>
                         </a:rPr>
-                        <a:t>4.3%</a:t>
-                      </a:r>
-                      <a:endParaRPr lang="en-FR" sz="1000" b="0" i="0" u="none" strike="noStrike">
+                        <a:t>NET (neuroendocrine </a:t>
+                      </a:r>
+                      <a:r>
+                        <a:rPr lang="en-GB" sz="1000" b="0" i="0" u="none" strike="noStrike" dirty="0" err="1">
+                          <a:solidFill>
+                            <a:srgbClr val="000000"/>
+                          </a:solidFill>
+                          <a:effectLst/>
+                          <a:latin typeface="Arial" panose="020B0604020202020204" pitchFamily="34" charset="0"/>
+                          <a:cs typeface="Arial" panose="020B0604020202020204" pitchFamily="34" charset="0"/>
+                        </a:rPr>
+                        <a:t>tumors</a:t>
+                      </a:r>
+                      <a:r>
+                        <a:rPr lang="en-GB" sz="1000" b="0" i="0" u="none" strike="noStrike" dirty="0">
+                          <a:solidFill>
+                            <a:srgbClr val="000000"/>
+                          </a:solidFill>
+                          <a:effectLst/>
+                          <a:latin typeface="Arial" panose="020B0604020202020204" pitchFamily="34" charset="0"/>
+                          <a:cs typeface="Arial" panose="020B0604020202020204" pitchFamily="34" charset="0"/>
+                        </a:rPr>
+                        <a:t>) + acromegaly</a:t>
+                      </a:r>
+                      <a:endParaRPr lang="en-FR" sz="1000" b="0" i="0" u="none" strike="noStrike" dirty="0">
                         <a:solidFill>
                           <a:srgbClr val="000000"/>
                         </a:solidFill>
@@ -7581,6 +7375,37 @@
                     <a:bodyPr/>
                     <a:lstStyle/>
                     <a:p>
+                      <a:pPr algn="l" fontAlgn="b">
+                        <a:buNone/>
+                      </a:pPr>
+                      <a:r>
+                        <a:rPr lang="en-FR" sz="1000" b="0" u="none" strike="noStrike" dirty="0">
+                          <a:solidFill>
+                            <a:srgbClr val="000000"/>
+                          </a:solidFill>
+                          <a:effectLst/>
+                          <a:latin typeface="Arial" panose="020B0604020202020204" pitchFamily="34" charset="0"/>
+                          <a:cs typeface="Arial" panose="020B0604020202020204" pitchFamily="34" charset="0"/>
+                        </a:rPr>
+                        <a:t> $         1 135 (+4.3%) </a:t>
+                      </a:r>
+                      <a:endParaRPr lang="en-FR" sz="1000" b="0" i="0" u="none" strike="noStrike" dirty="0">
+                        <a:solidFill>
+                          <a:srgbClr val="000000"/>
+                        </a:solidFill>
+                        <a:effectLst/>
+                        <a:latin typeface="Arial" panose="020B0604020202020204" pitchFamily="34" charset="0"/>
+                        <a:cs typeface="Arial" panose="020B0604020202020204" pitchFamily="34" charset="0"/>
+                      </a:endParaRPr>
+                    </a:p>
+                  </a:txBody>
+                  <a:tcPr marL="9525" marR="9525" marT="9525" marB="0" anchor="ctr"/>
+                </a:tc>
+                <a:tc>
+                  <a:txBody>
+                    <a:bodyPr/>
+                    <a:lstStyle/>
+                    <a:p>
                       <a:pPr algn="ctr" fontAlgn="b">
                         <a:buNone/>
                       </a:pPr>
@@ -7593,7 +7418,7 @@
                           <a:latin typeface="Arial" panose="020B0604020202020204" pitchFamily="34" charset="0"/>
                           <a:cs typeface="Arial" panose="020B0604020202020204" pitchFamily="34" charset="0"/>
                         </a:rPr>
-                        <a:t>Peptid</a:t>
+                        <a:t>Peptide</a:t>
                       </a:r>
                     </a:p>
                   </a:txBody>
@@ -7660,7 +7485,7 @@
                           <a:latin typeface="Arial" panose="020B0604020202020204" pitchFamily="34" charset="0"/>
                           <a:cs typeface="Arial" panose="020B0604020202020204" pitchFamily="34" charset="0"/>
                         </a:rPr>
-                        <a:t>Cabometyx</a:t>
+                        <a:t>Cabometyx*</a:t>
                       </a:r>
                       <a:endParaRPr lang="en-FR" sz="1000" b="0" i="0" u="none" strike="noStrike" dirty="0">
                         <a:solidFill>
@@ -7714,7 +7539,7 @@
                         <a:buNone/>
                       </a:pPr>
                       <a:r>
-                        <a:rPr lang="en-FR" sz="1000" b="0" u="none" strike="noStrike" dirty="0">
+                        <a:rPr lang="en-GB" sz="1000" b="0" i="0" u="none" strike="noStrike" dirty="0">
                           <a:solidFill>
                             <a:srgbClr val="000000"/>
                           </a:solidFill>
@@ -7722,7 +7547,7 @@
                           <a:latin typeface="Arial" panose="020B0604020202020204" pitchFamily="34" charset="0"/>
                           <a:cs typeface="Arial" panose="020B0604020202020204" pitchFamily="34" charset="0"/>
                         </a:rPr>
-                        <a:t> $            613 </a:t>
+                        <a:t>Multi-TKI (VEGFR/MET/AXL)</a:t>
                       </a:r>
                       <a:endParaRPr lang="en-FR" sz="1000" b="0" i="0" u="none" strike="noStrike" dirty="0">
                         <a:solidFill>
@@ -7741,11 +7566,11 @@
                     <a:bodyPr/>
                     <a:lstStyle/>
                     <a:p>
-                      <a:pPr algn="ctr" fontAlgn="b">
-                        <a:buNone/>
-                      </a:pPr>
-                      <a:r>
-                        <a:rPr lang="en-FR" sz="1000" b="0" u="none" strike="noStrike" dirty="0">
+                      <a:pPr algn="l" fontAlgn="b">
+                        <a:buNone/>
+                      </a:pPr>
+                      <a:r>
+                        <a:rPr lang="en-GB" sz="1000" b="0" i="0" u="none" strike="noStrike" dirty="0">
                           <a:solidFill>
                             <a:srgbClr val="000000"/>
                           </a:solidFill>
@@ -7753,7 +7578,7 @@
                           <a:latin typeface="Arial" panose="020B0604020202020204" pitchFamily="34" charset="0"/>
                           <a:cs typeface="Arial" panose="020B0604020202020204" pitchFamily="34" charset="0"/>
                         </a:rPr>
-                        <a:t>5.1%</a:t>
+                        <a:t>RCC + HCC + thyroid.</a:t>
                       </a:r>
                       <a:endParaRPr lang="en-FR" sz="1000" b="0" i="0" u="none" strike="noStrike" dirty="0">
                         <a:solidFill>
@@ -7772,60 +7597,7 @@
                     <a:bodyPr/>
                     <a:lstStyle/>
                     <a:p>
-                      <a:pPr algn="ctr" fontAlgn="b">
-                        <a:buNone/>
-                      </a:pPr>
-                      <a:r>
-                        <a:rPr lang="en-FR" sz="1000" b="0" i="0" u="none" strike="noStrike" dirty="0">
-                          <a:solidFill>
-                            <a:srgbClr val="000000"/>
-                          </a:solidFill>
-                          <a:effectLst/>
-                          <a:latin typeface="Arial" panose="020B0604020202020204" pitchFamily="34" charset="0"/>
-                          <a:cs typeface="Arial" panose="020B0604020202020204" pitchFamily="34" charset="0"/>
-                        </a:rPr>
-                        <a:t>SM</a:t>
-                      </a:r>
-                    </a:p>
-                  </a:txBody>
-                  <a:tcPr marL="9525" marR="9525" marT="9525" marB="0" anchor="ctr"/>
-                </a:tc>
-                <a:tc>
-                  <a:txBody>
-                    <a:bodyPr/>
-                    <a:lstStyle/>
-                    <a:p>
-                      <a:pPr algn="ctr" fontAlgn="b">
-                        <a:buNone/>
-                      </a:pPr>
-                      <a:r>
-                        <a:rPr lang="en-FR" sz="1000" b="0" i="0" u="none" strike="noStrike" dirty="0">
-                          <a:solidFill>
-                            <a:srgbClr val="000000"/>
-                          </a:solidFill>
-                          <a:effectLst/>
-                          <a:latin typeface="Arial" panose="020B0604020202020204" pitchFamily="34" charset="0"/>
-                          <a:cs typeface="Arial" panose="020B0604020202020204" pitchFamily="34" charset="0"/>
-                        </a:rPr>
-                        <a:t>2029</a:t>
-                      </a:r>
-                    </a:p>
-                  </a:txBody>
-                  <a:tcPr marL="9525" marR="9525" marT="9525" marB="0" anchor="ctr"/>
-                </a:tc>
-                <a:extLst>
-                  <a:ext uri="{0D108BD9-81ED-4DB2-BD59-A6C34878D82A}">
-                    <a16:rowId xmlns:a16="http://schemas.microsoft.com/office/drawing/2014/main" val="1143314011"/>
-                  </a:ext>
-                </a:extLst>
-              </a:tr>
-              <a:tr h="176342">
-                <a:tc>
-                  <a:txBody>
-                    <a:bodyPr/>
-                    <a:lstStyle/>
-                    <a:p>
-                      <a:pPr algn="ctr" fontAlgn="b">
+                      <a:pPr algn="l" fontAlgn="b">
                         <a:buNone/>
                       </a:pPr>
                       <a:r>
@@ -7837,7 +7609,7 @@
                           <a:latin typeface="Arial" panose="020B0604020202020204" pitchFamily="34" charset="0"/>
                           <a:cs typeface="Arial" panose="020B0604020202020204" pitchFamily="34" charset="0"/>
                         </a:rPr>
-                        <a:t>Decapeptyl</a:t>
+                        <a:t> $            613 (+5.1%) </a:t>
                       </a:r>
                       <a:endParaRPr lang="en-FR" sz="1000" b="0" i="0" u="none" strike="noStrike" dirty="0">
                         <a:solidFill>
@@ -7860,6 +7632,506 @@
                         <a:buNone/>
                       </a:pPr>
                       <a:r>
+                        <a:rPr lang="en-FR" sz="1000" b="0" i="0" u="none" strike="noStrike" dirty="0">
+                          <a:solidFill>
+                            <a:srgbClr val="000000"/>
+                          </a:solidFill>
+                          <a:effectLst/>
+                          <a:latin typeface="Arial" panose="020B0604020202020204" pitchFamily="34" charset="0"/>
+                          <a:cs typeface="Arial" panose="020B0604020202020204" pitchFamily="34" charset="0"/>
+                        </a:rPr>
+                        <a:t>SM</a:t>
+                      </a:r>
+                    </a:p>
+                  </a:txBody>
+                  <a:tcPr marL="9525" marR="9525" marT="9525" marB="0" anchor="ctr"/>
+                </a:tc>
+                <a:tc>
+                  <a:txBody>
+                    <a:bodyPr/>
+                    <a:lstStyle/>
+                    <a:p>
+                      <a:pPr algn="ctr" fontAlgn="b">
+                        <a:buNone/>
+                      </a:pPr>
+                      <a:r>
+                        <a:rPr lang="en-FR" sz="1000" b="0" i="0" u="none" strike="noStrike" dirty="0">
+                          <a:solidFill>
+                            <a:srgbClr val="000000"/>
+                          </a:solidFill>
+                          <a:effectLst/>
+                          <a:latin typeface="Arial" panose="020B0604020202020204" pitchFamily="34" charset="0"/>
+                          <a:cs typeface="Arial" panose="020B0604020202020204" pitchFamily="34" charset="0"/>
+                        </a:rPr>
+                        <a:t>2029</a:t>
+                      </a:r>
+                    </a:p>
+                  </a:txBody>
+                  <a:tcPr marL="9525" marR="9525" marT="9525" marB="0" anchor="ctr"/>
+                </a:tc>
+                <a:extLst>
+                  <a:ext uri="{0D108BD9-81ED-4DB2-BD59-A6C34878D82A}">
+                    <a16:rowId xmlns:a16="http://schemas.microsoft.com/office/drawing/2014/main" val="1143314011"/>
+                  </a:ext>
+                </a:extLst>
+              </a:tr>
+              <a:tr h="176342">
+                <a:tc>
+                  <a:txBody>
+                    <a:bodyPr/>
+                    <a:lstStyle/>
+                    <a:p>
+                      <a:pPr algn="ctr" fontAlgn="b">
+                        <a:buNone/>
+                      </a:pPr>
+                      <a:r>
+                        <a:rPr lang="en-FR" sz="1000" b="0" u="none" strike="noStrike" dirty="0">
+                          <a:solidFill>
+                            <a:srgbClr val="000000"/>
+                          </a:solidFill>
+                          <a:effectLst/>
+                          <a:latin typeface="Arial" panose="020B0604020202020204" pitchFamily="34" charset="0"/>
+                          <a:cs typeface="Arial" panose="020B0604020202020204" pitchFamily="34" charset="0"/>
+                        </a:rPr>
+                        <a:t>Decapeptyl</a:t>
+                      </a:r>
+                      <a:endParaRPr lang="en-FR" sz="1000" b="0" i="0" u="none" strike="noStrike" dirty="0">
+                        <a:solidFill>
+                          <a:srgbClr val="000000"/>
+                        </a:solidFill>
+                        <a:effectLst/>
+                        <a:latin typeface="Arial" panose="020B0604020202020204" pitchFamily="34" charset="0"/>
+                        <a:cs typeface="Arial" panose="020B0604020202020204" pitchFamily="34" charset="0"/>
+                      </a:endParaRPr>
+                    </a:p>
+                  </a:txBody>
+                  <a:tcPr marL="9525" marR="9525" marT="9525" marB="0" anchor="ctr"/>
+                </a:tc>
+                <a:tc>
+                  <a:txBody>
+                    <a:bodyPr/>
+                    <a:lstStyle/>
+                    <a:p>
+                      <a:pPr algn="ctr" fontAlgn="b">
+                        <a:buNone/>
+                      </a:pPr>
+                      <a:r>
+                        <a:rPr lang="en-FR" sz="1000" b="0" u="none" strike="noStrike" dirty="0">
+                          <a:solidFill>
+                            <a:srgbClr val="000000"/>
+                          </a:solidFill>
+                          <a:effectLst/>
+                          <a:latin typeface="Arial" panose="020B0604020202020204" pitchFamily="34" charset="0"/>
+                          <a:cs typeface="Arial" panose="020B0604020202020204" pitchFamily="34" charset="0"/>
+                        </a:rPr>
+                        <a:t>Oncology</a:t>
+                      </a:r>
+                      <a:endParaRPr lang="en-FR" sz="1000" b="0" i="0" u="none" strike="noStrike" dirty="0">
+                        <a:solidFill>
+                          <a:srgbClr val="000000"/>
+                        </a:solidFill>
+                        <a:effectLst/>
+                        <a:latin typeface="Arial" panose="020B0604020202020204" pitchFamily="34" charset="0"/>
+                        <a:cs typeface="Arial" panose="020B0604020202020204" pitchFamily="34" charset="0"/>
+                      </a:endParaRPr>
+                    </a:p>
+                  </a:txBody>
+                  <a:tcPr marL="9525" marR="9525" marT="9525" marB="0" anchor="ctr"/>
+                </a:tc>
+                <a:tc>
+                  <a:txBody>
+                    <a:bodyPr/>
+                    <a:lstStyle/>
+                    <a:p>
+                      <a:pPr algn="ctr" fontAlgn="b">
+                        <a:buNone/>
+                      </a:pPr>
+                      <a:r>
+                        <a:rPr lang="en-GB" sz="1000" b="0" i="0" u="none" strike="noStrike" dirty="0">
+                          <a:solidFill>
+                            <a:srgbClr val="000000"/>
+                          </a:solidFill>
+                          <a:effectLst/>
+                          <a:latin typeface="Arial" panose="020B0604020202020204" pitchFamily="34" charset="0"/>
+                          <a:cs typeface="Arial" panose="020B0604020202020204" pitchFamily="34" charset="0"/>
+                        </a:rPr>
+                        <a:t>GnRH agonist</a:t>
+                      </a:r>
+                      <a:endParaRPr lang="en-FR" sz="1000" b="0" i="0" u="none" strike="noStrike" dirty="0">
+                        <a:solidFill>
+                          <a:srgbClr val="000000"/>
+                        </a:solidFill>
+                        <a:effectLst/>
+                        <a:latin typeface="Arial" panose="020B0604020202020204" pitchFamily="34" charset="0"/>
+                        <a:cs typeface="Arial" panose="020B0604020202020204" pitchFamily="34" charset="0"/>
+                      </a:endParaRPr>
+                    </a:p>
+                  </a:txBody>
+                  <a:tcPr marL="9525" marR="9525" marT="9525" marB="0" anchor="ctr"/>
+                </a:tc>
+                <a:tc>
+                  <a:txBody>
+                    <a:bodyPr/>
+                    <a:lstStyle/>
+                    <a:p>
+                      <a:pPr algn="l" fontAlgn="b">
+                        <a:buNone/>
+                      </a:pPr>
+                      <a:r>
+                        <a:rPr lang="en-GB" sz="1000" b="0" i="0" u="none" strike="noStrike" dirty="0">
+                          <a:solidFill>
+                            <a:srgbClr val="000000"/>
+                          </a:solidFill>
+                          <a:effectLst/>
+                          <a:latin typeface="Arial" panose="020B0604020202020204" pitchFamily="34" charset="0"/>
+                          <a:cs typeface="Arial" panose="020B0604020202020204" pitchFamily="34" charset="0"/>
+                        </a:rPr>
+                        <a:t>Prostate cancer + endometriosis</a:t>
+                      </a:r>
+                      <a:endParaRPr lang="en-FR" sz="1000" b="0" i="0" u="none" strike="noStrike" dirty="0">
+                        <a:solidFill>
+                          <a:srgbClr val="000000"/>
+                        </a:solidFill>
+                        <a:effectLst/>
+                        <a:latin typeface="Arial" panose="020B0604020202020204" pitchFamily="34" charset="0"/>
+                        <a:cs typeface="Arial" panose="020B0604020202020204" pitchFamily="34" charset="0"/>
+                      </a:endParaRPr>
+                    </a:p>
+                  </a:txBody>
+                  <a:tcPr marL="9525" marR="9525" marT="9525" marB="0" anchor="ctr"/>
+                </a:tc>
+                <a:tc>
+                  <a:txBody>
+                    <a:bodyPr/>
+                    <a:lstStyle/>
+                    <a:p>
+                      <a:pPr algn="l" fontAlgn="b">
+                        <a:buNone/>
+                      </a:pPr>
+                      <a:r>
+                        <a:rPr lang="en-FR" sz="1000" b="0" u="none" strike="noStrike" dirty="0">
+                          <a:solidFill>
+                            <a:srgbClr val="000000"/>
+                          </a:solidFill>
+                          <a:effectLst/>
+                          <a:latin typeface="Arial" panose="020B0604020202020204" pitchFamily="34" charset="0"/>
+                          <a:cs typeface="Arial" panose="020B0604020202020204" pitchFamily="34" charset="0"/>
+                        </a:rPr>
+                        <a:t> $            543 (+2.7%) </a:t>
+                      </a:r>
+                      <a:endParaRPr lang="en-FR" sz="1000" b="0" i="0" u="none" strike="noStrike" dirty="0">
+                        <a:solidFill>
+                          <a:srgbClr val="000000"/>
+                        </a:solidFill>
+                        <a:effectLst/>
+                        <a:latin typeface="Arial" panose="020B0604020202020204" pitchFamily="34" charset="0"/>
+                        <a:cs typeface="Arial" panose="020B0604020202020204" pitchFamily="34" charset="0"/>
+                      </a:endParaRPr>
+                    </a:p>
+                  </a:txBody>
+                  <a:tcPr marL="9525" marR="9525" marT="9525" marB="0" anchor="ctr"/>
+                </a:tc>
+                <a:tc>
+                  <a:txBody>
+                    <a:bodyPr/>
+                    <a:lstStyle/>
+                    <a:p>
+                      <a:pPr algn="ctr" fontAlgn="b">
+                        <a:buNone/>
+                      </a:pPr>
+                      <a:r>
+                        <a:rPr lang="en-FR" sz="1000" b="0" i="0" u="none" strike="noStrike" dirty="0">
+                          <a:solidFill>
+                            <a:srgbClr val="000000"/>
+                          </a:solidFill>
+                          <a:effectLst/>
+                          <a:latin typeface="Arial" panose="020B0604020202020204" pitchFamily="34" charset="0"/>
+                          <a:cs typeface="Arial" panose="020B0604020202020204" pitchFamily="34" charset="0"/>
+                        </a:rPr>
+                        <a:t>Peptide</a:t>
+                      </a:r>
+                    </a:p>
+                  </a:txBody>
+                  <a:tcPr marL="9525" marR="9525" marT="9525" marB="0" anchor="ctr"/>
+                </a:tc>
+                <a:tc>
+                  <a:txBody>
+                    <a:bodyPr/>
+                    <a:lstStyle/>
+                    <a:p>
+                      <a:pPr algn="ctr" fontAlgn="b">
+                        <a:buNone/>
+                      </a:pPr>
+                      <a:r>
+                        <a:rPr lang="en-FR" sz="1000" b="0" i="0" u="none" strike="noStrike" dirty="0">
+                          <a:solidFill>
+                            <a:srgbClr val="000000"/>
+                          </a:solidFill>
+                          <a:effectLst/>
+                          <a:latin typeface="Arial" panose="020B0604020202020204" pitchFamily="34" charset="0"/>
+                          <a:cs typeface="Arial" panose="020B0604020202020204" pitchFamily="34" charset="0"/>
+                        </a:rPr>
+                        <a:t>Expired</a:t>
+                      </a:r>
+                    </a:p>
+                  </a:txBody>
+                  <a:tcPr marL="9525" marR="9525" marT="9525" marB="0" anchor="ctr"/>
+                </a:tc>
+                <a:extLst>
+                  <a:ext uri="{0D108BD9-81ED-4DB2-BD59-A6C34878D82A}">
+                    <a16:rowId xmlns:a16="http://schemas.microsoft.com/office/drawing/2014/main" val="1831744614"/>
+                  </a:ext>
+                </a:extLst>
+              </a:tr>
+              <a:tr h="176342">
+                <a:tc>
+                  <a:txBody>
+                    <a:bodyPr/>
+                    <a:lstStyle/>
+                    <a:p>
+                      <a:pPr algn="ctr" fontAlgn="b">
+                        <a:buNone/>
+                      </a:pPr>
+                      <a:r>
+                        <a:rPr lang="en-FR" sz="1000" b="0" u="none" strike="noStrike" dirty="0">
+                          <a:solidFill>
+                            <a:srgbClr val="000000"/>
+                          </a:solidFill>
+                          <a:effectLst/>
+                          <a:latin typeface="Arial" panose="020B0604020202020204" pitchFamily="34" charset="0"/>
+                          <a:cs typeface="Arial" panose="020B0604020202020204" pitchFamily="34" charset="0"/>
+                        </a:rPr>
+                        <a:t>Onivyde</a:t>
+                      </a:r>
+                      <a:endParaRPr lang="en-FR" sz="1000" b="0" i="0" u="none" strike="noStrike" dirty="0">
+                        <a:solidFill>
+                          <a:srgbClr val="000000"/>
+                        </a:solidFill>
+                        <a:effectLst/>
+                        <a:latin typeface="Arial" panose="020B0604020202020204" pitchFamily="34" charset="0"/>
+                        <a:cs typeface="Arial" panose="020B0604020202020204" pitchFamily="34" charset="0"/>
+                      </a:endParaRPr>
+                    </a:p>
+                  </a:txBody>
+                  <a:tcPr marL="9525" marR="9525" marT="9525" marB="0" anchor="ctr"/>
+                </a:tc>
+                <a:tc>
+                  <a:txBody>
+                    <a:bodyPr/>
+                    <a:lstStyle/>
+                    <a:p>
+                      <a:pPr algn="ctr" fontAlgn="b">
+                        <a:buNone/>
+                      </a:pPr>
+                      <a:r>
+                        <a:rPr lang="en-FR" sz="1000" b="0" u="none" strike="noStrike" dirty="0">
+                          <a:solidFill>
+                            <a:srgbClr val="000000"/>
+                          </a:solidFill>
+                          <a:effectLst/>
+                          <a:latin typeface="Arial" panose="020B0604020202020204" pitchFamily="34" charset="0"/>
+                          <a:cs typeface="Arial" panose="020B0604020202020204" pitchFamily="34" charset="0"/>
+                        </a:rPr>
+                        <a:t>Oncology</a:t>
+                      </a:r>
+                      <a:endParaRPr lang="en-FR" sz="1000" b="0" i="0" u="none" strike="noStrike" dirty="0">
+                        <a:solidFill>
+                          <a:srgbClr val="000000"/>
+                        </a:solidFill>
+                        <a:effectLst/>
+                        <a:latin typeface="Arial" panose="020B0604020202020204" pitchFamily="34" charset="0"/>
+                        <a:cs typeface="Arial" panose="020B0604020202020204" pitchFamily="34" charset="0"/>
+                      </a:endParaRPr>
+                    </a:p>
+                  </a:txBody>
+                  <a:tcPr marL="9525" marR="9525" marT="9525" marB="0" anchor="ctr"/>
+                </a:tc>
+                <a:tc>
+                  <a:txBody>
+                    <a:bodyPr/>
+                    <a:lstStyle/>
+                    <a:p>
+                      <a:pPr algn="ctr" fontAlgn="b">
+                        <a:buNone/>
+                      </a:pPr>
+                      <a:r>
+                        <a:rPr lang="en-GB" sz="1000" b="0" i="0" u="none" strike="noStrike" dirty="0">
+                          <a:solidFill>
+                            <a:srgbClr val="000000"/>
+                          </a:solidFill>
+                          <a:effectLst/>
+                          <a:latin typeface="Arial" panose="020B0604020202020204" pitchFamily="34" charset="0"/>
+                          <a:cs typeface="Arial" panose="020B0604020202020204" pitchFamily="34" charset="0"/>
+                        </a:rPr>
+                        <a:t>topoisomerase I inhibitor</a:t>
+                      </a:r>
+                      <a:endParaRPr lang="en-FR" sz="1000" b="0" i="0" u="none" strike="noStrike" dirty="0">
+                        <a:solidFill>
+                          <a:srgbClr val="000000"/>
+                        </a:solidFill>
+                        <a:effectLst/>
+                        <a:latin typeface="Arial" panose="020B0604020202020204" pitchFamily="34" charset="0"/>
+                        <a:cs typeface="Arial" panose="020B0604020202020204" pitchFamily="34" charset="0"/>
+                      </a:endParaRPr>
+                    </a:p>
+                  </a:txBody>
+                  <a:tcPr marL="9525" marR="9525" marT="9525" marB="0" anchor="ctr"/>
+                </a:tc>
+                <a:tc>
+                  <a:txBody>
+                    <a:bodyPr/>
+                    <a:lstStyle/>
+                    <a:p>
+                      <a:pPr algn="l" fontAlgn="b">
+                        <a:buNone/>
+                      </a:pPr>
+                      <a:r>
+                        <a:rPr lang="en-GB" sz="1000" b="0" i="0" u="none" strike="noStrike" dirty="0">
+                          <a:solidFill>
+                            <a:srgbClr val="000000"/>
+                          </a:solidFill>
+                          <a:effectLst/>
+                          <a:latin typeface="Arial" panose="020B0604020202020204" pitchFamily="34" charset="0"/>
+                          <a:cs typeface="Arial" panose="020B0604020202020204" pitchFamily="34" charset="0"/>
+                        </a:rPr>
+                        <a:t>Pancreatic (PDAC)</a:t>
+                      </a:r>
+                      <a:endParaRPr lang="en-FR" sz="1000" b="0" i="0" u="none" strike="noStrike" dirty="0">
+                        <a:solidFill>
+                          <a:srgbClr val="000000"/>
+                        </a:solidFill>
+                        <a:effectLst/>
+                        <a:latin typeface="Arial" panose="020B0604020202020204" pitchFamily="34" charset="0"/>
+                        <a:cs typeface="Arial" panose="020B0604020202020204" pitchFamily="34" charset="0"/>
+                      </a:endParaRPr>
+                    </a:p>
+                  </a:txBody>
+                  <a:tcPr marL="9525" marR="9525" marT="9525" marB="0" anchor="ctr"/>
+                </a:tc>
+                <a:tc>
+                  <a:txBody>
+                    <a:bodyPr/>
+                    <a:lstStyle/>
+                    <a:p>
+                      <a:pPr algn="l" fontAlgn="b">
+                        <a:buNone/>
+                      </a:pPr>
+                      <a:r>
+                        <a:rPr lang="en-FR" sz="1000" b="0" u="none" strike="noStrike" dirty="0">
+                          <a:solidFill>
+                            <a:srgbClr val="000000"/>
+                          </a:solidFill>
+                          <a:effectLst/>
+                          <a:latin typeface="Arial" panose="020B0604020202020204" pitchFamily="34" charset="0"/>
+                          <a:cs typeface="Arial" panose="020B0604020202020204" pitchFamily="34" charset="0"/>
+                        </a:rPr>
+                        <a:t> $            207 (+6.2%) </a:t>
+                      </a:r>
+                      <a:endParaRPr lang="en-FR" sz="1000" b="0" i="0" u="none" strike="noStrike" dirty="0">
+                        <a:solidFill>
+                          <a:srgbClr val="000000"/>
+                        </a:solidFill>
+                        <a:effectLst/>
+                        <a:latin typeface="Arial" panose="020B0604020202020204" pitchFamily="34" charset="0"/>
+                        <a:cs typeface="Arial" panose="020B0604020202020204" pitchFamily="34" charset="0"/>
+                      </a:endParaRPr>
+                    </a:p>
+                  </a:txBody>
+                  <a:tcPr marL="9525" marR="9525" marT="9525" marB="0" anchor="ctr"/>
+                </a:tc>
+                <a:tc>
+                  <a:txBody>
+                    <a:bodyPr/>
+                    <a:lstStyle/>
+                    <a:p>
+                      <a:pPr algn="ctr" fontAlgn="b">
+                        <a:buNone/>
+                      </a:pPr>
+                      <a:r>
+                        <a:rPr lang="en-FR" sz="1000" b="0" i="0" u="none" strike="noStrike" dirty="0">
+                          <a:solidFill>
+                            <a:srgbClr val="000000"/>
+                          </a:solidFill>
+                          <a:effectLst/>
+                          <a:latin typeface="Arial" panose="020B0604020202020204" pitchFamily="34" charset="0"/>
+                          <a:cs typeface="Arial" panose="020B0604020202020204" pitchFamily="34" charset="0"/>
+                        </a:rPr>
+                        <a:t>SM</a:t>
+                      </a:r>
+                    </a:p>
+                  </a:txBody>
+                  <a:tcPr marL="9525" marR="9525" marT="9525" marB="0" anchor="ctr"/>
+                </a:tc>
+                <a:tc>
+                  <a:txBody>
+                    <a:bodyPr/>
+                    <a:lstStyle/>
+                    <a:p>
+                      <a:pPr algn="ctr" fontAlgn="b">
+                        <a:buNone/>
+                      </a:pPr>
+                      <a:r>
+                        <a:rPr lang="en-FR" sz="1000" b="0" i="0" u="none" strike="noStrike" dirty="0">
+                          <a:solidFill>
+                            <a:srgbClr val="000000"/>
+                          </a:solidFill>
+                          <a:effectLst/>
+                          <a:latin typeface="Arial" panose="020B0604020202020204" pitchFamily="34" charset="0"/>
+                          <a:cs typeface="Arial" panose="020B0604020202020204" pitchFamily="34" charset="0"/>
+                        </a:rPr>
+                        <a:t>2036</a:t>
+                      </a:r>
+                    </a:p>
+                  </a:txBody>
+                  <a:tcPr marL="9525" marR="9525" marT="9525" marB="0" anchor="ctr"/>
+                </a:tc>
+                <a:extLst>
+                  <a:ext uri="{0D108BD9-81ED-4DB2-BD59-A6C34878D82A}">
+                    <a16:rowId xmlns:a16="http://schemas.microsoft.com/office/drawing/2014/main" val="2702811013"/>
+                  </a:ext>
+                </a:extLst>
+              </a:tr>
+              <a:tr h="205733">
+                <a:tc>
+                  <a:txBody>
+                    <a:bodyPr/>
+                    <a:lstStyle/>
+                    <a:p>
+                      <a:pPr algn="ctr" fontAlgn="b">
+                        <a:buNone/>
+                      </a:pPr>
+                      <a:r>
+                        <a:rPr lang="en-FR" sz="1000" b="0" u="none" strike="noStrike" dirty="0">
+                          <a:solidFill>
+                            <a:srgbClr val="000000"/>
+                          </a:solidFill>
+                          <a:effectLst/>
+                          <a:latin typeface="Arial" panose="020B0604020202020204" pitchFamily="34" charset="0"/>
+                          <a:cs typeface="Arial" panose="020B0604020202020204" pitchFamily="34" charset="0"/>
+                        </a:rPr>
+                        <a:t>Iqirvo</a:t>
+                      </a:r>
+                      <a:endParaRPr lang="en-FR" sz="1000" b="0" i="0" u="none" strike="noStrike" dirty="0">
+                        <a:solidFill>
+                          <a:srgbClr val="000000"/>
+                        </a:solidFill>
+                        <a:effectLst/>
+                        <a:latin typeface="Arial" panose="020B0604020202020204" pitchFamily="34" charset="0"/>
+                        <a:cs typeface="Arial" panose="020B0604020202020204" pitchFamily="34" charset="0"/>
+                      </a:endParaRPr>
+                    </a:p>
+                  </a:txBody>
+                  <a:tcPr marL="9525" marR="9525" marT="9525" marB="0" anchor="ctr"/>
+                </a:tc>
+                <a:tc>
+                  <a:txBody>
+                    <a:bodyPr/>
+                    <a:lstStyle/>
+                    <a:p>
+                      <a:pPr algn="ctr" fontAlgn="b">
+                        <a:buNone/>
+                      </a:pPr>
+                      <a:r>
                         <a:rPr lang="en-FR" sz="1000" b="0" u="none" strike="noStrike">
                           <a:solidFill>
                             <a:srgbClr val="000000"/>
@@ -7868,7 +8140,7 @@
                           <a:latin typeface="Arial" panose="020B0604020202020204" pitchFamily="34" charset="0"/>
                           <a:cs typeface="Arial" panose="020B0604020202020204" pitchFamily="34" charset="0"/>
                         </a:rPr>
-                        <a:t>Oncology</a:t>
+                        <a:t>Rare Diseases</a:t>
                       </a:r>
                       <a:endParaRPr lang="en-FR" sz="1000" b="0" i="0" u="none" strike="noStrike">
                         <a:solidFill>
@@ -7891,7 +8163,7 @@
                         <a:buNone/>
                       </a:pPr>
                       <a:r>
-                        <a:rPr lang="en-FR" sz="1000" b="0" u="none" strike="noStrike" dirty="0">
+                        <a:rPr lang="en-GB" sz="1000" b="0" i="0" u="none" strike="noStrike" dirty="0">
                           <a:solidFill>
                             <a:srgbClr val="000000"/>
                           </a:solidFill>
@@ -7899,7 +8171,29 @@
                           <a:latin typeface="Arial" panose="020B0604020202020204" pitchFamily="34" charset="0"/>
                           <a:cs typeface="Arial" panose="020B0604020202020204" pitchFamily="34" charset="0"/>
                         </a:rPr>
-                        <a:t> $            543 </a:t>
+                        <a:t>PPAR</a:t>
+                      </a:r>
+                      <a:r>
+                        <a:rPr lang="el-GR" sz="1000" b="0" i="0" u="none" strike="noStrike" dirty="0">
+                          <a:solidFill>
+                            <a:srgbClr val="000000"/>
+                          </a:solidFill>
+                          <a:effectLst/>
+                          <a:latin typeface="Arial" panose="020B0604020202020204" pitchFamily="34" charset="0"/>
+                          <a:cs typeface="Arial" panose="020B0604020202020204" pitchFamily="34" charset="0"/>
+                        </a:rPr>
+                        <a:t>α/δ </a:t>
+                      </a:r>
+                      <a:r>
+                        <a:rPr lang="en-GB" sz="1000" b="0" i="0" u="none" strike="noStrike" dirty="0">
+                          <a:solidFill>
+                            <a:srgbClr val="000000"/>
+                          </a:solidFill>
+                          <a:effectLst/>
+                          <a:latin typeface="Arial" panose="020B0604020202020204" pitchFamily="34" charset="0"/>
+                          <a:cs typeface="Arial" panose="020B0604020202020204" pitchFamily="34" charset="0"/>
+                        </a:rPr>
+                        <a:t>agonist</a:t>
                       </a:r>
                       <a:endParaRPr lang="en-FR" sz="1000" b="0" i="0" u="none" strike="noStrike" dirty="0">
                         <a:solidFill>
@@ -7918,11 +8212,11 @@
                     <a:bodyPr/>
                     <a:lstStyle/>
                     <a:p>
-                      <a:pPr algn="ctr" fontAlgn="b">
-                        <a:buNone/>
-                      </a:pPr>
-                      <a:r>
-                        <a:rPr lang="en-FR" sz="1000" b="0" u="none" strike="noStrike" dirty="0">
+                      <a:pPr algn="l" fontAlgn="b">
+                        <a:buNone/>
+                      </a:pPr>
+                      <a:r>
+                        <a:rPr lang="en-GB" sz="1000" b="0" i="0" u="none" strike="noStrike" dirty="0">
                           <a:solidFill>
                             <a:srgbClr val="000000"/>
                           </a:solidFill>
@@ -7930,7 +8224,7 @@
                           <a:latin typeface="Arial" panose="020B0604020202020204" pitchFamily="34" charset="0"/>
                           <a:cs typeface="Arial" panose="020B0604020202020204" pitchFamily="34" charset="0"/>
                         </a:rPr>
-                        <a:t>2.7%</a:t>
+                        <a:t>PBC (primary biliary cholangitis).</a:t>
                       </a:r>
                       <a:endParaRPr lang="en-FR" sz="1000" b="0" i="0" u="none" strike="noStrike" dirty="0">
                         <a:solidFill>
@@ -7949,60 +8243,7 @@
                     <a:bodyPr/>
                     <a:lstStyle/>
                     <a:p>
-                      <a:pPr algn="ctr" fontAlgn="b">
-                        <a:buNone/>
-                      </a:pPr>
-                      <a:r>
-                        <a:rPr lang="en-FR" sz="1000" b="0" i="0" u="none" strike="noStrike" dirty="0">
-                          <a:solidFill>
-                            <a:srgbClr val="000000"/>
-                          </a:solidFill>
-                          <a:effectLst/>
-                          <a:latin typeface="Arial" panose="020B0604020202020204" pitchFamily="34" charset="0"/>
-                          <a:cs typeface="Arial" panose="020B0604020202020204" pitchFamily="34" charset="0"/>
-                        </a:rPr>
-                        <a:t>Peptid</a:t>
-                      </a:r>
-                    </a:p>
-                  </a:txBody>
-                  <a:tcPr marL="9525" marR="9525" marT="9525" marB="0" anchor="ctr"/>
-                </a:tc>
-                <a:tc>
-                  <a:txBody>
-                    <a:bodyPr/>
-                    <a:lstStyle/>
-                    <a:p>
-                      <a:pPr algn="ctr" fontAlgn="b">
-                        <a:buNone/>
-                      </a:pPr>
-                      <a:r>
-                        <a:rPr lang="en-FR" sz="1000" b="0" i="0" u="none" strike="noStrike" dirty="0">
-                          <a:solidFill>
-                            <a:srgbClr val="000000"/>
-                          </a:solidFill>
-                          <a:effectLst/>
-                          <a:latin typeface="Arial" panose="020B0604020202020204" pitchFamily="34" charset="0"/>
-                          <a:cs typeface="Arial" panose="020B0604020202020204" pitchFamily="34" charset="0"/>
-                        </a:rPr>
-                        <a:t>Expired</a:t>
-                      </a:r>
-                    </a:p>
-                  </a:txBody>
-                  <a:tcPr marL="9525" marR="9525" marT="9525" marB="0" anchor="ctr"/>
-                </a:tc>
-                <a:extLst>
-                  <a:ext uri="{0D108BD9-81ED-4DB2-BD59-A6C34878D82A}">
-                    <a16:rowId xmlns:a16="http://schemas.microsoft.com/office/drawing/2014/main" val="1831744614"/>
-                  </a:ext>
-                </a:extLst>
-              </a:tr>
-              <a:tr h="176342">
-                <a:tc>
-                  <a:txBody>
-                    <a:bodyPr/>
-                    <a:lstStyle/>
-                    <a:p>
-                      <a:pPr algn="ctr" fontAlgn="b">
+                      <a:pPr algn="l" fontAlgn="b">
                         <a:buNone/>
                       </a:pPr>
                       <a:r>
@@ -8014,7 +8255,7 @@
                           <a:latin typeface="Arial" panose="020B0604020202020204" pitchFamily="34" charset="0"/>
                           <a:cs typeface="Arial" panose="020B0604020202020204" pitchFamily="34" charset="0"/>
                         </a:rPr>
-                        <a:t>Onivyde</a:t>
+                        <a:t> $            184 (launched) </a:t>
                       </a:r>
                       <a:endParaRPr lang="en-FR" sz="1000" b="0" i="0" u="none" strike="noStrike" dirty="0">
                         <a:solidFill>
@@ -8037,6 +8278,90 @@
                         <a:buNone/>
                       </a:pPr>
                       <a:r>
+                        <a:rPr lang="en-FR" sz="1000" b="0" i="0" u="none" strike="noStrike" dirty="0">
+                          <a:solidFill>
+                            <a:srgbClr val="000000"/>
+                          </a:solidFill>
+                          <a:effectLst/>
+                          <a:latin typeface="Arial" panose="020B0604020202020204" pitchFamily="34" charset="0"/>
+                          <a:cs typeface="Arial" panose="020B0604020202020204" pitchFamily="34" charset="0"/>
+                        </a:rPr>
+                        <a:t>SM</a:t>
+                      </a:r>
+                    </a:p>
+                  </a:txBody>
+                  <a:tcPr marL="9525" marR="9525" marT="9525" marB="0" anchor="ctr"/>
+                </a:tc>
+                <a:tc>
+                  <a:txBody>
+                    <a:bodyPr/>
+                    <a:lstStyle/>
+                    <a:p>
+                      <a:pPr algn="ctr" fontAlgn="b">
+                        <a:buNone/>
+                      </a:pPr>
+                      <a:r>
+                        <a:rPr lang="en-FR" sz="1000" b="0" i="0" u="none" strike="noStrike" dirty="0">
+                          <a:solidFill>
+                            <a:srgbClr val="000000"/>
+                          </a:solidFill>
+                          <a:effectLst/>
+                          <a:latin typeface="Arial" panose="020B0604020202020204" pitchFamily="34" charset="0"/>
+                          <a:cs typeface="Arial" panose="020B0604020202020204" pitchFamily="34" charset="0"/>
+                        </a:rPr>
+                        <a:t>2037</a:t>
+                      </a:r>
+                    </a:p>
+                  </a:txBody>
+                  <a:tcPr marL="9525" marR="9525" marT="9525" marB="0" anchor="ctr"/>
+                </a:tc>
+                <a:extLst>
+                  <a:ext uri="{0D108BD9-81ED-4DB2-BD59-A6C34878D82A}">
+                    <a16:rowId xmlns:a16="http://schemas.microsoft.com/office/drawing/2014/main" val="706977273"/>
+                  </a:ext>
+                </a:extLst>
+              </a:tr>
+              <a:tr h="205733">
+                <a:tc>
+                  <a:txBody>
+                    <a:bodyPr/>
+                    <a:lstStyle/>
+                    <a:p>
+                      <a:pPr algn="ctr" fontAlgn="b">
+                        <a:buNone/>
+                      </a:pPr>
+                      <a:r>
+                        <a:rPr lang="en-FR" sz="1000" b="0" u="none" strike="noStrike" dirty="0">
+                          <a:solidFill>
+                            <a:srgbClr val="000000"/>
+                          </a:solidFill>
+                          <a:effectLst/>
+                          <a:latin typeface="Arial" panose="020B0604020202020204" pitchFamily="34" charset="0"/>
+                          <a:cs typeface="Arial" panose="020B0604020202020204" pitchFamily="34" charset="0"/>
+                        </a:rPr>
+                        <a:t>Bylvay</a:t>
+                      </a:r>
+                      <a:endParaRPr lang="en-FR" sz="1000" b="0" i="0" u="none" strike="noStrike" dirty="0">
+                        <a:solidFill>
+                          <a:srgbClr val="000000"/>
+                        </a:solidFill>
+                        <a:effectLst/>
+                        <a:latin typeface="Arial" panose="020B0604020202020204" pitchFamily="34" charset="0"/>
+                        <a:cs typeface="Arial" panose="020B0604020202020204" pitchFamily="34" charset="0"/>
+                      </a:endParaRPr>
+                    </a:p>
+                  </a:txBody>
+                  <a:tcPr marL="9525" marR="9525" marT="9525" marB="0" anchor="ctr"/>
+                </a:tc>
+                <a:tc>
+                  <a:txBody>
+                    <a:bodyPr/>
+                    <a:lstStyle/>
+                    <a:p>
+                      <a:pPr algn="ctr" fontAlgn="b">
+                        <a:buNone/>
+                      </a:pPr>
+                      <a:r>
                         <a:rPr lang="en-FR" sz="1000" b="0" u="none" strike="noStrike">
                           <a:solidFill>
                             <a:srgbClr val="000000"/>
@@ -8045,7 +8370,7 @@
                           <a:latin typeface="Arial" panose="020B0604020202020204" pitchFamily="34" charset="0"/>
                           <a:cs typeface="Arial" panose="020B0604020202020204" pitchFamily="34" charset="0"/>
                         </a:rPr>
-                        <a:t>Oncology</a:t>
+                        <a:t>Rare Diseases</a:t>
                       </a:r>
                       <a:endParaRPr lang="en-FR" sz="1000" b="0" i="0" u="none" strike="noStrike">
                         <a:solidFill>
@@ -8068,7 +8393,7 @@
                         <a:buNone/>
                       </a:pPr>
                       <a:r>
-                        <a:rPr lang="en-FR" sz="1000" b="0" u="none" strike="noStrike" dirty="0">
+                        <a:rPr lang="en-GB" sz="1000" b="0" i="0" u="none" strike="noStrike" dirty="0">
                           <a:solidFill>
                             <a:srgbClr val="000000"/>
                           </a:solidFill>
@@ -8076,7 +8401,7 @@
                           <a:latin typeface="Arial" panose="020B0604020202020204" pitchFamily="34" charset="0"/>
                           <a:cs typeface="Arial" panose="020B0604020202020204" pitchFamily="34" charset="0"/>
                         </a:rPr>
-                        <a:t> $            207 </a:t>
+                        <a:t>IBAT inhibitor</a:t>
                       </a:r>
                       <a:endParaRPr lang="en-FR" sz="1000" b="0" i="0" u="none" strike="noStrike" dirty="0">
                         <a:solidFill>
@@ -8095,11 +8420,11 @@
                     <a:bodyPr/>
                     <a:lstStyle/>
                     <a:p>
-                      <a:pPr algn="ctr" fontAlgn="b">
-                        <a:buNone/>
-                      </a:pPr>
-                      <a:r>
-                        <a:rPr lang="en-FR" sz="1000" b="0" u="none" strike="noStrike" dirty="0">
+                      <a:pPr algn="l" fontAlgn="b">
+                        <a:buNone/>
+                      </a:pPr>
+                      <a:r>
+                        <a:rPr lang="en-GB" sz="1000" b="0" i="0" u="none" strike="noStrike" dirty="0">
                           <a:solidFill>
                             <a:srgbClr val="000000"/>
                           </a:solidFill>
@@ -8107,7 +8432,7 @@
                           <a:latin typeface="Arial" panose="020B0604020202020204" pitchFamily="34" charset="0"/>
                           <a:cs typeface="Arial" panose="020B0604020202020204" pitchFamily="34" charset="0"/>
                         </a:rPr>
-                        <a:t>6.2%</a:t>
+                        <a:t>Cholestatic liver (PFIC, biliary atresia).</a:t>
                       </a:r>
                       <a:endParaRPr lang="en-FR" sz="1000" b="0" i="0" u="none" strike="noStrike" dirty="0">
                         <a:solidFill>
@@ -8126,60 +8451,7 @@
                     <a:bodyPr/>
                     <a:lstStyle/>
                     <a:p>
-                      <a:pPr algn="ctr" fontAlgn="b">
-                        <a:buNone/>
-                      </a:pPr>
-                      <a:r>
-                        <a:rPr lang="en-FR" sz="1000" b="0" i="0" u="none" strike="noStrike" dirty="0">
-                          <a:solidFill>
-                            <a:srgbClr val="000000"/>
-                          </a:solidFill>
-                          <a:effectLst/>
-                          <a:latin typeface="Arial" panose="020B0604020202020204" pitchFamily="34" charset="0"/>
-                          <a:cs typeface="Arial" panose="020B0604020202020204" pitchFamily="34" charset="0"/>
-                        </a:rPr>
-                        <a:t>SM</a:t>
-                      </a:r>
-                    </a:p>
-                  </a:txBody>
-                  <a:tcPr marL="9525" marR="9525" marT="9525" marB="0" anchor="ctr"/>
-                </a:tc>
-                <a:tc>
-                  <a:txBody>
-                    <a:bodyPr/>
-                    <a:lstStyle/>
-                    <a:p>
-                      <a:pPr algn="ctr" fontAlgn="b">
-                        <a:buNone/>
-                      </a:pPr>
-                      <a:r>
-                        <a:rPr lang="en-FR" sz="1000" b="0" i="0" u="none" strike="noStrike" dirty="0">
-                          <a:solidFill>
-                            <a:srgbClr val="000000"/>
-                          </a:solidFill>
-                          <a:effectLst/>
-                          <a:latin typeface="Arial" panose="020B0604020202020204" pitchFamily="34" charset="0"/>
-                          <a:cs typeface="Arial" panose="020B0604020202020204" pitchFamily="34" charset="0"/>
-                        </a:rPr>
-                        <a:t>2036</a:t>
-                      </a:r>
-                    </a:p>
-                  </a:txBody>
-                  <a:tcPr marL="9525" marR="9525" marT="9525" marB="0" anchor="ctr"/>
-                </a:tc>
-                <a:extLst>
-                  <a:ext uri="{0D108BD9-81ED-4DB2-BD59-A6C34878D82A}">
-                    <a16:rowId xmlns:a16="http://schemas.microsoft.com/office/drawing/2014/main" val="2702811013"/>
-                  </a:ext>
-                </a:extLst>
-              </a:tr>
-              <a:tr h="176342">
-                <a:tc>
-                  <a:txBody>
-                    <a:bodyPr/>
-                    <a:lstStyle/>
-                    <a:p>
-                      <a:pPr algn="ctr" fontAlgn="b">
+                      <a:pPr algn="l" fontAlgn="b">
                         <a:buNone/>
                       </a:pPr>
                       <a:r>
@@ -8191,7 +8463,7 @@
                           <a:latin typeface="Arial" panose="020B0604020202020204" pitchFamily="34" charset="0"/>
                           <a:cs typeface="Arial" panose="020B0604020202020204" pitchFamily="34" charset="0"/>
                         </a:rPr>
-                        <a:t>Tazverik</a:t>
+                        <a:t> $            180 (+36.3%) </a:t>
                       </a:r>
                       <a:endParaRPr lang="en-FR" sz="1000" b="0" i="0" u="none" strike="noStrike" dirty="0">
                         <a:solidFill>
@@ -8214,6 +8486,90 @@
                         <a:buNone/>
                       </a:pPr>
                       <a:r>
+                        <a:rPr lang="en-FR" sz="1000" b="0" i="0" u="none" strike="noStrike" dirty="0">
+                          <a:solidFill>
+                            <a:srgbClr val="000000"/>
+                          </a:solidFill>
+                          <a:effectLst/>
+                          <a:latin typeface="Arial" panose="020B0604020202020204" pitchFamily="34" charset="0"/>
+                          <a:cs typeface="Arial" panose="020B0604020202020204" pitchFamily="34" charset="0"/>
+                        </a:rPr>
+                        <a:t>SM</a:t>
+                      </a:r>
+                    </a:p>
+                  </a:txBody>
+                  <a:tcPr marL="9525" marR="9525" marT="9525" marB="0" anchor="ctr"/>
+                </a:tc>
+                <a:tc>
+                  <a:txBody>
+                    <a:bodyPr/>
+                    <a:lstStyle/>
+                    <a:p>
+                      <a:pPr algn="ctr" fontAlgn="b">
+                        <a:buNone/>
+                      </a:pPr>
+                      <a:r>
+                        <a:rPr lang="en-FR" sz="1000" b="0" i="0" u="none" strike="noStrike" dirty="0">
+                          <a:solidFill>
+                            <a:srgbClr val="000000"/>
+                          </a:solidFill>
+                          <a:effectLst/>
+                          <a:latin typeface="Arial" panose="020B0604020202020204" pitchFamily="34" charset="0"/>
+                          <a:cs typeface="Arial" panose="020B0604020202020204" pitchFamily="34" charset="0"/>
+                        </a:rPr>
+                        <a:t>2039</a:t>
+                      </a:r>
+                    </a:p>
+                  </a:txBody>
+                  <a:tcPr marL="9525" marR="9525" marT="9525" marB="0" anchor="ctr"/>
+                </a:tc>
+                <a:extLst>
+                  <a:ext uri="{0D108BD9-81ED-4DB2-BD59-A6C34878D82A}">
+                    <a16:rowId xmlns:a16="http://schemas.microsoft.com/office/drawing/2014/main" val="215480271"/>
+                  </a:ext>
+                </a:extLst>
+              </a:tr>
+              <a:tr h="205733">
+                <a:tc>
+                  <a:txBody>
+                    <a:bodyPr/>
+                    <a:lstStyle/>
+                    <a:p>
+                      <a:pPr algn="ctr" fontAlgn="b">
+                        <a:buNone/>
+                      </a:pPr>
+                      <a:r>
+                        <a:rPr lang="en-FR" sz="1000" b="0" u="none" strike="noStrike" dirty="0">
+                          <a:solidFill>
+                            <a:srgbClr val="000000"/>
+                          </a:solidFill>
+                          <a:effectLst/>
+                          <a:latin typeface="Arial" panose="020B0604020202020204" pitchFamily="34" charset="0"/>
+                          <a:cs typeface="Arial" panose="020B0604020202020204" pitchFamily="34" charset="0"/>
+                        </a:rPr>
+                        <a:t>Dysport</a:t>
+                      </a:r>
+                      <a:endParaRPr lang="en-FR" sz="1000" b="0" i="0" u="none" strike="noStrike" dirty="0">
+                        <a:solidFill>
+                          <a:srgbClr val="000000"/>
+                        </a:solidFill>
+                        <a:effectLst/>
+                        <a:latin typeface="Arial" panose="020B0604020202020204" pitchFamily="34" charset="0"/>
+                        <a:cs typeface="Arial" panose="020B0604020202020204" pitchFamily="34" charset="0"/>
+                      </a:endParaRPr>
+                    </a:p>
+                  </a:txBody>
+                  <a:tcPr marL="9525" marR="9525" marT="9525" marB="0" anchor="ctr"/>
+                </a:tc>
+                <a:tc>
+                  <a:txBody>
+                    <a:bodyPr/>
+                    <a:lstStyle/>
+                    <a:p>
+                      <a:pPr algn="ctr" fontAlgn="b">
+                        <a:buNone/>
+                      </a:pPr>
+                      <a:r>
                         <a:rPr lang="en-FR" sz="1000" b="0" u="none" strike="noStrike">
                           <a:solidFill>
                             <a:srgbClr val="000000"/>
@@ -8222,7 +8578,7 @@
                           <a:latin typeface="Arial" panose="020B0604020202020204" pitchFamily="34" charset="0"/>
                           <a:cs typeface="Arial" panose="020B0604020202020204" pitchFamily="34" charset="0"/>
                         </a:rPr>
-                        <a:t>Oncology</a:t>
+                        <a:t>Neurosciences</a:t>
                       </a:r>
                       <a:endParaRPr lang="en-FR" sz="1000" b="0" i="0" u="none" strike="noStrike">
                         <a:solidFill>
@@ -8245,7 +8601,7 @@
                         <a:buNone/>
                       </a:pPr>
                       <a:r>
-                        <a:rPr lang="en-FR" sz="1000" b="0" u="none" strike="noStrike">
+                        <a:rPr lang="en-GB" sz="1000" b="0" i="0" u="none" strike="noStrike" dirty="0">
                           <a:solidFill>
                             <a:srgbClr val="000000"/>
                           </a:solidFill>
@@ -8253,38 +8609,7 @@
                           <a:latin typeface="Arial" panose="020B0604020202020204" pitchFamily="34" charset="0"/>
                           <a:cs typeface="Arial" panose="020B0604020202020204" pitchFamily="34" charset="0"/>
                         </a:rPr>
-                        <a:t> $              41 </a:t>
-                      </a:r>
-                      <a:endParaRPr lang="en-FR" sz="1000" b="0" i="0" u="none" strike="noStrike">
-                        <a:solidFill>
-                          <a:srgbClr val="000000"/>
-                        </a:solidFill>
-                        <a:effectLst/>
-                        <a:latin typeface="Arial" panose="020B0604020202020204" pitchFamily="34" charset="0"/>
-                        <a:cs typeface="Arial" panose="020B0604020202020204" pitchFamily="34" charset="0"/>
-                      </a:endParaRPr>
-                    </a:p>
-                  </a:txBody>
-                  <a:tcPr marL="9525" marR="9525" marT="9525" marB="0" anchor="ctr"/>
-                </a:tc>
-                <a:tc>
-                  <a:txBody>
-                    <a:bodyPr/>
-                    <a:lstStyle/>
-                    <a:p>
-                      <a:pPr algn="ctr" fontAlgn="b">
-                        <a:buNone/>
-                      </a:pPr>
-                      <a:r>
-                        <a:rPr lang="en-FR" sz="1000" b="0" u="none" strike="noStrike" dirty="0">
-                          <a:solidFill>
-                            <a:srgbClr val="000000"/>
-                          </a:solidFill>
-                          <a:effectLst/>
-                          <a:latin typeface="Arial" panose="020B0604020202020204" pitchFamily="34" charset="0"/>
-                          <a:cs typeface="Arial" panose="020B0604020202020204" pitchFamily="34" charset="0"/>
-                        </a:rPr>
-                        <a:t>-9.1%</a:t>
+                        <a:t>Botulinum toxin type A</a:t>
                       </a:r>
                       <a:endParaRPr lang="en-FR" sz="1000" b="0" i="0" u="none" strike="noStrike" dirty="0">
                         <a:solidFill>
@@ -8303,45 +8628,8 @@
                     <a:bodyPr/>
                     <a:lstStyle/>
                     <a:p>
-                      <a:pPr algn="ctr" fontAlgn="b">
-                        <a:buNone/>
-                      </a:pPr>
-                      <a:r>
-                        <a:rPr lang="en-FR" sz="1000" b="0" i="0" u="none" strike="noStrike" dirty="0">
-                          <a:solidFill>
-                            <a:srgbClr val="000000"/>
-                          </a:solidFill>
-                          <a:effectLst/>
-                          <a:latin typeface="Arial" panose="020B0604020202020204" pitchFamily="34" charset="0"/>
-                          <a:cs typeface="Arial" panose="020B0604020202020204" pitchFamily="34" charset="0"/>
-                        </a:rPr>
-                        <a:t>SM</a:t>
-                      </a:r>
-                    </a:p>
-                  </a:txBody>
-                  <a:tcPr marL="9525" marR="9525" marT="9525" marB="0" anchor="ctr"/>
-                </a:tc>
-                <a:tc>
-                  <a:txBody>
-                    <a:bodyPr/>
-                    <a:lstStyle/>
-                    <a:p>
-                      <a:pPr marL="0" marR="0" lvl="0" indent="0" algn="ctr" defTabSz="914400" rtl="0" eaLnBrk="1" fontAlgn="b" latinLnBrk="0" hangingPunct="1">
-                        <a:lnSpc>
-                          <a:spcPct val="100000"/>
-                        </a:lnSpc>
-                        <a:spcBef>
-                          <a:spcPts val="0"/>
-                        </a:spcBef>
-                        <a:spcAft>
-                          <a:spcPts val="0"/>
-                        </a:spcAft>
-                        <a:buClrTx/>
-                        <a:buSzTx/>
-                        <a:buFontTx/>
-                        <a:buNone/>
-                        <a:tabLst/>
-                        <a:defRPr/>
+                      <a:pPr algn="l" fontAlgn="b">
+                        <a:buNone/>
                       </a:pPr>
                       <a:r>
                         <a:rPr lang="en-GB" sz="1000" b="0" i="0" u="none" strike="noStrike" dirty="0">
@@ -8352,56 +8640,7 @@
                           <a:latin typeface="Arial" panose="020B0604020202020204" pitchFamily="34" charset="0"/>
                           <a:cs typeface="Arial" panose="020B0604020202020204" pitchFamily="34" charset="0"/>
                         </a:rPr>
-                        <a:t>2032 (withdrew</a:t>
-                      </a:r>
-                      <a:r>
-                        <a:rPr lang="en-FR" sz="1000" b="0" i="0" u="none" strike="noStrike" dirty="0">
-                          <a:solidFill>
-                            <a:srgbClr val="000000"/>
-                          </a:solidFill>
-                          <a:effectLst/>
-                          <a:latin typeface="Arial" panose="020B0604020202020204" pitchFamily="34" charset="0"/>
-                          <a:cs typeface="Arial" panose="020B0604020202020204" pitchFamily="34" charset="0"/>
-                        </a:rPr>
-                        <a:t>)</a:t>
-                      </a:r>
-                      <a:endParaRPr lang="en-GB" sz="1000" b="0" i="0" u="none" strike="noStrike" dirty="0">
-                        <a:solidFill>
-                          <a:srgbClr val="000000"/>
-                        </a:solidFill>
-                        <a:effectLst/>
-                        <a:latin typeface="Arial" panose="020B0604020202020204" pitchFamily="34" charset="0"/>
-                        <a:cs typeface="Arial" panose="020B0604020202020204" pitchFamily="34" charset="0"/>
-                      </a:endParaRPr>
-                    </a:p>
-                  </a:txBody>
-                  <a:tcPr marL="9525" marR="9525" marT="9525" marB="0" anchor="ctr"/>
-                </a:tc>
-                <a:extLst>
-                  <a:ext uri="{0D108BD9-81ED-4DB2-BD59-A6C34878D82A}">
-                    <a16:rowId xmlns:a16="http://schemas.microsoft.com/office/drawing/2014/main" val="3431630276"/>
-                  </a:ext>
-                </a:extLst>
-              </a:tr>
-              <a:tr h="205733">
-                <a:tc>
-                  <a:txBody>
-                    <a:bodyPr/>
-                    <a:lstStyle/>
-                    <a:p>
-                      <a:pPr algn="ctr" fontAlgn="b">
-                        <a:buNone/>
-                      </a:pPr>
-                      <a:r>
-                        <a:rPr lang="en-FR" sz="1000" b="0" u="none" strike="noStrike" dirty="0">
-                          <a:solidFill>
-                            <a:srgbClr val="000000"/>
-                          </a:solidFill>
-                          <a:effectLst/>
-                          <a:latin typeface="Arial" panose="020B0604020202020204" pitchFamily="34" charset="0"/>
-                          <a:cs typeface="Arial" panose="020B0604020202020204" pitchFamily="34" charset="0"/>
-                        </a:rPr>
-                        <a:t>Iqirvo</a:t>
+                        <a:t>Aesthetic + therapeutic (spasticity, dystonia, migraine).</a:t>
                       </a:r>
                       <a:endParaRPr lang="en-FR" sz="1000" b="0" i="0" u="none" strike="noStrike" dirty="0">
                         <a:solidFill>
@@ -8420,69 +8659,7 @@
                     <a:bodyPr/>
                     <a:lstStyle/>
                     <a:p>
-                      <a:pPr algn="ctr" fontAlgn="b">
-                        <a:buNone/>
-                      </a:pPr>
-                      <a:r>
-                        <a:rPr lang="en-FR" sz="1000" b="0" u="none" strike="noStrike">
-                          <a:solidFill>
-                            <a:srgbClr val="000000"/>
-                          </a:solidFill>
-                          <a:effectLst/>
-                          <a:latin typeface="Arial" panose="020B0604020202020204" pitchFamily="34" charset="0"/>
-                          <a:cs typeface="Arial" panose="020B0604020202020204" pitchFamily="34" charset="0"/>
-                        </a:rPr>
-                        <a:t>Rare Diseases</a:t>
-                      </a:r>
-                      <a:endParaRPr lang="en-FR" sz="1000" b="0" i="0" u="none" strike="noStrike">
-                        <a:solidFill>
-                          <a:srgbClr val="000000"/>
-                        </a:solidFill>
-                        <a:effectLst/>
-                        <a:latin typeface="Arial" panose="020B0604020202020204" pitchFamily="34" charset="0"/>
-                        <a:cs typeface="Arial" panose="020B0604020202020204" pitchFamily="34" charset="0"/>
-                      </a:endParaRPr>
-                    </a:p>
-                  </a:txBody>
-                  <a:tcPr marL="9525" marR="9525" marT="9525" marB="0" anchor="ctr"/>
-                </a:tc>
-                <a:tc>
-                  <a:txBody>
-                    <a:bodyPr/>
-                    <a:lstStyle/>
-                    <a:p>
-                      <a:pPr algn="ctr" fontAlgn="b">
-                        <a:buNone/>
-                      </a:pPr>
-                      <a:r>
-                        <a:rPr lang="en-FR" sz="1000" b="0" u="none" strike="noStrike">
-                          <a:solidFill>
-                            <a:srgbClr val="000000"/>
-                          </a:solidFill>
-                          <a:effectLst/>
-                          <a:latin typeface="Arial" panose="020B0604020202020204" pitchFamily="34" charset="0"/>
-                          <a:cs typeface="Arial" panose="020B0604020202020204" pitchFamily="34" charset="0"/>
-                        </a:rPr>
-                        <a:t> $            184 </a:t>
-                      </a:r>
-                      <a:endParaRPr lang="en-FR" sz="1000" b="0" i="0" u="none" strike="noStrike">
-                        <a:solidFill>
-                          <a:srgbClr val="000000"/>
-                        </a:solidFill>
-                        <a:effectLst/>
-                        <a:latin typeface="Arial" panose="020B0604020202020204" pitchFamily="34" charset="0"/>
-                        <a:cs typeface="Arial" panose="020B0604020202020204" pitchFamily="34" charset="0"/>
-                      </a:endParaRPr>
-                    </a:p>
-                  </a:txBody>
-                  <a:tcPr marL="9525" marR="9525" marT="9525" marB="0" anchor="ctr"/>
-                </a:tc>
-                <a:tc>
-                  <a:txBody>
-                    <a:bodyPr/>
-                    <a:lstStyle/>
-                    <a:p>
-                      <a:pPr algn="ctr" fontAlgn="b">
+                      <a:pPr algn="l" fontAlgn="b">
                         <a:buNone/>
                       </a:pPr>
                       <a:r>
@@ -8494,540 +8671,9 @@
                           <a:latin typeface="Arial" panose="020B0604020202020204" pitchFamily="34" charset="0"/>
                           <a:cs typeface="Arial" panose="020B0604020202020204" pitchFamily="34" charset="0"/>
                         </a:rPr>
-                        <a:t>n/a</a:t>
+                        <a:t> $            734 (+9.7%) </a:t>
                       </a:r>
                       <a:endParaRPr lang="en-FR" sz="1000" b="0" i="0" u="none" strike="noStrike" dirty="0">
-                        <a:solidFill>
-                          <a:srgbClr val="000000"/>
-                        </a:solidFill>
-                        <a:effectLst/>
-                        <a:latin typeface="Arial" panose="020B0604020202020204" pitchFamily="34" charset="0"/>
-                        <a:cs typeface="Arial" panose="020B0604020202020204" pitchFamily="34" charset="0"/>
-                      </a:endParaRPr>
-                    </a:p>
-                  </a:txBody>
-                  <a:tcPr marL="9525" marR="9525" marT="9525" marB="0" anchor="ctr"/>
-                </a:tc>
-                <a:tc>
-                  <a:txBody>
-                    <a:bodyPr/>
-                    <a:lstStyle/>
-                    <a:p>
-                      <a:pPr algn="ctr" fontAlgn="b">
-                        <a:buNone/>
-                      </a:pPr>
-                      <a:r>
-                        <a:rPr lang="en-FR" sz="1000" b="0" i="0" u="none" strike="noStrike" dirty="0">
-                          <a:solidFill>
-                            <a:srgbClr val="000000"/>
-                          </a:solidFill>
-                          <a:effectLst/>
-                          <a:latin typeface="Arial" panose="020B0604020202020204" pitchFamily="34" charset="0"/>
-                          <a:cs typeface="Arial" panose="020B0604020202020204" pitchFamily="34" charset="0"/>
-                        </a:rPr>
-                        <a:t>SM</a:t>
-                      </a:r>
-                    </a:p>
-                  </a:txBody>
-                  <a:tcPr marL="9525" marR="9525" marT="9525" marB="0" anchor="ctr"/>
-                </a:tc>
-                <a:tc>
-                  <a:txBody>
-                    <a:bodyPr/>
-                    <a:lstStyle/>
-                    <a:p>
-                      <a:pPr algn="ctr" fontAlgn="b">
-                        <a:buNone/>
-                      </a:pPr>
-                      <a:r>
-                        <a:rPr lang="en-FR" sz="1000" b="0" i="0" u="none" strike="noStrike" dirty="0">
-                          <a:solidFill>
-                            <a:srgbClr val="000000"/>
-                          </a:solidFill>
-                          <a:effectLst/>
-                          <a:latin typeface="Arial" panose="020B0604020202020204" pitchFamily="34" charset="0"/>
-                          <a:cs typeface="Arial" panose="020B0604020202020204" pitchFamily="34" charset="0"/>
-                        </a:rPr>
-                        <a:t>2037</a:t>
-                      </a:r>
-                    </a:p>
-                  </a:txBody>
-                  <a:tcPr marL="9525" marR="9525" marT="9525" marB="0" anchor="ctr"/>
-                </a:tc>
-                <a:extLst>
-                  <a:ext uri="{0D108BD9-81ED-4DB2-BD59-A6C34878D82A}">
-                    <a16:rowId xmlns:a16="http://schemas.microsoft.com/office/drawing/2014/main" val="706977273"/>
-                  </a:ext>
-                </a:extLst>
-              </a:tr>
-              <a:tr h="205733">
-                <a:tc>
-                  <a:txBody>
-                    <a:bodyPr/>
-                    <a:lstStyle/>
-                    <a:p>
-                      <a:pPr algn="ctr" fontAlgn="b">
-                        <a:buNone/>
-                      </a:pPr>
-                      <a:r>
-                        <a:rPr lang="en-FR" sz="1000" b="0" u="none" strike="noStrike" dirty="0">
-                          <a:solidFill>
-                            <a:srgbClr val="000000"/>
-                          </a:solidFill>
-                          <a:effectLst/>
-                          <a:latin typeface="Arial" panose="020B0604020202020204" pitchFamily="34" charset="0"/>
-                          <a:cs typeface="Arial" panose="020B0604020202020204" pitchFamily="34" charset="0"/>
-                        </a:rPr>
-                        <a:t>Bylvay</a:t>
-                      </a:r>
-                      <a:endParaRPr lang="en-FR" sz="1000" b="0" i="0" u="none" strike="noStrike" dirty="0">
-                        <a:solidFill>
-                          <a:srgbClr val="000000"/>
-                        </a:solidFill>
-                        <a:effectLst/>
-                        <a:latin typeface="Arial" panose="020B0604020202020204" pitchFamily="34" charset="0"/>
-                        <a:cs typeface="Arial" panose="020B0604020202020204" pitchFamily="34" charset="0"/>
-                      </a:endParaRPr>
-                    </a:p>
-                  </a:txBody>
-                  <a:tcPr marL="9525" marR="9525" marT="9525" marB="0" anchor="ctr"/>
-                </a:tc>
-                <a:tc>
-                  <a:txBody>
-                    <a:bodyPr/>
-                    <a:lstStyle/>
-                    <a:p>
-                      <a:pPr algn="ctr" fontAlgn="b">
-                        <a:buNone/>
-                      </a:pPr>
-                      <a:r>
-                        <a:rPr lang="en-FR" sz="1000" b="0" u="none" strike="noStrike">
-                          <a:solidFill>
-                            <a:srgbClr val="000000"/>
-                          </a:solidFill>
-                          <a:effectLst/>
-                          <a:latin typeface="Arial" panose="020B0604020202020204" pitchFamily="34" charset="0"/>
-                          <a:cs typeface="Arial" panose="020B0604020202020204" pitchFamily="34" charset="0"/>
-                        </a:rPr>
-                        <a:t>Rare Diseases</a:t>
-                      </a:r>
-                      <a:endParaRPr lang="en-FR" sz="1000" b="0" i="0" u="none" strike="noStrike">
-                        <a:solidFill>
-                          <a:srgbClr val="000000"/>
-                        </a:solidFill>
-                        <a:effectLst/>
-                        <a:latin typeface="Arial" panose="020B0604020202020204" pitchFamily="34" charset="0"/>
-                        <a:cs typeface="Arial" panose="020B0604020202020204" pitchFamily="34" charset="0"/>
-                      </a:endParaRPr>
-                    </a:p>
-                  </a:txBody>
-                  <a:tcPr marL="9525" marR="9525" marT="9525" marB="0" anchor="ctr"/>
-                </a:tc>
-                <a:tc>
-                  <a:txBody>
-                    <a:bodyPr/>
-                    <a:lstStyle/>
-                    <a:p>
-                      <a:pPr algn="ctr" fontAlgn="b">
-                        <a:buNone/>
-                      </a:pPr>
-                      <a:r>
-                        <a:rPr lang="en-FR" sz="1000" b="0" u="none" strike="noStrike">
-                          <a:solidFill>
-                            <a:srgbClr val="000000"/>
-                          </a:solidFill>
-                          <a:effectLst/>
-                          <a:latin typeface="Arial" panose="020B0604020202020204" pitchFamily="34" charset="0"/>
-                          <a:cs typeface="Arial" panose="020B0604020202020204" pitchFamily="34" charset="0"/>
-                        </a:rPr>
-                        <a:t> $            180 </a:t>
-                      </a:r>
-                      <a:endParaRPr lang="en-FR" sz="1000" b="0" i="0" u="none" strike="noStrike">
-                        <a:solidFill>
-                          <a:srgbClr val="000000"/>
-                        </a:solidFill>
-                        <a:effectLst/>
-                        <a:latin typeface="Arial" panose="020B0604020202020204" pitchFamily="34" charset="0"/>
-                        <a:cs typeface="Arial" panose="020B0604020202020204" pitchFamily="34" charset="0"/>
-                      </a:endParaRPr>
-                    </a:p>
-                  </a:txBody>
-                  <a:tcPr marL="9525" marR="9525" marT="9525" marB="0" anchor="ctr"/>
-                </a:tc>
-                <a:tc>
-                  <a:txBody>
-                    <a:bodyPr/>
-                    <a:lstStyle/>
-                    <a:p>
-                      <a:pPr algn="ctr" fontAlgn="b">
-                        <a:buNone/>
-                      </a:pPr>
-                      <a:r>
-                        <a:rPr lang="en-FR" sz="1000" b="0" u="none" strike="noStrike" dirty="0">
-                          <a:solidFill>
-                            <a:srgbClr val="000000"/>
-                          </a:solidFill>
-                          <a:effectLst/>
-                          <a:latin typeface="Arial" panose="020B0604020202020204" pitchFamily="34" charset="0"/>
-                          <a:cs typeface="Arial" panose="020B0604020202020204" pitchFamily="34" charset="0"/>
-                        </a:rPr>
-                        <a:t>36.3%</a:t>
-                      </a:r>
-                      <a:endParaRPr lang="en-FR" sz="1000" b="0" i="0" u="none" strike="noStrike" dirty="0">
-                        <a:solidFill>
-                          <a:srgbClr val="000000"/>
-                        </a:solidFill>
-                        <a:effectLst/>
-                        <a:latin typeface="Arial" panose="020B0604020202020204" pitchFamily="34" charset="0"/>
-                        <a:cs typeface="Arial" panose="020B0604020202020204" pitchFamily="34" charset="0"/>
-                      </a:endParaRPr>
-                    </a:p>
-                  </a:txBody>
-                  <a:tcPr marL="9525" marR="9525" marT="9525" marB="0" anchor="ctr"/>
-                </a:tc>
-                <a:tc>
-                  <a:txBody>
-                    <a:bodyPr/>
-                    <a:lstStyle/>
-                    <a:p>
-                      <a:pPr algn="ctr" fontAlgn="b">
-                        <a:buNone/>
-                      </a:pPr>
-                      <a:r>
-                        <a:rPr lang="en-FR" sz="1000" b="0" i="0" u="none" strike="noStrike" dirty="0">
-                          <a:solidFill>
-                            <a:srgbClr val="000000"/>
-                          </a:solidFill>
-                          <a:effectLst/>
-                          <a:latin typeface="Arial" panose="020B0604020202020204" pitchFamily="34" charset="0"/>
-                          <a:cs typeface="Arial" panose="020B0604020202020204" pitchFamily="34" charset="0"/>
-                        </a:rPr>
-                        <a:t>SM</a:t>
-                      </a:r>
-                    </a:p>
-                  </a:txBody>
-                  <a:tcPr marL="9525" marR="9525" marT="9525" marB="0" anchor="ctr"/>
-                </a:tc>
-                <a:tc>
-                  <a:txBody>
-                    <a:bodyPr/>
-                    <a:lstStyle/>
-                    <a:p>
-                      <a:pPr algn="ctr" fontAlgn="b">
-                        <a:buNone/>
-                      </a:pPr>
-                      <a:r>
-                        <a:rPr lang="en-FR" sz="1000" b="0" i="0" u="none" strike="noStrike" dirty="0">
-                          <a:solidFill>
-                            <a:srgbClr val="000000"/>
-                          </a:solidFill>
-                          <a:effectLst/>
-                          <a:latin typeface="Arial" panose="020B0604020202020204" pitchFamily="34" charset="0"/>
-                          <a:cs typeface="Arial" panose="020B0604020202020204" pitchFamily="34" charset="0"/>
-                        </a:rPr>
-                        <a:t>2039</a:t>
-                      </a:r>
-                    </a:p>
-                  </a:txBody>
-                  <a:tcPr marL="9525" marR="9525" marT="9525" marB="0" anchor="ctr"/>
-                </a:tc>
-                <a:extLst>
-                  <a:ext uri="{0D108BD9-81ED-4DB2-BD59-A6C34878D82A}">
-                    <a16:rowId xmlns:a16="http://schemas.microsoft.com/office/drawing/2014/main" val="215480271"/>
-                  </a:ext>
-                </a:extLst>
-              </a:tr>
-              <a:tr h="205733">
-                <a:tc>
-                  <a:txBody>
-                    <a:bodyPr/>
-                    <a:lstStyle/>
-                    <a:p>
-                      <a:pPr algn="ctr" fontAlgn="b">
-                        <a:buNone/>
-                      </a:pPr>
-                      <a:r>
-                        <a:rPr lang="en-FR" sz="1000" b="0" u="none" strike="noStrike" dirty="0">
-                          <a:solidFill>
-                            <a:srgbClr val="000000"/>
-                          </a:solidFill>
-                          <a:effectLst/>
-                          <a:latin typeface="Arial" panose="020B0604020202020204" pitchFamily="34" charset="0"/>
-                          <a:cs typeface="Arial" panose="020B0604020202020204" pitchFamily="34" charset="0"/>
-                        </a:rPr>
-                        <a:t>Sohonos</a:t>
-                      </a:r>
-                      <a:endParaRPr lang="en-FR" sz="1000" b="0" i="0" u="none" strike="noStrike" dirty="0">
-                        <a:solidFill>
-                          <a:srgbClr val="000000"/>
-                        </a:solidFill>
-                        <a:effectLst/>
-                        <a:latin typeface="Arial" panose="020B0604020202020204" pitchFamily="34" charset="0"/>
-                        <a:cs typeface="Arial" panose="020B0604020202020204" pitchFamily="34" charset="0"/>
-                      </a:endParaRPr>
-                    </a:p>
-                  </a:txBody>
-                  <a:tcPr marL="9525" marR="9525" marT="9525" marB="0" anchor="ctr"/>
-                </a:tc>
-                <a:tc>
-                  <a:txBody>
-                    <a:bodyPr/>
-                    <a:lstStyle/>
-                    <a:p>
-                      <a:pPr algn="ctr" fontAlgn="b">
-                        <a:buNone/>
-                      </a:pPr>
-                      <a:r>
-                        <a:rPr lang="en-FR" sz="1000" b="0" u="none" strike="noStrike">
-                          <a:solidFill>
-                            <a:srgbClr val="000000"/>
-                          </a:solidFill>
-                          <a:effectLst/>
-                          <a:latin typeface="Arial" panose="020B0604020202020204" pitchFamily="34" charset="0"/>
-                          <a:cs typeface="Arial" panose="020B0604020202020204" pitchFamily="34" charset="0"/>
-                        </a:rPr>
-                        <a:t>Rare Diseases</a:t>
-                      </a:r>
-                      <a:endParaRPr lang="en-FR" sz="1000" b="0" i="0" u="none" strike="noStrike">
-                        <a:solidFill>
-                          <a:srgbClr val="000000"/>
-                        </a:solidFill>
-                        <a:effectLst/>
-                        <a:latin typeface="Arial" panose="020B0604020202020204" pitchFamily="34" charset="0"/>
-                        <a:cs typeface="Arial" panose="020B0604020202020204" pitchFamily="34" charset="0"/>
-                      </a:endParaRPr>
-                    </a:p>
-                  </a:txBody>
-                  <a:tcPr marL="9525" marR="9525" marT="9525" marB="0" anchor="ctr"/>
-                </a:tc>
-                <a:tc>
-                  <a:txBody>
-                    <a:bodyPr/>
-                    <a:lstStyle/>
-                    <a:p>
-                      <a:pPr algn="ctr" fontAlgn="b">
-                        <a:buNone/>
-                      </a:pPr>
-                      <a:r>
-                        <a:rPr lang="en-FR" sz="1000" b="0" u="none" strike="noStrike">
-                          <a:solidFill>
-                            <a:srgbClr val="000000"/>
-                          </a:solidFill>
-                          <a:effectLst/>
-                          <a:latin typeface="Arial" panose="020B0604020202020204" pitchFamily="34" charset="0"/>
-                          <a:cs typeface="Arial" panose="020B0604020202020204" pitchFamily="34" charset="0"/>
-                        </a:rPr>
-                        <a:t> $              21 </a:t>
-                      </a:r>
-                      <a:endParaRPr lang="en-FR" sz="1000" b="0" i="0" u="none" strike="noStrike">
-                        <a:solidFill>
-                          <a:srgbClr val="000000"/>
-                        </a:solidFill>
-                        <a:effectLst/>
-                        <a:latin typeface="Arial" panose="020B0604020202020204" pitchFamily="34" charset="0"/>
-                        <a:cs typeface="Arial" panose="020B0604020202020204" pitchFamily="34" charset="0"/>
-                      </a:endParaRPr>
-                    </a:p>
-                  </a:txBody>
-                  <a:tcPr marL="9525" marR="9525" marT="9525" marB="0" anchor="ctr"/>
-                </a:tc>
-                <a:tc>
-                  <a:txBody>
-                    <a:bodyPr/>
-                    <a:lstStyle/>
-                    <a:p>
-                      <a:pPr algn="ctr" fontAlgn="b">
-                        <a:buNone/>
-                      </a:pPr>
-                      <a:r>
-                        <a:rPr lang="en-FR" sz="1000" b="0" u="none" strike="noStrike">
-                          <a:solidFill>
-                            <a:srgbClr val="000000"/>
-                          </a:solidFill>
-                          <a:effectLst/>
-                          <a:latin typeface="Arial" panose="020B0604020202020204" pitchFamily="34" charset="0"/>
-                          <a:cs typeface="Arial" panose="020B0604020202020204" pitchFamily="34" charset="0"/>
-                        </a:rPr>
-                        <a:t>0.1%</a:t>
-                      </a:r>
-                      <a:endParaRPr lang="en-FR" sz="1000" b="0" i="0" u="none" strike="noStrike">
-                        <a:solidFill>
-                          <a:srgbClr val="000000"/>
-                        </a:solidFill>
-                        <a:effectLst/>
-                        <a:latin typeface="Arial" panose="020B0604020202020204" pitchFamily="34" charset="0"/>
-                        <a:cs typeface="Arial" panose="020B0604020202020204" pitchFamily="34" charset="0"/>
-                      </a:endParaRPr>
-                    </a:p>
-                  </a:txBody>
-                  <a:tcPr marL="9525" marR="9525" marT="9525" marB="0" anchor="ctr"/>
-                </a:tc>
-                <a:tc>
-                  <a:txBody>
-                    <a:bodyPr/>
-                    <a:lstStyle/>
-                    <a:p>
-                      <a:pPr algn="ctr" fontAlgn="b">
-                        <a:buNone/>
-                      </a:pPr>
-                      <a:r>
-                        <a:rPr lang="en-FR" sz="1000" b="0" i="0" u="none" strike="noStrike" dirty="0">
-                          <a:solidFill>
-                            <a:srgbClr val="000000"/>
-                          </a:solidFill>
-                          <a:effectLst/>
-                          <a:latin typeface="Arial" panose="020B0604020202020204" pitchFamily="34" charset="0"/>
-                          <a:cs typeface="Arial" panose="020B0604020202020204" pitchFamily="34" charset="0"/>
-                        </a:rPr>
-                        <a:t>SM</a:t>
-                      </a:r>
-                    </a:p>
-                  </a:txBody>
-                  <a:tcPr marL="9525" marR="9525" marT="9525" marB="0" anchor="ctr"/>
-                </a:tc>
-                <a:tc>
-                  <a:txBody>
-                    <a:bodyPr/>
-                    <a:lstStyle/>
-                    <a:p>
-                      <a:pPr algn="ctr" fontAlgn="b">
-                        <a:buNone/>
-                      </a:pPr>
-                      <a:r>
-                        <a:rPr lang="en-FR" sz="1000" b="0" i="0" u="none" strike="noStrike" dirty="0">
-                          <a:solidFill>
-                            <a:srgbClr val="000000"/>
-                          </a:solidFill>
-                          <a:effectLst/>
-                          <a:latin typeface="Arial" panose="020B0604020202020204" pitchFamily="34" charset="0"/>
-                          <a:cs typeface="Arial" panose="020B0604020202020204" pitchFamily="34" charset="0"/>
-                        </a:rPr>
-                        <a:t>2038</a:t>
-                      </a:r>
-                    </a:p>
-                  </a:txBody>
-                  <a:tcPr marL="9525" marR="9525" marT="9525" marB="0" anchor="ctr"/>
-                </a:tc>
-                <a:extLst>
-                  <a:ext uri="{0D108BD9-81ED-4DB2-BD59-A6C34878D82A}">
-                    <a16:rowId xmlns:a16="http://schemas.microsoft.com/office/drawing/2014/main" val="564204970"/>
-                  </a:ext>
-                </a:extLst>
-              </a:tr>
-              <a:tr h="205733">
-                <a:tc>
-                  <a:txBody>
-                    <a:bodyPr/>
-                    <a:lstStyle/>
-                    <a:p>
-                      <a:pPr algn="ctr" fontAlgn="b">
-                        <a:buNone/>
-                      </a:pPr>
-                      <a:r>
-                        <a:rPr lang="en-FR" sz="1000" b="0" u="none" strike="noStrike" dirty="0">
-                          <a:solidFill>
-                            <a:srgbClr val="000000"/>
-                          </a:solidFill>
-                          <a:effectLst/>
-                          <a:latin typeface="Arial" panose="020B0604020202020204" pitchFamily="34" charset="0"/>
-                          <a:cs typeface="Arial" panose="020B0604020202020204" pitchFamily="34" charset="0"/>
-                        </a:rPr>
-                        <a:t>Dysport</a:t>
-                      </a:r>
-                      <a:endParaRPr lang="en-FR" sz="1000" b="0" i="0" u="none" strike="noStrike" dirty="0">
-                        <a:solidFill>
-                          <a:srgbClr val="000000"/>
-                        </a:solidFill>
-                        <a:effectLst/>
-                        <a:latin typeface="Arial" panose="020B0604020202020204" pitchFamily="34" charset="0"/>
-                        <a:cs typeface="Arial" panose="020B0604020202020204" pitchFamily="34" charset="0"/>
-                      </a:endParaRPr>
-                    </a:p>
-                  </a:txBody>
-                  <a:tcPr marL="9525" marR="9525" marT="9525" marB="0" anchor="ctr"/>
-                </a:tc>
-                <a:tc>
-                  <a:txBody>
-                    <a:bodyPr/>
-                    <a:lstStyle/>
-                    <a:p>
-                      <a:pPr algn="ctr" fontAlgn="b">
-                        <a:buNone/>
-                      </a:pPr>
-                      <a:r>
-                        <a:rPr lang="en-FR" sz="1000" b="0" u="none" strike="noStrike">
-                          <a:solidFill>
-                            <a:srgbClr val="000000"/>
-                          </a:solidFill>
-                          <a:effectLst/>
-                          <a:latin typeface="Arial" panose="020B0604020202020204" pitchFamily="34" charset="0"/>
-                          <a:cs typeface="Arial" panose="020B0604020202020204" pitchFamily="34" charset="0"/>
-                        </a:rPr>
-                        <a:t>Neurosciences</a:t>
-                      </a:r>
-                      <a:endParaRPr lang="en-FR" sz="1000" b="0" i="0" u="none" strike="noStrike">
-                        <a:solidFill>
-                          <a:srgbClr val="000000"/>
-                        </a:solidFill>
-                        <a:effectLst/>
-                        <a:latin typeface="Arial" panose="020B0604020202020204" pitchFamily="34" charset="0"/>
-                        <a:cs typeface="Arial" panose="020B0604020202020204" pitchFamily="34" charset="0"/>
-                      </a:endParaRPr>
-                    </a:p>
-                  </a:txBody>
-                  <a:tcPr marL="9525" marR="9525" marT="9525" marB="0" anchor="ctr"/>
-                </a:tc>
-                <a:tc>
-                  <a:txBody>
-                    <a:bodyPr/>
-                    <a:lstStyle/>
-                    <a:p>
-                      <a:pPr algn="ctr" fontAlgn="b">
-                        <a:buNone/>
-                      </a:pPr>
-                      <a:r>
-                        <a:rPr lang="en-FR" sz="1000" b="0" u="none" strike="noStrike">
-                          <a:solidFill>
-                            <a:srgbClr val="000000"/>
-                          </a:solidFill>
-                          <a:effectLst/>
-                          <a:latin typeface="Arial" panose="020B0604020202020204" pitchFamily="34" charset="0"/>
-                          <a:cs typeface="Arial" panose="020B0604020202020204" pitchFamily="34" charset="0"/>
-                        </a:rPr>
-                        <a:t> $            734 </a:t>
-                      </a:r>
-                      <a:endParaRPr lang="en-FR" sz="1000" b="0" i="0" u="none" strike="noStrike">
-                        <a:solidFill>
-                          <a:srgbClr val="000000"/>
-                        </a:solidFill>
-                        <a:effectLst/>
-                        <a:latin typeface="Arial" panose="020B0604020202020204" pitchFamily="34" charset="0"/>
-                        <a:cs typeface="Arial" panose="020B0604020202020204" pitchFamily="34" charset="0"/>
-                      </a:endParaRPr>
-                    </a:p>
-                  </a:txBody>
-                  <a:tcPr marL="9525" marR="9525" marT="9525" marB="0" anchor="ctr"/>
-                </a:tc>
-                <a:tc>
-                  <a:txBody>
-                    <a:bodyPr/>
-                    <a:lstStyle/>
-                    <a:p>
-                      <a:pPr algn="ctr" fontAlgn="b">
-                        <a:buNone/>
-                      </a:pPr>
-                      <a:r>
-                        <a:rPr lang="en-FR" sz="1000" b="0" u="none" strike="noStrike">
-                          <a:solidFill>
-                            <a:srgbClr val="000000"/>
-                          </a:solidFill>
-                          <a:effectLst/>
-                          <a:latin typeface="Arial" panose="020B0604020202020204" pitchFamily="34" charset="0"/>
-                          <a:cs typeface="Arial" panose="020B0604020202020204" pitchFamily="34" charset="0"/>
-                        </a:rPr>
-                        <a:t>9.7%</a:t>
-                      </a:r>
-                      <a:endParaRPr lang="en-FR" sz="1000" b="0" i="0" u="none" strike="noStrike">
                         <a:solidFill>
                           <a:srgbClr val="000000"/>
                         </a:solidFill>
@@ -9117,6 +8763,41 @@
           </a:graphicData>
         </a:graphic>
       </p:graphicFrame>
+      <p:sp>
+        <p:nvSpPr>
+          <p:cNvPr id="33" name="TextBox 32">
+            <a:extLst>
+              <a:ext uri="{FF2B5EF4-FFF2-40B4-BE49-F238E27FC236}">
+                <a16:creationId xmlns:a16="http://schemas.microsoft.com/office/drawing/2014/main" id="{BA9D6793-9232-8911-0D97-59C86A77114B}"/>
+              </a:ext>
+            </a:extLst>
+          </p:cNvPr>
+          <p:cNvSpPr txBox="1"/>
+          <p:nvPr/>
+        </p:nvSpPr>
+        <p:spPr>
+          <a:xfrm>
+            <a:off x="10452312" y="6564260"/>
+            <a:ext cx="1654620" cy="261610"/>
+          </a:xfrm>
+          <a:prstGeom prst="rect">
+            <a:avLst/>
+          </a:prstGeom>
+          <a:noFill/>
+        </p:spPr>
+        <p:txBody>
+          <a:bodyPr wrap="none" rtlCol="0">
+            <a:spAutoFit/>
+          </a:bodyPr>
+          <a:lstStyle/>
+          <a:p>
+            <a:r>
+              <a:rPr lang="en-AU" sz="1100" i="1" dirty="0"/>
+              <a:t>* Licensed from Exelixis.</a:t>
+            </a:r>
+          </a:p>
+        </p:txBody>
+      </p:sp>
     </p:spTree>
     <p:extLst>
       <p:ext uri="{BB962C8B-B14F-4D97-AF65-F5344CB8AC3E}">
@@ -9378,10 +9059,10 @@
       </p:sp>
       <p:sp>
         <p:nvSpPr>
-          <p:cNvPr id="11" name="Rectangle 10">
+          <p:cNvPr id="15" name="Rectangle 14">
             <a:extLst>
               <a:ext uri="{FF2B5EF4-FFF2-40B4-BE49-F238E27FC236}">
-                <a16:creationId xmlns:a16="http://schemas.microsoft.com/office/drawing/2014/main" id="{F0C5C1B1-901C-657B-7FAA-AA9A5CD1BF22}"/>
+                <a16:creationId xmlns:a16="http://schemas.microsoft.com/office/drawing/2014/main" id="{B37309D6-F235-4153-66C5-EABAD384377D}"/>
               </a:ext>
             </a:extLst>
           </p:cNvPr>
@@ -9390,7 +9071,7 @@
         </p:nvSpPr>
         <p:spPr>
           <a:xfrm>
-            <a:off x="451104" y="1447671"/>
+            <a:off x="526950" y="2380916"/>
             <a:ext cx="2900922" cy="45719"/>
           </a:xfrm>
           <a:prstGeom prst="rect">
@@ -9430,10 +9111,10 @@
       </p:sp>
       <p:sp>
         <p:nvSpPr>
-          <p:cNvPr id="13" name="TextBox 12">
+          <p:cNvPr id="16" name="TextBox 15">
             <a:extLst>
               <a:ext uri="{FF2B5EF4-FFF2-40B4-BE49-F238E27FC236}">
-                <a16:creationId xmlns:a16="http://schemas.microsoft.com/office/drawing/2014/main" id="{FFDFB974-72E5-20EC-A8D8-06F57E7DB71C}"/>
+                <a16:creationId xmlns:a16="http://schemas.microsoft.com/office/drawing/2014/main" id="{D6943AD7-58A9-9ECC-E9B3-78E67C6D31AD}"/>
               </a:ext>
             </a:extLst>
           </p:cNvPr>
@@ -9442,8 +9123,8 @@
         </p:nvSpPr>
         <p:spPr>
           <a:xfrm>
-            <a:off x="375258" y="1101198"/>
-            <a:ext cx="5425973" cy="369332"/>
+            <a:off x="451104" y="2034443"/>
+            <a:ext cx="1183978" cy="369332"/>
           </a:xfrm>
           <a:prstGeom prst="rect">
             <a:avLst/>
@@ -9457,1021 +9138,22 @@
           <a:lstStyle/>
           <a:p>
             <a:r>
-              <a:rPr lang="en-AU" b="1" dirty="0" err="1">
-                <a:solidFill>
-                  <a:srgbClr val="163B5A"/>
-                </a:solidFill>
-              </a:rPr>
-              <a:t>MoA</a:t>
-            </a:r>
-            <a:r>
               <a:rPr lang="en-AU" b="1" dirty="0">
                 <a:solidFill>
                   <a:srgbClr val="163B5A"/>
                 </a:solidFill>
               </a:rPr>
-              <a:t> and Indications for Market and Competition</a:t>
+              <a:t>Oncology</a:t>
             </a:r>
           </a:p>
         </p:txBody>
       </p:sp>
-      <p:graphicFrame>
-        <p:nvGraphicFramePr>
-          <p:cNvPr id="14" name="Table 13">
+      <p:sp>
+        <p:nvSpPr>
+          <p:cNvPr id="17" name="Rectangle 16">
             <a:extLst>
               <a:ext uri="{FF2B5EF4-FFF2-40B4-BE49-F238E27FC236}">
-                <a16:creationId xmlns:a16="http://schemas.microsoft.com/office/drawing/2014/main" id="{370DBFD2-2318-2FB9-7C42-459C18A84859}"/>
-              </a:ext>
-            </a:extLst>
-          </p:cNvPr>
-          <p:cNvGraphicFramePr>
-            <a:graphicFrameLocks noGrp="1"/>
-          </p:cNvGraphicFramePr>
-          <p:nvPr>
-            <p:extLst>
-              <p:ext uri="{D42A27DB-BD31-4B8C-83A1-F6EECF244321}">
-                <p14:modId xmlns:p14="http://schemas.microsoft.com/office/powerpoint/2010/main" val="191735135"/>
-              </p:ext>
-            </p:extLst>
-          </p:nvPr>
-        </p:nvGraphicFramePr>
-        <p:xfrm>
-          <a:off x="451104" y="1620715"/>
-          <a:ext cx="11289791" cy="1594485"/>
-        </p:xfrm>
-        <a:graphic>
-          <a:graphicData uri="http://schemas.openxmlformats.org/drawingml/2006/table">
-            <a:tbl>
-              <a:tblPr firstRow="1" bandRow="1">
-                <a:tableStyleId>{6E25E649-3F16-4E02-A733-19D2CDBF48F0}</a:tableStyleId>
-              </a:tblPr>
-              <a:tblGrid>
-                <a:gridCol w="1935981">
-                  <a:extLst>
-                    <a:ext uri="{9D8B030D-6E8A-4147-A177-3AD203B41FA5}">
-                      <a16:colId xmlns:a16="http://schemas.microsoft.com/office/drawing/2014/main" val="4200776620"/>
-                    </a:ext>
-                  </a:extLst>
-                </a:gridCol>
-                <a:gridCol w="2718611">
-                  <a:extLst>
-                    <a:ext uri="{9D8B030D-6E8A-4147-A177-3AD203B41FA5}">
-                      <a16:colId xmlns:a16="http://schemas.microsoft.com/office/drawing/2014/main" val="3962167202"/>
-                    </a:ext>
-                  </a:extLst>
-                </a:gridCol>
-                <a:gridCol w="6635199">
-                  <a:extLst>
-                    <a:ext uri="{9D8B030D-6E8A-4147-A177-3AD203B41FA5}">
-                      <a16:colId xmlns:a16="http://schemas.microsoft.com/office/drawing/2014/main" val="1114885578"/>
-                    </a:ext>
-                  </a:extLst>
-                </a:gridCol>
-              </a:tblGrid>
-              <a:tr h="125978">
-                <a:tc>
-                  <a:txBody>
-                    <a:bodyPr/>
-                    <a:lstStyle/>
-                    <a:p>
-                      <a:pPr algn="ctr" fontAlgn="ctr">
-                        <a:buNone/>
-                      </a:pPr>
-                      <a:r>
-                        <a:rPr lang="en-FR" sz="1100" b="1" u="none" strike="noStrike" dirty="0">
-                          <a:solidFill>
-                            <a:srgbClr val="FFFFFF"/>
-                          </a:solidFill>
-                          <a:effectLst/>
-                        </a:rPr>
-                        <a:t>TA</a:t>
-                      </a:r>
-                      <a:endParaRPr lang="en-FR" sz="1100" b="1" i="0" u="none" strike="noStrike" dirty="0">
-                        <a:solidFill>
-                          <a:srgbClr val="FFFFFF"/>
-                        </a:solidFill>
-                        <a:effectLst/>
-                        <a:latin typeface="Carlito"/>
-                      </a:endParaRPr>
-                    </a:p>
-                  </a:txBody>
-                  <a:tcPr marL="9525" marR="9525" marT="9525" marB="0" anchor="ctr"/>
-                </a:tc>
-                <a:tc>
-                  <a:txBody>
-                    <a:bodyPr/>
-                    <a:lstStyle/>
-                    <a:p>
-                      <a:pPr algn="ctr" fontAlgn="ctr">
-                        <a:buNone/>
-                      </a:pPr>
-                      <a:r>
-                        <a:rPr lang="en-FR" sz="1100" b="1" u="none" strike="noStrike" dirty="0">
-                          <a:solidFill>
-                            <a:srgbClr val="FFFFFF"/>
-                          </a:solidFill>
-                          <a:effectLst/>
-                        </a:rPr>
-                        <a:t>Asset (Product / Pipeline)</a:t>
-                      </a:r>
-                      <a:endParaRPr lang="en-FR" sz="1100" b="1" i="0" u="none" strike="noStrike" dirty="0">
-                        <a:solidFill>
-                          <a:srgbClr val="FFFFFF"/>
-                        </a:solidFill>
-                        <a:effectLst/>
-                        <a:latin typeface="Carlito"/>
-                      </a:endParaRPr>
-                    </a:p>
-                  </a:txBody>
-                  <a:tcPr marL="9525" marR="9525" marT="9525" marB="0" anchor="ctr"/>
-                </a:tc>
-                <a:tc>
-                  <a:txBody>
-                    <a:bodyPr/>
-                    <a:lstStyle/>
-                    <a:p>
-                      <a:pPr algn="ctr" fontAlgn="ctr">
-                        <a:buNone/>
-                      </a:pPr>
-                      <a:r>
-                        <a:rPr lang="en-FR" sz="1100" b="1" u="none" strike="noStrike" dirty="0">
-                          <a:solidFill>
-                            <a:srgbClr val="FFFFFF"/>
-                          </a:solidFill>
-                          <a:effectLst/>
-                        </a:rPr>
-                        <a:t>MoA / Market</a:t>
-                      </a:r>
-                      <a:endParaRPr lang="en-FR" sz="1100" b="1" i="0" u="none" strike="noStrike" dirty="0">
-                        <a:solidFill>
-                          <a:srgbClr val="FFFFFF"/>
-                        </a:solidFill>
-                        <a:effectLst/>
-                        <a:latin typeface="Carlito"/>
-                      </a:endParaRPr>
-                    </a:p>
-                  </a:txBody>
-                  <a:tcPr marL="9525" marR="9525" marT="9525" marB="0" anchor="ctr"/>
-                </a:tc>
-                <a:extLst>
-                  <a:ext uri="{0D108BD9-81ED-4DB2-BD59-A6C34878D82A}">
-                    <a16:rowId xmlns:a16="http://schemas.microsoft.com/office/drawing/2014/main" val="833554430"/>
-                  </a:ext>
-                </a:extLst>
-              </a:tr>
-              <a:tr h="118104">
-                <a:tc>
-                  <a:txBody>
-                    <a:bodyPr/>
-                    <a:lstStyle/>
-                    <a:p>
-                      <a:pPr marL="0" marR="0" lvl="0" indent="0" algn="ctr" defTabSz="914400" rtl="0" eaLnBrk="1" fontAlgn="b" latinLnBrk="0" hangingPunct="1">
-                        <a:lnSpc>
-                          <a:spcPct val="100000"/>
-                        </a:lnSpc>
-                        <a:spcBef>
-                          <a:spcPts val="0"/>
-                        </a:spcBef>
-                        <a:spcAft>
-                          <a:spcPts val="0"/>
-                        </a:spcAft>
-                        <a:buClrTx/>
-                        <a:buSzTx/>
-                        <a:buFontTx/>
-                        <a:buNone/>
-                        <a:tabLst/>
-                        <a:defRPr/>
-                      </a:pPr>
-                      <a:r>
-                        <a:rPr kumimoji="0" lang="en-FR" sz="1100" b="0" i="0" u="none" strike="noStrike" kern="1200" cap="none" spc="0" normalizeH="0" baseline="0" noProof="0" dirty="0">
-                          <a:ln>
-                            <a:noFill/>
-                          </a:ln>
-                          <a:solidFill>
-                            <a:prstClr val="black"/>
-                          </a:solidFill>
-                          <a:effectLst/>
-                          <a:uLnTx/>
-                          <a:uFillTx/>
-                          <a:latin typeface="Aptos" panose="02110004020202020204"/>
-                          <a:ea typeface="+mn-ea"/>
-                          <a:cs typeface="+mn-cs"/>
-                        </a:rPr>
-                        <a:t>Oncology</a:t>
-                      </a:r>
-                      <a:endParaRPr kumimoji="0" lang="en-FR" sz="1100" b="0" i="0" u="none" strike="noStrike" kern="1200" cap="none" spc="0" normalizeH="0" baseline="0" noProof="0" dirty="0">
-                        <a:ln>
-                          <a:noFill/>
-                        </a:ln>
-                        <a:solidFill>
-                          <a:prstClr val="black"/>
-                        </a:solidFill>
-                        <a:effectLst/>
-                        <a:uLnTx/>
-                        <a:uFillTx/>
-                        <a:latin typeface="Carlito"/>
-                        <a:ea typeface="+mn-ea"/>
-                        <a:cs typeface="+mn-cs"/>
-                      </a:endParaRPr>
-                    </a:p>
-                  </a:txBody>
-                  <a:tcPr marL="9525" marR="9525" marT="9525" marB="0" anchor="b"/>
-                </a:tc>
-                <a:tc>
-                  <a:txBody>
-                    <a:bodyPr/>
-                    <a:lstStyle/>
-                    <a:p>
-                      <a:pPr algn="ctr" fontAlgn="b">
-                        <a:buNone/>
-                      </a:pPr>
-                      <a:r>
-                        <a:rPr lang="en-FR" sz="1000" b="0" u="none" strike="noStrike" dirty="0">
-                          <a:solidFill>
-                            <a:srgbClr val="000000"/>
-                          </a:solidFill>
-                          <a:effectLst/>
-                          <a:latin typeface="Arial" panose="020B0604020202020204" pitchFamily="34" charset="0"/>
-                          <a:cs typeface="Arial" panose="020B0604020202020204" pitchFamily="34" charset="0"/>
-                        </a:rPr>
-                        <a:t>Somatuline</a:t>
-                      </a:r>
-                      <a:endParaRPr lang="en-FR" sz="1000" b="0" i="0" u="none" strike="noStrike" dirty="0">
-                        <a:solidFill>
-                          <a:srgbClr val="000000"/>
-                        </a:solidFill>
-                        <a:effectLst/>
-                        <a:latin typeface="Arial" panose="020B0604020202020204" pitchFamily="34" charset="0"/>
-                        <a:cs typeface="Arial" panose="020B0604020202020204" pitchFamily="34" charset="0"/>
-                      </a:endParaRPr>
-                    </a:p>
-                  </a:txBody>
-                  <a:tcPr marL="9525" marR="9525" marT="9525" marB="0" anchor="ctr"/>
-                </a:tc>
-                <a:tc>
-                  <a:txBody>
-                    <a:bodyPr/>
-                    <a:lstStyle/>
-                    <a:p>
-                      <a:pPr marL="0" marR="0" lvl="0" indent="0" algn="ctr" defTabSz="914400" rtl="0" eaLnBrk="1" fontAlgn="b" latinLnBrk="0" hangingPunct="1">
-                        <a:lnSpc>
-                          <a:spcPct val="100000"/>
-                        </a:lnSpc>
-                        <a:spcBef>
-                          <a:spcPts val="0"/>
-                        </a:spcBef>
-                        <a:spcAft>
-                          <a:spcPts val="0"/>
-                        </a:spcAft>
-                        <a:buClrTx/>
-                        <a:buSzTx/>
-                        <a:buFontTx/>
-                        <a:buNone/>
-                        <a:tabLst/>
-                        <a:defRPr/>
-                      </a:pPr>
-                      <a:r>
-                        <a:rPr lang="en-FR" sz="1100" dirty="0"/>
-                        <a:t>somatostatin analog (peptide)</a:t>
-                      </a:r>
-                    </a:p>
-                  </a:txBody>
-                  <a:tcPr marL="9525" marR="9525" marT="9525" marB="0" anchor="b"/>
-                </a:tc>
-                <a:extLst>
-                  <a:ext uri="{0D108BD9-81ED-4DB2-BD59-A6C34878D82A}">
-                    <a16:rowId xmlns:a16="http://schemas.microsoft.com/office/drawing/2014/main" val="849279326"/>
-                  </a:ext>
-                </a:extLst>
-              </a:tr>
-              <a:tr h="118104">
-                <a:tc>
-                  <a:txBody>
-                    <a:bodyPr/>
-                    <a:lstStyle/>
-                    <a:p>
-                      <a:pPr marL="0" marR="0" lvl="0" indent="0" algn="ctr" defTabSz="914400" rtl="0" eaLnBrk="1" fontAlgn="b" latinLnBrk="0" hangingPunct="1">
-                        <a:lnSpc>
-                          <a:spcPct val="100000"/>
-                        </a:lnSpc>
-                        <a:spcBef>
-                          <a:spcPts val="0"/>
-                        </a:spcBef>
-                        <a:spcAft>
-                          <a:spcPts val="0"/>
-                        </a:spcAft>
-                        <a:buClrTx/>
-                        <a:buSzTx/>
-                        <a:buFontTx/>
-                        <a:buNone/>
-                        <a:tabLst/>
-                        <a:defRPr/>
-                      </a:pPr>
-                      <a:r>
-                        <a:rPr kumimoji="0" lang="en-FR" sz="1100" b="0" i="0" u="none" strike="noStrike" kern="1200" cap="none" spc="0" normalizeH="0" baseline="0" noProof="0">
-                          <a:ln>
-                            <a:noFill/>
-                          </a:ln>
-                          <a:solidFill>
-                            <a:prstClr val="black"/>
-                          </a:solidFill>
-                          <a:effectLst/>
-                          <a:uLnTx/>
-                          <a:uFillTx/>
-                          <a:latin typeface="Aptos" panose="02110004020202020204"/>
-                          <a:ea typeface="+mn-ea"/>
-                          <a:cs typeface="+mn-cs"/>
-                        </a:rPr>
-                        <a:t>Oncology</a:t>
-                      </a:r>
-                      <a:endParaRPr kumimoji="0" lang="en-FR" sz="1100" b="0" i="0" u="none" strike="noStrike" kern="1200" cap="none" spc="0" normalizeH="0" baseline="0" noProof="0" dirty="0">
-                        <a:ln>
-                          <a:noFill/>
-                        </a:ln>
-                        <a:solidFill>
-                          <a:prstClr val="black"/>
-                        </a:solidFill>
-                        <a:effectLst/>
-                        <a:uLnTx/>
-                        <a:uFillTx/>
-                        <a:latin typeface="Carlito"/>
-                        <a:ea typeface="+mn-ea"/>
-                        <a:cs typeface="+mn-cs"/>
-                      </a:endParaRPr>
-                    </a:p>
-                  </a:txBody>
-                  <a:tcPr marL="9525" marR="9525" marT="9525" marB="0" anchor="b"/>
-                </a:tc>
-                <a:tc>
-                  <a:txBody>
-                    <a:bodyPr/>
-                    <a:lstStyle/>
-                    <a:p>
-                      <a:pPr algn="ctr" fontAlgn="b">
-                        <a:buNone/>
-                      </a:pPr>
-                      <a:r>
-                        <a:rPr lang="en-FR" sz="1000" b="0" u="none" strike="noStrike" dirty="0">
-                          <a:solidFill>
-                            <a:srgbClr val="000000"/>
-                          </a:solidFill>
-                          <a:effectLst/>
-                          <a:latin typeface="Arial" panose="020B0604020202020204" pitchFamily="34" charset="0"/>
-                          <a:cs typeface="Arial" panose="020B0604020202020204" pitchFamily="34" charset="0"/>
-                        </a:rPr>
-                        <a:t>Cabometyx</a:t>
-                      </a:r>
-                      <a:endParaRPr lang="en-FR" sz="1000" b="0" i="0" u="none" strike="noStrike" dirty="0">
-                        <a:solidFill>
-                          <a:srgbClr val="000000"/>
-                        </a:solidFill>
-                        <a:effectLst/>
-                        <a:latin typeface="Arial" panose="020B0604020202020204" pitchFamily="34" charset="0"/>
-                        <a:cs typeface="Arial" panose="020B0604020202020204" pitchFamily="34" charset="0"/>
-                      </a:endParaRPr>
-                    </a:p>
-                  </a:txBody>
-                  <a:tcPr marL="9525" marR="9525" marT="9525" marB="0" anchor="ctr"/>
-                </a:tc>
-                <a:tc>
-                  <a:txBody>
-                    <a:bodyPr/>
-                    <a:lstStyle/>
-                    <a:p>
-                      <a:pPr algn="ctr" fontAlgn="b">
-                        <a:buNone/>
-                      </a:pPr>
-                      <a:endParaRPr lang="en-FR" sz="1100" b="0" i="0" u="none" strike="noStrike" dirty="0">
-                        <a:effectLst/>
-                        <a:latin typeface="Carlito"/>
-                      </a:endParaRPr>
-                    </a:p>
-                  </a:txBody>
-                  <a:tcPr marL="9525" marR="9525" marT="9525" marB="0" anchor="b"/>
-                </a:tc>
-                <a:extLst>
-                  <a:ext uri="{0D108BD9-81ED-4DB2-BD59-A6C34878D82A}">
-                    <a16:rowId xmlns:a16="http://schemas.microsoft.com/office/drawing/2014/main" val="2726320237"/>
-                  </a:ext>
-                </a:extLst>
-              </a:tr>
-              <a:tr h="118104">
-                <a:tc>
-                  <a:txBody>
-                    <a:bodyPr/>
-                    <a:lstStyle/>
-                    <a:p>
-                      <a:pPr marL="0" marR="0" lvl="0" indent="0" algn="ctr" defTabSz="914400" rtl="0" eaLnBrk="1" fontAlgn="b" latinLnBrk="0" hangingPunct="1">
-                        <a:lnSpc>
-                          <a:spcPct val="100000"/>
-                        </a:lnSpc>
-                        <a:spcBef>
-                          <a:spcPts val="0"/>
-                        </a:spcBef>
-                        <a:spcAft>
-                          <a:spcPts val="0"/>
-                        </a:spcAft>
-                        <a:buClrTx/>
-                        <a:buSzTx/>
-                        <a:buFontTx/>
-                        <a:buNone/>
-                        <a:tabLst/>
-                        <a:defRPr/>
-                      </a:pPr>
-                      <a:r>
-                        <a:rPr kumimoji="0" lang="en-FR" sz="1100" b="0" i="0" u="none" strike="noStrike" kern="1200" cap="none" spc="0" normalizeH="0" baseline="0" noProof="0">
-                          <a:ln>
-                            <a:noFill/>
-                          </a:ln>
-                          <a:solidFill>
-                            <a:prstClr val="black"/>
-                          </a:solidFill>
-                          <a:effectLst/>
-                          <a:uLnTx/>
-                          <a:uFillTx/>
-                          <a:latin typeface="Aptos" panose="02110004020202020204"/>
-                          <a:ea typeface="+mn-ea"/>
-                          <a:cs typeface="+mn-cs"/>
-                        </a:rPr>
-                        <a:t>Oncology</a:t>
-                      </a:r>
-                      <a:endParaRPr kumimoji="0" lang="en-FR" sz="1100" b="0" i="0" u="none" strike="noStrike" kern="1200" cap="none" spc="0" normalizeH="0" baseline="0" noProof="0" dirty="0">
-                        <a:ln>
-                          <a:noFill/>
-                        </a:ln>
-                        <a:solidFill>
-                          <a:prstClr val="black"/>
-                        </a:solidFill>
-                        <a:effectLst/>
-                        <a:uLnTx/>
-                        <a:uFillTx/>
-                        <a:latin typeface="Carlito"/>
-                        <a:ea typeface="+mn-ea"/>
-                        <a:cs typeface="+mn-cs"/>
-                      </a:endParaRPr>
-                    </a:p>
-                  </a:txBody>
-                  <a:tcPr marL="9525" marR="9525" marT="9525" marB="0" anchor="b"/>
-                </a:tc>
-                <a:tc>
-                  <a:txBody>
-                    <a:bodyPr/>
-                    <a:lstStyle/>
-                    <a:p>
-                      <a:pPr algn="ctr" fontAlgn="b">
-                        <a:buNone/>
-                      </a:pPr>
-                      <a:r>
-                        <a:rPr lang="en-FR" sz="1000" b="0" u="none" strike="noStrike" dirty="0">
-                          <a:solidFill>
-                            <a:srgbClr val="000000"/>
-                          </a:solidFill>
-                          <a:effectLst/>
-                          <a:latin typeface="Arial" panose="020B0604020202020204" pitchFamily="34" charset="0"/>
-                          <a:cs typeface="Arial" panose="020B0604020202020204" pitchFamily="34" charset="0"/>
-                        </a:rPr>
-                        <a:t>Decapeptyl</a:t>
-                      </a:r>
-                      <a:endParaRPr lang="en-FR" sz="1000" b="0" i="0" u="none" strike="noStrike" dirty="0">
-                        <a:solidFill>
-                          <a:srgbClr val="000000"/>
-                        </a:solidFill>
-                        <a:effectLst/>
-                        <a:latin typeface="Arial" panose="020B0604020202020204" pitchFamily="34" charset="0"/>
-                        <a:cs typeface="Arial" panose="020B0604020202020204" pitchFamily="34" charset="0"/>
-                      </a:endParaRPr>
-                    </a:p>
-                  </a:txBody>
-                  <a:tcPr marL="9525" marR="9525" marT="9525" marB="0" anchor="ctr"/>
-                </a:tc>
-                <a:tc>
-                  <a:txBody>
-                    <a:bodyPr/>
-                    <a:lstStyle/>
-                    <a:p>
-                      <a:pPr algn="ctr" fontAlgn="b">
-                        <a:buNone/>
-                      </a:pPr>
-                      <a:endParaRPr lang="en-FR" sz="1100" b="0" i="0" u="none" strike="noStrike" dirty="0">
-                        <a:effectLst/>
-                        <a:latin typeface="Carlito"/>
-                      </a:endParaRPr>
-                    </a:p>
-                  </a:txBody>
-                  <a:tcPr marL="9525" marR="9525" marT="9525" marB="0" anchor="b"/>
-                </a:tc>
-                <a:extLst>
-                  <a:ext uri="{0D108BD9-81ED-4DB2-BD59-A6C34878D82A}">
-                    <a16:rowId xmlns:a16="http://schemas.microsoft.com/office/drawing/2014/main" val="591110887"/>
-                  </a:ext>
-                </a:extLst>
-              </a:tr>
-              <a:tr h="118104">
-                <a:tc>
-                  <a:txBody>
-                    <a:bodyPr/>
-                    <a:lstStyle/>
-                    <a:p>
-                      <a:pPr marL="0" marR="0" lvl="0" indent="0" algn="ctr" defTabSz="914400" rtl="0" eaLnBrk="1" fontAlgn="b" latinLnBrk="0" hangingPunct="1">
-                        <a:lnSpc>
-                          <a:spcPct val="100000"/>
-                        </a:lnSpc>
-                        <a:spcBef>
-                          <a:spcPts val="0"/>
-                        </a:spcBef>
-                        <a:spcAft>
-                          <a:spcPts val="0"/>
-                        </a:spcAft>
-                        <a:buClrTx/>
-                        <a:buSzTx/>
-                        <a:buFontTx/>
-                        <a:buNone/>
-                        <a:tabLst/>
-                        <a:defRPr/>
-                      </a:pPr>
-                      <a:r>
-                        <a:rPr kumimoji="0" lang="en-FR" sz="1100" b="0" i="0" u="none" strike="noStrike" kern="1200" cap="none" spc="0" normalizeH="0" baseline="0" noProof="0">
-                          <a:ln>
-                            <a:noFill/>
-                          </a:ln>
-                          <a:solidFill>
-                            <a:prstClr val="black"/>
-                          </a:solidFill>
-                          <a:effectLst/>
-                          <a:uLnTx/>
-                          <a:uFillTx/>
-                          <a:latin typeface="Aptos" panose="02110004020202020204"/>
-                          <a:ea typeface="+mn-ea"/>
-                          <a:cs typeface="+mn-cs"/>
-                        </a:rPr>
-                        <a:t>Oncology</a:t>
-                      </a:r>
-                      <a:endParaRPr kumimoji="0" lang="en-FR" sz="1100" b="0" i="0" u="none" strike="noStrike" kern="1200" cap="none" spc="0" normalizeH="0" baseline="0" noProof="0" dirty="0">
-                        <a:ln>
-                          <a:noFill/>
-                        </a:ln>
-                        <a:solidFill>
-                          <a:prstClr val="black"/>
-                        </a:solidFill>
-                        <a:effectLst/>
-                        <a:uLnTx/>
-                        <a:uFillTx/>
-                        <a:latin typeface="Carlito"/>
-                        <a:ea typeface="+mn-ea"/>
-                        <a:cs typeface="+mn-cs"/>
-                      </a:endParaRPr>
-                    </a:p>
-                  </a:txBody>
-                  <a:tcPr marL="9525" marR="9525" marT="9525" marB="0" anchor="b"/>
-                </a:tc>
-                <a:tc>
-                  <a:txBody>
-                    <a:bodyPr/>
-                    <a:lstStyle/>
-                    <a:p>
-                      <a:pPr algn="ctr" fontAlgn="b">
-                        <a:buNone/>
-                      </a:pPr>
-                      <a:r>
-                        <a:rPr lang="en-FR" sz="1000" b="0" u="none" strike="noStrike" dirty="0">
-                          <a:solidFill>
-                            <a:srgbClr val="000000"/>
-                          </a:solidFill>
-                          <a:effectLst/>
-                          <a:latin typeface="Arial" panose="020B0604020202020204" pitchFamily="34" charset="0"/>
-                          <a:cs typeface="Arial" panose="020B0604020202020204" pitchFamily="34" charset="0"/>
-                        </a:rPr>
-                        <a:t>Onivyde</a:t>
-                      </a:r>
-                      <a:endParaRPr lang="en-FR" sz="1000" b="0" i="0" u="none" strike="noStrike" dirty="0">
-                        <a:solidFill>
-                          <a:srgbClr val="000000"/>
-                        </a:solidFill>
-                        <a:effectLst/>
-                        <a:latin typeface="Arial" panose="020B0604020202020204" pitchFamily="34" charset="0"/>
-                        <a:cs typeface="Arial" panose="020B0604020202020204" pitchFamily="34" charset="0"/>
-                      </a:endParaRPr>
-                    </a:p>
-                  </a:txBody>
-                  <a:tcPr marL="9525" marR="9525" marT="9525" marB="0" anchor="ctr"/>
-                </a:tc>
-                <a:tc>
-                  <a:txBody>
-                    <a:bodyPr/>
-                    <a:lstStyle/>
-                    <a:p>
-                      <a:pPr algn="ctr" fontAlgn="b">
-                        <a:buNone/>
-                      </a:pPr>
-                      <a:endParaRPr lang="en-FR" sz="1100" b="0" i="0" u="none" strike="noStrike" dirty="0">
-                        <a:effectLst/>
-                        <a:latin typeface="Carlito"/>
-                      </a:endParaRPr>
-                    </a:p>
-                  </a:txBody>
-                  <a:tcPr marL="9525" marR="9525" marT="9525" marB="0" anchor="b"/>
-                </a:tc>
-                <a:extLst>
-                  <a:ext uri="{0D108BD9-81ED-4DB2-BD59-A6C34878D82A}">
-                    <a16:rowId xmlns:a16="http://schemas.microsoft.com/office/drawing/2014/main" val="3939620745"/>
-                  </a:ext>
-                </a:extLst>
-              </a:tr>
-              <a:tr h="118104">
-                <a:tc>
-                  <a:txBody>
-                    <a:bodyPr/>
-                    <a:lstStyle/>
-                    <a:p>
-                      <a:pPr marL="0" marR="0" lvl="0" indent="0" algn="ctr" defTabSz="914400" rtl="0" eaLnBrk="1" fontAlgn="b" latinLnBrk="0" hangingPunct="1">
-                        <a:lnSpc>
-                          <a:spcPct val="100000"/>
-                        </a:lnSpc>
-                        <a:spcBef>
-                          <a:spcPts val="0"/>
-                        </a:spcBef>
-                        <a:spcAft>
-                          <a:spcPts val="0"/>
-                        </a:spcAft>
-                        <a:buClrTx/>
-                        <a:buSzTx/>
-                        <a:buFontTx/>
-                        <a:buNone/>
-                        <a:tabLst/>
-                        <a:defRPr/>
-                      </a:pPr>
-                      <a:r>
-                        <a:rPr kumimoji="0" lang="en-FR" sz="1100" b="0" i="0" u="none" strike="noStrike" kern="1200" cap="none" spc="0" normalizeH="0" baseline="0" noProof="0" dirty="0">
-                          <a:ln>
-                            <a:noFill/>
-                          </a:ln>
-                          <a:solidFill>
-                            <a:prstClr val="black"/>
-                          </a:solidFill>
-                          <a:effectLst/>
-                          <a:uLnTx/>
-                          <a:uFillTx/>
-                          <a:latin typeface="Aptos" panose="02110004020202020204"/>
-                          <a:ea typeface="+mn-ea"/>
-                          <a:cs typeface="+mn-cs"/>
-                        </a:rPr>
-                        <a:t>Oncology</a:t>
-                      </a:r>
-                      <a:endParaRPr kumimoji="0" lang="en-FR" sz="1100" b="0" i="0" u="none" strike="noStrike" kern="1200" cap="none" spc="0" normalizeH="0" baseline="0" noProof="0" dirty="0">
-                        <a:ln>
-                          <a:noFill/>
-                        </a:ln>
-                        <a:solidFill>
-                          <a:prstClr val="black"/>
-                        </a:solidFill>
-                        <a:effectLst/>
-                        <a:uLnTx/>
-                        <a:uFillTx/>
-                        <a:latin typeface="Carlito"/>
-                        <a:ea typeface="+mn-ea"/>
-                        <a:cs typeface="+mn-cs"/>
-                      </a:endParaRPr>
-                    </a:p>
-                  </a:txBody>
-                  <a:tcPr marL="9525" marR="9525" marT="9525" marB="0" anchor="b"/>
-                </a:tc>
-                <a:tc>
-                  <a:txBody>
-                    <a:bodyPr/>
-                    <a:lstStyle/>
-                    <a:p>
-                      <a:pPr marL="0" marR="0" lvl="0" indent="0" algn="ctr" defTabSz="914400" rtl="0" eaLnBrk="1" fontAlgn="b" latinLnBrk="0" hangingPunct="1">
-                        <a:lnSpc>
-                          <a:spcPct val="100000"/>
-                        </a:lnSpc>
-                        <a:spcBef>
-                          <a:spcPts val="0"/>
-                        </a:spcBef>
-                        <a:spcAft>
-                          <a:spcPts val="0"/>
-                        </a:spcAft>
-                        <a:buClrTx/>
-                        <a:buSzTx/>
-                        <a:buFontTx/>
-                        <a:buNone/>
-                        <a:tabLst/>
-                        <a:defRPr/>
-                      </a:pPr>
-                      <a:r>
-                        <a:rPr lang="en-FR" sz="1100" b="0" u="none" strike="noStrike" dirty="0">
-                          <a:effectLst/>
-                        </a:rPr>
-                        <a:t>Ojemda</a:t>
-                      </a:r>
-                      <a:endParaRPr lang="en-FR" sz="1100" b="0" i="0" u="none" strike="noStrike" dirty="0">
-                        <a:effectLst/>
-                        <a:latin typeface="Carlito"/>
-                      </a:endParaRPr>
-                    </a:p>
-                  </a:txBody>
-                  <a:tcPr marL="9525" marR="9525" marT="9525" marB="0" anchor="b"/>
-                </a:tc>
-                <a:tc>
-                  <a:txBody>
-                    <a:bodyPr/>
-                    <a:lstStyle/>
-                    <a:p>
-                      <a:pPr algn="ctr" fontAlgn="b">
-                        <a:buNone/>
-                      </a:pPr>
-                      <a:r>
-                        <a:rPr lang="en-GB" sz="1100" b="0" u="none" strike="noStrike" dirty="0">
-                          <a:effectLst/>
-                        </a:rPr>
-                        <a:t>RAF inhibitor targeting BRAF</a:t>
-                      </a:r>
-                      <a:endParaRPr lang="en-FR" sz="1100" b="0" i="0" u="none" strike="noStrike" dirty="0">
-                        <a:effectLst/>
-                        <a:latin typeface="Carlito"/>
-                      </a:endParaRPr>
-                    </a:p>
-                  </a:txBody>
-                  <a:tcPr marL="9525" marR="9525" marT="9525" marB="0" anchor="b"/>
-                </a:tc>
-                <a:extLst>
-                  <a:ext uri="{0D108BD9-81ED-4DB2-BD59-A6C34878D82A}">
-                    <a16:rowId xmlns:a16="http://schemas.microsoft.com/office/drawing/2014/main" val="1210521652"/>
-                  </a:ext>
-                </a:extLst>
-              </a:tr>
-              <a:tr h="118104">
-                <a:tc>
-                  <a:txBody>
-                    <a:bodyPr/>
-                    <a:lstStyle/>
-                    <a:p>
-                      <a:pPr algn="ctr" fontAlgn="b">
-                        <a:buNone/>
-                      </a:pPr>
-                      <a:r>
-                        <a:rPr lang="en-FR" sz="1100" b="0" u="none" strike="noStrike" dirty="0">
-                          <a:effectLst/>
-                        </a:rPr>
-                        <a:t>Oncology</a:t>
-                      </a:r>
-                      <a:endParaRPr lang="en-FR" sz="1100" b="0" i="0" u="none" strike="noStrike" dirty="0">
-                        <a:effectLst/>
-                        <a:latin typeface="Carlito"/>
-                      </a:endParaRPr>
-                    </a:p>
-                  </a:txBody>
-                  <a:tcPr marL="9525" marR="9525" marT="9525" marB="0" anchor="b"/>
-                </a:tc>
-                <a:tc>
-                  <a:txBody>
-                    <a:bodyPr/>
-                    <a:lstStyle/>
-                    <a:p>
-                      <a:pPr marL="0" marR="0" lvl="0" indent="0" algn="ctr" defTabSz="914400" rtl="0" eaLnBrk="1" fontAlgn="b" latinLnBrk="0" hangingPunct="1">
-                        <a:lnSpc>
-                          <a:spcPct val="100000"/>
-                        </a:lnSpc>
-                        <a:spcBef>
-                          <a:spcPts val="0"/>
-                        </a:spcBef>
-                        <a:spcAft>
-                          <a:spcPts val="0"/>
-                        </a:spcAft>
-                        <a:buClrTx/>
-                        <a:buSzTx/>
-                        <a:buFontTx/>
-                        <a:buNone/>
-                        <a:tabLst/>
-                        <a:defRPr/>
-                      </a:pPr>
-                      <a:r>
-                        <a:rPr lang="en-FR" sz="1100" b="0" u="none" strike="noStrike" dirty="0">
-                          <a:effectLst/>
-                        </a:rPr>
-                        <a:t>IPN60340 / ICT01</a:t>
-                      </a:r>
-                      <a:r>
-                        <a:rPr lang="en-FR" sz="1100" b="0" i="0" u="none" strike="noStrike" dirty="0">
-                          <a:effectLst/>
-                          <a:latin typeface="Carlito"/>
-                        </a:rPr>
-                        <a:t>, </a:t>
-                      </a:r>
-                      <a:r>
-                        <a:rPr lang="en-FR" sz="1100" b="0" u="none" strike="noStrike" dirty="0">
-                          <a:effectLst/>
-                        </a:rPr>
-                        <a:t>IPN01203</a:t>
-                      </a:r>
-                      <a:endParaRPr lang="en-FR" sz="1100" b="0" i="0" u="none" strike="noStrike" dirty="0">
-                        <a:effectLst/>
-                        <a:latin typeface="Carlito"/>
-                      </a:endParaRPr>
-                    </a:p>
-                  </a:txBody>
-                  <a:tcPr marL="9525" marR="9525" marT="9525" marB="0" anchor="b"/>
-                </a:tc>
-                <a:tc>
-                  <a:txBody>
-                    <a:bodyPr/>
-                    <a:lstStyle/>
-                    <a:p>
-                      <a:pPr algn="ctr" fontAlgn="b">
-                        <a:buNone/>
-                      </a:pPr>
-                      <a:r>
-                        <a:rPr lang="en-GB" sz="1100" b="0" u="none" strike="noStrike" dirty="0">
-                          <a:effectLst/>
-                        </a:rPr>
-                        <a:t>T-cell activator</a:t>
-                      </a:r>
-                      <a:endParaRPr lang="en-FR" sz="1100" b="0" i="0" u="none" strike="noStrike" dirty="0">
-                        <a:effectLst/>
-                        <a:latin typeface="Carlito"/>
-                      </a:endParaRPr>
-                    </a:p>
-                  </a:txBody>
-                  <a:tcPr marL="9525" marR="9525" marT="9525" marB="0" anchor="b"/>
-                </a:tc>
-                <a:extLst>
-                  <a:ext uri="{0D108BD9-81ED-4DB2-BD59-A6C34878D82A}">
-                    <a16:rowId xmlns:a16="http://schemas.microsoft.com/office/drawing/2014/main" val="1864132227"/>
-                  </a:ext>
-                </a:extLst>
-              </a:tr>
-              <a:tr h="118104">
-                <a:tc>
-                  <a:txBody>
-                    <a:bodyPr/>
-                    <a:lstStyle/>
-                    <a:p>
-                      <a:pPr algn="ctr" fontAlgn="b">
-                        <a:buNone/>
-                      </a:pPr>
-                      <a:r>
-                        <a:rPr lang="en-FR" sz="1100" b="0" i="0" u="none" strike="noStrike" dirty="0">
-                          <a:effectLst/>
-                          <a:latin typeface="Carlito"/>
-                        </a:rPr>
-                        <a:t>Rare Diseases</a:t>
-                      </a:r>
-                    </a:p>
-                  </a:txBody>
-                  <a:tcPr marL="9525" marR="9525" marT="9525" marB="0" anchor="b"/>
-                </a:tc>
-                <a:tc>
-                  <a:txBody>
-                    <a:bodyPr/>
-                    <a:lstStyle/>
-                    <a:p>
-                      <a:pPr algn="ctr" fontAlgn="b">
-                        <a:buNone/>
-                      </a:pPr>
-                      <a:r>
-                        <a:rPr lang="en-FR" sz="1100" b="0" u="none" strike="noStrike" dirty="0">
-                          <a:effectLst/>
-                        </a:rPr>
-                        <a:t>Iqirvo, Elafibranor</a:t>
-                      </a:r>
-                      <a:endParaRPr lang="en-FR" sz="1100" b="0" i="0" u="none" strike="noStrike" dirty="0">
-                        <a:effectLst/>
-                        <a:latin typeface="Carlito"/>
-                      </a:endParaRPr>
-                    </a:p>
-                  </a:txBody>
-                  <a:tcPr marL="9525" marR="9525" marT="9525" marB="0" anchor="b"/>
-                </a:tc>
-                <a:tc>
-                  <a:txBody>
-                    <a:bodyPr/>
-                    <a:lstStyle/>
-                    <a:p>
-                      <a:pPr algn="ctr" fontAlgn="b">
-                        <a:buNone/>
-                      </a:pPr>
-                      <a:r>
-                        <a:rPr lang="en-GB" sz="1100" b="0" u="none" strike="noStrike" dirty="0">
-                          <a:effectLst/>
-                        </a:rPr>
-                        <a:t>PPAR </a:t>
-                      </a:r>
-                      <a:r>
-                        <a:rPr lang="el-GR" sz="1100" b="0" u="none" strike="noStrike" dirty="0">
-                          <a:effectLst/>
-                        </a:rPr>
-                        <a:t>α/δ </a:t>
-                      </a:r>
-                      <a:r>
-                        <a:rPr lang="en-GB" sz="1100" b="0" u="none" strike="noStrike" dirty="0">
-                          <a:effectLst/>
-                        </a:rPr>
-                        <a:t>agonist</a:t>
-                      </a:r>
-                      <a:endParaRPr lang="en-FR" sz="1100" b="0" i="0" u="none" strike="noStrike" dirty="0">
-                        <a:effectLst/>
-                        <a:latin typeface="Carlito"/>
-                      </a:endParaRPr>
-                    </a:p>
-                  </a:txBody>
-                  <a:tcPr marL="9525" marR="9525" marT="9525" marB="0" anchor="b"/>
-                </a:tc>
-                <a:extLst>
-                  <a:ext uri="{0D108BD9-81ED-4DB2-BD59-A6C34878D82A}">
-                    <a16:rowId xmlns:a16="http://schemas.microsoft.com/office/drawing/2014/main" val="1800218135"/>
-                  </a:ext>
-                </a:extLst>
-              </a:tr>
-              <a:tr h="118104">
-                <a:tc>
-                  <a:txBody>
-                    <a:bodyPr/>
-                    <a:lstStyle/>
-                    <a:p>
-                      <a:pPr algn="ctr" fontAlgn="b">
-                        <a:buNone/>
-                      </a:pPr>
-                      <a:r>
-                        <a:rPr lang="en-FR" sz="1100" b="0" u="none" strike="noStrike" dirty="0">
-                          <a:effectLst/>
-                        </a:rPr>
-                        <a:t>Neuroscience</a:t>
-                      </a:r>
-                      <a:endParaRPr lang="en-FR" sz="1100" b="0" i="0" u="none" strike="noStrike" dirty="0">
-                        <a:effectLst/>
-                        <a:latin typeface="Carlito"/>
-                      </a:endParaRPr>
-                    </a:p>
-                  </a:txBody>
-                  <a:tcPr marL="9525" marR="9525" marT="9525" marB="0" anchor="b"/>
-                </a:tc>
-                <a:tc>
-                  <a:txBody>
-                    <a:bodyPr/>
-                    <a:lstStyle/>
-                    <a:p>
-                      <a:pPr marL="0" marR="0" lvl="0" indent="0" algn="ctr" defTabSz="914400" rtl="0" eaLnBrk="1" fontAlgn="b" latinLnBrk="0" hangingPunct="1">
-                        <a:lnSpc>
-                          <a:spcPct val="100000"/>
-                        </a:lnSpc>
-                        <a:spcBef>
-                          <a:spcPts val="0"/>
-                        </a:spcBef>
-                        <a:spcAft>
-                          <a:spcPts val="0"/>
-                        </a:spcAft>
-                        <a:buClrTx/>
-                        <a:buSzTx/>
-                        <a:buFontTx/>
-                        <a:buNone/>
-                        <a:tabLst/>
-                        <a:defRPr/>
-                      </a:pPr>
-                      <a:r>
-                        <a:rPr lang="en-FR" sz="1100" b="0" u="none" strike="noStrike" dirty="0">
-                          <a:effectLst/>
-                        </a:rPr>
-                        <a:t>Corabotase</a:t>
-                      </a:r>
-                      <a:endParaRPr lang="en-FR" sz="1100" b="0" i="0" u="none" strike="noStrike" dirty="0">
-                        <a:effectLst/>
-                        <a:latin typeface="Carlito"/>
-                      </a:endParaRPr>
-                    </a:p>
-                  </a:txBody>
-                  <a:tcPr marL="9525" marR="9525" marT="9525" marB="0" anchor="b"/>
-                </a:tc>
-                <a:tc>
-                  <a:txBody>
-                    <a:bodyPr/>
-                    <a:lstStyle/>
-                    <a:p>
-                      <a:pPr algn="ctr" fontAlgn="b">
-                        <a:buNone/>
-                      </a:pPr>
-                      <a:endParaRPr lang="en-FR" sz="1100" b="0" i="0" u="none" strike="noStrike" dirty="0">
-                        <a:effectLst/>
-                        <a:latin typeface="Carlito"/>
-                      </a:endParaRPr>
-                    </a:p>
-                  </a:txBody>
-                  <a:tcPr marL="9525" marR="9525" marT="9525" marB="0" anchor="b"/>
-                </a:tc>
-                <a:extLst>
-                  <a:ext uri="{0D108BD9-81ED-4DB2-BD59-A6C34878D82A}">
-                    <a16:rowId xmlns:a16="http://schemas.microsoft.com/office/drawing/2014/main" val="19971142"/>
-                  </a:ext>
-                </a:extLst>
-              </a:tr>
-            </a:tbl>
-          </a:graphicData>
-        </a:graphic>
-      </p:graphicFrame>
-      <p:sp>
-        <p:nvSpPr>
-          <p:cNvPr id="15" name="Rectangle 14">
-            <a:extLst>
-              <a:ext uri="{FF2B5EF4-FFF2-40B4-BE49-F238E27FC236}">
-                <a16:creationId xmlns:a16="http://schemas.microsoft.com/office/drawing/2014/main" id="{B37309D6-F235-4153-66C5-EABAD384377D}"/>
+                <a16:creationId xmlns:a16="http://schemas.microsoft.com/office/drawing/2014/main" id="{AE78747F-ED8F-6803-3399-5D848F893357}"/>
               </a:ext>
             </a:extLst>
           </p:cNvPr>
@@ -10480,7 +9162,7 @@
         </p:nvSpPr>
         <p:spPr>
           <a:xfrm>
-            <a:off x="526950" y="3711858"/>
+            <a:off x="4697616" y="2380916"/>
             <a:ext cx="2900922" cy="45719"/>
           </a:xfrm>
           <a:prstGeom prst="rect">
@@ -10520,10 +9202,10 @@
       </p:sp>
       <p:sp>
         <p:nvSpPr>
-          <p:cNvPr id="16" name="TextBox 15">
+          <p:cNvPr id="18" name="TextBox 17">
             <a:extLst>
               <a:ext uri="{FF2B5EF4-FFF2-40B4-BE49-F238E27FC236}">
-                <a16:creationId xmlns:a16="http://schemas.microsoft.com/office/drawing/2014/main" id="{D6943AD7-58A9-9ECC-E9B3-78E67C6D31AD}"/>
+                <a16:creationId xmlns:a16="http://schemas.microsoft.com/office/drawing/2014/main" id="{3FC1522C-6AB8-3A42-FBC1-32A1AF43BE03}"/>
               </a:ext>
             </a:extLst>
           </p:cNvPr>
@@ -10532,8 +9214,8 @@
         </p:nvSpPr>
         <p:spPr>
           <a:xfrm>
-            <a:off x="451104" y="3365385"/>
-            <a:ext cx="1183978" cy="369332"/>
+            <a:off x="4621770" y="2034443"/>
+            <a:ext cx="1963807" cy="369332"/>
           </a:xfrm>
           <a:prstGeom prst="rect">
             <a:avLst/>
@@ -10552,17 +9234,70 @@
                   <a:srgbClr val="163B5A"/>
                 </a:solidFill>
               </a:rPr>
-              <a:t>Oncology</a:t>
+              <a:t>PPAR </a:t>
+            </a:r>
+            <a:r>
+              <a:rPr lang="el-GR" b="1" dirty="0">
+                <a:solidFill>
+                  <a:srgbClr val="163B5A"/>
+                </a:solidFill>
+              </a:rPr>
+              <a:t>α/δ </a:t>
+            </a:r>
+            <a:r>
+              <a:rPr lang="en-AU" b="1" dirty="0">
+                <a:solidFill>
+                  <a:srgbClr val="163B5A"/>
+                </a:solidFill>
+              </a:rPr>
+              <a:t>agonist</a:t>
             </a:r>
           </a:p>
         </p:txBody>
       </p:sp>
       <p:sp>
         <p:nvSpPr>
-          <p:cNvPr id="17" name="Rectangle 16">
+          <p:cNvPr id="20" name="TextBox 19">
             <a:extLst>
               <a:ext uri="{FF2B5EF4-FFF2-40B4-BE49-F238E27FC236}">
-                <a16:creationId xmlns:a16="http://schemas.microsoft.com/office/drawing/2014/main" id="{AE78747F-ED8F-6803-3399-5D848F893357}"/>
+                <a16:creationId xmlns:a16="http://schemas.microsoft.com/office/drawing/2014/main" id="{AC20A729-A476-3ADB-A2A7-82EFA36482DF}"/>
+              </a:ext>
+            </a:extLst>
+          </p:cNvPr>
+          <p:cNvSpPr txBox="1"/>
+          <p:nvPr/>
+        </p:nvSpPr>
+        <p:spPr>
+          <a:xfrm>
+            <a:off x="451103" y="1154740"/>
+            <a:ext cx="11289791" cy="646331"/>
+          </a:xfrm>
+          <a:prstGeom prst="rect">
+            <a:avLst/>
+          </a:prstGeom>
+          <a:noFill/>
+        </p:spPr>
+        <p:txBody>
+          <a:bodyPr wrap="square">
+            <a:spAutoFit/>
+          </a:bodyPr>
+          <a:lstStyle/>
+          <a:p>
+            <a:pPr algn="ctr"/>
+            <a:r>
+              <a:rPr lang="en-FR" dirty="0"/>
+              <a:t>Focus rationale: Ipsen revenue concentrates in 3 franchises (Onco 69%, Neuro 20%, Rare disease 11%). We analyze the 2 markets defining its strategic trajectory: [marché 1] and [marché 2]</a:t>
+            </a:r>
+            <a:endParaRPr lang="en-AU" dirty="0"/>
+          </a:p>
+        </p:txBody>
+      </p:sp>
+      <p:sp>
+        <p:nvSpPr>
+          <p:cNvPr id="21" name="Rectangle 20">
+            <a:extLst>
+              <a:ext uri="{FF2B5EF4-FFF2-40B4-BE49-F238E27FC236}">
+                <a16:creationId xmlns:a16="http://schemas.microsoft.com/office/drawing/2014/main" id="{E6F32A66-789B-0E8C-C5F8-B8D0E3CDAA2F}"/>
               </a:ext>
             </a:extLst>
           </p:cNvPr>
@@ -10571,7 +9306,7 @@
         </p:nvSpPr>
         <p:spPr>
           <a:xfrm>
-            <a:off x="4697616" y="3711858"/>
+            <a:off x="8839972" y="2380915"/>
             <a:ext cx="2900922" cy="45719"/>
           </a:xfrm>
           <a:prstGeom prst="rect">
@@ -10611,10 +9346,10 @@
       </p:sp>
       <p:sp>
         <p:nvSpPr>
-          <p:cNvPr id="18" name="TextBox 17">
+          <p:cNvPr id="22" name="TextBox 21">
             <a:extLst>
               <a:ext uri="{FF2B5EF4-FFF2-40B4-BE49-F238E27FC236}">
-                <a16:creationId xmlns:a16="http://schemas.microsoft.com/office/drawing/2014/main" id="{3FC1522C-6AB8-3A42-FBC1-32A1AF43BE03}"/>
+                <a16:creationId xmlns:a16="http://schemas.microsoft.com/office/drawing/2014/main" id="{0EA7F4BC-4214-0A86-8100-D05D7CEA4315}"/>
               </a:ext>
             </a:extLst>
           </p:cNvPr>
@@ -10623,7 +9358,7 @@
         </p:nvSpPr>
         <p:spPr>
           <a:xfrm>
-            <a:off x="4621770" y="3365385"/>
+            <a:off x="8764126" y="2034442"/>
             <a:ext cx="1963807" cy="369332"/>
           </a:xfrm>
           <a:prstGeom prst="rect">
@@ -10913,13 +9648,18 @@
           <a:lstStyle/>
           <a:p>
             <a:r>
-              <a:rPr lang="en-AU" sz="1400" dirty="0">
-                <a:solidFill>
-                  <a:srgbClr val="163B5A"/>
-                </a:solidFill>
-              </a:rPr>
-              <a:t>XXXX</a:t>
-            </a:r>
+              <a:rPr lang="en-US" sz="1400" dirty="0"/>
+              <a:t>Ipsen target a very diversified specialty-care portfolio to secure revenue and decrease dependency on few oncology </a:t>
+            </a:r>
+            <a:r>
+              <a:rPr lang="en-US" sz="1400" dirty="0" err="1"/>
+              <a:t>produtcs</a:t>
+            </a:r>
+            <a:endParaRPr lang="en-AU" sz="1400" dirty="0">
+              <a:solidFill>
+                <a:srgbClr val="163B5A"/>
+              </a:solidFill>
+            </a:endParaRPr>
           </a:p>
         </p:txBody>
       </p:sp>
@@ -13433,7 +12173,7 @@
         </p:nvSpPr>
         <p:spPr>
           <a:xfrm>
-            <a:off x="7649776" y="4821943"/>
+            <a:off x="7368561" y="5024970"/>
             <a:ext cx="2900922" cy="45719"/>
           </a:xfrm>
           <a:prstGeom prst="rect">
@@ -13485,7 +12225,7 @@
         </p:nvSpPr>
         <p:spPr>
           <a:xfrm>
-            <a:off x="7573930" y="4475470"/>
+            <a:off x="7292715" y="4678497"/>
             <a:ext cx="2329292" cy="369332"/>
           </a:xfrm>
           <a:prstGeom prst="rect">
@@ -13525,7 +12265,7 @@
         <p:spPr>
           <a:xfrm>
             <a:off x="451104" y="5167338"/>
-            <a:ext cx="6604001" cy="1015663"/>
+            <a:ext cx="6604001" cy="1569660"/>
           </a:xfrm>
           <a:prstGeom prst="rect">
             <a:avLst/>
@@ -13543,26 +12283,9 @@
               <a:buChar char="•"/>
             </a:pPr>
             <a:r>
-              <a:rPr lang="en-US" sz="1200" b="1" dirty="0" err="1"/>
-              <a:t>Portefeuil</a:t>
-            </a:r>
-            <a:r>
-              <a:rPr lang="en-US" sz="1200" b="1" dirty="0"/>
-              <a:t> </a:t>
-            </a:r>
-            <a:r>
-              <a:rPr lang="en-US" sz="1200" b="1" dirty="0" err="1"/>
-              <a:t>devient</a:t>
-            </a:r>
-            <a:r>
-              <a:rPr lang="en-US" sz="1200" b="1" dirty="0"/>
-              <a:t> très </a:t>
-            </a:r>
-            <a:r>
-              <a:rPr lang="en-US" sz="1200" b="1" dirty="0" err="1"/>
-              <a:t>diversifié</a:t>
-            </a:r>
-            <a:endParaRPr lang="en-US" sz="1200" b="1" dirty="0"/>
+              <a:rPr lang="en-US" sz="1200" dirty="0"/>
+              <a:t>Diversified specialty-care portfolio, with Oncology as the revenue backbone</a:t>
+            </a:r>
           </a:p>
           <a:p>
             <a:pPr marL="285750" indent="-285750">
@@ -13570,13 +12293,38 @@
               <a:buChar char="•"/>
             </a:pPr>
             <a:r>
-              <a:rPr lang="en-US" sz="1200" b="1" dirty="0"/>
-              <a:t>Clear post-2020 external-innovation reset: </a:t>
-            </a:r>
-            <a:r>
               <a:rPr lang="en-US" sz="1200" dirty="0"/>
-              <a:t>30 best-/first-in-class programs brought into the pipeline since 2020.</a:t>
-            </a:r>
+              <a:t>Oncology driven by mature but resilient franchises: </a:t>
+            </a:r>
+            <a:r>
+              <a:rPr lang="en-US" sz="1200" dirty="0" err="1"/>
+              <a:t>Somatuline</a:t>
+            </a:r>
+            <a:r>
+              <a:rPr lang="en-US" sz="1200" dirty="0"/>
+              <a:t>, </a:t>
+            </a:r>
+            <a:r>
+              <a:rPr lang="en-US" sz="1200" dirty="0" err="1"/>
+              <a:t>Cabometyx</a:t>
+            </a:r>
+            <a:r>
+              <a:rPr lang="en-US" sz="1200" dirty="0"/>
+              <a:t>, </a:t>
+            </a:r>
+            <a:r>
+              <a:rPr lang="en-US" sz="1200" dirty="0" err="1"/>
+              <a:t>Decapeptyl</a:t>
+            </a:r>
+            <a:r>
+              <a:rPr lang="en-US" sz="1200" dirty="0"/>
+              <a:t>, </a:t>
+            </a:r>
+            <a:r>
+              <a:rPr lang="en-US" sz="1200" dirty="0" err="1"/>
+              <a:t>Onivyde</a:t>
+            </a:r>
+            <a:endParaRPr lang="en-US" sz="1200" dirty="0"/>
           </a:p>
           <a:p>
             <a:pPr marL="285750" indent="-285750">
@@ -13584,30 +12332,69 @@
               <a:buChar char="•"/>
             </a:pPr>
             <a:r>
-              <a:rPr lang="en-US" sz="1200" b="1" dirty="0"/>
-              <a:t>2024-2025 shift toward early oncology modalities </a:t>
-            </a:r>
-            <a:r>
               <a:rPr lang="en-US" sz="1200" dirty="0"/>
-              <a:t>(ADCs, T-cell engagers, </a:t>
+              <a:t>Rare Disease emerging as a second growth engine, led by </a:t>
             </a:r>
             <a:r>
               <a:rPr lang="en-US" sz="1200" dirty="0" err="1"/>
-              <a:t>γδ</a:t>
+              <a:t>Iqirvo</a:t>
             </a:r>
             <a:r>
               <a:rPr lang="en-US" sz="1200" dirty="0"/>
-              <a:t> T-cell activation, MAPK pathway assets)</a:t>
+              <a:t> and </a:t>
+            </a:r>
+            <a:r>
+              <a:rPr lang="en-US" sz="1200" dirty="0" err="1"/>
+              <a:t>Bylvay</a:t>
+            </a:r>
+            <a:endParaRPr lang="en-US" sz="1200" dirty="0"/>
+          </a:p>
+          <a:p>
+            <a:pPr marL="285750" indent="-285750">
+              <a:buFont typeface="Arial" panose="020B0604020202020204" pitchFamily="34" charset="0"/>
+              <a:buChar char="•"/>
+            </a:pPr>
+            <a:r>
+              <a:rPr lang="en-US" sz="1200" dirty="0"/>
+              <a:t>Neuroscience anchored by Dysport, with </a:t>
+            </a:r>
+            <a:r>
+              <a:rPr lang="en-US" sz="1200" dirty="0" err="1"/>
+              <a:t>corabotase</a:t>
+            </a:r>
+            <a:r>
+              <a:rPr lang="en-US" sz="1200" dirty="0"/>
+              <a:t> as next-generation growth relay</a:t>
+            </a:r>
+          </a:p>
+          <a:p>
+            <a:pPr marL="285750" indent="-285750">
+              <a:buFont typeface="Arial" panose="020B0604020202020204" pitchFamily="34" charset="0"/>
+              <a:buChar char="•"/>
+            </a:pPr>
+            <a:r>
+              <a:rPr lang="en-US" sz="1200" dirty="0"/>
+              <a:t>Post-2020 external innovation engine: 30+ best-/first-in-class programs added through M&amp;A, licensing and partnerships</a:t>
+            </a:r>
+          </a:p>
+          <a:p>
+            <a:pPr marL="285750" indent="-285750">
+              <a:buFont typeface="Arial" panose="020B0604020202020204" pitchFamily="34" charset="0"/>
+              <a:buChar char="•"/>
+            </a:pPr>
+            <a:r>
+              <a:rPr lang="en-US" sz="1200" dirty="0"/>
+              <a:t>Strategic shift toward precision oncology, rare liver diseases and next-generation neurotoxins</a:t>
             </a:r>
           </a:p>
         </p:txBody>
       </p:sp>
       <p:sp>
         <p:nvSpPr>
-          <p:cNvPr id="20" name="TextBox 19">
+          <p:cNvPr id="22" name="TextBox 21">
             <a:extLst>
               <a:ext uri="{FF2B5EF4-FFF2-40B4-BE49-F238E27FC236}">
-                <a16:creationId xmlns:a16="http://schemas.microsoft.com/office/drawing/2014/main" id="{387E2389-67D0-9DBE-F994-A7F3C3D455DA}"/>
+                <a16:creationId xmlns:a16="http://schemas.microsoft.com/office/drawing/2014/main" id="{FD1D0E5E-3D0B-19EB-58EF-4B8BF5D7C54D}"/>
               </a:ext>
             </a:extLst>
           </p:cNvPr>
@@ -13616,8 +12403,8 @@
         </p:nvSpPr>
         <p:spPr>
           <a:xfrm>
-            <a:off x="7573930" y="4932382"/>
-            <a:ext cx="4448181" cy="276999"/>
+            <a:off x="7292715" y="5116925"/>
+            <a:ext cx="4814082" cy="1569660"/>
           </a:xfrm>
           <a:prstGeom prst="rect">
             <a:avLst/>
@@ -13630,15 +12417,74 @@
           </a:bodyPr>
           <a:lstStyle/>
           <a:p>
-            <a:pPr marL="285750" indent="-285750">
-              <a:buFont typeface="Arial" panose="020B0604020202020204" pitchFamily="34" charset="0"/>
-              <a:buChar char="•"/>
-            </a:pPr>
-            <a:r>
-              <a:rPr lang="fr-FR" sz="1200" b="1" dirty="0"/>
-              <a:t>Reprends </a:t>
-            </a:r>
-            <a:endParaRPr lang="en-AU" sz="1200" dirty="0"/>
+            <a:r>
+              <a:rPr lang="en-US" sz="1200" b="1" dirty="0"/>
+              <a:t>Oncology: </a:t>
+            </a:r>
+            <a:r>
+              <a:rPr lang="en-US" sz="1200" dirty="0"/>
+              <a:t>Can Ipsen offset </a:t>
+            </a:r>
+            <a:r>
+              <a:rPr lang="en-US" sz="1200" dirty="0" err="1"/>
+              <a:t>Somatuline</a:t>
+            </a:r>
+            <a:r>
+              <a:rPr lang="en-US" sz="1200" dirty="0"/>
+              <a:t> LOE risk fast enough through </a:t>
+            </a:r>
+            <a:r>
+              <a:rPr lang="en-US" sz="1200" dirty="0" err="1"/>
+              <a:t>Cabometyx</a:t>
+            </a:r>
+            <a:r>
+              <a:rPr lang="en-US" sz="1200" dirty="0"/>
+              <a:t> / </a:t>
+            </a:r>
+            <a:r>
+              <a:rPr lang="en-US" sz="1200" dirty="0" err="1"/>
+              <a:t>Onivyde</a:t>
+            </a:r>
+            <a:r>
+              <a:rPr lang="en-US" sz="1200" dirty="0"/>
+              <a:t> / </a:t>
+            </a:r>
+            <a:r>
+              <a:rPr lang="en-US" sz="1200" dirty="0" err="1"/>
+              <a:t>Ojemda</a:t>
+            </a:r>
+            <a:r>
+              <a:rPr lang="en-US" sz="1200" dirty="0"/>
+              <a:t> and new precision-oncology modalities?</a:t>
+            </a:r>
+          </a:p>
+          <a:p>
+            <a:r>
+              <a:rPr lang="en-US" sz="1200" b="1" dirty="0"/>
+              <a:t>Rare Disease: </a:t>
+            </a:r>
+            <a:r>
+              <a:rPr lang="en-US" sz="1200" dirty="0"/>
+              <a:t>Is Ipsen building a true second TA pillar, or still using Rare Disease as portfolio diversification?</a:t>
+            </a:r>
+          </a:p>
+          <a:p>
+            <a:r>
+              <a:rPr lang="en-US" sz="1200" b="1" dirty="0"/>
+              <a:t>Neuroscience: </a:t>
+            </a:r>
+            <a:r>
+              <a:rPr lang="en-US" sz="1200" dirty="0"/>
+              <a:t>Is Dysport/</a:t>
+            </a:r>
+            <a:r>
+              <a:rPr lang="en-US" sz="1200" dirty="0" err="1"/>
+              <a:t>corabotase</a:t>
+            </a:r>
+            <a:r>
+              <a:rPr lang="en-US" sz="1200" dirty="0"/>
+              <a:t> enough to secure long-term growth, or does Ipsen need external neuro assets beyond toxin lifecycle expansion?</a:t>
+            </a:r>
           </a:p>
         </p:txBody>
       </p:sp>

--- a/Ipsen.pptx
+++ b/Ipsen.pptx
@@ -5,7 +5,7 @@
     <p:sldMasterId id="2147483648" r:id="rId1"/>
   </p:sldMasterIdLst>
   <p:sldIdLst>
-    <p:sldId id="257" r:id="rId2"/>
+    <p:sldId id="260" r:id="rId2"/>
     <p:sldId id="259" r:id="rId3"/>
     <p:sldId id="258" r:id="rId4"/>
   </p:sldIdLst>
@@ -3340,7 +3340,7 @@
         <p:cNvPr id="1" name="">
           <a:extLst>
             <a:ext uri="{FF2B5EF4-FFF2-40B4-BE49-F238E27FC236}">
-              <a16:creationId xmlns:a16="http://schemas.microsoft.com/office/drawing/2014/main" id="{EAA03932-B9A7-BBF1-0F06-B9E641DE0EE8}"/>
+              <a16:creationId xmlns:a16="http://schemas.microsoft.com/office/drawing/2014/main" id="{4A99DA62-9881-E1D1-3ED2-C42C5FF670CE}"/>
             </a:ext>
           </a:extLst>
         </p:cNvPr>
@@ -3360,7 +3360,7 @@
           <p:cNvPr id="4" name="Rectangle 3">
             <a:extLst>
               <a:ext uri="{FF2B5EF4-FFF2-40B4-BE49-F238E27FC236}">
-                <a16:creationId xmlns:a16="http://schemas.microsoft.com/office/drawing/2014/main" id="{B9781270-B1CA-CC68-8272-76D5B7FC02DC}"/>
+                <a16:creationId xmlns:a16="http://schemas.microsoft.com/office/drawing/2014/main" id="{06D8D4E9-C048-E1D8-FE8A-213493937A0F}"/>
               </a:ext>
             </a:extLst>
           </p:cNvPr>
@@ -3412,7 +3412,7 @@
           <p:cNvPr id="5" name="Rectangle 4">
             <a:extLst>
               <a:ext uri="{FF2B5EF4-FFF2-40B4-BE49-F238E27FC236}">
-                <a16:creationId xmlns:a16="http://schemas.microsoft.com/office/drawing/2014/main" id="{4DCCCC47-554E-5BB8-32FD-26ACD3E06A08}"/>
+                <a16:creationId xmlns:a16="http://schemas.microsoft.com/office/drawing/2014/main" id="{4FBA2D66-B531-D970-88BC-38A25F159ACB}"/>
               </a:ext>
             </a:extLst>
           </p:cNvPr>
@@ -3464,7 +3464,7 @@
           <p:cNvPr id="7" name="Straight Connector 6">
             <a:extLst>
               <a:ext uri="{FF2B5EF4-FFF2-40B4-BE49-F238E27FC236}">
-                <a16:creationId xmlns:a16="http://schemas.microsoft.com/office/drawing/2014/main" id="{E10551A7-7D7F-3473-66BD-3861DDB38FEC}"/>
+                <a16:creationId xmlns:a16="http://schemas.microsoft.com/office/drawing/2014/main" id="{4BD04FF0-D827-5C2D-8A79-A0B8D2CAC0E0}"/>
               </a:ext>
             </a:extLst>
           </p:cNvPr>
@@ -3505,7 +3505,7 @@
           <p:cNvPr id="8" name="TextBox 7">
             <a:extLst>
               <a:ext uri="{FF2B5EF4-FFF2-40B4-BE49-F238E27FC236}">
-                <a16:creationId xmlns:a16="http://schemas.microsoft.com/office/drawing/2014/main" id="{D1413FD2-4082-6B36-FAC6-F4ABD41FFCA0}"/>
+                <a16:creationId xmlns:a16="http://schemas.microsoft.com/office/drawing/2014/main" id="{8A9570B6-36FD-75E5-163E-8CC228C00C3C}"/>
               </a:ext>
             </a:extLst>
           </p:cNvPr>
@@ -3544,7 +3544,7 @@
           <p:cNvPr id="9" name="TextBox 8">
             <a:extLst>
               <a:ext uri="{FF2B5EF4-FFF2-40B4-BE49-F238E27FC236}">
-                <a16:creationId xmlns:a16="http://schemas.microsoft.com/office/drawing/2014/main" id="{C91A7399-7304-370C-46A6-54B7A9373618}"/>
+                <a16:creationId xmlns:a16="http://schemas.microsoft.com/office/drawing/2014/main" id="{BED23A3C-98AE-416B-499A-DC2CBB8B4C95}"/>
               </a:ext>
             </a:extLst>
           </p:cNvPr>
@@ -3589,7 +3589,7 @@
                   <a:srgbClr val="163B5A"/>
                 </a:solidFill>
               </a:rPr>
-              <a:t> the emergence of neuroscience and rare diseases products</a:t>
+              <a:t> the emergence of neuroscience and rare disease products</a:t>
             </a:r>
           </a:p>
         </p:txBody>
@@ -3599,7 +3599,7 @@
           <p:cNvPr id="15" name="Rectangle 14">
             <a:extLst>
               <a:ext uri="{FF2B5EF4-FFF2-40B4-BE49-F238E27FC236}">
-                <a16:creationId xmlns:a16="http://schemas.microsoft.com/office/drawing/2014/main" id="{3F703125-CAAF-583B-C36A-51A88959B899}"/>
+                <a16:creationId xmlns:a16="http://schemas.microsoft.com/office/drawing/2014/main" id="{D96C4126-7DAE-C596-61D0-7A2031D3C242}"/>
               </a:ext>
             </a:extLst>
           </p:cNvPr>
@@ -3651,7 +3651,7 @@
           <p:cNvPr id="16" name="TextBox 15">
             <a:extLst>
               <a:ext uri="{FF2B5EF4-FFF2-40B4-BE49-F238E27FC236}">
-                <a16:creationId xmlns:a16="http://schemas.microsoft.com/office/drawing/2014/main" id="{A8C21DBF-B41B-0648-001E-29886316F1AF}"/>
+                <a16:creationId xmlns:a16="http://schemas.microsoft.com/office/drawing/2014/main" id="{EFAEEF5D-72B3-2F23-234E-E74608B94028}"/>
               </a:ext>
             </a:extLst>
           </p:cNvPr>
@@ -3690,7 +3690,7 @@
           <p:cNvPr id="17" name="TextBox 16">
             <a:extLst>
               <a:ext uri="{FF2B5EF4-FFF2-40B4-BE49-F238E27FC236}">
-                <a16:creationId xmlns:a16="http://schemas.microsoft.com/office/drawing/2014/main" id="{7904A1F9-80D6-6B9D-6B51-9FBA23018A5B}"/>
+                <a16:creationId xmlns:a16="http://schemas.microsoft.com/office/drawing/2014/main" id="{DDD04CA2-1FC8-C925-78EB-57F2CA44F519}"/>
               </a:ext>
             </a:extLst>
           </p:cNvPr>
@@ -3700,7 +3700,7 @@
         <p:spPr>
           <a:xfrm>
             <a:off x="451104" y="1534679"/>
-            <a:ext cx="4500275" cy="2862322"/>
+            <a:ext cx="5505465" cy="3046988"/>
           </a:xfrm>
           <a:prstGeom prst="rect">
             <a:avLst/>
@@ -3895,8 +3895,47 @@
               <a:rPr lang="en-GB" sz="1200" dirty="0"/>
               <a:t>Net cash position: +€560M (FY25): strong bolt-on M&amp;A firepower</a:t>
             </a:r>
+          </a:p>
+          <a:p>
+            <a:pPr marL="742950" lvl="1" indent="-285750">
+              <a:buFont typeface="Arial" panose="020B0604020202020204" pitchFamily="34" charset="0"/>
+              <a:buChar char="•"/>
+            </a:pPr>
+            <a:r>
+              <a:rPr lang="en-FR" sz="1200" dirty="0"/>
+              <a:t>R&amp;D/Rev at 20%: </a:t>
+            </a:r>
+            <a:r>
+              <a:rPr lang="en-GB" sz="1200" dirty="0"/>
+              <a:t>rising, funding diversification pipeline</a:t>
+            </a:r>
             <a:endParaRPr lang="en-FR" sz="1200" dirty="0"/>
           </a:p>
+          <a:p>
+            <a:pPr marL="742950" lvl="1" indent="-285750">
+              <a:buFont typeface="Arial" panose="020B0604020202020204" pitchFamily="34" charset="0"/>
+              <a:buChar char="•"/>
+            </a:pPr>
+            <a:r>
+              <a:rPr lang="en-FR" sz="1200" dirty="0"/>
+              <a:t>11pt of GM increase: increase revenue quicker than COGS</a:t>
+            </a:r>
+          </a:p>
+          <a:p>
+            <a:pPr marL="742950" lvl="1" indent="-285750">
+              <a:buFont typeface="Arial" panose="020B0604020202020204" pitchFamily="34" charset="0"/>
+              <a:buChar char="•"/>
+            </a:pPr>
+            <a:r>
+              <a:rPr lang="en-FR" sz="1200" dirty="0"/>
+              <a:t>FCF at 1b (FY25), vs. 0.77 FY24 driven by </a:t>
+            </a:r>
+            <a:r>
+              <a:rPr lang="en-GB" sz="1200" dirty="0"/>
+              <a:t>EBITDA growth + lower capex</a:t>
+            </a:r>
+            <a:endParaRPr lang="en-FR" sz="1200" dirty="0"/>
+          </a:p>
         </p:txBody>
       </p:sp>
       <p:sp>
@@ -3904,7 +3943,7 @@
           <p:cNvPr id="19" name="TextBox 18">
             <a:extLst>
               <a:ext uri="{FF2B5EF4-FFF2-40B4-BE49-F238E27FC236}">
-                <a16:creationId xmlns:a16="http://schemas.microsoft.com/office/drawing/2014/main" id="{84DF435D-1ACB-FF21-2115-A000A2EA182D}"/>
+                <a16:creationId xmlns:a16="http://schemas.microsoft.com/office/drawing/2014/main" id="{399026E1-A114-8151-AFF3-1944256D33DF}"/>
               </a:ext>
             </a:extLst>
           </p:cNvPr>
@@ -3934,2831 +3973,12 @@
           </a:p>
         </p:txBody>
       </p:sp>
-      <p:graphicFrame>
-        <p:nvGraphicFramePr>
-          <p:cNvPr id="23" name="Table 22">
-            <a:extLst>
-              <a:ext uri="{FF2B5EF4-FFF2-40B4-BE49-F238E27FC236}">
-                <a16:creationId xmlns:a16="http://schemas.microsoft.com/office/drawing/2014/main" id="{A188FADF-309A-399C-3546-0C19F4F2DA0A}"/>
-              </a:ext>
-            </a:extLst>
-          </p:cNvPr>
-          <p:cNvGraphicFramePr>
-            <a:graphicFrameLocks noGrp="1"/>
-          </p:cNvGraphicFramePr>
-          <p:nvPr>
-            <p:extLst>
-              <p:ext uri="{D42A27DB-BD31-4B8C-83A1-F6EECF244321}">
-                <p14:modId xmlns:p14="http://schemas.microsoft.com/office/powerpoint/2010/main" val="2648005757"/>
-              </p:ext>
-            </p:extLst>
-          </p:nvPr>
-        </p:nvGraphicFramePr>
-        <p:xfrm>
-          <a:off x="6235431" y="1608530"/>
-          <a:ext cx="5871503" cy="3221355"/>
-        </p:xfrm>
-        <a:graphic>
-          <a:graphicData uri="http://schemas.openxmlformats.org/drawingml/2006/table">
-            <a:tbl>
-              <a:tblPr/>
-              <a:tblGrid>
-                <a:gridCol w="3013263">
-                  <a:extLst>
-                    <a:ext uri="{9D8B030D-6E8A-4147-A177-3AD203B41FA5}">
-                      <a16:colId xmlns:a16="http://schemas.microsoft.com/office/drawing/2014/main" val="1086495563"/>
-                    </a:ext>
-                  </a:extLst>
-                </a:gridCol>
-                <a:gridCol w="1085162">
-                  <a:extLst>
-                    <a:ext uri="{9D8B030D-6E8A-4147-A177-3AD203B41FA5}">
-                      <a16:colId xmlns:a16="http://schemas.microsoft.com/office/drawing/2014/main" val="3095386841"/>
-                    </a:ext>
-                  </a:extLst>
-                </a:gridCol>
-                <a:gridCol w="1085162">
-                  <a:extLst>
-                    <a:ext uri="{9D8B030D-6E8A-4147-A177-3AD203B41FA5}">
-                      <a16:colId xmlns:a16="http://schemas.microsoft.com/office/drawing/2014/main" val="2581013858"/>
-                    </a:ext>
-                  </a:extLst>
-                </a:gridCol>
-                <a:gridCol w="687916">
-                  <a:extLst>
-                    <a:ext uri="{9D8B030D-6E8A-4147-A177-3AD203B41FA5}">
-                      <a16:colId xmlns:a16="http://schemas.microsoft.com/office/drawing/2014/main" val="1447243760"/>
-                    </a:ext>
-                  </a:extLst>
-                </a:gridCol>
-              </a:tblGrid>
-              <a:tr h="109474">
-                <a:tc>
-                  <a:txBody>
-                    <a:bodyPr/>
-                    <a:lstStyle/>
-                    <a:p>
-                      <a:pPr algn="l" fontAlgn="b">
-                        <a:buNone/>
-                      </a:pPr>
-                      <a:r>
-                        <a:rPr lang="en-FR" sz="900" b="0" i="1" u="none" strike="noStrike" dirty="0">
-                          <a:solidFill>
-                            <a:srgbClr val="808080"/>
-                          </a:solidFill>
-                          <a:effectLst/>
-                          <a:latin typeface="Arial" panose="020B0604020202020204" pitchFamily="34" charset="0"/>
-                        </a:rPr>
-                        <a:t>(in million of euros)</a:t>
-                      </a:r>
-                    </a:p>
-                  </a:txBody>
-                  <a:tcPr marL="9525" marR="9525" marT="9525" marB="0" anchor="b">
-                    <a:lnL>
-                      <a:noFill/>
-                    </a:lnL>
-                    <a:lnR>
-                      <a:noFill/>
-                    </a:lnR>
-                    <a:lnT>
-                      <a:noFill/>
-                    </a:lnT>
-                    <a:lnB>
-                      <a:noFill/>
-                    </a:lnB>
-                    <a:solidFill>
-                      <a:srgbClr val="DAE9F8"/>
-                    </a:solidFill>
-                  </a:tcPr>
-                </a:tc>
-                <a:tc>
-                  <a:txBody>
-                    <a:bodyPr/>
-                    <a:lstStyle/>
-                    <a:p>
-                      <a:pPr algn="ctr" fontAlgn="b">
-                        <a:buNone/>
-                      </a:pPr>
-                      <a:r>
-                        <a:rPr lang="en-FR" sz="1050" b="1" i="0" u="none" strike="noStrike">
-                          <a:effectLst/>
-                          <a:latin typeface="Arial" panose="020B0604020202020204" pitchFamily="34" charset="0"/>
-                        </a:rPr>
-                        <a:t>2025</a:t>
-                      </a:r>
-                    </a:p>
-                  </a:txBody>
-                  <a:tcPr marL="9525" marR="9525" marT="9525" marB="0" anchor="b">
-                    <a:lnL>
-                      <a:noFill/>
-                    </a:lnL>
-                    <a:lnR>
-                      <a:noFill/>
-                    </a:lnR>
-                    <a:lnT>
-                      <a:noFill/>
-                    </a:lnT>
-                    <a:lnB>
-                      <a:noFill/>
-                    </a:lnB>
-                    <a:solidFill>
-                      <a:srgbClr val="DAE9F8"/>
-                    </a:solidFill>
-                  </a:tcPr>
-                </a:tc>
-                <a:tc>
-                  <a:txBody>
-                    <a:bodyPr/>
-                    <a:lstStyle/>
-                    <a:p>
-                      <a:pPr algn="ctr" fontAlgn="b">
-                        <a:buNone/>
-                      </a:pPr>
-                      <a:r>
-                        <a:rPr lang="en-FR" sz="1050" b="1" i="0" u="none" strike="noStrike">
-                          <a:effectLst/>
-                          <a:latin typeface="Arial" panose="020B0604020202020204" pitchFamily="34" charset="0"/>
-                        </a:rPr>
-                        <a:t>2024</a:t>
-                      </a:r>
-                    </a:p>
-                  </a:txBody>
-                  <a:tcPr marL="9525" marR="9525" marT="9525" marB="0" anchor="b">
-                    <a:lnL>
-                      <a:noFill/>
-                    </a:lnL>
-                    <a:lnR>
-                      <a:noFill/>
-                    </a:lnR>
-                    <a:lnT>
-                      <a:noFill/>
-                    </a:lnT>
-                    <a:lnB>
-                      <a:noFill/>
-                    </a:lnB>
-                    <a:solidFill>
-                      <a:srgbClr val="DAE9F8"/>
-                    </a:solidFill>
-                  </a:tcPr>
-                </a:tc>
-                <a:tc>
-                  <a:txBody>
-                    <a:bodyPr/>
-                    <a:lstStyle/>
-                    <a:p>
-                      <a:pPr algn="ctr" fontAlgn="b">
-                        <a:buNone/>
-                      </a:pPr>
-                      <a:r>
-                        <a:rPr lang="en-FR" sz="1050" b="1" i="0" u="none" strike="noStrike">
-                          <a:effectLst/>
-                          <a:latin typeface="Arial" panose="020B0604020202020204" pitchFamily="34" charset="0"/>
-                        </a:rPr>
-                        <a:t>YoY</a:t>
-                      </a:r>
-                    </a:p>
-                  </a:txBody>
-                  <a:tcPr marL="9525" marR="9525" marT="9525" marB="0" anchor="b">
-                    <a:lnL>
-                      <a:noFill/>
-                    </a:lnL>
-                    <a:lnR>
-                      <a:noFill/>
-                    </a:lnR>
-                    <a:lnT>
-                      <a:noFill/>
-                    </a:lnT>
-                    <a:lnB>
-                      <a:noFill/>
-                    </a:lnB>
-                    <a:solidFill>
-                      <a:srgbClr val="DAE9F8"/>
-                    </a:solidFill>
-                  </a:tcPr>
-                </a:tc>
-                <a:extLst>
-                  <a:ext uri="{0D108BD9-81ED-4DB2-BD59-A6C34878D82A}">
-                    <a16:rowId xmlns:a16="http://schemas.microsoft.com/office/drawing/2014/main" val="1671293505"/>
-                  </a:ext>
-                </a:extLst>
-              </a:tr>
-              <a:tr h="109474">
-                <a:tc>
-                  <a:txBody>
-                    <a:bodyPr/>
-                    <a:lstStyle/>
-                    <a:p>
-                      <a:pPr algn="l" fontAlgn="b">
-                        <a:buNone/>
-                      </a:pPr>
-                      <a:r>
-                        <a:rPr lang="en-FR" sz="1050" b="1" i="0" u="none" strike="noStrike" dirty="0">
-                          <a:effectLst/>
-                          <a:latin typeface="Arial" panose="020B0604020202020204" pitchFamily="34" charset="0"/>
-                        </a:rPr>
-                        <a:t>Revenue</a:t>
-                      </a:r>
-                    </a:p>
-                  </a:txBody>
-                  <a:tcPr marL="85725" marR="9525" marT="9525" marB="0" anchor="b">
-                    <a:lnL>
-                      <a:noFill/>
-                    </a:lnL>
-                    <a:lnR>
-                      <a:noFill/>
-                    </a:lnR>
-                    <a:lnT>
-                      <a:noFill/>
-                    </a:lnT>
-                    <a:lnB>
-                      <a:noFill/>
-                    </a:lnB>
-                    <a:solidFill>
-                      <a:srgbClr val="DAE9F8"/>
-                    </a:solidFill>
-                  </a:tcPr>
-                </a:tc>
-                <a:tc>
-                  <a:txBody>
-                    <a:bodyPr/>
-                    <a:lstStyle/>
-                    <a:p>
-                      <a:pPr algn="l" fontAlgn="b">
-                        <a:buNone/>
-                      </a:pPr>
-                      <a:r>
-                        <a:rPr lang="en-FR" sz="1050" b="1" i="0" u="none" strike="noStrike">
-                          <a:effectLst/>
-                          <a:latin typeface="Arial" panose="020B0604020202020204" pitchFamily="34" charset="0"/>
-                        </a:rPr>
-                        <a:t> $             3 676 </a:t>
-                      </a:r>
-                    </a:p>
-                  </a:txBody>
-                  <a:tcPr marL="9525" marR="9525" marT="9525" marB="0" anchor="b">
-                    <a:lnL>
-                      <a:noFill/>
-                    </a:lnL>
-                    <a:lnR>
-                      <a:noFill/>
-                    </a:lnR>
-                    <a:lnT>
-                      <a:noFill/>
-                    </a:lnT>
-                    <a:lnB>
-                      <a:noFill/>
-                    </a:lnB>
-                    <a:solidFill>
-                      <a:srgbClr val="DAE9F8"/>
-                    </a:solidFill>
-                  </a:tcPr>
-                </a:tc>
-                <a:tc>
-                  <a:txBody>
-                    <a:bodyPr/>
-                    <a:lstStyle/>
-                    <a:p>
-                      <a:pPr algn="l" fontAlgn="b">
-                        <a:buNone/>
-                      </a:pPr>
-                      <a:r>
-                        <a:rPr lang="en-FR" sz="1050" b="1" i="0" u="none" strike="noStrike">
-                          <a:effectLst/>
-                          <a:latin typeface="Arial" panose="020B0604020202020204" pitchFamily="34" charset="0"/>
-                        </a:rPr>
-                        <a:t> $             3 401 </a:t>
-                      </a:r>
-                    </a:p>
-                  </a:txBody>
-                  <a:tcPr marL="9525" marR="9525" marT="9525" marB="0" anchor="b">
-                    <a:lnL>
-                      <a:noFill/>
-                    </a:lnL>
-                    <a:lnR>
-                      <a:noFill/>
-                    </a:lnR>
-                    <a:lnT>
-                      <a:noFill/>
-                    </a:lnT>
-                    <a:lnB>
-                      <a:noFill/>
-                    </a:lnB>
-                    <a:solidFill>
-                      <a:srgbClr val="DAE9F8"/>
-                    </a:solidFill>
-                  </a:tcPr>
-                </a:tc>
-                <a:tc>
-                  <a:txBody>
-                    <a:bodyPr/>
-                    <a:lstStyle/>
-                    <a:p>
-                      <a:pPr algn="ctr" fontAlgn="b">
-                        <a:buNone/>
-                      </a:pPr>
-                      <a:r>
-                        <a:rPr lang="en-FR" sz="1050" b="1" i="0" u="none" strike="noStrike">
-                          <a:effectLst/>
-                          <a:latin typeface="Arial" panose="020B0604020202020204" pitchFamily="34" charset="0"/>
-                        </a:rPr>
-                        <a:t>8%</a:t>
-                      </a:r>
-                    </a:p>
-                  </a:txBody>
-                  <a:tcPr marL="9525" marR="9525" marT="9525" marB="0" anchor="b">
-                    <a:lnL>
-                      <a:noFill/>
-                    </a:lnL>
-                    <a:lnR>
-                      <a:noFill/>
-                    </a:lnR>
-                    <a:lnT>
-                      <a:noFill/>
-                    </a:lnT>
-                    <a:lnB>
-                      <a:noFill/>
-                    </a:lnB>
-                    <a:solidFill>
-                      <a:srgbClr val="DAE9F8"/>
-                    </a:solidFill>
-                  </a:tcPr>
-                </a:tc>
-                <a:extLst>
-                  <a:ext uri="{0D108BD9-81ED-4DB2-BD59-A6C34878D82A}">
-                    <a16:rowId xmlns:a16="http://schemas.microsoft.com/office/drawing/2014/main" val="1966418651"/>
-                  </a:ext>
-                </a:extLst>
-              </a:tr>
-              <a:tr h="109474">
-                <a:tc>
-                  <a:txBody>
-                    <a:bodyPr/>
-                    <a:lstStyle/>
-                    <a:p>
-                      <a:pPr algn="l" fontAlgn="b">
-                        <a:buNone/>
-                      </a:pPr>
-                      <a:r>
-                        <a:rPr lang="en-FR" sz="1050" b="0" i="1" u="none" strike="noStrike">
-                          <a:effectLst/>
-                          <a:latin typeface="Arial" panose="020B0604020202020204" pitchFamily="34" charset="0"/>
-                        </a:rPr>
-                        <a:t>Oncology</a:t>
-                      </a:r>
-                    </a:p>
-                  </a:txBody>
-                  <a:tcPr marL="257175" marR="9525" marT="9525" marB="0" anchor="b">
-                    <a:lnL>
-                      <a:noFill/>
-                    </a:lnL>
-                    <a:lnR>
-                      <a:noFill/>
-                    </a:lnR>
-                    <a:lnT>
-                      <a:noFill/>
-                    </a:lnT>
-                    <a:lnB>
-                      <a:noFill/>
-                    </a:lnB>
-                    <a:noFill/>
-                  </a:tcPr>
-                </a:tc>
-                <a:tc>
-                  <a:txBody>
-                    <a:bodyPr/>
-                    <a:lstStyle/>
-                    <a:p>
-                      <a:pPr algn="l" fontAlgn="b">
-                        <a:buNone/>
-                      </a:pPr>
-                      <a:r>
-                        <a:rPr lang="en-FR" sz="1050" b="0" i="1" u="none" strike="noStrike">
-                          <a:effectLst/>
-                          <a:latin typeface="Arial" panose="020B0604020202020204" pitchFamily="34" charset="0"/>
-                        </a:rPr>
-                        <a:t> $            2 544 </a:t>
-                      </a:r>
-                    </a:p>
-                  </a:txBody>
-                  <a:tcPr marL="9525" marR="9525" marT="9525" marB="0" anchor="b">
-                    <a:lnL>
-                      <a:noFill/>
-                    </a:lnL>
-                    <a:lnR>
-                      <a:noFill/>
-                    </a:lnR>
-                    <a:lnT>
-                      <a:noFill/>
-                    </a:lnT>
-                    <a:lnB>
-                      <a:noFill/>
-                    </a:lnB>
-                    <a:noFill/>
-                  </a:tcPr>
-                </a:tc>
-                <a:tc>
-                  <a:txBody>
-                    <a:bodyPr/>
-                    <a:lstStyle/>
-                    <a:p>
-                      <a:pPr algn="l" fontAlgn="b">
-                        <a:buNone/>
-                      </a:pPr>
-                      <a:r>
-                        <a:rPr lang="en-FR" sz="1050" b="0" i="1" u="none" strike="noStrike">
-                          <a:effectLst/>
-                          <a:latin typeface="Arial" panose="020B0604020202020204" pitchFamily="34" charset="0"/>
-                        </a:rPr>
-                        <a:t> $            2 505 </a:t>
-                      </a:r>
-                    </a:p>
-                  </a:txBody>
-                  <a:tcPr marL="9525" marR="9525" marT="9525" marB="0" anchor="b">
-                    <a:lnL>
-                      <a:noFill/>
-                    </a:lnL>
-                    <a:lnR>
-                      <a:noFill/>
-                    </a:lnR>
-                    <a:lnT>
-                      <a:noFill/>
-                    </a:lnT>
-                    <a:lnB>
-                      <a:noFill/>
-                    </a:lnB>
-                    <a:noFill/>
-                  </a:tcPr>
-                </a:tc>
-                <a:tc>
-                  <a:txBody>
-                    <a:bodyPr/>
-                    <a:lstStyle/>
-                    <a:p>
-                      <a:pPr algn="ctr" fontAlgn="b">
-                        <a:buNone/>
-                      </a:pPr>
-                      <a:r>
-                        <a:rPr lang="en-FR" sz="1050" b="0" i="0" u="none" strike="noStrike">
-                          <a:effectLst/>
-                          <a:latin typeface="Arial" panose="020B0604020202020204" pitchFamily="34" charset="0"/>
-                        </a:rPr>
-                        <a:t>2%</a:t>
-                      </a:r>
-                    </a:p>
-                  </a:txBody>
-                  <a:tcPr marL="9525" marR="9525" marT="9525" marB="0" anchor="b">
-                    <a:lnL>
-                      <a:noFill/>
-                    </a:lnL>
-                    <a:lnR>
-                      <a:noFill/>
-                    </a:lnR>
-                    <a:lnT>
-                      <a:noFill/>
-                    </a:lnT>
-                    <a:lnB>
-                      <a:noFill/>
-                    </a:lnB>
-                    <a:solidFill>
-                      <a:srgbClr val="FFFFFF"/>
-                    </a:solidFill>
-                  </a:tcPr>
-                </a:tc>
-                <a:extLst>
-                  <a:ext uri="{0D108BD9-81ED-4DB2-BD59-A6C34878D82A}">
-                    <a16:rowId xmlns:a16="http://schemas.microsoft.com/office/drawing/2014/main" val="782671932"/>
-                  </a:ext>
-                </a:extLst>
-              </a:tr>
-              <a:tr h="109474">
-                <a:tc>
-                  <a:txBody>
-                    <a:bodyPr/>
-                    <a:lstStyle/>
-                    <a:p>
-                      <a:pPr algn="l" fontAlgn="b">
-                        <a:buNone/>
-                      </a:pPr>
-                      <a:r>
-                        <a:rPr lang="en-FR" sz="1050" b="0" i="1" u="none" strike="noStrike">
-                          <a:solidFill>
-                            <a:srgbClr val="808080"/>
-                          </a:solidFill>
-                          <a:effectLst/>
-                          <a:latin typeface="Arial" panose="020B0604020202020204" pitchFamily="34" charset="0"/>
-                        </a:rPr>
-                        <a:t>% Oncology/Rev</a:t>
-                      </a:r>
-                    </a:p>
-                  </a:txBody>
-                  <a:tcPr marL="257175" marR="9525" marT="9525" marB="0" anchor="b">
-                    <a:lnL>
-                      <a:noFill/>
-                    </a:lnL>
-                    <a:lnR>
-                      <a:noFill/>
-                    </a:lnR>
-                    <a:lnT>
-                      <a:noFill/>
-                    </a:lnT>
-                    <a:lnB>
-                      <a:noFill/>
-                    </a:lnB>
-                    <a:noFill/>
-                  </a:tcPr>
-                </a:tc>
-                <a:tc>
-                  <a:txBody>
-                    <a:bodyPr/>
-                    <a:lstStyle/>
-                    <a:p>
-                      <a:pPr algn="r" fontAlgn="b">
-                        <a:buNone/>
-                      </a:pPr>
-                      <a:r>
-                        <a:rPr lang="en-FR" sz="1050" b="0" i="1" u="none" strike="noStrike">
-                          <a:solidFill>
-                            <a:srgbClr val="808080"/>
-                          </a:solidFill>
-                          <a:effectLst/>
-                          <a:latin typeface="Arial" panose="020B0604020202020204" pitchFamily="34" charset="0"/>
-                        </a:rPr>
-                        <a:t>69%</a:t>
-                      </a:r>
-                    </a:p>
-                  </a:txBody>
-                  <a:tcPr marL="9525" marR="9525" marT="9525" marB="0" anchor="b">
-                    <a:lnL>
-                      <a:noFill/>
-                    </a:lnL>
-                    <a:lnR>
-                      <a:noFill/>
-                    </a:lnR>
-                    <a:lnT>
-                      <a:noFill/>
-                    </a:lnT>
-                    <a:lnB>
-                      <a:noFill/>
-                    </a:lnB>
-                    <a:noFill/>
-                  </a:tcPr>
-                </a:tc>
-                <a:tc>
-                  <a:txBody>
-                    <a:bodyPr/>
-                    <a:lstStyle/>
-                    <a:p>
-                      <a:pPr algn="r" fontAlgn="b">
-                        <a:buNone/>
-                      </a:pPr>
-                      <a:r>
-                        <a:rPr lang="en-FR" sz="1050" b="0" i="1" u="none" strike="noStrike">
-                          <a:solidFill>
-                            <a:srgbClr val="808080"/>
-                          </a:solidFill>
-                          <a:effectLst/>
-                          <a:latin typeface="Arial" panose="020B0604020202020204" pitchFamily="34" charset="0"/>
-                        </a:rPr>
-                        <a:t>74%</a:t>
-                      </a:r>
-                    </a:p>
-                  </a:txBody>
-                  <a:tcPr marL="9525" marR="9525" marT="9525" marB="0" anchor="b">
-                    <a:lnL>
-                      <a:noFill/>
-                    </a:lnL>
-                    <a:lnR>
-                      <a:noFill/>
-                    </a:lnR>
-                    <a:lnT>
-                      <a:noFill/>
-                    </a:lnT>
-                    <a:lnB>
-                      <a:noFill/>
-                    </a:lnB>
-                    <a:noFill/>
-                  </a:tcPr>
-                </a:tc>
-                <a:tc>
-                  <a:txBody>
-                    <a:bodyPr/>
-                    <a:lstStyle/>
-                    <a:p>
-                      <a:pPr algn="ctr" fontAlgn="b">
-                        <a:buNone/>
-                      </a:pPr>
-                      <a:r>
-                        <a:rPr lang="en-FR" sz="1050" b="0" i="0" u="none" strike="noStrike">
-                          <a:effectLst/>
-                          <a:latin typeface="Arial" panose="020B0604020202020204" pitchFamily="34" charset="0"/>
-                        </a:rPr>
-                        <a:t> </a:t>
-                      </a:r>
-                    </a:p>
-                  </a:txBody>
-                  <a:tcPr marL="9525" marR="9525" marT="9525" marB="0" anchor="b">
-                    <a:lnL>
-                      <a:noFill/>
-                    </a:lnL>
-                    <a:lnR>
-                      <a:noFill/>
-                    </a:lnR>
-                    <a:lnT>
-                      <a:noFill/>
-                    </a:lnT>
-                    <a:lnB>
-                      <a:noFill/>
-                    </a:lnB>
-                    <a:solidFill>
-                      <a:srgbClr val="FFFFFF"/>
-                    </a:solidFill>
-                  </a:tcPr>
-                </a:tc>
-                <a:extLst>
-                  <a:ext uri="{0D108BD9-81ED-4DB2-BD59-A6C34878D82A}">
-                    <a16:rowId xmlns:a16="http://schemas.microsoft.com/office/drawing/2014/main" val="2971373604"/>
-                  </a:ext>
-                </a:extLst>
-              </a:tr>
-              <a:tr h="109474">
-                <a:tc>
-                  <a:txBody>
-                    <a:bodyPr/>
-                    <a:lstStyle/>
-                    <a:p>
-                      <a:pPr algn="l" fontAlgn="b">
-                        <a:buNone/>
-                      </a:pPr>
-                      <a:r>
-                        <a:rPr lang="en-FR" sz="1050" b="0" i="1" u="none" strike="noStrike">
-                          <a:effectLst/>
-                          <a:latin typeface="Arial" panose="020B0604020202020204" pitchFamily="34" charset="0"/>
-                        </a:rPr>
-                        <a:t>Neurosciences</a:t>
-                      </a:r>
-                    </a:p>
-                  </a:txBody>
-                  <a:tcPr marL="257175" marR="9525" marT="9525" marB="0" anchor="b">
-                    <a:lnL>
-                      <a:noFill/>
-                    </a:lnL>
-                    <a:lnR>
-                      <a:noFill/>
-                    </a:lnR>
-                    <a:lnT>
-                      <a:noFill/>
-                    </a:lnT>
-                    <a:lnB>
-                      <a:noFill/>
-                    </a:lnB>
-                    <a:noFill/>
-                  </a:tcPr>
-                </a:tc>
-                <a:tc>
-                  <a:txBody>
-                    <a:bodyPr/>
-                    <a:lstStyle/>
-                    <a:p>
-                      <a:pPr algn="l" fontAlgn="b">
-                        <a:buNone/>
-                      </a:pPr>
-                      <a:r>
-                        <a:rPr lang="en-FR" sz="1050" b="0" i="1" u="none" strike="noStrike">
-                          <a:effectLst/>
-                          <a:latin typeface="Arial" panose="020B0604020202020204" pitchFamily="34" charset="0"/>
-                        </a:rPr>
-                        <a:t> $               746 </a:t>
-                      </a:r>
-                    </a:p>
-                  </a:txBody>
-                  <a:tcPr marL="9525" marR="9525" marT="9525" marB="0" anchor="b">
-                    <a:lnL>
-                      <a:noFill/>
-                    </a:lnL>
-                    <a:lnR>
-                      <a:noFill/>
-                    </a:lnR>
-                    <a:lnT>
-                      <a:noFill/>
-                    </a:lnT>
-                    <a:lnB>
-                      <a:noFill/>
-                    </a:lnB>
-                    <a:noFill/>
-                  </a:tcPr>
-                </a:tc>
-                <a:tc>
-                  <a:txBody>
-                    <a:bodyPr/>
-                    <a:lstStyle/>
-                    <a:p>
-                      <a:pPr algn="l" fontAlgn="b">
-                        <a:buNone/>
-                      </a:pPr>
-                      <a:r>
-                        <a:rPr lang="en-FR" sz="1050" b="0" i="1" u="none" strike="noStrike">
-                          <a:effectLst/>
-                          <a:latin typeface="Arial" panose="020B0604020202020204" pitchFamily="34" charset="0"/>
-                        </a:rPr>
-                        <a:t> $               701 </a:t>
-                      </a:r>
-                    </a:p>
-                  </a:txBody>
-                  <a:tcPr marL="9525" marR="9525" marT="9525" marB="0" anchor="b">
-                    <a:lnL>
-                      <a:noFill/>
-                    </a:lnL>
-                    <a:lnR>
-                      <a:noFill/>
-                    </a:lnR>
-                    <a:lnT>
-                      <a:noFill/>
-                    </a:lnT>
-                    <a:lnB>
-                      <a:noFill/>
-                    </a:lnB>
-                    <a:noFill/>
-                  </a:tcPr>
-                </a:tc>
-                <a:tc>
-                  <a:txBody>
-                    <a:bodyPr/>
-                    <a:lstStyle/>
-                    <a:p>
-                      <a:pPr algn="ctr" fontAlgn="b">
-                        <a:buNone/>
-                      </a:pPr>
-                      <a:r>
-                        <a:rPr lang="en-FR" sz="1050" b="0" i="0" u="none" strike="noStrike">
-                          <a:effectLst/>
-                          <a:latin typeface="Arial" panose="020B0604020202020204" pitchFamily="34" charset="0"/>
-                        </a:rPr>
-                        <a:t>7%</a:t>
-                      </a:r>
-                    </a:p>
-                  </a:txBody>
-                  <a:tcPr marL="9525" marR="9525" marT="9525" marB="0" anchor="b">
-                    <a:lnL>
-                      <a:noFill/>
-                    </a:lnL>
-                    <a:lnR>
-                      <a:noFill/>
-                    </a:lnR>
-                    <a:lnT>
-                      <a:noFill/>
-                    </a:lnT>
-                    <a:lnB>
-                      <a:noFill/>
-                    </a:lnB>
-                    <a:solidFill>
-                      <a:srgbClr val="FFFFFF"/>
-                    </a:solidFill>
-                  </a:tcPr>
-                </a:tc>
-                <a:extLst>
-                  <a:ext uri="{0D108BD9-81ED-4DB2-BD59-A6C34878D82A}">
-                    <a16:rowId xmlns:a16="http://schemas.microsoft.com/office/drawing/2014/main" val="3078145632"/>
-                  </a:ext>
-                </a:extLst>
-              </a:tr>
-              <a:tr h="109474">
-                <a:tc>
-                  <a:txBody>
-                    <a:bodyPr/>
-                    <a:lstStyle/>
-                    <a:p>
-                      <a:pPr algn="l" fontAlgn="b">
-                        <a:buNone/>
-                      </a:pPr>
-                      <a:r>
-                        <a:rPr lang="en-FR" sz="1050" b="0" i="1" u="none" strike="noStrike">
-                          <a:solidFill>
-                            <a:srgbClr val="808080"/>
-                          </a:solidFill>
-                          <a:effectLst/>
-                          <a:latin typeface="Arial" panose="020B0604020202020204" pitchFamily="34" charset="0"/>
-                        </a:rPr>
-                        <a:t>% Neurosciences/Rev</a:t>
-                      </a:r>
-                    </a:p>
-                  </a:txBody>
-                  <a:tcPr marL="257175" marR="9525" marT="9525" marB="0" anchor="b">
-                    <a:lnL>
-                      <a:noFill/>
-                    </a:lnL>
-                    <a:lnR>
-                      <a:noFill/>
-                    </a:lnR>
-                    <a:lnT>
-                      <a:noFill/>
-                    </a:lnT>
-                    <a:lnB>
-                      <a:noFill/>
-                    </a:lnB>
-                    <a:noFill/>
-                  </a:tcPr>
-                </a:tc>
-                <a:tc>
-                  <a:txBody>
-                    <a:bodyPr/>
-                    <a:lstStyle/>
-                    <a:p>
-                      <a:pPr algn="r" fontAlgn="b">
-                        <a:buNone/>
-                      </a:pPr>
-                      <a:r>
-                        <a:rPr lang="en-FR" sz="1050" b="0" i="1" u="none" strike="noStrike">
-                          <a:solidFill>
-                            <a:srgbClr val="808080"/>
-                          </a:solidFill>
-                          <a:effectLst/>
-                          <a:latin typeface="Arial" panose="020B0604020202020204" pitchFamily="34" charset="0"/>
-                        </a:rPr>
-                        <a:t>20%</a:t>
-                      </a:r>
-                    </a:p>
-                  </a:txBody>
-                  <a:tcPr marL="9525" marR="9525" marT="9525" marB="0" anchor="b">
-                    <a:lnL>
-                      <a:noFill/>
-                    </a:lnL>
-                    <a:lnR>
-                      <a:noFill/>
-                    </a:lnR>
-                    <a:lnT>
-                      <a:noFill/>
-                    </a:lnT>
-                    <a:lnB>
-                      <a:noFill/>
-                    </a:lnB>
-                    <a:noFill/>
-                  </a:tcPr>
-                </a:tc>
-                <a:tc>
-                  <a:txBody>
-                    <a:bodyPr/>
-                    <a:lstStyle/>
-                    <a:p>
-                      <a:pPr algn="r" fontAlgn="b">
-                        <a:buNone/>
-                      </a:pPr>
-                      <a:r>
-                        <a:rPr lang="en-FR" sz="1050" b="0" i="1" u="none" strike="noStrike">
-                          <a:solidFill>
-                            <a:srgbClr val="808080"/>
-                          </a:solidFill>
-                          <a:effectLst/>
-                          <a:latin typeface="Arial" panose="020B0604020202020204" pitchFamily="34" charset="0"/>
-                        </a:rPr>
-                        <a:t>21%</a:t>
-                      </a:r>
-                    </a:p>
-                  </a:txBody>
-                  <a:tcPr marL="9525" marR="9525" marT="9525" marB="0" anchor="b">
-                    <a:lnL>
-                      <a:noFill/>
-                    </a:lnL>
-                    <a:lnR>
-                      <a:noFill/>
-                    </a:lnR>
-                    <a:lnT>
-                      <a:noFill/>
-                    </a:lnT>
-                    <a:lnB>
-                      <a:noFill/>
-                    </a:lnB>
-                    <a:noFill/>
-                  </a:tcPr>
-                </a:tc>
-                <a:tc>
-                  <a:txBody>
-                    <a:bodyPr/>
-                    <a:lstStyle/>
-                    <a:p>
-                      <a:pPr algn="ctr" fontAlgn="b">
-                        <a:buNone/>
-                      </a:pPr>
-                      <a:r>
-                        <a:rPr lang="en-FR" sz="1050" b="0" i="0" u="none" strike="noStrike">
-                          <a:effectLst/>
-                          <a:latin typeface="Arial" panose="020B0604020202020204" pitchFamily="34" charset="0"/>
-                        </a:rPr>
-                        <a:t> </a:t>
-                      </a:r>
-                    </a:p>
-                  </a:txBody>
-                  <a:tcPr marL="9525" marR="9525" marT="9525" marB="0" anchor="b">
-                    <a:lnL>
-                      <a:noFill/>
-                    </a:lnL>
-                    <a:lnR>
-                      <a:noFill/>
-                    </a:lnR>
-                    <a:lnT>
-                      <a:noFill/>
-                    </a:lnT>
-                    <a:lnB>
-                      <a:noFill/>
-                    </a:lnB>
-                    <a:solidFill>
-                      <a:srgbClr val="FFFFFF"/>
-                    </a:solidFill>
-                  </a:tcPr>
-                </a:tc>
-                <a:extLst>
-                  <a:ext uri="{0D108BD9-81ED-4DB2-BD59-A6C34878D82A}">
-                    <a16:rowId xmlns:a16="http://schemas.microsoft.com/office/drawing/2014/main" val="2314554571"/>
-                  </a:ext>
-                </a:extLst>
-              </a:tr>
-              <a:tr h="109474">
-                <a:tc>
-                  <a:txBody>
-                    <a:bodyPr/>
-                    <a:lstStyle/>
-                    <a:p>
-                      <a:pPr algn="l" fontAlgn="b">
-                        <a:buNone/>
-                      </a:pPr>
-                      <a:r>
-                        <a:rPr lang="en-FR" sz="1050" b="0" i="1" u="none" strike="noStrike">
-                          <a:effectLst/>
-                          <a:latin typeface="Arial" panose="020B0604020202020204" pitchFamily="34" charset="0"/>
-                        </a:rPr>
-                        <a:t>Rare diseases</a:t>
-                      </a:r>
-                    </a:p>
-                  </a:txBody>
-                  <a:tcPr marL="257175" marR="9525" marT="9525" marB="0" anchor="b">
-                    <a:lnL>
-                      <a:noFill/>
-                    </a:lnL>
-                    <a:lnR>
-                      <a:noFill/>
-                    </a:lnR>
-                    <a:lnT>
-                      <a:noFill/>
-                    </a:lnT>
-                    <a:lnB>
-                      <a:noFill/>
-                    </a:lnB>
-                    <a:noFill/>
-                  </a:tcPr>
-                </a:tc>
-                <a:tc>
-                  <a:txBody>
-                    <a:bodyPr/>
-                    <a:lstStyle/>
-                    <a:p>
-                      <a:pPr algn="l" fontAlgn="b">
-                        <a:buNone/>
-                      </a:pPr>
-                      <a:r>
-                        <a:rPr lang="en-FR" sz="1050" b="0" i="1" u="none" strike="noStrike">
-                          <a:effectLst/>
-                          <a:latin typeface="Arial" panose="020B0604020202020204" pitchFamily="34" charset="0"/>
-                        </a:rPr>
-                        <a:t> $               386 </a:t>
-                      </a:r>
-                    </a:p>
-                  </a:txBody>
-                  <a:tcPr marL="9525" marR="9525" marT="9525" marB="0" anchor="b">
-                    <a:lnL>
-                      <a:noFill/>
-                    </a:lnL>
-                    <a:lnR>
-                      <a:noFill/>
-                    </a:lnR>
-                    <a:lnT>
-                      <a:noFill/>
-                    </a:lnT>
-                    <a:lnB>
-                      <a:noFill/>
-                    </a:lnB>
-                    <a:noFill/>
-                  </a:tcPr>
-                </a:tc>
-                <a:tc>
-                  <a:txBody>
-                    <a:bodyPr/>
-                    <a:lstStyle/>
-                    <a:p>
-                      <a:pPr algn="l" fontAlgn="b">
-                        <a:buNone/>
-                      </a:pPr>
-                      <a:r>
-                        <a:rPr lang="en-FR" sz="1050" b="0" i="1" u="none" strike="noStrike">
-                          <a:effectLst/>
-                          <a:latin typeface="Arial" panose="020B0604020202020204" pitchFamily="34" charset="0"/>
-                        </a:rPr>
-                        <a:t> $               196 </a:t>
-                      </a:r>
-                    </a:p>
-                  </a:txBody>
-                  <a:tcPr marL="9525" marR="9525" marT="9525" marB="0" anchor="b">
-                    <a:lnL>
-                      <a:noFill/>
-                    </a:lnL>
-                    <a:lnR>
-                      <a:noFill/>
-                    </a:lnR>
-                    <a:lnT>
-                      <a:noFill/>
-                    </a:lnT>
-                    <a:lnB>
-                      <a:noFill/>
-                    </a:lnB>
-                    <a:noFill/>
-                  </a:tcPr>
-                </a:tc>
-                <a:tc>
-                  <a:txBody>
-                    <a:bodyPr/>
-                    <a:lstStyle/>
-                    <a:p>
-                      <a:pPr algn="ctr" fontAlgn="b">
-                        <a:buNone/>
-                      </a:pPr>
-                      <a:r>
-                        <a:rPr lang="en-FR" sz="1050" b="0" i="0" u="none" strike="noStrike">
-                          <a:effectLst/>
-                          <a:latin typeface="Arial" panose="020B0604020202020204" pitchFamily="34" charset="0"/>
-                        </a:rPr>
-                        <a:t>97%</a:t>
-                      </a:r>
-                    </a:p>
-                  </a:txBody>
-                  <a:tcPr marL="9525" marR="9525" marT="9525" marB="0" anchor="b">
-                    <a:lnL>
-                      <a:noFill/>
-                    </a:lnL>
-                    <a:lnR>
-                      <a:noFill/>
-                    </a:lnR>
-                    <a:lnT>
-                      <a:noFill/>
-                    </a:lnT>
-                    <a:lnB>
-                      <a:noFill/>
-                    </a:lnB>
-                    <a:solidFill>
-                      <a:srgbClr val="FFFFFF"/>
-                    </a:solidFill>
-                  </a:tcPr>
-                </a:tc>
-                <a:extLst>
-                  <a:ext uri="{0D108BD9-81ED-4DB2-BD59-A6C34878D82A}">
-                    <a16:rowId xmlns:a16="http://schemas.microsoft.com/office/drawing/2014/main" val="4153790158"/>
-                  </a:ext>
-                </a:extLst>
-              </a:tr>
-              <a:tr h="109474">
-                <a:tc>
-                  <a:txBody>
-                    <a:bodyPr/>
-                    <a:lstStyle/>
-                    <a:p>
-                      <a:pPr algn="l" fontAlgn="b">
-                        <a:buNone/>
-                      </a:pPr>
-                      <a:r>
-                        <a:rPr lang="en-FR" sz="1050" b="0" i="1" u="none" strike="noStrike">
-                          <a:solidFill>
-                            <a:srgbClr val="808080"/>
-                          </a:solidFill>
-                          <a:effectLst/>
-                          <a:latin typeface="Arial" panose="020B0604020202020204" pitchFamily="34" charset="0"/>
-                        </a:rPr>
-                        <a:t>% Rare diseases/Rev</a:t>
-                      </a:r>
-                    </a:p>
-                  </a:txBody>
-                  <a:tcPr marL="257175" marR="9525" marT="9525" marB="0" anchor="b">
-                    <a:lnL>
-                      <a:noFill/>
-                    </a:lnL>
-                    <a:lnR>
-                      <a:noFill/>
-                    </a:lnR>
-                    <a:lnT>
-                      <a:noFill/>
-                    </a:lnT>
-                    <a:lnB>
-                      <a:noFill/>
-                    </a:lnB>
-                    <a:noFill/>
-                  </a:tcPr>
-                </a:tc>
-                <a:tc>
-                  <a:txBody>
-                    <a:bodyPr/>
-                    <a:lstStyle/>
-                    <a:p>
-                      <a:pPr algn="r" fontAlgn="b">
-                        <a:buNone/>
-                      </a:pPr>
-                      <a:r>
-                        <a:rPr lang="en-FR" sz="1050" b="0" i="1" u="none" strike="noStrike">
-                          <a:solidFill>
-                            <a:srgbClr val="808080"/>
-                          </a:solidFill>
-                          <a:effectLst/>
-                          <a:latin typeface="Arial" panose="020B0604020202020204" pitchFamily="34" charset="0"/>
-                        </a:rPr>
-                        <a:t>11%</a:t>
-                      </a:r>
-                    </a:p>
-                  </a:txBody>
-                  <a:tcPr marL="9525" marR="9525" marT="9525" marB="0" anchor="b">
-                    <a:lnL>
-                      <a:noFill/>
-                    </a:lnL>
-                    <a:lnR>
-                      <a:noFill/>
-                    </a:lnR>
-                    <a:lnT>
-                      <a:noFill/>
-                    </a:lnT>
-                    <a:lnB>
-                      <a:noFill/>
-                    </a:lnB>
-                    <a:noFill/>
-                  </a:tcPr>
-                </a:tc>
-                <a:tc>
-                  <a:txBody>
-                    <a:bodyPr/>
-                    <a:lstStyle/>
-                    <a:p>
-                      <a:pPr algn="r" fontAlgn="b">
-                        <a:buNone/>
-                      </a:pPr>
-                      <a:r>
-                        <a:rPr lang="en-FR" sz="1050" b="0" i="1" u="none" strike="noStrike">
-                          <a:solidFill>
-                            <a:srgbClr val="808080"/>
-                          </a:solidFill>
-                          <a:effectLst/>
-                          <a:latin typeface="Arial" panose="020B0604020202020204" pitchFamily="34" charset="0"/>
-                        </a:rPr>
-                        <a:t>6%</a:t>
-                      </a:r>
-                    </a:p>
-                  </a:txBody>
-                  <a:tcPr marL="9525" marR="9525" marT="9525" marB="0" anchor="b">
-                    <a:lnL>
-                      <a:noFill/>
-                    </a:lnL>
-                    <a:lnR>
-                      <a:noFill/>
-                    </a:lnR>
-                    <a:lnT>
-                      <a:noFill/>
-                    </a:lnT>
-                    <a:lnB>
-                      <a:noFill/>
-                    </a:lnB>
-                    <a:noFill/>
-                  </a:tcPr>
-                </a:tc>
-                <a:tc>
-                  <a:txBody>
-                    <a:bodyPr/>
-                    <a:lstStyle/>
-                    <a:p>
-                      <a:pPr algn="ctr" fontAlgn="b">
-                        <a:buNone/>
-                      </a:pPr>
-                      <a:r>
-                        <a:rPr lang="en-FR" sz="1050" b="0" i="0" u="none" strike="noStrike">
-                          <a:effectLst/>
-                          <a:latin typeface="Arial" panose="020B0604020202020204" pitchFamily="34" charset="0"/>
-                        </a:rPr>
-                        <a:t> </a:t>
-                      </a:r>
-                    </a:p>
-                  </a:txBody>
-                  <a:tcPr marL="9525" marR="9525" marT="9525" marB="0" anchor="b">
-                    <a:lnL>
-                      <a:noFill/>
-                    </a:lnL>
-                    <a:lnR>
-                      <a:noFill/>
-                    </a:lnR>
-                    <a:lnT>
-                      <a:noFill/>
-                    </a:lnT>
-                    <a:lnB>
-                      <a:noFill/>
-                    </a:lnB>
-                    <a:solidFill>
-                      <a:srgbClr val="FFFFFF"/>
-                    </a:solidFill>
-                  </a:tcPr>
-                </a:tc>
-                <a:extLst>
-                  <a:ext uri="{0D108BD9-81ED-4DB2-BD59-A6C34878D82A}">
-                    <a16:rowId xmlns:a16="http://schemas.microsoft.com/office/drawing/2014/main" val="3193971473"/>
-                  </a:ext>
-                </a:extLst>
-              </a:tr>
-              <a:tr h="109474">
-                <a:tc>
-                  <a:txBody>
-                    <a:bodyPr/>
-                    <a:lstStyle/>
-                    <a:p>
-                      <a:pPr algn="l" fontAlgn="b">
-                        <a:buNone/>
-                      </a:pPr>
-                      <a:r>
-                        <a:rPr lang="en-FR" sz="1050" b="0" i="0" u="none" strike="noStrike" dirty="0">
-                          <a:effectLst/>
-                          <a:latin typeface="Arial" panose="020B0604020202020204" pitchFamily="34" charset="0"/>
-                        </a:rPr>
-                        <a:t>Cost of sales</a:t>
-                      </a:r>
-                    </a:p>
-                  </a:txBody>
-                  <a:tcPr marL="257175" marR="9525" marT="9525" marB="0" anchor="b">
-                    <a:lnL>
-                      <a:noFill/>
-                    </a:lnL>
-                    <a:lnR>
-                      <a:noFill/>
-                    </a:lnR>
-                    <a:lnT>
-                      <a:noFill/>
-                    </a:lnT>
-                    <a:lnB>
-                      <a:noFill/>
-                    </a:lnB>
-                    <a:noFill/>
-                  </a:tcPr>
-                </a:tc>
-                <a:tc>
-                  <a:txBody>
-                    <a:bodyPr/>
-                    <a:lstStyle/>
-                    <a:p>
-                      <a:pPr algn="l" fontAlgn="b">
-                        <a:buNone/>
-                      </a:pPr>
-                      <a:r>
-                        <a:rPr lang="en-FR" sz="1050" b="0" i="0" u="none" strike="noStrike" dirty="0">
-                          <a:effectLst/>
-                          <a:latin typeface="Arial" panose="020B0604020202020204" pitchFamily="34" charset="0"/>
-                        </a:rPr>
-                        <a:t> $             ( 751)</a:t>
-                      </a:r>
-                    </a:p>
-                  </a:txBody>
-                  <a:tcPr marL="9525" marR="9525" marT="9525" marB="0" anchor="b">
-                    <a:lnL>
-                      <a:noFill/>
-                    </a:lnL>
-                    <a:lnR>
-                      <a:noFill/>
-                    </a:lnR>
-                    <a:lnT>
-                      <a:noFill/>
-                    </a:lnT>
-                    <a:lnB>
-                      <a:noFill/>
-                    </a:lnB>
-                    <a:noFill/>
-                  </a:tcPr>
-                </a:tc>
-                <a:tc>
-                  <a:txBody>
-                    <a:bodyPr/>
-                    <a:lstStyle/>
-                    <a:p>
-                      <a:pPr algn="l" fontAlgn="b">
-                        <a:buNone/>
-                      </a:pPr>
-                      <a:r>
-                        <a:rPr lang="en-FR" sz="1050" b="0" i="0" u="none" strike="noStrike">
-                          <a:effectLst/>
-                          <a:latin typeface="Arial" panose="020B0604020202020204" pitchFamily="34" charset="0"/>
-                        </a:rPr>
-                        <a:t> $             ( 704)</a:t>
-                      </a:r>
-                    </a:p>
-                  </a:txBody>
-                  <a:tcPr marL="9525" marR="9525" marT="9525" marB="0" anchor="b">
-                    <a:lnL>
-                      <a:noFill/>
-                    </a:lnL>
-                    <a:lnR>
-                      <a:noFill/>
-                    </a:lnR>
-                    <a:lnT>
-                      <a:noFill/>
-                    </a:lnT>
-                    <a:lnB>
-                      <a:noFill/>
-                    </a:lnB>
-                    <a:noFill/>
-                  </a:tcPr>
-                </a:tc>
-                <a:tc>
-                  <a:txBody>
-                    <a:bodyPr/>
-                    <a:lstStyle/>
-                    <a:p>
-                      <a:pPr algn="ctr" fontAlgn="b">
-                        <a:buNone/>
-                      </a:pPr>
-                      <a:r>
-                        <a:rPr lang="en-FR" sz="1050" b="0" i="0" u="none" strike="noStrike">
-                          <a:effectLst/>
-                          <a:latin typeface="Arial" panose="020B0604020202020204" pitchFamily="34" charset="0"/>
-                        </a:rPr>
-                        <a:t>7%</a:t>
-                      </a:r>
-                    </a:p>
-                  </a:txBody>
-                  <a:tcPr marL="9525" marR="9525" marT="9525" marB="0" anchor="b">
-                    <a:lnL>
-                      <a:noFill/>
-                    </a:lnL>
-                    <a:lnR>
-                      <a:noFill/>
-                    </a:lnR>
-                    <a:lnT>
-                      <a:noFill/>
-                    </a:lnT>
-                    <a:lnB>
-                      <a:noFill/>
-                    </a:lnB>
-                    <a:solidFill>
-                      <a:srgbClr val="FFFFFF"/>
-                    </a:solidFill>
-                  </a:tcPr>
-                </a:tc>
-                <a:extLst>
-                  <a:ext uri="{0D108BD9-81ED-4DB2-BD59-A6C34878D82A}">
-                    <a16:rowId xmlns:a16="http://schemas.microsoft.com/office/drawing/2014/main" val="440574439"/>
-                  </a:ext>
-                </a:extLst>
-              </a:tr>
-              <a:tr h="109474">
-                <a:tc>
-                  <a:txBody>
-                    <a:bodyPr/>
-                    <a:lstStyle/>
-                    <a:p>
-                      <a:pPr algn="l" fontAlgn="b">
-                        <a:buNone/>
-                      </a:pPr>
-                      <a:r>
-                        <a:rPr lang="en-FR" sz="1050" b="1" i="0" u="none" strike="noStrike">
-                          <a:effectLst/>
-                          <a:latin typeface="Arial" panose="020B0604020202020204" pitchFamily="34" charset="0"/>
-                        </a:rPr>
-                        <a:t>Gross Margin</a:t>
-                      </a:r>
-                    </a:p>
-                  </a:txBody>
-                  <a:tcPr marL="85725" marR="9525" marT="9525" marB="0" anchor="b">
-                    <a:lnL>
-                      <a:noFill/>
-                    </a:lnL>
-                    <a:lnR>
-                      <a:noFill/>
-                    </a:lnR>
-                    <a:lnT>
-                      <a:noFill/>
-                    </a:lnT>
-                    <a:lnB>
-                      <a:noFill/>
-                    </a:lnB>
-                    <a:solidFill>
-                      <a:srgbClr val="DAE9F8"/>
-                    </a:solidFill>
-                  </a:tcPr>
-                </a:tc>
-                <a:tc>
-                  <a:txBody>
-                    <a:bodyPr/>
-                    <a:lstStyle/>
-                    <a:p>
-                      <a:pPr algn="l" fontAlgn="b">
-                        <a:buNone/>
-                      </a:pPr>
-                      <a:r>
-                        <a:rPr lang="en-FR" sz="1050" b="1" i="0" u="none" strike="noStrike">
-                          <a:effectLst/>
-                          <a:latin typeface="Arial" panose="020B0604020202020204" pitchFamily="34" charset="0"/>
-                        </a:rPr>
-                        <a:t> $             3 178 </a:t>
-                      </a:r>
-                    </a:p>
-                  </a:txBody>
-                  <a:tcPr marL="9525" marR="9525" marT="9525" marB="0" anchor="b">
-                    <a:lnL>
-                      <a:noFill/>
-                    </a:lnL>
-                    <a:lnR>
-                      <a:noFill/>
-                    </a:lnR>
-                    <a:lnT>
-                      <a:noFill/>
-                    </a:lnT>
-                    <a:lnB>
-                      <a:noFill/>
-                    </a:lnB>
-                    <a:solidFill>
-                      <a:srgbClr val="DAE9F8"/>
-                    </a:solidFill>
-                  </a:tcPr>
-                </a:tc>
-                <a:tc>
-                  <a:txBody>
-                    <a:bodyPr/>
-                    <a:lstStyle/>
-                    <a:p>
-                      <a:pPr algn="l" fontAlgn="b">
-                        <a:buNone/>
-                      </a:pPr>
-                      <a:r>
-                        <a:rPr lang="en-FR" sz="1050" b="1" i="0" u="none" strike="noStrike">
-                          <a:effectLst/>
-                          <a:latin typeface="Arial" panose="020B0604020202020204" pitchFamily="34" charset="0"/>
-                        </a:rPr>
-                        <a:t> $             2 870 </a:t>
-                      </a:r>
-                    </a:p>
-                  </a:txBody>
-                  <a:tcPr marL="9525" marR="9525" marT="9525" marB="0" anchor="b">
-                    <a:lnL>
-                      <a:noFill/>
-                    </a:lnL>
-                    <a:lnR>
-                      <a:noFill/>
-                    </a:lnR>
-                    <a:lnT>
-                      <a:noFill/>
-                    </a:lnT>
-                    <a:lnB>
-                      <a:noFill/>
-                    </a:lnB>
-                    <a:solidFill>
-                      <a:srgbClr val="DAE9F8"/>
-                    </a:solidFill>
-                  </a:tcPr>
-                </a:tc>
-                <a:tc>
-                  <a:txBody>
-                    <a:bodyPr/>
-                    <a:lstStyle/>
-                    <a:p>
-                      <a:pPr algn="ctr" fontAlgn="b">
-                        <a:buNone/>
-                      </a:pPr>
-                      <a:r>
-                        <a:rPr lang="en-FR" sz="1050" b="1" i="0" u="none" strike="noStrike">
-                          <a:effectLst/>
-                          <a:latin typeface="Arial" panose="020B0604020202020204" pitchFamily="34" charset="0"/>
-                        </a:rPr>
-                        <a:t>11%</a:t>
-                      </a:r>
-                    </a:p>
-                  </a:txBody>
-                  <a:tcPr marL="9525" marR="9525" marT="9525" marB="0" anchor="b">
-                    <a:lnL>
-                      <a:noFill/>
-                    </a:lnL>
-                    <a:lnR>
-                      <a:noFill/>
-                    </a:lnR>
-                    <a:lnT>
-                      <a:noFill/>
-                    </a:lnT>
-                    <a:lnB>
-                      <a:noFill/>
-                    </a:lnB>
-                    <a:solidFill>
-                      <a:srgbClr val="DAE9F8"/>
-                    </a:solidFill>
-                  </a:tcPr>
-                </a:tc>
-                <a:extLst>
-                  <a:ext uri="{0D108BD9-81ED-4DB2-BD59-A6C34878D82A}">
-                    <a16:rowId xmlns:a16="http://schemas.microsoft.com/office/drawing/2014/main" val="2585470252"/>
-                  </a:ext>
-                </a:extLst>
-              </a:tr>
-              <a:tr h="109474">
-                <a:tc>
-                  <a:txBody>
-                    <a:bodyPr/>
-                    <a:lstStyle/>
-                    <a:p>
-                      <a:pPr algn="l" fontAlgn="b">
-                        <a:buNone/>
-                      </a:pPr>
-                      <a:r>
-                        <a:rPr lang="en-FR" sz="1050" b="0" i="0" u="none" strike="noStrike">
-                          <a:effectLst/>
-                          <a:latin typeface="Arial" panose="020B0604020202020204" pitchFamily="34" charset="0"/>
-                        </a:rPr>
-                        <a:t>Selling general and administrative expenses</a:t>
-                      </a:r>
-                    </a:p>
-                  </a:txBody>
-                  <a:tcPr marL="85725" marR="9525" marT="9525" marB="0" anchor="b">
-                    <a:lnL>
-                      <a:noFill/>
-                    </a:lnL>
-                    <a:lnR>
-                      <a:noFill/>
-                    </a:lnR>
-                    <a:lnT>
-                      <a:noFill/>
-                    </a:lnT>
-                    <a:lnB>
-                      <a:noFill/>
-                    </a:lnB>
-                    <a:noFill/>
-                  </a:tcPr>
-                </a:tc>
-                <a:tc>
-                  <a:txBody>
-                    <a:bodyPr/>
-                    <a:lstStyle/>
-                    <a:p>
-                      <a:pPr algn="l" fontAlgn="b">
-                        <a:buNone/>
-                      </a:pPr>
-                      <a:r>
-                        <a:rPr lang="en-FR" sz="1050" b="0" i="0" u="none" strike="noStrike">
-                          <a:effectLst/>
-                          <a:latin typeface="Arial" panose="020B0604020202020204" pitchFamily="34" charset="0"/>
-                        </a:rPr>
-                        <a:t> $           (1 163)</a:t>
-                      </a:r>
-                    </a:p>
-                  </a:txBody>
-                  <a:tcPr marL="9525" marR="9525" marT="9525" marB="0" anchor="b">
-                    <a:lnL>
-                      <a:noFill/>
-                    </a:lnL>
-                    <a:lnR>
-                      <a:noFill/>
-                    </a:lnR>
-                    <a:lnT>
-                      <a:noFill/>
-                    </a:lnT>
-                    <a:lnB>
-                      <a:noFill/>
-                    </a:lnB>
-                    <a:noFill/>
-                  </a:tcPr>
-                </a:tc>
-                <a:tc>
-                  <a:txBody>
-                    <a:bodyPr/>
-                    <a:lstStyle/>
-                    <a:p>
-                      <a:pPr algn="l" fontAlgn="b">
-                        <a:buNone/>
-                      </a:pPr>
-                      <a:r>
-                        <a:rPr lang="en-FR" sz="1050" b="0" i="0" u="none" strike="noStrike">
-                          <a:effectLst/>
-                          <a:latin typeface="Arial" panose="020B0604020202020204" pitchFamily="34" charset="0"/>
-                        </a:rPr>
-                        <a:t> $           (1 088)</a:t>
-                      </a:r>
-                    </a:p>
-                  </a:txBody>
-                  <a:tcPr marL="9525" marR="9525" marT="9525" marB="0" anchor="b">
-                    <a:lnL>
-                      <a:noFill/>
-                    </a:lnL>
-                    <a:lnR>
-                      <a:noFill/>
-                    </a:lnR>
-                    <a:lnT>
-                      <a:noFill/>
-                    </a:lnT>
-                    <a:lnB>
-                      <a:noFill/>
-                    </a:lnB>
-                    <a:noFill/>
-                  </a:tcPr>
-                </a:tc>
-                <a:tc>
-                  <a:txBody>
-                    <a:bodyPr/>
-                    <a:lstStyle/>
-                    <a:p>
-                      <a:pPr algn="ctr" fontAlgn="b">
-                        <a:buNone/>
-                      </a:pPr>
-                      <a:r>
-                        <a:rPr lang="en-FR" sz="1050" b="0" i="0" u="none" strike="noStrike">
-                          <a:effectLst/>
-                          <a:latin typeface="Arial" panose="020B0604020202020204" pitchFamily="34" charset="0"/>
-                        </a:rPr>
-                        <a:t>7%</a:t>
-                      </a:r>
-                    </a:p>
-                  </a:txBody>
-                  <a:tcPr marL="9525" marR="9525" marT="9525" marB="0" anchor="b">
-                    <a:lnL>
-                      <a:noFill/>
-                    </a:lnL>
-                    <a:lnR>
-                      <a:noFill/>
-                    </a:lnR>
-                    <a:lnT>
-                      <a:noFill/>
-                    </a:lnT>
-                    <a:lnB>
-                      <a:noFill/>
-                    </a:lnB>
-                    <a:solidFill>
-                      <a:srgbClr val="FFFFFF"/>
-                    </a:solidFill>
-                  </a:tcPr>
-                </a:tc>
-                <a:extLst>
-                  <a:ext uri="{0D108BD9-81ED-4DB2-BD59-A6C34878D82A}">
-                    <a16:rowId xmlns:a16="http://schemas.microsoft.com/office/drawing/2014/main" val="1447314584"/>
-                  </a:ext>
-                </a:extLst>
-              </a:tr>
-              <a:tr h="109474">
-                <a:tc>
-                  <a:txBody>
-                    <a:bodyPr/>
-                    <a:lstStyle/>
-                    <a:p>
-                      <a:pPr algn="l" fontAlgn="b">
-                        <a:buNone/>
-                      </a:pPr>
-                      <a:r>
-                        <a:rPr lang="en-FR" sz="1050" b="0" i="1" u="none" strike="noStrike">
-                          <a:solidFill>
-                            <a:srgbClr val="808080"/>
-                          </a:solidFill>
-                          <a:effectLst/>
-                          <a:latin typeface="Arial" panose="020B0604020202020204" pitchFamily="34" charset="0"/>
-                        </a:rPr>
-                        <a:t>% SG&amp;A/Rev</a:t>
-                      </a:r>
-                    </a:p>
-                  </a:txBody>
-                  <a:tcPr marL="257175" marR="9525" marT="9525" marB="0" anchor="b">
-                    <a:lnL>
-                      <a:noFill/>
-                    </a:lnL>
-                    <a:lnR>
-                      <a:noFill/>
-                    </a:lnR>
-                    <a:lnT>
-                      <a:noFill/>
-                    </a:lnT>
-                    <a:lnB>
-                      <a:noFill/>
-                    </a:lnB>
-                    <a:noFill/>
-                  </a:tcPr>
-                </a:tc>
-                <a:tc>
-                  <a:txBody>
-                    <a:bodyPr/>
-                    <a:lstStyle/>
-                    <a:p>
-                      <a:pPr algn="r" fontAlgn="b">
-                        <a:buNone/>
-                      </a:pPr>
-                      <a:r>
-                        <a:rPr lang="en-FR" sz="1050" b="0" i="1" u="none" strike="noStrike">
-                          <a:solidFill>
-                            <a:srgbClr val="808080"/>
-                          </a:solidFill>
-                          <a:effectLst/>
-                          <a:latin typeface="Arial" panose="020B0604020202020204" pitchFamily="34" charset="0"/>
-                        </a:rPr>
-                        <a:t>32%</a:t>
-                      </a:r>
-                    </a:p>
-                  </a:txBody>
-                  <a:tcPr marL="9525" marR="9525" marT="9525" marB="0" anchor="b">
-                    <a:lnL>
-                      <a:noFill/>
-                    </a:lnL>
-                    <a:lnR>
-                      <a:noFill/>
-                    </a:lnR>
-                    <a:lnT>
-                      <a:noFill/>
-                    </a:lnT>
-                    <a:lnB>
-                      <a:noFill/>
-                    </a:lnB>
-                    <a:noFill/>
-                  </a:tcPr>
-                </a:tc>
-                <a:tc>
-                  <a:txBody>
-                    <a:bodyPr/>
-                    <a:lstStyle/>
-                    <a:p>
-                      <a:pPr algn="r" fontAlgn="b">
-                        <a:buNone/>
-                      </a:pPr>
-                      <a:r>
-                        <a:rPr lang="en-FR" sz="1050" b="0" i="1" u="none" strike="noStrike">
-                          <a:solidFill>
-                            <a:srgbClr val="808080"/>
-                          </a:solidFill>
-                          <a:effectLst/>
-                          <a:latin typeface="Arial" panose="020B0604020202020204" pitchFamily="34" charset="0"/>
-                        </a:rPr>
-                        <a:t>32%</a:t>
-                      </a:r>
-                    </a:p>
-                  </a:txBody>
-                  <a:tcPr marL="9525" marR="9525" marT="9525" marB="0" anchor="b">
-                    <a:lnL>
-                      <a:noFill/>
-                    </a:lnL>
-                    <a:lnR>
-                      <a:noFill/>
-                    </a:lnR>
-                    <a:lnT>
-                      <a:noFill/>
-                    </a:lnT>
-                    <a:lnB>
-                      <a:noFill/>
-                    </a:lnB>
-                    <a:noFill/>
-                  </a:tcPr>
-                </a:tc>
-                <a:tc>
-                  <a:txBody>
-                    <a:bodyPr/>
-                    <a:lstStyle/>
-                    <a:p>
-                      <a:pPr algn="ctr" fontAlgn="b">
-                        <a:buNone/>
-                      </a:pPr>
-                      <a:r>
-                        <a:rPr lang="en-FR" sz="1050" b="0" i="0" u="none" strike="noStrike">
-                          <a:effectLst/>
-                          <a:latin typeface="Arial" panose="020B0604020202020204" pitchFamily="34" charset="0"/>
-                        </a:rPr>
-                        <a:t> </a:t>
-                      </a:r>
-                    </a:p>
-                  </a:txBody>
-                  <a:tcPr marL="9525" marR="9525" marT="9525" marB="0" anchor="b">
-                    <a:lnL>
-                      <a:noFill/>
-                    </a:lnL>
-                    <a:lnR>
-                      <a:noFill/>
-                    </a:lnR>
-                    <a:lnT>
-                      <a:noFill/>
-                    </a:lnT>
-                    <a:lnB>
-                      <a:noFill/>
-                    </a:lnB>
-                    <a:solidFill>
-                      <a:srgbClr val="FFFFFF"/>
-                    </a:solidFill>
-                  </a:tcPr>
-                </a:tc>
-                <a:extLst>
-                  <a:ext uri="{0D108BD9-81ED-4DB2-BD59-A6C34878D82A}">
-                    <a16:rowId xmlns:a16="http://schemas.microsoft.com/office/drawing/2014/main" val="1441368655"/>
-                  </a:ext>
-                </a:extLst>
-              </a:tr>
-              <a:tr h="109474">
-                <a:tc>
-                  <a:txBody>
-                    <a:bodyPr/>
-                    <a:lstStyle/>
-                    <a:p>
-                      <a:pPr algn="l" fontAlgn="b">
-                        <a:buNone/>
-                      </a:pPr>
-                      <a:r>
-                        <a:rPr lang="en-FR" sz="1050" b="0" i="0" u="none" strike="noStrike" dirty="0">
-                          <a:effectLst/>
-                          <a:latin typeface="Arial" panose="020B0604020202020204" pitchFamily="34" charset="0"/>
-                        </a:rPr>
-                        <a:t>Research and development expenses</a:t>
-                      </a:r>
-                    </a:p>
-                  </a:txBody>
-                  <a:tcPr marL="85725" marR="9525" marT="9525" marB="0" anchor="b">
-                    <a:lnL>
-                      <a:noFill/>
-                    </a:lnL>
-                    <a:lnR>
-                      <a:noFill/>
-                    </a:lnR>
-                    <a:lnT>
-                      <a:noFill/>
-                    </a:lnT>
-                    <a:lnB>
-                      <a:noFill/>
-                    </a:lnB>
-                    <a:noFill/>
-                  </a:tcPr>
-                </a:tc>
-                <a:tc>
-                  <a:txBody>
-                    <a:bodyPr/>
-                    <a:lstStyle/>
-                    <a:p>
-                      <a:pPr algn="l" fontAlgn="b">
-                        <a:buNone/>
-                      </a:pPr>
-                      <a:r>
-                        <a:rPr lang="en-FR" sz="1050" b="0" i="0" u="none" strike="noStrike">
-                          <a:effectLst/>
-                          <a:latin typeface="Arial" panose="020B0604020202020204" pitchFamily="34" charset="0"/>
-                        </a:rPr>
-                        <a:t> $             ( 754)</a:t>
-                      </a:r>
-                    </a:p>
-                  </a:txBody>
-                  <a:tcPr marL="9525" marR="9525" marT="9525" marB="0" anchor="b">
-                    <a:lnL>
-                      <a:noFill/>
-                    </a:lnL>
-                    <a:lnR>
-                      <a:noFill/>
-                    </a:lnR>
-                    <a:lnT>
-                      <a:noFill/>
-                    </a:lnT>
-                    <a:lnB>
-                      <a:noFill/>
-                    </a:lnB>
-                    <a:noFill/>
-                  </a:tcPr>
-                </a:tc>
-                <a:tc>
-                  <a:txBody>
-                    <a:bodyPr/>
-                    <a:lstStyle/>
-                    <a:p>
-                      <a:pPr algn="l" fontAlgn="b">
-                        <a:buNone/>
-                      </a:pPr>
-                      <a:r>
-                        <a:rPr lang="en-FR" sz="1050" b="0" i="0" u="none" strike="noStrike">
-                          <a:effectLst/>
-                          <a:latin typeface="Arial" panose="020B0604020202020204" pitchFamily="34" charset="0"/>
-                        </a:rPr>
-                        <a:t> $             ( 687)</a:t>
-                      </a:r>
-                    </a:p>
-                  </a:txBody>
-                  <a:tcPr marL="9525" marR="9525" marT="9525" marB="0" anchor="b">
-                    <a:lnL>
-                      <a:noFill/>
-                    </a:lnL>
-                    <a:lnR>
-                      <a:noFill/>
-                    </a:lnR>
-                    <a:lnT>
-                      <a:noFill/>
-                    </a:lnT>
-                    <a:lnB>
-                      <a:noFill/>
-                    </a:lnB>
-                    <a:noFill/>
-                  </a:tcPr>
-                </a:tc>
-                <a:tc>
-                  <a:txBody>
-                    <a:bodyPr/>
-                    <a:lstStyle/>
-                    <a:p>
-                      <a:pPr algn="ctr" fontAlgn="b">
-                        <a:buNone/>
-                      </a:pPr>
-                      <a:r>
-                        <a:rPr lang="en-FR" sz="1050" b="0" i="0" u="none" strike="noStrike">
-                          <a:effectLst/>
-                          <a:latin typeface="Arial" panose="020B0604020202020204" pitchFamily="34" charset="0"/>
-                        </a:rPr>
-                        <a:t>10%</a:t>
-                      </a:r>
-                    </a:p>
-                  </a:txBody>
-                  <a:tcPr marL="9525" marR="9525" marT="9525" marB="0" anchor="b">
-                    <a:lnL>
-                      <a:noFill/>
-                    </a:lnL>
-                    <a:lnR>
-                      <a:noFill/>
-                    </a:lnR>
-                    <a:lnT>
-                      <a:noFill/>
-                    </a:lnT>
-                    <a:lnB>
-                      <a:noFill/>
-                    </a:lnB>
-                    <a:solidFill>
-                      <a:srgbClr val="FFFFFF"/>
-                    </a:solidFill>
-                  </a:tcPr>
-                </a:tc>
-                <a:extLst>
-                  <a:ext uri="{0D108BD9-81ED-4DB2-BD59-A6C34878D82A}">
-                    <a16:rowId xmlns:a16="http://schemas.microsoft.com/office/drawing/2014/main" val="1843090504"/>
-                  </a:ext>
-                </a:extLst>
-              </a:tr>
-              <a:tr h="109474">
-                <a:tc>
-                  <a:txBody>
-                    <a:bodyPr/>
-                    <a:lstStyle/>
-                    <a:p>
-                      <a:pPr algn="l" fontAlgn="b">
-                        <a:buNone/>
-                      </a:pPr>
-                      <a:r>
-                        <a:rPr lang="en-FR" sz="1050" b="0" i="1" u="none" strike="noStrike">
-                          <a:solidFill>
-                            <a:srgbClr val="808080"/>
-                          </a:solidFill>
-                          <a:effectLst/>
-                          <a:latin typeface="Arial" panose="020B0604020202020204" pitchFamily="34" charset="0"/>
-                        </a:rPr>
-                        <a:t>% R&amp;D/Rev</a:t>
-                      </a:r>
-                    </a:p>
-                  </a:txBody>
-                  <a:tcPr marL="257175" marR="9525" marT="9525" marB="0" anchor="b">
-                    <a:lnL>
-                      <a:noFill/>
-                    </a:lnL>
-                    <a:lnR>
-                      <a:noFill/>
-                    </a:lnR>
-                    <a:lnT>
-                      <a:noFill/>
-                    </a:lnT>
-                    <a:lnB>
-                      <a:noFill/>
-                    </a:lnB>
-                    <a:noFill/>
-                  </a:tcPr>
-                </a:tc>
-                <a:tc>
-                  <a:txBody>
-                    <a:bodyPr/>
-                    <a:lstStyle/>
-                    <a:p>
-                      <a:pPr algn="r" fontAlgn="b">
-                        <a:buNone/>
-                      </a:pPr>
-                      <a:r>
-                        <a:rPr lang="en-FR" sz="1050" b="0" i="1" u="none" strike="noStrike">
-                          <a:solidFill>
-                            <a:srgbClr val="808080"/>
-                          </a:solidFill>
-                          <a:effectLst/>
-                          <a:latin typeface="Arial" panose="020B0604020202020204" pitchFamily="34" charset="0"/>
-                        </a:rPr>
-                        <a:t>21%</a:t>
-                      </a:r>
-                    </a:p>
-                  </a:txBody>
-                  <a:tcPr marL="9525" marR="9525" marT="9525" marB="0" anchor="b">
-                    <a:lnL>
-                      <a:noFill/>
-                    </a:lnL>
-                    <a:lnR>
-                      <a:noFill/>
-                    </a:lnR>
-                    <a:lnT>
-                      <a:noFill/>
-                    </a:lnT>
-                    <a:lnB>
-                      <a:noFill/>
-                    </a:lnB>
-                    <a:noFill/>
-                  </a:tcPr>
-                </a:tc>
-                <a:tc>
-                  <a:txBody>
-                    <a:bodyPr/>
-                    <a:lstStyle/>
-                    <a:p>
-                      <a:pPr algn="r" fontAlgn="b">
-                        <a:buNone/>
-                      </a:pPr>
-                      <a:r>
-                        <a:rPr lang="en-FR" sz="1050" b="0" i="1" u="none" strike="noStrike">
-                          <a:solidFill>
-                            <a:srgbClr val="808080"/>
-                          </a:solidFill>
-                          <a:effectLst/>
-                          <a:latin typeface="Arial" panose="020B0604020202020204" pitchFamily="34" charset="0"/>
-                        </a:rPr>
-                        <a:t>20%</a:t>
-                      </a:r>
-                    </a:p>
-                  </a:txBody>
-                  <a:tcPr marL="9525" marR="9525" marT="9525" marB="0" anchor="b">
-                    <a:lnL>
-                      <a:noFill/>
-                    </a:lnL>
-                    <a:lnR>
-                      <a:noFill/>
-                    </a:lnR>
-                    <a:lnT>
-                      <a:noFill/>
-                    </a:lnT>
-                    <a:lnB>
-                      <a:noFill/>
-                    </a:lnB>
-                    <a:noFill/>
-                  </a:tcPr>
-                </a:tc>
-                <a:tc>
-                  <a:txBody>
-                    <a:bodyPr/>
-                    <a:lstStyle/>
-                    <a:p>
-                      <a:pPr algn="ctr" fontAlgn="b">
-                        <a:buNone/>
-                      </a:pPr>
-                      <a:r>
-                        <a:rPr lang="en-FR" sz="1050" b="0" i="0" u="none" strike="noStrike">
-                          <a:effectLst/>
-                          <a:latin typeface="Arial" panose="020B0604020202020204" pitchFamily="34" charset="0"/>
-                        </a:rPr>
-                        <a:t> </a:t>
-                      </a:r>
-                    </a:p>
-                  </a:txBody>
-                  <a:tcPr marL="9525" marR="9525" marT="9525" marB="0" anchor="b">
-                    <a:lnL>
-                      <a:noFill/>
-                    </a:lnL>
-                    <a:lnR>
-                      <a:noFill/>
-                    </a:lnR>
-                    <a:lnT>
-                      <a:noFill/>
-                    </a:lnT>
-                    <a:lnB>
-                      <a:noFill/>
-                    </a:lnB>
-                    <a:solidFill>
-                      <a:srgbClr val="FFFFFF"/>
-                    </a:solidFill>
-                  </a:tcPr>
-                </a:tc>
-                <a:extLst>
-                  <a:ext uri="{0D108BD9-81ED-4DB2-BD59-A6C34878D82A}">
-                    <a16:rowId xmlns:a16="http://schemas.microsoft.com/office/drawing/2014/main" val="2090777429"/>
-                  </a:ext>
-                </a:extLst>
-              </a:tr>
-              <a:tr h="109474">
-                <a:tc>
-                  <a:txBody>
-                    <a:bodyPr/>
-                    <a:lstStyle/>
-                    <a:p>
-                      <a:pPr algn="l" fontAlgn="b">
-                        <a:buNone/>
-                      </a:pPr>
-                      <a:r>
-                        <a:rPr lang="en-FR" sz="1050" b="0" i="0" u="none" strike="noStrike">
-                          <a:effectLst/>
-                          <a:latin typeface="Arial" panose="020B0604020202020204" pitchFamily="34" charset="0"/>
-                        </a:rPr>
-                        <a:t>Other</a:t>
-                      </a:r>
-                    </a:p>
-                  </a:txBody>
-                  <a:tcPr marL="85725" marR="9525" marT="9525" marB="0" anchor="b">
-                    <a:lnL>
-                      <a:noFill/>
-                    </a:lnL>
-                    <a:lnR>
-                      <a:noFill/>
-                    </a:lnR>
-                    <a:lnT>
-                      <a:noFill/>
-                    </a:lnT>
-                    <a:lnB>
-                      <a:noFill/>
-                    </a:lnB>
-                    <a:noFill/>
-                  </a:tcPr>
-                </a:tc>
-                <a:tc>
-                  <a:txBody>
-                    <a:bodyPr/>
-                    <a:lstStyle/>
-                    <a:p>
-                      <a:pPr algn="l" fontAlgn="b">
-                        <a:buNone/>
-                      </a:pPr>
-                      <a:r>
-                        <a:rPr lang="en-FR" sz="1050" b="0" i="0" u="none" strike="noStrike">
-                          <a:effectLst/>
-                          <a:latin typeface="Arial" panose="020B0604020202020204" pitchFamily="34" charset="0"/>
-                        </a:rPr>
-                        <a:t> $             ( 288)</a:t>
-                      </a:r>
-                    </a:p>
-                  </a:txBody>
-                  <a:tcPr marL="9525" marR="9525" marT="9525" marB="0" anchor="b">
-                    <a:lnL>
-                      <a:noFill/>
-                    </a:lnL>
-                    <a:lnR>
-                      <a:noFill/>
-                    </a:lnR>
-                    <a:lnT>
-                      <a:noFill/>
-                    </a:lnT>
-                    <a:lnB>
-                      <a:noFill/>
-                    </a:lnB>
-                    <a:noFill/>
-                  </a:tcPr>
-                </a:tc>
-                <a:tc>
-                  <a:txBody>
-                    <a:bodyPr/>
-                    <a:lstStyle/>
-                    <a:p>
-                      <a:pPr algn="l" fontAlgn="b">
-                        <a:buNone/>
-                      </a:pPr>
-                      <a:r>
-                        <a:rPr lang="en-FR" sz="1050" b="0" i="0" u="none" strike="noStrike">
-                          <a:effectLst/>
-                          <a:latin typeface="Arial" panose="020B0604020202020204" pitchFamily="34" charset="0"/>
-                        </a:rPr>
-                        <a:t> $             ( 318)</a:t>
-                      </a:r>
-                    </a:p>
-                  </a:txBody>
-                  <a:tcPr marL="9525" marR="9525" marT="9525" marB="0" anchor="b">
-                    <a:lnL>
-                      <a:noFill/>
-                    </a:lnL>
-                    <a:lnR>
-                      <a:noFill/>
-                    </a:lnR>
-                    <a:lnT>
-                      <a:noFill/>
-                    </a:lnT>
-                    <a:lnB>
-                      <a:noFill/>
-                    </a:lnB>
-                    <a:noFill/>
-                  </a:tcPr>
-                </a:tc>
-                <a:tc>
-                  <a:txBody>
-                    <a:bodyPr/>
-                    <a:lstStyle/>
-                    <a:p>
-                      <a:pPr algn="ctr" fontAlgn="b">
-                        <a:buNone/>
-                      </a:pPr>
-                      <a:r>
-                        <a:rPr lang="en-FR" sz="1050" b="0" i="0" u="none" strike="noStrike">
-                          <a:effectLst/>
-                          <a:latin typeface="Arial" panose="020B0604020202020204" pitchFamily="34" charset="0"/>
-                        </a:rPr>
-                        <a:t>-10%</a:t>
-                      </a:r>
-                    </a:p>
-                  </a:txBody>
-                  <a:tcPr marL="9525" marR="9525" marT="9525" marB="0" anchor="b">
-                    <a:lnL>
-                      <a:noFill/>
-                    </a:lnL>
-                    <a:lnR>
-                      <a:noFill/>
-                    </a:lnR>
-                    <a:lnT>
-                      <a:noFill/>
-                    </a:lnT>
-                    <a:lnB>
-                      <a:noFill/>
-                    </a:lnB>
-                    <a:solidFill>
-                      <a:srgbClr val="FFFFFF"/>
-                    </a:solidFill>
-                  </a:tcPr>
-                </a:tc>
-                <a:extLst>
-                  <a:ext uri="{0D108BD9-81ED-4DB2-BD59-A6C34878D82A}">
-                    <a16:rowId xmlns:a16="http://schemas.microsoft.com/office/drawing/2014/main" val="3034809464"/>
-                  </a:ext>
-                </a:extLst>
-              </a:tr>
-              <a:tr h="109474">
-                <a:tc>
-                  <a:txBody>
-                    <a:bodyPr/>
-                    <a:lstStyle/>
-                    <a:p>
-                      <a:pPr algn="l" fontAlgn="b">
-                        <a:buNone/>
-                      </a:pPr>
-                      <a:r>
-                        <a:rPr lang="en-FR" sz="1050" b="0" i="0" u="none" strike="noStrike">
-                          <a:effectLst/>
-                          <a:latin typeface="Arial" panose="020B0604020202020204" pitchFamily="34" charset="0"/>
-                        </a:rPr>
-                        <a:t>Impairment losses</a:t>
-                      </a:r>
-                    </a:p>
-                  </a:txBody>
-                  <a:tcPr marL="85725" marR="9525" marT="9525" marB="0" anchor="b">
-                    <a:lnL>
-                      <a:noFill/>
-                    </a:lnL>
-                    <a:lnR>
-                      <a:noFill/>
-                    </a:lnR>
-                    <a:lnT>
-                      <a:noFill/>
-                    </a:lnT>
-                    <a:lnB>
-                      <a:noFill/>
-                    </a:lnB>
-                    <a:noFill/>
-                  </a:tcPr>
-                </a:tc>
-                <a:tc>
-                  <a:txBody>
-                    <a:bodyPr/>
-                    <a:lstStyle/>
-                    <a:p>
-                      <a:pPr algn="l" fontAlgn="b">
-                        <a:buNone/>
-                      </a:pPr>
-                      <a:r>
-                        <a:rPr lang="en-FR" sz="1050" b="0" i="0" u="none" strike="noStrike">
-                          <a:effectLst/>
-                          <a:latin typeface="Arial" panose="020B0604020202020204" pitchFamily="34" charset="0"/>
-                        </a:rPr>
-                        <a:t> $             ( 347)</a:t>
-                      </a:r>
-                    </a:p>
-                  </a:txBody>
-                  <a:tcPr marL="9525" marR="9525" marT="9525" marB="0" anchor="b">
-                    <a:lnL>
-                      <a:noFill/>
-                    </a:lnL>
-                    <a:lnR>
-                      <a:noFill/>
-                    </a:lnR>
-                    <a:lnT>
-                      <a:noFill/>
-                    </a:lnT>
-                    <a:lnB>
-                      <a:noFill/>
-                    </a:lnB>
-                    <a:noFill/>
-                  </a:tcPr>
-                </a:tc>
-                <a:tc>
-                  <a:txBody>
-                    <a:bodyPr/>
-                    <a:lstStyle/>
-                    <a:p>
-                      <a:pPr algn="l" fontAlgn="b">
-                        <a:buNone/>
-                      </a:pPr>
-                      <a:r>
-                        <a:rPr lang="en-FR" sz="1050" b="0" i="0" u="none" strike="noStrike">
-                          <a:effectLst/>
-                          <a:latin typeface="Arial" panose="020B0604020202020204" pitchFamily="34" charset="0"/>
-                        </a:rPr>
-                        <a:t> $             ( 281)</a:t>
-                      </a:r>
-                    </a:p>
-                  </a:txBody>
-                  <a:tcPr marL="9525" marR="9525" marT="9525" marB="0" anchor="b">
-                    <a:lnL>
-                      <a:noFill/>
-                    </a:lnL>
-                    <a:lnR>
-                      <a:noFill/>
-                    </a:lnR>
-                    <a:lnT>
-                      <a:noFill/>
-                    </a:lnT>
-                    <a:lnB>
-                      <a:noFill/>
-                    </a:lnB>
-                    <a:noFill/>
-                  </a:tcPr>
-                </a:tc>
-                <a:tc>
-                  <a:txBody>
-                    <a:bodyPr/>
-                    <a:lstStyle/>
-                    <a:p>
-                      <a:pPr algn="ctr" fontAlgn="b">
-                        <a:buNone/>
-                      </a:pPr>
-                      <a:r>
-                        <a:rPr lang="en-FR" sz="1050" b="0" i="0" u="none" strike="noStrike">
-                          <a:effectLst/>
-                          <a:latin typeface="Arial" panose="020B0604020202020204" pitchFamily="34" charset="0"/>
-                        </a:rPr>
-                        <a:t>24%</a:t>
-                      </a:r>
-                    </a:p>
-                  </a:txBody>
-                  <a:tcPr marL="9525" marR="9525" marT="9525" marB="0" anchor="b">
-                    <a:lnL>
-                      <a:noFill/>
-                    </a:lnL>
-                    <a:lnR>
-                      <a:noFill/>
-                    </a:lnR>
-                    <a:lnT>
-                      <a:noFill/>
-                    </a:lnT>
-                    <a:lnB>
-                      <a:noFill/>
-                    </a:lnB>
-                    <a:solidFill>
-                      <a:srgbClr val="FFFFFF"/>
-                    </a:solidFill>
-                  </a:tcPr>
-                </a:tc>
-                <a:extLst>
-                  <a:ext uri="{0D108BD9-81ED-4DB2-BD59-A6C34878D82A}">
-                    <a16:rowId xmlns:a16="http://schemas.microsoft.com/office/drawing/2014/main" val="70704503"/>
-                  </a:ext>
-                </a:extLst>
-              </a:tr>
-              <a:tr h="109474">
-                <a:tc>
-                  <a:txBody>
-                    <a:bodyPr/>
-                    <a:lstStyle/>
-                    <a:p>
-                      <a:pPr algn="l" fontAlgn="b">
-                        <a:buNone/>
-                      </a:pPr>
-                      <a:r>
-                        <a:rPr lang="en-FR" sz="1050" b="1" i="0" u="none" strike="noStrike">
-                          <a:effectLst/>
-                          <a:latin typeface="Arial" panose="020B0604020202020204" pitchFamily="34" charset="0"/>
-                        </a:rPr>
-                        <a:t>Operating Income</a:t>
-                      </a:r>
-                    </a:p>
-                  </a:txBody>
-                  <a:tcPr marL="85725" marR="9525" marT="9525" marB="0" anchor="b">
-                    <a:lnL>
-                      <a:noFill/>
-                    </a:lnL>
-                    <a:lnR>
-                      <a:noFill/>
-                    </a:lnR>
-                    <a:lnT>
-                      <a:noFill/>
-                    </a:lnT>
-                    <a:lnB>
-                      <a:noFill/>
-                    </a:lnB>
-                    <a:solidFill>
-                      <a:srgbClr val="DAE9F8"/>
-                    </a:solidFill>
-                  </a:tcPr>
-                </a:tc>
-                <a:tc>
-                  <a:txBody>
-                    <a:bodyPr/>
-                    <a:lstStyle/>
-                    <a:p>
-                      <a:pPr algn="l" fontAlgn="b">
-                        <a:buNone/>
-                      </a:pPr>
-                      <a:r>
-                        <a:rPr lang="en-FR" sz="1050" b="1" i="0" u="none" strike="noStrike">
-                          <a:effectLst/>
-                          <a:latin typeface="Arial" panose="020B0604020202020204" pitchFamily="34" charset="0"/>
-                        </a:rPr>
-                        <a:t> $                626 </a:t>
-                      </a:r>
-                    </a:p>
-                  </a:txBody>
-                  <a:tcPr marL="9525" marR="9525" marT="9525" marB="0" anchor="b">
-                    <a:lnL>
-                      <a:noFill/>
-                    </a:lnL>
-                    <a:lnR>
-                      <a:noFill/>
-                    </a:lnR>
-                    <a:lnT>
-                      <a:noFill/>
-                    </a:lnT>
-                    <a:lnB>
-                      <a:noFill/>
-                    </a:lnB>
-                    <a:solidFill>
-                      <a:srgbClr val="DAE9F8"/>
-                    </a:solidFill>
-                  </a:tcPr>
-                </a:tc>
-                <a:tc>
-                  <a:txBody>
-                    <a:bodyPr/>
-                    <a:lstStyle/>
-                    <a:p>
-                      <a:pPr algn="l" fontAlgn="b">
-                        <a:buNone/>
-                      </a:pPr>
-                      <a:r>
-                        <a:rPr lang="en-FR" sz="1050" b="1" i="0" u="none" strike="noStrike">
-                          <a:effectLst/>
-                          <a:latin typeface="Arial" panose="020B0604020202020204" pitchFamily="34" charset="0"/>
-                        </a:rPr>
-                        <a:t> $                497 </a:t>
-                      </a:r>
-                    </a:p>
-                  </a:txBody>
-                  <a:tcPr marL="9525" marR="9525" marT="9525" marB="0" anchor="b">
-                    <a:lnL>
-                      <a:noFill/>
-                    </a:lnL>
-                    <a:lnR>
-                      <a:noFill/>
-                    </a:lnR>
-                    <a:lnT>
-                      <a:noFill/>
-                    </a:lnT>
-                    <a:lnB>
-                      <a:noFill/>
-                    </a:lnB>
-                    <a:solidFill>
-                      <a:srgbClr val="DAE9F8"/>
-                    </a:solidFill>
-                  </a:tcPr>
-                </a:tc>
-                <a:tc>
-                  <a:txBody>
-                    <a:bodyPr/>
-                    <a:lstStyle/>
-                    <a:p>
-                      <a:pPr algn="ctr" fontAlgn="b">
-                        <a:buNone/>
-                      </a:pPr>
-                      <a:r>
-                        <a:rPr lang="en-FR" sz="1050" b="1" i="0" u="none" strike="noStrike">
-                          <a:effectLst/>
-                          <a:latin typeface="Arial" panose="020B0604020202020204" pitchFamily="34" charset="0"/>
-                        </a:rPr>
-                        <a:t>26%</a:t>
-                      </a:r>
-                    </a:p>
-                  </a:txBody>
-                  <a:tcPr marL="9525" marR="9525" marT="9525" marB="0" anchor="b">
-                    <a:lnL>
-                      <a:noFill/>
-                    </a:lnL>
-                    <a:lnR>
-                      <a:noFill/>
-                    </a:lnR>
-                    <a:lnT>
-                      <a:noFill/>
-                    </a:lnT>
-                    <a:lnB>
-                      <a:noFill/>
-                    </a:lnB>
-                    <a:solidFill>
-                      <a:srgbClr val="DAE9F8"/>
-                    </a:solidFill>
-                  </a:tcPr>
-                </a:tc>
-                <a:extLst>
-                  <a:ext uri="{0D108BD9-81ED-4DB2-BD59-A6C34878D82A}">
-                    <a16:rowId xmlns:a16="http://schemas.microsoft.com/office/drawing/2014/main" val="2468822685"/>
-                  </a:ext>
-                </a:extLst>
-              </a:tr>
-              <a:tr h="109474">
-                <a:tc>
-                  <a:txBody>
-                    <a:bodyPr/>
-                    <a:lstStyle/>
-                    <a:p>
-                      <a:pPr algn="l" fontAlgn="b">
-                        <a:buNone/>
-                      </a:pPr>
-                      <a:r>
-                        <a:rPr lang="en-FR" sz="1050" b="0" i="0" u="none" strike="noStrike">
-                          <a:effectLst/>
-                          <a:latin typeface="Arial" panose="020B0604020202020204" pitchFamily="34" charset="0"/>
-                        </a:rPr>
-                        <a:t>Total financial income and expenses</a:t>
-                      </a:r>
-                    </a:p>
-                  </a:txBody>
-                  <a:tcPr marL="85725" marR="9525" marT="9525" marB="0" anchor="b">
-                    <a:lnL>
-                      <a:noFill/>
-                    </a:lnL>
-                    <a:lnR>
-                      <a:noFill/>
-                    </a:lnR>
-                    <a:lnT>
-                      <a:noFill/>
-                    </a:lnT>
-                    <a:lnB>
-                      <a:noFill/>
-                    </a:lnB>
-                    <a:noFill/>
-                  </a:tcPr>
-                </a:tc>
-                <a:tc>
-                  <a:txBody>
-                    <a:bodyPr/>
-                    <a:lstStyle/>
-                    <a:p>
-                      <a:pPr algn="l" fontAlgn="b">
-                        <a:buNone/>
-                      </a:pPr>
-                      <a:r>
-                        <a:rPr lang="en-FR" sz="1050" b="0" i="0" u="none" strike="noStrike">
-                          <a:effectLst/>
-                          <a:latin typeface="Arial" panose="020B0604020202020204" pitchFamily="34" charset="0"/>
-                        </a:rPr>
-                        <a:t> $             ( 181)</a:t>
-                      </a:r>
-                    </a:p>
-                  </a:txBody>
-                  <a:tcPr marL="9525" marR="9525" marT="9525" marB="0" anchor="b">
-                    <a:lnL>
-                      <a:noFill/>
-                    </a:lnL>
-                    <a:lnR>
-                      <a:noFill/>
-                    </a:lnR>
-                    <a:lnT>
-                      <a:noFill/>
-                    </a:lnT>
-                    <a:lnB>
-                      <a:noFill/>
-                    </a:lnB>
-                    <a:noFill/>
-                  </a:tcPr>
-                </a:tc>
-                <a:tc>
-                  <a:txBody>
-                    <a:bodyPr/>
-                    <a:lstStyle/>
-                    <a:p>
-                      <a:pPr algn="l" fontAlgn="b">
-                        <a:buNone/>
-                      </a:pPr>
-                      <a:r>
-                        <a:rPr lang="en-FR" sz="1050" b="0" i="0" u="none" strike="noStrike">
-                          <a:effectLst/>
-                          <a:latin typeface="Arial" panose="020B0604020202020204" pitchFamily="34" charset="0"/>
-                        </a:rPr>
-                        <a:t> $             ( 149)</a:t>
-                      </a:r>
-                    </a:p>
-                  </a:txBody>
-                  <a:tcPr marL="9525" marR="9525" marT="9525" marB="0" anchor="b">
-                    <a:lnL>
-                      <a:noFill/>
-                    </a:lnL>
-                    <a:lnR>
-                      <a:noFill/>
-                    </a:lnR>
-                    <a:lnT>
-                      <a:noFill/>
-                    </a:lnT>
-                    <a:lnB>
-                      <a:noFill/>
-                    </a:lnB>
-                    <a:noFill/>
-                  </a:tcPr>
-                </a:tc>
-                <a:tc>
-                  <a:txBody>
-                    <a:bodyPr/>
-                    <a:lstStyle/>
-                    <a:p>
-                      <a:pPr algn="ctr" fontAlgn="b">
-                        <a:buNone/>
-                      </a:pPr>
-                      <a:r>
-                        <a:rPr lang="en-FR" sz="1050" b="0" i="0" u="none" strike="noStrike">
-                          <a:effectLst/>
-                          <a:latin typeface="Arial" panose="020B0604020202020204" pitchFamily="34" charset="0"/>
-                        </a:rPr>
-                        <a:t>21%</a:t>
-                      </a:r>
-                    </a:p>
-                  </a:txBody>
-                  <a:tcPr marL="9525" marR="9525" marT="9525" marB="0" anchor="b">
-                    <a:lnL>
-                      <a:noFill/>
-                    </a:lnL>
-                    <a:lnR>
-                      <a:noFill/>
-                    </a:lnR>
-                    <a:lnT>
-                      <a:noFill/>
-                    </a:lnT>
-                    <a:lnB>
-                      <a:noFill/>
-                    </a:lnB>
-                    <a:solidFill>
-                      <a:srgbClr val="FFFFFF"/>
-                    </a:solidFill>
-                  </a:tcPr>
-                </a:tc>
-                <a:extLst>
-                  <a:ext uri="{0D108BD9-81ED-4DB2-BD59-A6C34878D82A}">
-                    <a16:rowId xmlns:a16="http://schemas.microsoft.com/office/drawing/2014/main" val="1134804352"/>
-                  </a:ext>
-                </a:extLst>
-              </a:tr>
-              <a:tr h="109474">
-                <a:tc>
-                  <a:txBody>
-                    <a:bodyPr/>
-                    <a:lstStyle/>
-                    <a:p>
-                      <a:pPr algn="l" fontAlgn="b">
-                        <a:buNone/>
-                      </a:pPr>
-                      <a:r>
-                        <a:rPr lang="en-FR" sz="1050" b="1" i="0" u="none" strike="noStrike">
-                          <a:effectLst/>
-                          <a:latin typeface="Arial" panose="020B0604020202020204" pitchFamily="34" charset="0"/>
-                        </a:rPr>
-                        <a:t>Consolidated Net Profit</a:t>
-                      </a:r>
-                    </a:p>
-                  </a:txBody>
-                  <a:tcPr marL="85725" marR="9525" marT="9525" marB="0" anchor="b">
-                    <a:lnL>
-                      <a:noFill/>
-                    </a:lnL>
-                    <a:lnR>
-                      <a:noFill/>
-                    </a:lnR>
-                    <a:lnT>
-                      <a:noFill/>
-                    </a:lnT>
-                    <a:lnB>
-                      <a:noFill/>
-                    </a:lnB>
-                    <a:solidFill>
-                      <a:srgbClr val="DAE9F8"/>
-                    </a:solidFill>
-                  </a:tcPr>
-                </a:tc>
-                <a:tc>
-                  <a:txBody>
-                    <a:bodyPr/>
-                    <a:lstStyle/>
-                    <a:p>
-                      <a:pPr algn="l" fontAlgn="b">
-                        <a:buNone/>
-                      </a:pPr>
-                      <a:r>
-                        <a:rPr lang="en-FR" sz="1050" b="1" i="0" u="none" strike="noStrike">
-                          <a:effectLst/>
-                          <a:latin typeface="Arial" panose="020B0604020202020204" pitchFamily="34" charset="0"/>
-                        </a:rPr>
-                        <a:t> $                445 </a:t>
-                      </a:r>
-                    </a:p>
-                  </a:txBody>
-                  <a:tcPr marL="9525" marR="9525" marT="9525" marB="0" anchor="b">
-                    <a:lnL>
-                      <a:noFill/>
-                    </a:lnL>
-                    <a:lnR>
-                      <a:noFill/>
-                    </a:lnR>
-                    <a:lnT>
-                      <a:noFill/>
-                    </a:lnT>
-                    <a:lnB>
-                      <a:noFill/>
-                    </a:lnB>
-                    <a:solidFill>
-                      <a:srgbClr val="DAE9F8"/>
-                    </a:solidFill>
-                  </a:tcPr>
-                </a:tc>
-                <a:tc>
-                  <a:txBody>
-                    <a:bodyPr/>
-                    <a:lstStyle/>
-                    <a:p>
-                      <a:pPr algn="l" fontAlgn="b">
-                        <a:buNone/>
-                      </a:pPr>
-                      <a:r>
-                        <a:rPr lang="en-FR" sz="1050" b="1" i="0" u="none" strike="noStrike">
-                          <a:effectLst/>
-                          <a:latin typeface="Arial" panose="020B0604020202020204" pitchFamily="34" charset="0"/>
-                        </a:rPr>
-                        <a:t> $                347 </a:t>
-                      </a:r>
-                    </a:p>
-                  </a:txBody>
-                  <a:tcPr marL="9525" marR="9525" marT="9525" marB="0" anchor="b">
-                    <a:lnL>
-                      <a:noFill/>
-                    </a:lnL>
-                    <a:lnR>
-                      <a:noFill/>
-                    </a:lnR>
-                    <a:lnT>
-                      <a:noFill/>
-                    </a:lnT>
-                    <a:lnB>
-                      <a:noFill/>
-                    </a:lnB>
-                    <a:solidFill>
-                      <a:srgbClr val="DAE9F8"/>
-                    </a:solidFill>
-                  </a:tcPr>
-                </a:tc>
-                <a:tc>
-                  <a:txBody>
-                    <a:bodyPr/>
-                    <a:lstStyle/>
-                    <a:p>
-                      <a:pPr algn="ctr" fontAlgn="b">
-                        <a:buNone/>
-                      </a:pPr>
-                      <a:r>
-                        <a:rPr lang="en-FR" sz="1050" b="1" i="0" u="none" strike="noStrike" dirty="0">
-                          <a:effectLst/>
-                          <a:latin typeface="Arial" panose="020B0604020202020204" pitchFamily="34" charset="0"/>
-                        </a:rPr>
-                        <a:t>28%</a:t>
-                      </a:r>
-                    </a:p>
-                  </a:txBody>
-                  <a:tcPr marL="9525" marR="9525" marT="9525" marB="0" anchor="b">
-                    <a:lnL>
-                      <a:noFill/>
-                    </a:lnL>
-                    <a:lnR>
-                      <a:noFill/>
-                    </a:lnR>
-                    <a:lnT>
-                      <a:noFill/>
-                    </a:lnT>
-                    <a:lnB>
-                      <a:noFill/>
-                    </a:lnB>
-                    <a:solidFill>
-                      <a:srgbClr val="DAE9F8"/>
-                    </a:solidFill>
-                  </a:tcPr>
-                </a:tc>
-                <a:extLst>
-                  <a:ext uri="{0D108BD9-81ED-4DB2-BD59-A6C34878D82A}">
-                    <a16:rowId xmlns:a16="http://schemas.microsoft.com/office/drawing/2014/main" val="639691924"/>
-                  </a:ext>
-                </a:extLst>
-              </a:tr>
-            </a:tbl>
-          </a:graphicData>
-        </a:graphic>
-      </p:graphicFrame>
       <p:sp>
         <p:nvSpPr>
           <p:cNvPr id="24" name="Rectangle 23">
             <a:extLst>
               <a:ext uri="{FF2B5EF4-FFF2-40B4-BE49-F238E27FC236}">
-                <a16:creationId xmlns:a16="http://schemas.microsoft.com/office/drawing/2014/main" id="{759E410D-241E-46EC-CC8F-BC9119AEC800}"/>
+                <a16:creationId xmlns:a16="http://schemas.microsoft.com/office/drawing/2014/main" id="{73FB4F1D-D669-820F-AAD3-9EA521734204}"/>
               </a:ext>
             </a:extLst>
           </p:cNvPr>
@@ -6767,7 +3987,7 @@
         </p:nvSpPr>
         <p:spPr>
           <a:xfrm>
-            <a:off x="6261845" y="1456815"/>
+            <a:off x="7195832" y="1456815"/>
             <a:ext cx="2900922" cy="45719"/>
           </a:xfrm>
           <a:prstGeom prst="rect">
@@ -6810,7 +4030,7 @@
           <p:cNvPr id="25" name="TextBox 24">
             <a:extLst>
               <a:ext uri="{FF2B5EF4-FFF2-40B4-BE49-F238E27FC236}">
-                <a16:creationId xmlns:a16="http://schemas.microsoft.com/office/drawing/2014/main" id="{9F6AD165-8413-8562-8CBC-F6DF9DEB7EB6}"/>
+                <a16:creationId xmlns:a16="http://schemas.microsoft.com/office/drawing/2014/main" id="{DCC7CF5D-FC29-C10E-C021-266AF4185216}"/>
               </a:ext>
             </a:extLst>
           </p:cNvPr>
@@ -6819,7 +4039,7 @@
         </p:nvSpPr>
         <p:spPr>
           <a:xfrm>
-            <a:off x="6185999" y="1110342"/>
+            <a:off x="7119986" y="1110342"/>
             <a:ext cx="1265475" cy="369332"/>
           </a:xfrm>
           <a:prstGeom prst="rect">
@@ -6849,7 +4069,7 @@
           <p:cNvPr id="26" name="Rectangle 25">
             <a:extLst>
               <a:ext uri="{FF2B5EF4-FFF2-40B4-BE49-F238E27FC236}">
-                <a16:creationId xmlns:a16="http://schemas.microsoft.com/office/drawing/2014/main" id="{A0C09DE2-899D-8DC4-90B4-C5DDAC5D7BFC}"/>
+                <a16:creationId xmlns:a16="http://schemas.microsoft.com/office/drawing/2014/main" id="{0217541D-9BD0-84AD-9E65-B086AB81EBE4}"/>
               </a:ext>
             </a:extLst>
           </p:cNvPr>
@@ -6901,7 +4121,7 @@
           <p:cNvPr id="27" name="TextBox 26">
             <a:extLst>
               <a:ext uri="{FF2B5EF4-FFF2-40B4-BE49-F238E27FC236}">
-                <a16:creationId xmlns:a16="http://schemas.microsoft.com/office/drawing/2014/main" id="{429DD423-1ECE-A203-FA18-511DF4D5D84E}"/>
+                <a16:creationId xmlns:a16="http://schemas.microsoft.com/office/drawing/2014/main" id="{7EEDED1A-656E-6D6F-51B5-300E00593975}"/>
               </a:ext>
             </a:extLst>
           </p:cNvPr>
@@ -6940,7 +4160,7 @@
           <p:cNvPr id="32" name="Table 31">
             <a:extLst>
               <a:ext uri="{FF2B5EF4-FFF2-40B4-BE49-F238E27FC236}">
-                <a16:creationId xmlns:a16="http://schemas.microsoft.com/office/drawing/2014/main" id="{263C2BD3-25AA-1DA2-4148-3233276D2709}"/>
+                <a16:creationId xmlns:a16="http://schemas.microsoft.com/office/drawing/2014/main" id="{57B3506C-0F33-28FE-E301-8AD5E5D6DD61}"/>
               </a:ext>
             </a:extLst>
           </p:cNvPr>
@@ -6950,7 +4170,7 @@
           <p:nvPr>
             <p:extLst>
               <p:ext uri="{D42A27DB-BD31-4B8C-83A1-F6EECF244321}">
-                <p14:modId xmlns:p14="http://schemas.microsoft.com/office/powerpoint/2010/main" val="561119692"/>
+                <p14:modId xmlns:p14="http://schemas.microsoft.com/office/powerpoint/2010/main" val="1519234100"/>
               </p:ext>
             </p:extLst>
           </p:nvPr>
@@ -7578,7 +4798,7 @@
                           <a:latin typeface="Arial" panose="020B0604020202020204" pitchFamily="34" charset="0"/>
                           <a:cs typeface="Arial" panose="020B0604020202020204" pitchFamily="34" charset="0"/>
                         </a:rPr>
-                        <a:t>RCC + HCC + thyroid.</a:t>
+                        <a:t>RCC + HCC + thyroid</a:t>
                       </a:r>
                       <a:endParaRPr lang="en-FR" sz="1000" b="0" i="0" u="none" strike="noStrike" dirty="0">
                         <a:solidFill>
@@ -7963,7 +5183,7 @@
                           <a:latin typeface="Arial" panose="020B0604020202020204" pitchFamily="34" charset="0"/>
                           <a:cs typeface="Arial" panose="020B0604020202020204" pitchFamily="34" charset="0"/>
                         </a:rPr>
-                        <a:t>topoisomerase I inhibitor</a:t>
+                        <a:t>Topoisomerase I inhibitor</a:t>
                       </a:r>
                       <a:endParaRPr lang="en-FR" sz="1000" b="0" i="0" u="none" strike="noStrike" dirty="0">
                         <a:solidFill>
@@ -8768,7 +5988,7 @@
           <p:cNvPr id="33" name="TextBox 32">
             <a:extLst>
               <a:ext uri="{FF2B5EF4-FFF2-40B4-BE49-F238E27FC236}">
-                <a16:creationId xmlns:a16="http://schemas.microsoft.com/office/drawing/2014/main" id="{BA9D6793-9232-8911-0D97-59C86A77114B}"/>
+                <a16:creationId xmlns:a16="http://schemas.microsoft.com/office/drawing/2014/main" id="{9B511885-8AE0-FED9-A7E9-501D95EA1887}"/>
               </a:ext>
             </a:extLst>
           </p:cNvPr>
@@ -8798,10 +6018,73 @@
           </a:p>
         </p:txBody>
       </p:sp>
+      <p:graphicFrame>
+        <p:nvGraphicFramePr>
+          <p:cNvPr id="2" name="Object 1">
+            <a:extLst>
+              <a:ext uri="{FF2B5EF4-FFF2-40B4-BE49-F238E27FC236}">
+                <a16:creationId xmlns:a16="http://schemas.microsoft.com/office/drawing/2014/main" id="{7D2AE335-BDCB-0B19-F649-B0F7F9CBA281}"/>
+              </a:ext>
+            </a:extLst>
+          </p:cNvPr>
+          <p:cNvGraphicFramePr>
+            <a:graphicFrameLocks noChangeAspect="1"/>
+          </p:cNvGraphicFramePr>
+          <p:nvPr>
+            <p:extLst>
+              <p:ext uri="{D42A27DB-BD31-4B8C-83A1-F6EECF244321}">
+                <p14:modId xmlns:p14="http://schemas.microsoft.com/office/powerpoint/2010/main" val="499455282"/>
+              </p:ext>
+            </p:extLst>
+          </p:nvPr>
+        </p:nvGraphicFramePr>
+        <p:xfrm>
+          <a:off x="7195832" y="1605188"/>
+          <a:ext cx="4469218" cy="3407526"/>
+        </p:xfrm>
+        <a:graphic>
+          <a:graphicData uri="http://schemas.openxmlformats.org/presentationml/2006/ole">
+            <mc:AlternateContent xmlns:mc="http://schemas.openxmlformats.org/markup-compatibility/2006">
+              <mc:Choice xmlns:v="urn:schemas-microsoft-com:vml" Requires="v">
+                <p:oleObj name="Worksheet" r:id="rId2" imgW="5613400" imgH="4279900" progId="Excel.Sheet.12">
+                  <p:embed/>
+                </p:oleObj>
+              </mc:Choice>
+              <mc:Fallback>
+                <p:oleObj name="Worksheet" r:id="rId2" imgW="5613400" imgH="4279900" progId="Excel.Sheet.12">
+                  <p:embed/>
+                  <p:pic>
+                    <p:nvPicPr>
+                      <p:cNvPr id="0" name=""/>
+                      <p:cNvPicPr/>
+                      <p:nvPr/>
+                    </p:nvPicPr>
+                    <p:blipFill>
+                      <a:blip r:embed="rId3"/>
+                      <a:stretch>
+                        <a:fillRect/>
+                      </a:stretch>
+                    </p:blipFill>
+                    <p:spPr>
+                      <a:xfrm>
+                        <a:off x="7195832" y="1605188"/>
+                        <a:ext cx="4469218" cy="3407526"/>
+                      </a:xfrm>
+                      <a:prstGeom prst="rect">
+                        <a:avLst/>
+                      </a:prstGeom>
+                    </p:spPr>
+                  </p:pic>
+                </p:oleObj>
+              </mc:Fallback>
+            </mc:AlternateContent>
+          </a:graphicData>
+        </a:graphic>
+      </p:graphicFrame>
     </p:spTree>
     <p:extLst>
       <p:ext uri="{BB962C8B-B14F-4D97-AF65-F5344CB8AC3E}">
-        <p14:creationId xmlns:p14="http://schemas.microsoft.com/office/powerpoint/2010/main" val="2868389558"/>
+        <p14:creationId xmlns:p14="http://schemas.microsoft.com/office/powerpoint/2010/main" val="1239863713"/>
       </p:ext>
     </p:extLst>
   </p:cSld>
@@ -9052,79 +6335,27 @@
                   <a:srgbClr val="163B5A"/>
                 </a:solidFill>
               </a:rPr>
-              <a:t>XXXX</a:t>
-            </a:r>
-          </a:p>
-        </p:txBody>
-      </p:sp>
-      <p:sp>
-        <p:nvSpPr>
-          <p:cNvPr id="15" name="Rectangle 14">
-            <a:extLst>
-              <a:ext uri="{FF2B5EF4-FFF2-40B4-BE49-F238E27FC236}">
-                <a16:creationId xmlns:a16="http://schemas.microsoft.com/office/drawing/2014/main" id="{B37309D6-F235-4153-66C5-EABAD384377D}"/>
-              </a:ext>
-            </a:extLst>
-          </p:cNvPr>
-          <p:cNvSpPr/>
+              <a:t>Three markets behind 68% of revenue, all facing early competitive or patent pressure</a:t>
+            </a:r>
+          </a:p>
+        </p:txBody>
+      </p:sp>
+      <p:sp>
+        <p:nvSpPr>
+          <p:cNvPr id="20" name="TextBox 19">
+            <a:extLst>
+              <a:ext uri="{FF2B5EF4-FFF2-40B4-BE49-F238E27FC236}">
+                <a16:creationId xmlns:a16="http://schemas.microsoft.com/office/drawing/2014/main" id="{AC20A729-A476-3ADB-A2A7-82EFA36482DF}"/>
+              </a:ext>
+            </a:extLst>
+          </p:cNvPr>
+          <p:cNvSpPr txBox="1"/>
           <p:nvPr/>
         </p:nvSpPr>
         <p:spPr>
           <a:xfrm>
-            <a:off x="526950" y="2380916"/>
-            <a:ext cx="2900922" cy="45719"/>
-          </a:xfrm>
-          <a:prstGeom prst="rect">
-            <a:avLst/>
-          </a:prstGeom>
-          <a:solidFill>
-            <a:srgbClr val="163B5A"/>
-          </a:solidFill>
-          <a:ln>
-            <a:noFill/>
-          </a:ln>
-        </p:spPr>
-        <p:style>
-          <a:lnRef idx="2">
-            <a:schemeClr val="accent1">
-              <a:shade val="15000"/>
-            </a:schemeClr>
-          </a:lnRef>
-          <a:fillRef idx="1">
-            <a:schemeClr val="accent1"/>
-          </a:fillRef>
-          <a:effectRef idx="0">
-            <a:schemeClr val="accent1"/>
-          </a:effectRef>
-          <a:fontRef idx="minor">
-            <a:schemeClr val="lt1"/>
-          </a:fontRef>
-        </p:style>
-        <p:txBody>
-          <a:bodyPr rtlCol="0" anchor="ctr"/>
-          <a:lstStyle/>
-          <a:p>
-            <a:pPr algn="ctr"/>
-            <a:endParaRPr lang="en-AU"/>
-          </a:p>
-        </p:txBody>
-      </p:sp>
-      <p:sp>
-        <p:nvSpPr>
-          <p:cNvPr id="16" name="TextBox 15">
-            <a:extLst>
-              <a:ext uri="{FF2B5EF4-FFF2-40B4-BE49-F238E27FC236}">
-                <a16:creationId xmlns:a16="http://schemas.microsoft.com/office/drawing/2014/main" id="{D6943AD7-58A9-9ECC-E9B3-78E67C6D31AD}"/>
-              </a:ext>
-            </a:extLst>
-          </p:cNvPr>
-          <p:cNvSpPr txBox="1"/>
-          <p:nvPr/>
-        </p:nvSpPr>
-        <p:spPr>
-          <a:xfrm>
-            <a:off x="451104" y="2034443"/>
-            <a:ext cx="1183978" cy="369332"/>
+            <a:off x="451103" y="1154740"/>
+            <a:ext cx="11289791" cy="830997"/>
           </a:xfrm>
           <a:prstGeom prst="rect">
             <a:avLst/>
@@ -9132,90 +6363,91 @@
           <a:noFill/>
         </p:spPr>
         <p:txBody>
-          <a:bodyPr wrap="none" rtlCol="0">
+          <a:bodyPr wrap="square">
             <a:spAutoFit/>
           </a:bodyPr>
           <a:lstStyle/>
           <a:p>
-            <a:r>
-              <a:rPr lang="en-AU" b="1" dirty="0">
+            <a:pPr algn="ctr"/>
+            <a:r>
+              <a:rPr lang="en-GB" sz="1600" b="1" dirty="0">
                 <a:solidFill>
                   <a:srgbClr val="163B5A"/>
                 </a:solidFill>
               </a:rPr>
-              <a:t>Oncology</a:t>
-            </a:r>
-          </a:p>
-        </p:txBody>
-      </p:sp>
-      <p:sp>
-        <p:nvSpPr>
-          <p:cNvPr id="17" name="Rectangle 16">
-            <a:extLst>
-              <a:ext uri="{FF2B5EF4-FFF2-40B4-BE49-F238E27FC236}">
-                <a16:creationId xmlns:a16="http://schemas.microsoft.com/office/drawing/2014/main" id="{AE78747F-ED8F-6803-3399-5D848F893357}"/>
-              </a:ext>
-            </a:extLst>
-          </p:cNvPr>
-          <p:cNvSpPr/>
+              <a:t>Focus rationale</a:t>
+            </a:r>
+            <a:r>
+              <a:rPr lang="en-GB" sz="1600" dirty="0"/>
+              <a:t>: We </a:t>
+            </a:r>
+            <a:r>
+              <a:rPr lang="en-GB" sz="1600" dirty="0" err="1"/>
+              <a:t>analyze</a:t>
+            </a:r>
+            <a:r>
+              <a:rPr lang="en-GB" sz="1600" dirty="0"/>
+              <a:t> the 3 markets behind Ipsen's core assets: </a:t>
+            </a:r>
+            <a:r>
+              <a:rPr lang="en-GB" sz="1600" i="1" dirty="0" err="1"/>
+              <a:t>Somatuline</a:t>
+            </a:r>
+            <a:r>
+              <a:rPr lang="en-GB" sz="1600" dirty="0"/>
+              <a:t> (cash cow, mature, LOE-expired but galenic-defended), </a:t>
+            </a:r>
+            <a:r>
+              <a:rPr lang="en-GB" sz="1600" i="1" dirty="0"/>
+              <a:t>Dysport</a:t>
+            </a:r>
+            <a:r>
+              <a:rPr lang="en-GB" sz="1600" dirty="0"/>
+              <a:t> (cash cow + growth, next-gen relay), </a:t>
+            </a:r>
+            <a:r>
+              <a:rPr lang="en-GB" sz="1600" i="1" dirty="0" err="1"/>
+              <a:t>Cabometyx</a:t>
+            </a:r>
+            <a:r>
+              <a:rPr lang="en-GB" sz="1600" dirty="0"/>
+              <a:t> (cliff 2029, licensed). </a:t>
+            </a:r>
+          </a:p>
+          <a:p>
+            <a:pPr algn="ctr"/>
+            <a:r>
+              <a:rPr lang="en-GB" sz="1600" b="1" dirty="0">
+                <a:solidFill>
+                  <a:srgbClr val="163B5A"/>
+                </a:solidFill>
+              </a:rPr>
+              <a:t>Together: €2.48bn = 68% of FY25 revenue.</a:t>
+            </a:r>
+            <a:endParaRPr lang="en-AU" sz="1600" b="1" dirty="0">
+              <a:solidFill>
+                <a:srgbClr val="163B5A"/>
+              </a:solidFill>
+            </a:endParaRPr>
+          </a:p>
+        </p:txBody>
+      </p:sp>
+      <p:sp>
+        <p:nvSpPr>
+          <p:cNvPr id="26" name="TextBox 25">
+            <a:extLst>
+              <a:ext uri="{FF2B5EF4-FFF2-40B4-BE49-F238E27FC236}">
+                <a16:creationId xmlns:a16="http://schemas.microsoft.com/office/drawing/2014/main" id="{937D83E1-F675-99E3-6C1C-2A92008F0D95}"/>
+              </a:ext>
+            </a:extLst>
+          </p:cNvPr>
+          <p:cNvSpPr txBox="1"/>
           <p:nvPr/>
         </p:nvSpPr>
         <p:spPr>
           <a:xfrm>
-            <a:off x="4697616" y="2380916"/>
-            <a:ext cx="2900922" cy="45719"/>
-          </a:xfrm>
-          <a:prstGeom prst="rect">
-            <a:avLst/>
-          </a:prstGeom>
-          <a:solidFill>
-            <a:srgbClr val="163B5A"/>
-          </a:solidFill>
-          <a:ln>
-            <a:noFill/>
-          </a:ln>
-        </p:spPr>
-        <p:style>
-          <a:lnRef idx="2">
-            <a:schemeClr val="accent1">
-              <a:shade val="15000"/>
-            </a:schemeClr>
-          </a:lnRef>
-          <a:fillRef idx="1">
-            <a:schemeClr val="accent1"/>
-          </a:fillRef>
-          <a:effectRef idx="0">
-            <a:schemeClr val="accent1"/>
-          </a:effectRef>
-          <a:fontRef idx="minor">
-            <a:schemeClr val="lt1"/>
-          </a:fontRef>
-        </p:style>
-        <p:txBody>
-          <a:bodyPr rtlCol="0" anchor="ctr"/>
-          <a:lstStyle/>
-          <a:p>
-            <a:pPr algn="ctr"/>
-            <a:endParaRPr lang="en-AU"/>
-          </a:p>
-        </p:txBody>
-      </p:sp>
-      <p:sp>
-        <p:nvSpPr>
-          <p:cNvPr id="18" name="TextBox 17">
-            <a:extLst>
-              <a:ext uri="{FF2B5EF4-FFF2-40B4-BE49-F238E27FC236}">
-                <a16:creationId xmlns:a16="http://schemas.microsoft.com/office/drawing/2014/main" id="{3FC1522C-6AB8-3A42-FBC1-32A1AF43BE03}"/>
-              </a:ext>
-            </a:extLst>
-          </p:cNvPr>
-          <p:cNvSpPr txBox="1"/>
-          <p:nvPr/>
-        </p:nvSpPr>
-        <p:spPr>
-          <a:xfrm>
-            <a:off x="4621770" y="2034443"/>
-            <a:ext cx="1963807" cy="369332"/>
+            <a:off x="1731131" y="2170915"/>
+            <a:ext cx="3325092" cy="584775"/>
           </a:xfrm>
           <a:prstGeom prst="rect">
             <a:avLst/>
@@ -9223,44 +6455,58 @@
           <a:noFill/>
         </p:spPr>
         <p:txBody>
-          <a:bodyPr wrap="none" rtlCol="0">
+          <a:bodyPr wrap="square">
             <a:spAutoFit/>
           </a:bodyPr>
           <a:lstStyle/>
           <a:p>
-            <a:r>
-              <a:rPr lang="en-AU" b="1" dirty="0">
+            <a:pPr algn="ctr"/>
+            <a:r>
+              <a:rPr lang="en-AU" sz="1600" b="1" dirty="0">
                 <a:solidFill>
                   <a:srgbClr val="163B5A"/>
                 </a:solidFill>
               </a:rPr>
-              <a:t>PPAR </a:t>
-            </a:r>
-            <a:r>
-              <a:rPr lang="el-GR" b="1" dirty="0">
+              <a:t>Neuroendocrine </a:t>
+            </a:r>
+            <a:r>
+              <a:rPr lang="en-AU" sz="1600" b="1" dirty="0" err="1">
                 <a:solidFill>
                   <a:srgbClr val="163B5A"/>
                 </a:solidFill>
               </a:rPr>
-              <a:t>α/δ </a:t>
-            </a:r>
-            <a:r>
-              <a:rPr lang="en-AU" b="1" dirty="0">
+              <a:t>Tumors</a:t>
+            </a:r>
+            <a:r>
+              <a:rPr lang="en-AU" sz="1600" b="1" dirty="0">
                 <a:solidFill>
                   <a:srgbClr val="163B5A"/>
                 </a:solidFill>
               </a:rPr>
-              <a:t>agonist</a:t>
-            </a:r>
-          </a:p>
-        </p:txBody>
-      </p:sp>
-      <p:sp>
-        <p:nvSpPr>
-          <p:cNvPr id="20" name="TextBox 19">
-            <a:extLst>
-              <a:ext uri="{FF2B5EF4-FFF2-40B4-BE49-F238E27FC236}">
-                <a16:creationId xmlns:a16="http://schemas.microsoft.com/office/drawing/2014/main" id="{AC20A729-A476-3ADB-A2A7-82EFA36482DF}"/>
+              <a:t> (NET) / Somatostatin </a:t>
+            </a:r>
+            <a:r>
+              <a:rPr lang="en-AU" sz="1600" b="1" dirty="0" err="1">
+                <a:solidFill>
+                  <a:srgbClr val="163B5A"/>
+                </a:solidFill>
+              </a:rPr>
+              <a:t>Analogs</a:t>
+            </a:r>
+            <a:endParaRPr lang="en-AU" sz="1600" b="1" dirty="0">
+              <a:solidFill>
+                <a:srgbClr val="163B5A"/>
+              </a:solidFill>
+            </a:endParaRPr>
+          </a:p>
+        </p:txBody>
+      </p:sp>
+      <p:sp>
+        <p:nvSpPr>
+          <p:cNvPr id="27" name="TextBox 26">
+            <a:extLst>
+              <a:ext uri="{FF2B5EF4-FFF2-40B4-BE49-F238E27FC236}">
+                <a16:creationId xmlns:a16="http://schemas.microsoft.com/office/drawing/2014/main" id="{20C758FD-CFE7-C849-E62E-47FF10B568FD}"/>
               </a:ext>
             </a:extLst>
           </p:cNvPr>
@@ -9269,8 +6515,8 @@
         </p:nvSpPr>
         <p:spPr>
           <a:xfrm>
-            <a:off x="451103" y="1154740"/>
-            <a:ext cx="11289791" cy="646331"/>
+            <a:off x="5299018" y="2294025"/>
+            <a:ext cx="3325092" cy="338554"/>
           </a:xfrm>
           <a:prstGeom prst="rect">
             <a:avLst/>
@@ -9285,81 +6531,40 @@
           <a:p>
             <a:pPr algn="ctr"/>
             <a:r>
-              <a:rPr lang="en-FR" dirty="0"/>
-              <a:t>Focus rationale: Ipsen revenue concentrates in 3 franchises (Onco 69%, Neuro 20%, Rare disease 11%). We analyze the 2 markets defining its strategic trajectory: [marché 1] and [marché 2]</a:t>
-            </a:r>
-            <a:endParaRPr lang="en-AU" dirty="0"/>
-          </a:p>
-        </p:txBody>
-      </p:sp>
-      <p:sp>
-        <p:nvSpPr>
-          <p:cNvPr id="21" name="Rectangle 20">
-            <a:extLst>
-              <a:ext uri="{FF2B5EF4-FFF2-40B4-BE49-F238E27FC236}">
-                <a16:creationId xmlns:a16="http://schemas.microsoft.com/office/drawing/2014/main" id="{E6F32A66-789B-0E8C-C5F8-B8D0E3CDAA2F}"/>
-              </a:ext>
-            </a:extLst>
-          </p:cNvPr>
-          <p:cNvSpPr/>
+              <a:rPr lang="en-AU" sz="1600" b="1" dirty="0">
+                <a:solidFill>
+                  <a:srgbClr val="163B5A"/>
+                </a:solidFill>
+              </a:rPr>
+              <a:t>Botulinum Toxin </a:t>
+            </a:r>
+            <a:r>
+              <a:rPr lang="en-AU" sz="1600" b="1" i="1" dirty="0">
+                <a:solidFill>
+                  <a:srgbClr val="163B5A"/>
+                </a:solidFill>
+              </a:rPr>
+              <a:t>(Dysport)</a:t>
+            </a:r>
+          </a:p>
+        </p:txBody>
+      </p:sp>
+      <p:sp>
+        <p:nvSpPr>
+          <p:cNvPr id="28" name="TextBox 27">
+            <a:extLst>
+              <a:ext uri="{FF2B5EF4-FFF2-40B4-BE49-F238E27FC236}">
+                <a16:creationId xmlns:a16="http://schemas.microsoft.com/office/drawing/2014/main" id="{C13996C3-C82A-5D57-00D5-AE57DA805C67}"/>
+              </a:ext>
+            </a:extLst>
+          </p:cNvPr>
+          <p:cNvSpPr txBox="1"/>
           <p:nvPr/>
         </p:nvSpPr>
         <p:spPr>
           <a:xfrm>
-            <a:off x="8839972" y="2380915"/>
-            <a:ext cx="2900922" cy="45719"/>
-          </a:xfrm>
-          <a:prstGeom prst="rect">
-            <a:avLst/>
-          </a:prstGeom>
-          <a:solidFill>
-            <a:srgbClr val="163B5A"/>
-          </a:solidFill>
-          <a:ln>
-            <a:noFill/>
-          </a:ln>
-        </p:spPr>
-        <p:style>
-          <a:lnRef idx="2">
-            <a:schemeClr val="accent1">
-              <a:shade val="15000"/>
-            </a:schemeClr>
-          </a:lnRef>
-          <a:fillRef idx="1">
-            <a:schemeClr val="accent1"/>
-          </a:fillRef>
-          <a:effectRef idx="0">
-            <a:schemeClr val="accent1"/>
-          </a:effectRef>
-          <a:fontRef idx="minor">
-            <a:schemeClr val="lt1"/>
-          </a:fontRef>
-        </p:style>
-        <p:txBody>
-          <a:bodyPr rtlCol="0" anchor="ctr"/>
-          <a:lstStyle/>
-          <a:p>
-            <a:pPr algn="ctr"/>
-            <a:endParaRPr lang="en-AU"/>
-          </a:p>
-        </p:txBody>
-      </p:sp>
-      <p:sp>
-        <p:nvSpPr>
-          <p:cNvPr id="22" name="TextBox 21">
-            <a:extLst>
-              <a:ext uri="{FF2B5EF4-FFF2-40B4-BE49-F238E27FC236}">
-                <a16:creationId xmlns:a16="http://schemas.microsoft.com/office/drawing/2014/main" id="{0EA7F4BC-4214-0A86-8100-D05D7CEA4315}"/>
-              </a:ext>
-            </a:extLst>
-          </p:cNvPr>
-          <p:cNvSpPr txBox="1"/>
-          <p:nvPr/>
-        </p:nvSpPr>
-        <p:spPr>
-          <a:xfrm>
-            <a:off x="8764126" y="2034442"/>
-            <a:ext cx="1963807" cy="369332"/>
+            <a:off x="8795099" y="2294025"/>
+            <a:ext cx="3325092" cy="338554"/>
           </a:xfrm>
           <a:prstGeom prst="rect">
             <a:avLst/>
@@ -9367,34 +6572,1517 @@
           <a:noFill/>
         </p:spPr>
         <p:txBody>
+          <a:bodyPr wrap="square">
+            <a:spAutoFit/>
+          </a:bodyPr>
+          <a:lstStyle/>
+          <a:p>
+            <a:pPr algn="ctr"/>
+            <a:r>
+              <a:rPr lang="en-AU" sz="1600" b="1" dirty="0">
+                <a:solidFill>
+                  <a:srgbClr val="163B5A"/>
+                </a:solidFill>
+              </a:rPr>
+              <a:t>Renal Cell Carcinoma (RCC)</a:t>
+            </a:r>
+          </a:p>
+        </p:txBody>
+      </p:sp>
+      <p:sp>
+        <p:nvSpPr>
+          <p:cNvPr id="31" name="TextBox 30">
+            <a:extLst>
+              <a:ext uri="{FF2B5EF4-FFF2-40B4-BE49-F238E27FC236}">
+                <a16:creationId xmlns:a16="http://schemas.microsoft.com/office/drawing/2014/main" id="{96F667C3-6DD6-8530-E428-CA998567C10F}"/>
+              </a:ext>
+            </a:extLst>
+          </p:cNvPr>
+          <p:cNvSpPr txBox="1"/>
+          <p:nvPr/>
+        </p:nvSpPr>
+        <p:spPr>
+          <a:xfrm>
+            <a:off x="215168" y="2983685"/>
+            <a:ext cx="1301562" cy="307777"/>
+          </a:xfrm>
+          <a:prstGeom prst="rect">
+            <a:avLst/>
+          </a:prstGeom>
+          <a:noFill/>
+        </p:spPr>
+        <p:txBody>
+          <a:bodyPr wrap="square">
+            <a:spAutoFit/>
+          </a:bodyPr>
+          <a:lstStyle/>
+          <a:p>
+            <a:pPr algn="ctr"/>
+            <a:r>
+              <a:rPr lang="en-AU" sz="1400" i="1" dirty="0"/>
+              <a:t>Market size</a:t>
+            </a:r>
+          </a:p>
+        </p:txBody>
+      </p:sp>
+      <p:sp>
+        <p:nvSpPr>
+          <p:cNvPr id="32" name="TextBox 31">
+            <a:extLst>
+              <a:ext uri="{FF2B5EF4-FFF2-40B4-BE49-F238E27FC236}">
+                <a16:creationId xmlns:a16="http://schemas.microsoft.com/office/drawing/2014/main" id="{A1DB924C-D738-A426-7DC5-C469B8F4B106}"/>
+              </a:ext>
+            </a:extLst>
+          </p:cNvPr>
+          <p:cNvSpPr txBox="1"/>
+          <p:nvPr/>
+        </p:nvSpPr>
+        <p:spPr>
+          <a:xfrm>
+            <a:off x="215168" y="3634122"/>
+            <a:ext cx="1301562" cy="307777"/>
+          </a:xfrm>
+          <a:prstGeom prst="rect">
+            <a:avLst/>
+          </a:prstGeom>
+          <a:noFill/>
+        </p:spPr>
+        <p:txBody>
+          <a:bodyPr wrap="square">
+            <a:spAutoFit/>
+          </a:bodyPr>
+          <a:lstStyle/>
+          <a:p>
+            <a:pPr algn="ctr"/>
+            <a:r>
+              <a:rPr lang="en-AU" sz="1400" i="1" dirty="0"/>
+              <a:t>Epidemiology</a:t>
+            </a:r>
+          </a:p>
+        </p:txBody>
+      </p:sp>
+      <p:sp>
+        <p:nvSpPr>
+          <p:cNvPr id="33" name="TextBox 32">
+            <a:extLst>
+              <a:ext uri="{FF2B5EF4-FFF2-40B4-BE49-F238E27FC236}">
+                <a16:creationId xmlns:a16="http://schemas.microsoft.com/office/drawing/2014/main" id="{E1596876-5409-CDD3-F050-ECC4179485A0}"/>
+              </a:ext>
+            </a:extLst>
+          </p:cNvPr>
+          <p:cNvSpPr txBox="1"/>
+          <p:nvPr/>
+        </p:nvSpPr>
+        <p:spPr>
+          <a:xfrm>
+            <a:off x="215168" y="4094447"/>
+            <a:ext cx="1301562" cy="307777"/>
+          </a:xfrm>
+          <a:prstGeom prst="rect">
+            <a:avLst/>
+          </a:prstGeom>
+          <a:noFill/>
+        </p:spPr>
+        <p:txBody>
+          <a:bodyPr wrap="square">
+            <a:spAutoFit/>
+          </a:bodyPr>
+          <a:lstStyle/>
+          <a:p>
+            <a:pPr algn="ctr"/>
+            <a:r>
+              <a:rPr lang="en-AU" sz="1400" i="1" dirty="0"/>
+              <a:t>CAGR</a:t>
+            </a:r>
+          </a:p>
+        </p:txBody>
+      </p:sp>
+      <p:sp>
+        <p:nvSpPr>
+          <p:cNvPr id="34" name="TextBox 33">
+            <a:extLst>
+              <a:ext uri="{FF2B5EF4-FFF2-40B4-BE49-F238E27FC236}">
+                <a16:creationId xmlns:a16="http://schemas.microsoft.com/office/drawing/2014/main" id="{6B44F113-06C2-98DE-C148-3499CF6CB837}"/>
+              </a:ext>
+            </a:extLst>
+          </p:cNvPr>
+          <p:cNvSpPr txBox="1"/>
+          <p:nvPr/>
+        </p:nvSpPr>
+        <p:spPr>
+          <a:xfrm>
+            <a:off x="215168" y="4473045"/>
+            <a:ext cx="1301562" cy="307777"/>
+          </a:xfrm>
+          <a:prstGeom prst="rect">
+            <a:avLst/>
+          </a:prstGeom>
+          <a:noFill/>
+        </p:spPr>
+        <p:txBody>
+          <a:bodyPr wrap="square">
+            <a:spAutoFit/>
+          </a:bodyPr>
+          <a:lstStyle/>
+          <a:p>
+            <a:pPr algn="ctr"/>
+            <a:r>
+              <a:rPr lang="en-AU" sz="1400" i="1" dirty="0"/>
+              <a:t>Ipsen position</a:t>
+            </a:r>
+          </a:p>
+        </p:txBody>
+      </p:sp>
+      <p:sp>
+        <p:nvSpPr>
+          <p:cNvPr id="35" name="TextBox 34">
+            <a:extLst>
+              <a:ext uri="{FF2B5EF4-FFF2-40B4-BE49-F238E27FC236}">
+                <a16:creationId xmlns:a16="http://schemas.microsoft.com/office/drawing/2014/main" id="{264496A9-607C-84B7-5798-6D7199163A5D}"/>
+              </a:ext>
+            </a:extLst>
+          </p:cNvPr>
+          <p:cNvSpPr txBox="1"/>
+          <p:nvPr/>
+        </p:nvSpPr>
+        <p:spPr>
+          <a:xfrm>
+            <a:off x="215168" y="5011328"/>
+            <a:ext cx="1301562" cy="523220"/>
+          </a:xfrm>
+          <a:prstGeom prst="rect">
+            <a:avLst/>
+          </a:prstGeom>
+          <a:noFill/>
+        </p:spPr>
+        <p:txBody>
+          <a:bodyPr wrap="square">
+            <a:spAutoFit/>
+          </a:bodyPr>
+          <a:lstStyle/>
+          <a:p>
+            <a:pPr algn="ctr"/>
+            <a:r>
+              <a:rPr lang="en-AU" sz="1400" i="1" dirty="0"/>
+              <a:t>Top competitors</a:t>
+            </a:r>
+          </a:p>
+        </p:txBody>
+      </p:sp>
+      <p:sp>
+        <p:nvSpPr>
+          <p:cNvPr id="36" name="TextBox 35">
+            <a:extLst>
+              <a:ext uri="{FF2B5EF4-FFF2-40B4-BE49-F238E27FC236}">
+                <a16:creationId xmlns:a16="http://schemas.microsoft.com/office/drawing/2014/main" id="{9C4A90E6-DB2F-7059-5D70-200EE7101BD9}"/>
+              </a:ext>
+            </a:extLst>
+          </p:cNvPr>
+          <p:cNvSpPr txBox="1"/>
+          <p:nvPr/>
+        </p:nvSpPr>
+        <p:spPr>
+          <a:xfrm>
+            <a:off x="215168" y="5953294"/>
+            <a:ext cx="1301562" cy="307777"/>
+          </a:xfrm>
+          <a:prstGeom prst="rect">
+            <a:avLst/>
+          </a:prstGeom>
+          <a:noFill/>
+        </p:spPr>
+        <p:txBody>
+          <a:bodyPr wrap="square">
+            <a:spAutoFit/>
+          </a:bodyPr>
+          <a:lstStyle/>
+          <a:p>
+            <a:pPr algn="ctr"/>
+            <a:r>
+              <a:rPr lang="en-AU" sz="1400" i="1" dirty="0"/>
+              <a:t>Key threat</a:t>
+            </a:r>
+          </a:p>
+        </p:txBody>
+      </p:sp>
+      <p:cxnSp>
+        <p:nvCxnSpPr>
+          <p:cNvPr id="38" name="Straight Connector 37">
+            <a:extLst>
+              <a:ext uri="{FF2B5EF4-FFF2-40B4-BE49-F238E27FC236}">
+                <a16:creationId xmlns:a16="http://schemas.microsoft.com/office/drawing/2014/main" id="{7A39BD4B-13D3-CE4C-FB7B-57FEABD7E41C}"/>
+              </a:ext>
+            </a:extLst>
+          </p:cNvPr>
+          <p:cNvCxnSpPr>
+            <a:cxnSpLocks/>
+          </p:cNvCxnSpPr>
+          <p:nvPr/>
+        </p:nvCxnSpPr>
+        <p:spPr>
+          <a:xfrm>
+            <a:off x="280820" y="2817040"/>
+            <a:ext cx="11772000" cy="0"/>
+          </a:xfrm>
+          <a:prstGeom prst="line">
+            <a:avLst/>
+          </a:prstGeom>
+          <a:ln w="12700">
+            <a:prstDash val="dash"/>
+          </a:ln>
+        </p:spPr>
+        <p:style>
+          <a:lnRef idx="2">
+            <a:schemeClr val="accent1"/>
+          </a:lnRef>
+          <a:fillRef idx="0">
+            <a:schemeClr val="accent1"/>
+          </a:fillRef>
+          <a:effectRef idx="1">
+            <a:schemeClr val="accent1"/>
+          </a:effectRef>
+          <a:fontRef idx="minor">
+            <a:schemeClr val="tx1"/>
+          </a:fontRef>
+        </p:style>
+      </p:cxnSp>
+      <p:cxnSp>
+        <p:nvCxnSpPr>
+          <p:cNvPr id="41" name="Straight Connector 40">
+            <a:extLst>
+              <a:ext uri="{FF2B5EF4-FFF2-40B4-BE49-F238E27FC236}">
+                <a16:creationId xmlns:a16="http://schemas.microsoft.com/office/drawing/2014/main" id="{FA42FFC8-E11E-F78F-ED09-DD7D3A70168A}"/>
+              </a:ext>
+            </a:extLst>
+          </p:cNvPr>
+          <p:cNvCxnSpPr>
+            <a:cxnSpLocks/>
+          </p:cNvCxnSpPr>
+          <p:nvPr/>
+        </p:nvCxnSpPr>
+        <p:spPr>
+          <a:xfrm>
+            <a:off x="280820" y="3466185"/>
+            <a:ext cx="11772000" cy="0"/>
+          </a:xfrm>
+          <a:prstGeom prst="line">
+            <a:avLst/>
+          </a:prstGeom>
+          <a:ln w="12700">
+            <a:prstDash val="dash"/>
+          </a:ln>
+        </p:spPr>
+        <p:style>
+          <a:lnRef idx="2">
+            <a:schemeClr val="accent1"/>
+          </a:lnRef>
+          <a:fillRef idx="0">
+            <a:schemeClr val="accent1"/>
+          </a:fillRef>
+          <a:effectRef idx="1">
+            <a:schemeClr val="accent1"/>
+          </a:effectRef>
+          <a:fontRef idx="minor">
+            <a:schemeClr val="tx1"/>
+          </a:fontRef>
+        </p:style>
+      </p:cxnSp>
+      <p:cxnSp>
+        <p:nvCxnSpPr>
+          <p:cNvPr id="43" name="Straight Connector 42">
+            <a:extLst>
+              <a:ext uri="{FF2B5EF4-FFF2-40B4-BE49-F238E27FC236}">
+                <a16:creationId xmlns:a16="http://schemas.microsoft.com/office/drawing/2014/main" id="{3B13846C-45FD-16B1-DA14-18963CACEE9A}"/>
+              </a:ext>
+            </a:extLst>
+          </p:cNvPr>
+          <p:cNvCxnSpPr>
+            <a:cxnSpLocks/>
+          </p:cNvCxnSpPr>
+          <p:nvPr/>
+        </p:nvCxnSpPr>
+        <p:spPr>
+          <a:xfrm>
+            <a:off x="280820" y="4395055"/>
+            <a:ext cx="11772000" cy="0"/>
+          </a:xfrm>
+          <a:prstGeom prst="line">
+            <a:avLst/>
+          </a:prstGeom>
+          <a:ln w="12700">
+            <a:prstDash val="dash"/>
+          </a:ln>
+        </p:spPr>
+        <p:style>
+          <a:lnRef idx="2">
+            <a:schemeClr val="accent1"/>
+          </a:lnRef>
+          <a:fillRef idx="0">
+            <a:schemeClr val="accent1"/>
+          </a:fillRef>
+          <a:effectRef idx="1">
+            <a:schemeClr val="accent1"/>
+          </a:effectRef>
+          <a:fontRef idx="minor">
+            <a:schemeClr val="tx1"/>
+          </a:fontRef>
+        </p:style>
+      </p:cxnSp>
+      <p:cxnSp>
+        <p:nvCxnSpPr>
+          <p:cNvPr id="44" name="Straight Connector 43">
+            <a:extLst>
+              <a:ext uri="{FF2B5EF4-FFF2-40B4-BE49-F238E27FC236}">
+                <a16:creationId xmlns:a16="http://schemas.microsoft.com/office/drawing/2014/main" id="{4ED43C8C-4C12-D662-7792-9FDF654C04D2}"/>
+              </a:ext>
+            </a:extLst>
+          </p:cNvPr>
+          <p:cNvCxnSpPr>
+            <a:cxnSpLocks/>
+          </p:cNvCxnSpPr>
+          <p:nvPr/>
+        </p:nvCxnSpPr>
+        <p:spPr>
+          <a:xfrm>
+            <a:off x="280820" y="4857766"/>
+            <a:ext cx="11772000" cy="0"/>
+          </a:xfrm>
+          <a:prstGeom prst="line">
+            <a:avLst/>
+          </a:prstGeom>
+          <a:ln w="12700">
+            <a:prstDash val="dash"/>
+          </a:ln>
+        </p:spPr>
+        <p:style>
+          <a:lnRef idx="2">
+            <a:schemeClr val="accent1"/>
+          </a:lnRef>
+          <a:fillRef idx="0">
+            <a:schemeClr val="accent1"/>
+          </a:fillRef>
+          <a:effectRef idx="1">
+            <a:schemeClr val="accent1"/>
+          </a:effectRef>
+          <a:fontRef idx="minor">
+            <a:schemeClr val="tx1"/>
+          </a:fontRef>
+        </p:style>
+      </p:cxnSp>
+      <p:cxnSp>
+        <p:nvCxnSpPr>
+          <p:cNvPr id="45" name="Straight Connector 44">
+            <a:extLst>
+              <a:ext uri="{FF2B5EF4-FFF2-40B4-BE49-F238E27FC236}">
+                <a16:creationId xmlns:a16="http://schemas.microsoft.com/office/drawing/2014/main" id="{CF04E7A5-063A-5FE3-9B26-A2D084D68B76}"/>
+              </a:ext>
+            </a:extLst>
+          </p:cNvPr>
+          <p:cNvCxnSpPr>
+            <a:cxnSpLocks/>
+          </p:cNvCxnSpPr>
+          <p:nvPr/>
+        </p:nvCxnSpPr>
+        <p:spPr>
+          <a:xfrm>
+            <a:off x="280820" y="5688110"/>
+            <a:ext cx="11772000" cy="0"/>
+          </a:xfrm>
+          <a:prstGeom prst="line">
+            <a:avLst/>
+          </a:prstGeom>
+          <a:ln w="12700">
+            <a:prstDash val="dash"/>
+          </a:ln>
+        </p:spPr>
+        <p:style>
+          <a:lnRef idx="2">
+            <a:schemeClr val="accent1"/>
+          </a:lnRef>
+          <a:fillRef idx="0">
+            <a:schemeClr val="accent1"/>
+          </a:fillRef>
+          <a:effectRef idx="1">
+            <a:schemeClr val="accent1"/>
+          </a:effectRef>
+          <a:fontRef idx="minor">
+            <a:schemeClr val="tx1"/>
+          </a:fontRef>
+        </p:style>
+      </p:cxnSp>
+      <p:sp>
+        <p:nvSpPr>
+          <p:cNvPr id="46" name="TextBox 45">
+            <a:extLst>
+              <a:ext uri="{FF2B5EF4-FFF2-40B4-BE49-F238E27FC236}">
+                <a16:creationId xmlns:a16="http://schemas.microsoft.com/office/drawing/2014/main" id="{E5C5896F-4A6C-7F45-9E95-9716DE8827B4}"/>
+              </a:ext>
+            </a:extLst>
+          </p:cNvPr>
+          <p:cNvSpPr txBox="1"/>
+          <p:nvPr/>
+        </p:nvSpPr>
+        <p:spPr>
+          <a:xfrm>
+            <a:off x="2032249" y="2817040"/>
+            <a:ext cx="2722856" cy="646331"/>
+          </a:xfrm>
+          <a:prstGeom prst="rect">
+            <a:avLst/>
+          </a:prstGeom>
+          <a:noFill/>
+        </p:spPr>
+        <p:txBody>
+          <a:bodyPr wrap="square" rtlCol="0">
+            <a:spAutoFit/>
+          </a:bodyPr>
+          <a:lstStyle/>
+          <a:p>
+            <a:pPr algn="ctr"/>
+            <a:r>
+              <a:rPr lang="en-FR" sz="1200" dirty="0"/>
+              <a:t>Somatostatin analogs ~$5-7bn (2024)</a:t>
+            </a:r>
+          </a:p>
+          <a:p>
+            <a:pPr algn="ctr"/>
+            <a:r>
+              <a:rPr lang="en-FR" sz="1200" dirty="0"/>
+              <a:t>NET ≈ 50-59% of it</a:t>
+            </a:r>
+          </a:p>
+          <a:p>
+            <a:pPr algn="ctr"/>
+            <a:r>
+              <a:rPr lang="en-FR" sz="1200" dirty="0"/>
+              <a:t>lanreotide segment ~$3.9bn</a:t>
+            </a:r>
+            <a:endParaRPr lang="en-AU" sz="1200" dirty="0"/>
+          </a:p>
+        </p:txBody>
+      </p:sp>
+      <p:sp>
+        <p:nvSpPr>
+          <p:cNvPr id="47" name="TextBox 46">
+            <a:extLst>
+              <a:ext uri="{FF2B5EF4-FFF2-40B4-BE49-F238E27FC236}">
+                <a16:creationId xmlns:a16="http://schemas.microsoft.com/office/drawing/2014/main" id="{D8E578D0-305F-D029-0E02-E0A1266F8513}"/>
+              </a:ext>
+            </a:extLst>
+          </p:cNvPr>
+          <p:cNvSpPr txBox="1"/>
+          <p:nvPr/>
+        </p:nvSpPr>
+        <p:spPr>
+          <a:xfrm>
+            <a:off x="1707663" y="3459912"/>
+            <a:ext cx="3372029" cy="646331"/>
+          </a:xfrm>
+          <a:prstGeom prst="rect">
+            <a:avLst/>
+          </a:prstGeom>
+          <a:noFill/>
+        </p:spPr>
+        <p:txBody>
+          <a:bodyPr wrap="square" rtlCol="0">
+            <a:spAutoFit/>
+          </a:bodyPr>
+          <a:lstStyle/>
+          <a:p>
+            <a:pPr algn="ctr"/>
+            <a:r>
+              <a:rPr lang="en-GB" sz="1200" dirty="0"/>
+              <a:t>~35,000 new NET cases/yr (US) </a:t>
+            </a:r>
+          </a:p>
+          <a:p>
+            <a:pPr algn="ctr"/>
+            <a:r>
+              <a:rPr lang="en-GB" sz="1200" dirty="0"/>
+              <a:t>~125,000 US prevalence</a:t>
+            </a:r>
+          </a:p>
+          <a:p>
+            <a:pPr algn="ctr"/>
+            <a:r>
+              <a:rPr lang="en-GB" sz="1200" dirty="0"/>
+              <a:t>60-80% of GEP-NET patients on SSA therapy</a:t>
+            </a:r>
+            <a:endParaRPr lang="en-AU" sz="1200" dirty="0"/>
+          </a:p>
+        </p:txBody>
+      </p:sp>
+      <p:sp>
+        <p:nvSpPr>
+          <p:cNvPr id="48" name="TextBox 47">
+            <a:extLst>
+              <a:ext uri="{FF2B5EF4-FFF2-40B4-BE49-F238E27FC236}">
+                <a16:creationId xmlns:a16="http://schemas.microsoft.com/office/drawing/2014/main" id="{2E4E7486-6FB3-C922-F573-8725B19242D2}"/>
+              </a:ext>
+            </a:extLst>
+          </p:cNvPr>
+          <p:cNvSpPr txBox="1"/>
+          <p:nvPr/>
+        </p:nvSpPr>
+        <p:spPr>
+          <a:xfrm>
+            <a:off x="1707663" y="4109836"/>
+            <a:ext cx="3372029" cy="276999"/>
+          </a:xfrm>
+          <a:prstGeom prst="rect">
+            <a:avLst/>
+          </a:prstGeom>
+          <a:noFill/>
+        </p:spPr>
+        <p:txBody>
+          <a:bodyPr wrap="square" rtlCol="0">
+            <a:spAutoFit/>
+          </a:bodyPr>
+          <a:lstStyle/>
+          <a:p>
+            <a:pPr algn="ctr"/>
+            <a:r>
+              <a:rPr lang="en-GB" sz="1200" dirty="0"/>
+              <a:t>~7%</a:t>
+            </a:r>
+            <a:endParaRPr lang="en-AU" sz="1200" dirty="0"/>
+          </a:p>
+        </p:txBody>
+      </p:sp>
+      <p:sp>
+        <p:nvSpPr>
+          <p:cNvPr id="49" name="TextBox 48">
+            <a:extLst>
+              <a:ext uri="{FF2B5EF4-FFF2-40B4-BE49-F238E27FC236}">
+                <a16:creationId xmlns:a16="http://schemas.microsoft.com/office/drawing/2014/main" id="{05CE466E-6136-7DA1-497C-8814E18B4E08}"/>
+              </a:ext>
+            </a:extLst>
+          </p:cNvPr>
+          <p:cNvSpPr txBox="1"/>
+          <p:nvPr/>
+        </p:nvSpPr>
+        <p:spPr>
+          <a:xfrm>
+            <a:off x="1707663" y="4396101"/>
+            <a:ext cx="3372029" cy="461665"/>
+          </a:xfrm>
+          <a:prstGeom prst="rect">
+            <a:avLst/>
+          </a:prstGeom>
+          <a:noFill/>
+        </p:spPr>
+        <p:txBody>
+          <a:bodyPr wrap="square" rtlCol="0">
+            <a:spAutoFit/>
+          </a:bodyPr>
+          <a:lstStyle/>
+          <a:p>
+            <a:pPr algn="ctr"/>
+            <a:r>
+              <a:rPr lang="en-GB" sz="1200" dirty="0"/>
+              <a:t>Co-leader with </a:t>
+            </a:r>
+            <a:r>
+              <a:rPr lang="en-GB" sz="1200" i="1" dirty="0" err="1"/>
+              <a:t>Somatuline</a:t>
+            </a:r>
+            <a:r>
+              <a:rPr lang="en-GB" sz="1200" dirty="0"/>
+              <a:t> (</a:t>
+            </a:r>
+            <a:r>
+              <a:rPr lang="en-GB" sz="1200" dirty="0" err="1"/>
+              <a:t>lanreotide</a:t>
+            </a:r>
+            <a:r>
+              <a:rPr lang="en-GB" sz="1200" dirty="0"/>
+              <a:t> LAR)</a:t>
+            </a:r>
+          </a:p>
+          <a:p>
+            <a:pPr algn="ctr"/>
+            <a:r>
+              <a:rPr lang="en-GB" sz="1200" dirty="0"/>
+              <a:t>Top players ~68% combined share</a:t>
+            </a:r>
+            <a:endParaRPr lang="en-AU" sz="1200" dirty="0"/>
+          </a:p>
+        </p:txBody>
+      </p:sp>
+      <p:sp>
+        <p:nvSpPr>
+          <p:cNvPr id="50" name="TextBox 49">
+            <a:extLst>
+              <a:ext uri="{FF2B5EF4-FFF2-40B4-BE49-F238E27FC236}">
+                <a16:creationId xmlns:a16="http://schemas.microsoft.com/office/drawing/2014/main" id="{607EE4C4-7437-52E3-11BF-79F89DCB4C1C}"/>
+              </a:ext>
+            </a:extLst>
+          </p:cNvPr>
+          <p:cNvSpPr txBox="1"/>
+          <p:nvPr/>
+        </p:nvSpPr>
+        <p:spPr>
+          <a:xfrm>
+            <a:off x="1481560" y="4857113"/>
+            <a:ext cx="3824234" cy="830997"/>
+          </a:xfrm>
+          <a:prstGeom prst="rect">
+            <a:avLst/>
+          </a:prstGeom>
+          <a:noFill/>
+        </p:spPr>
+        <p:txBody>
+          <a:bodyPr wrap="square" rtlCol="0">
+            <a:spAutoFit/>
+          </a:bodyPr>
+          <a:lstStyle/>
+          <a:p>
+            <a:pPr algn="ctr"/>
+            <a:r>
+              <a:rPr lang="en-GB" sz="1200" b="1" dirty="0"/>
+              <a:t>Novartis</a:t>
+            </a:r>
+            <a:r>
+              <a:rPr lang="en-GB" sz="1200" dirty="0"/>
+              <a:t> (</a:t>
+            </a:r>
+            <a:r>
+              <a:rPr lang="en-GB" sz="1200" dirty="0" err="1"/>
+              <a:t>Sandostatin</a:t>
+            </a:r>
+            <a:r>
+              <a:rPr lang="en-GB" sz="1200" dirty="0"/>
+              <a:t>/octreotide + </a:t>
+            </a:r>
+            <a:r>
+              <a:rPr lang="en-GB" sz="1200" dirty="0" err="1"/>
+              <a:t>Lutathera</a:t>
+            </a:r>
+            <a:r>
+              <a:rPr lang="en-GB" sz="1200" dirty="0"/>
+              <a:t> radioligand) </a:t>
+            </a:r>
+          </a:p>
+          <a:p>
+            <a:pPr algn="ctr"/>
+            <a:r>
+              <a:rPr lang="en-GB" sz="1200" b="1" dirty="0"/>
+              <a:t>Teva</a:t>
+            </a:r>
+            <a:r>
+              <a:rPr lang="en-GB" sz="1200" dirty="0"/>
+              <a:t> (generic octreotide LAR, launched late 2024) </a:t>
+            </a:r>
+          </a:p>
+          <a:p>
+            <a:pPr algn="ctr"/>
+            <a:r>
+              <a:rPr lang="en-GB" sz="1200" b="1" dirty="0"/>
+              <a:t>Pfizer</a:t>
+            </a:r>
+            <a:endParaRPr lang="en-AU" sz="1200" b="1" dirty="0"/>
+          </a:p>
+        </p:txBody>
+      </p:sp>
+      <p:cxnSp>
+        <p:nvCxnSpPr>
+          <p:cNvPr id="53" name="Straight Connector 52">
+            <a:extLst>
+              <a:ext uri="{FF2B5EF4-FFF2-40B4-BE49-F238E27FC236}">
+                <a16:creationId xmlns:a16="http://schemas.microsoft.com/office/drawing/2014/main" id="{51BCE50A-164B-CB1D-CFA2-3E9274542FD0}"/>
+              </a:ext>
+            </a:extLst>
+          </p:cNvPr>
+          <p:cNvCxnSpPr>
+            <a:cxnSpLocks/>
+          </p:cNvCxnSpPr>
+          <p:nvPr/>
+        </p:nvCxnSpPr>
+        <p:spPr>
+          <a:xfrm>
+            <a:off x="280820" y="4111166"/>
+            <a:ext cx="11772000" cy="0"/>
+          </a:xfrm>
+          <a:prstGeom prst="line">
+            <a:avLst/>
+          </a:prstGeom>
+          <a:ln w="12700">
+            <a:prstDash val="dash"/>
+          </a:ln>
+        </p:spPr>
+        <p:style>
+          <a:lnRef idx="2">
+            <a:schemeClr val="accent1"/>
+          </a:lnRef>
+          <a:fillRef idx="0">
+            <a:schemeClr val="accent1"/>
+          </a:fillRef>
+          <a:effectRef idx="1">
+            <a:schemeClr val="accent1"/>
+          </a:effectRef>
+          <a:fontRef idx="minor">
+            <a:schemeClr val="tx1"/>
+          </a:fontRef>
+        </p:style>
+      </p:cxnSp>
+      <p:sp>
+        <p:nvSpPr>
+          <p:cNvPr id="54" name="TextBox 53">
+            <a:extLst>
+              <a:ext uri="{FF2B5EF4-FFF2-40B4-BE49-F238E27FC236}">
+                <a16:creationId xmlns:a16="http://schemas.microsoft.com/office/drawing/2014/main" id="{0CD1CAB4-57C7-8B36-0798-886DEDDB3810}"/>
+              </a:ext>
+            </a:extLst>
+          </p:cNvPr>
+          <p:cNvSpPr txBox="1"/>
+          <p:nvPr/>
+        </p:nvSpPr>
+        <p:spPr>
+          <a:xfrm>
+            <a:off x="1707663" y="5691685"/>
+            <a:ext cx="3372029" cy="830997"/>
+          </a:xfrm>
+          <a:prstGeom prst="rect">
+            <a:avLst/>
+          </a:prstGeom>
+          <a:noFill/>
+        </p:spPr>
+        <p:txBody>
+          <a:bodyPr wrap="square" rtlCol="0">
+            <a:spAutoFit/>
+          </a:bodyPr>
+          <a:lstStyle/>
+          <a:p>
+            <a:pPr algn="ctr"/>
+            <a:r>
+              <a:rPr lang="en-GB" sz="1200" dirty="0"/>
+              <a:t>Generic octreotide LAR (Teva 2024) + oral next-gen (</a:t>
+            </a:r>
+            <a:r>
+              <a:rPr lang="en-GB" sz="1200" dirty="0" err="1"/>
+              <a:t>Crinetics</a:t>
+            </a:r>
+            <a:r>
+              <a:rPr lang="en-GB" sz="1200" dirty="0"/>
+              <a:t> </a:t>
+            </a:r>
+            <a:r>
+              <a:rPr lang="en-GB" sz="1200" dirty="0" err="1"/>
+              <a:t>paltusotine</a:t>
+            </a:r>
+            <a:r>
+              <a:rPr lang="en-GB" sz="1200" dirty="0"/>
+              <a:t>) + radioligand displacement (Novartis </a:t>
+            </a:r>
+            <a:r>
+              <a:rPr lang="en-GB" sz="1200" dirty="0" err="1"/>
+              <a:t>Lutathera</a:t>
+            </a:r>
+            <a:r>
+              <a:rPr lang="en-GB" sz="1200" dirty="0"/>
+              <a:t>) erode the galenic moat</a:t>
+            </a:r>
+            <a:endParaRPr lang="en-AU" sz="1200" dirty="0"/>
+          </a:p>
+        </p:txBody>
+      </p:sp>
+      <p:sp>
+        <p:nvSpPr>
+          <p:cNvPr id="56" name="TextBox 55">
+            <a:extLst>
+              <a:ext uri="{FF2B5EF4-FFF2-40B4-BE49-F238E27FC236}">
+                <a16:creationId xmlns:a16="http://schemas.microsoft.com/office/drawing/2014/main" id="{007042F7-8DD4-4755-2731-6C792FCCFF48}"/>
+              </a:ext>
+            </a:extLst>
+          </p:cNvPr>
+          <p:cNvSpPr txBox="1"/>
+          <p:nvPr/>
+        </p:nvSpPr>
+        <p:spPr>
+          <a:xfrm>
+            <a:off x="5600136" y="2903688"/>
+            <a:ext cx="2722856" cy="461665"/>
+          </a:xfrm>
+          <a:prstGeom prst="rect">
+            <a:avLst/>
+          </a:prstGeom>
+          <a:noFill/>
+        </p:spPr>
+        <p:txBody>
+          <a:bodyPr wrap="square" rtlCol="0">
+            <a:spAutoFit/>
+          </a:bodyPr>
+          <a:lstStyle/>
+          <a:p>
+            <a:pPr algn="ctr"/>
+            <a:r>
+              <a:rPr lang="en-GB" sz="1200" dirty="0"/>
+              <a:t>~$8-10bn (2024)</a:t>
+            </a:r>
+          </a:p>
+          <a:p>
+            <a:pPr algn="ctr"/>
+            <a:r>
+              <a:rPr lang="en-GB" sz="1200" dirty="0"/>
+              <a:t>Aesthetic ~46% / therapeutic ~54%</a:t>
+            </a:r>
+            <a:endParaRPr lang="en-AU" sz="1200" dirty="0"/>
+          </a:p>
+        </p:txBody>
+      </p:sp>
+      <p:sp>
+        <p:nvSpPr>
+          <p:cNvPr id="57" name="TextBox 56">
+            <a:extLst>
+              <a:ext uri="{FF2B5EF4-FFF2-40B4-BE49-F238E27FC236}">
+                <a16:creationId xmlns:a16="http://schemas.microsoft.com/office/drawing/2014/main" id="{63EF446C-DA7A-C445-FEB7-B153E9FB1BF8}"/>
+              </a:ext>
+            </a:extLst>
+          </p:cNvPr>
+          <p:cNvSpPr txBox="1"/>
+          <p:nvPr/>
+        </p:nvSpPr>
+        <p:spPr>
+          <a:xfrm>
+            <a:off x="5169270" y="3459912"/>
+            <a:ext cx="3576235" cy="646331"/>
+          </a:xfrm>
+          <a:prstGeom prst="rect">
+            <a:avLst/>
+          </a:prstGeom>
+          <a:noFill/>
+        </p:spPr>
+        <p:txBody>
+          <a:bodyPr wrap="square" rtlCol="0">
+            <a:spAutoFit/>
+          </a:bodyPr>
+          <a:lstStyle/>
+          <a:p>
+            <a:pPr algn="ctr"/>
+            <a:r>
+              <a:rPr lang="en-GB" sz="1200" dirty="0"/>
+              <a:t>Aesthetic: largest non-surgical cosmetic procedure</a:t>
+            </a:r>
+          </a:p>
+          <a:p>
+            <a:pPr algn="ctr"/>
+            <a:r>
+              <a:rPr lang="en-GB" sz="1200" dirty="0"/>
+              <a:t>Therapeutic: chronic migraine, cervical dystonia, spasticity, hyperhidrosis</a:t>
+            </a:r>
+            <a:endParaRPr lang="en-AU" sz="1200" dirty="0"/>
+          </a:p>
+        </p:txBody>
+      </p:sp>
+      <p:sp>
+        <p:nvSpPr>
+          <p:cNvPr id="58" name="TextBox 57">
+            <a:extLst>
+              <a:ext uri="{FF2B5EF4-FFF2-40B4-BE49-F238E27FC236}">
+                <a16:creationId xmlns:a16="http://schemas.microsoft.com/office/drawing/2014/main" id="{74DE1680-C8D4-E0B5-B1A9-60BC9CFFF8EA}"/>
+              </a:ext>
+            </a:extLst>
+          </p:cNvPr>
+          <p:cNvSpPr txBox="1"/>
+          <p:nvPr/>
+        </p:nvSpPr>
+        <p:spPr>
+          <a:xfrm>
+            <a:off x="5275550" y="4109836"/>
+            <a:ext cx="3372029" cy="276999"/>
+          </a:xfrm>
+          <a:prstGeom prst="rect">
+            <a:avLst/>
+          </a:prstGeom>
+          <a:noFill/>
+        </p:spPr>
+        <p:txBody>
+          <a:bodyPr wrap="square" rtlCol="0">
+            <a:spAutoFit/>
+          </a:bodyPr>
+          <a:lstStyle/>
+          <a:p>
+            <a:pPr algn="ctr"/>
+            <a:r>
+              <a:rPr lang="en-GB" sz="1200" dirty="0"/>
+              <a:t>~9%</a:t>
+            </a:r>
+            <a:endParaRPr lang="en-AU" sz="1200" dirty="0"/>
+          </a:p>
+        </p:txBody>
+      </p:sp>
+      <p:sp>
+        <p:nvSpPr>
+          <p:cNvPr id="59" name="TextBox 58">
+            <a:extLst>
+              <a:ext uri="{FF2B5EF4-FFF2-40B4-BE49-F238E27FC236}">
+                <a16:creationId xmlns:a16="http://schemas.microsoft.com/office/drawing/2014/main" id="{E98A3A33-0E9C-5000-1E20-D285F4CABE2F}"/>
+              </a:ext>
+            </a:extLst>
+          </p:cNvPr>
+          <p:cNvSpPr txBox="1"/>
+          <p:nvPr/>
+        </p:nvSpPr>
+        <p:spPr>
+          <a:xfrm>
+            <a:off x="5275550" y="4396101"/>
+            <a:ext cx="3372029" cy="461665"/>
+          </a:xfrm>
+          <a:prstGeom prst="rect">
+            <a:avLst/>
+          </a:prstGeom>
+          <a:noFill/>
+        </p:spPr>
+        <p:txBody>
+          <a:bodyPr wrap="square" rtlCol="0">
+            <a:spAutoFit/>
+          </a:bodyPr>
+          <a:lstStyle/>
+          <a:p>
+            <a:pPr algn="ctr"/>
+            <a:r>
+              <a:rPr lang="en-GB" sz="1200" dirty="0"/>
+              <a:t>One of 3 established brands (Botox / Dysport / </a:t>
+            </a:r>
+            <a:r>
+              <a:rPr lang="en-GB" sz="1200" dirty="0" err="1"/>
+              <a:t>Xeomin</a:t>
+            </a:r>
+            <a:r>
+              <a:rPr lang="en-GB" sz="1200" dirty="0"/>
+              <a:t>)</a:t>
+            </a:r>
+            <a:endParaRPr lang="en-AU" sz="1200" dirty="0"/>
+          </a:p>
+        </p:txBody>
+      </p:sp>
+      <p:sp>
+        <p:nvSpPr>
+          <p:cNvPr id="60" name="TextBox 59">
+            <a:extLst>
+              <a:ext uri="{FF2B5EF4-FFF2-40B4-BE49-F238E27FC236}">
+                <a16:creationId xmlns:a16="http://schemas.microsoft.com/office/drawing/2014/main" id="{1CC3DFFC-6CA5-2EF7-EDE5-6D359010FB0F}"/>
+              </a:ext>
+            </a:extLst>
+          </p:cNvPr>
+          <p:cNvSpPr txBox="1"/>
+          <p:nvPr/>
+        </p:nvSpPr>
+        <p:spPr>
+          <a:xfrm>
+            <a:off x="5177621" y="4857113"/>
+            <a:ext cx="3567886" cy="830997"/>
+          </a:xfrm>
+          <a:prstGeom prst="rect">
+            <a:avLst/>
+          </a:prstGeom>
+          <a:noFill/>
+        </p:spPr>
+        <p:txBody>
+          <a:bodyPr wrap="square" rtlCol="0">
+            <a:spAutoFit/>
+          </a:bodyPr>
+          <a:lstStyle/>
+          <a:p>
+            <a:pPr algn="ctr"/>
+            <a:r>
+              <a:rPr lang="en-GB" sz="1200" b="1" dirty="0"/>
+              <a:t>AbbVie </a:t>
+            </a:r>
+            <a:r>
+              <a:rPr lang="en-GB" sz="1200" dirty="0"/>
+              <a:t>(Botox, dominant leader) </a:t>
+            </a:r>
+            <a:endParaRPr lang="en-GB" sz="1200" b="1" dirty="0"/>
+          </a:p>
+          <a:p>
+            <a:pPr algn="ctr"/>
+            <a:r>
+              <a:rPr lang="en-GB" sz="1200" b="1" dirty="0"/>
+              <a:t>Merz </a:t>
+            </a:r>
+            <a:r>
+              <a:rPr lang="en-GB" sz="1200" dirty="0"/>
+              <a:t>(</a:t>
+            </a:r>
+            <a:r>
+              <a:rPr lang="en-GB" sz="1200" dirty="0" err="1"/>
+              <a:t>Xeomin</a:t>
+            </a:r>
+            <a:r>
+              <a:rPr lang="en-GB" sz="1200" dirty="0"/>
+              <a:t>, preservative-free) </a:t>
+            </a:r>
+            <a:endParaRPr lang="en-GB" sz="1200" b="1" dirty="0"/>
+          </a:p>
+          <a:p>
+            <a:pPr algn="ctr"/>
+            <a:r>
+              <a:rPr lang="en-GB" sz="1200" b="1" dirty="0" err="1"/>
+              <a:t>Revance</a:t>
+            </a:r>
+            <a:r>
+              <a:rPr lang="en-GB" sz="1200" b="1" dirty="0"/>
+              <a:t> (</a:t>
+            </a:r>
+            <a:r>
+              <a:rPr lang="en-GB" sz="1200" dirty="0" err="1"/>
+              <a:t>Daxxify</a:t>
+            </a:r>
+            <a:r>
+              <a:rPr lang="en-GB" sz="1200" dirty="0"/>
+              <a:t>, 24-week duration) </a:t>
+            </a:r>
+          </a:p>
+          <a:p>
+            <a:pPr algn="ctr"/>
+            <a:r>
+              <a:rPr lang="en-GB" sz="1200" b="1" dirty="0"/>
+              <a:t>Korean players </a:t>
+            </a:r>
+            <a:r>
+              <a:rPr lang="en-GB" sz="1200" dirty="0"/>
+              <a:t>(Hugel, </a:t>
+            </a:r>
+            <a:r>
+              <a:rPr lang="en-GB" sz="1200" dirty="0" err="1"/>
+              <a:t>Daewoong</a:t>
+            </a:r>
+            <a:r>
+              <a:rPr lang="en-GB" sz="1200" dirty="0"/>
+              <a:t>, </a:t>
+            </a:r>
+            <a:r>
+              <a:rPr lang="en-GB" sz="1200" dirty="0" err="1"/>
+              <a:t>Medytox</a:t>
+            </a:r>
+            <a:r>
+              <a:rPr lang="en-GB" sz="1200" dirty="0"/>
+              <a:t>)</a:t>
+            </a:r>
+            <a:endParaRPr lang="en-AU" sz="1200" dirty="0"/>
+          </a:p>
+        </p:txBody>
+      </p:sp>
+      <p:sp>
+        <p:nvSpPr>
+          <p:cNvPr id="61" name="TextBox 60">
+            <a:extLst>
+              <a:ext uri="{FF2B5EF4-FFF2-40B4-BE49-F238E27FC236}">
+                <a16:creationId xmlns:a16="http://schemas.microsoft.com/office/drawing/2014/main" id="{89849CAA-D927-D571-CB5C-5E99F17DD3C9}"/>
+              </a:ext>
+            </a:extLst>
+          </p:cNvPr>
+          <p:cNvSpPr txBox="1"/>
+          <p:nvPr/>
+        </p:nvSpPr>
+        <p:spPr>
+          <a:xfrm>
+            <a:off x="5275550" y="5691685"/>
+            <a:ext cx="3372029" cy="646331"/>
+          </a:xfrm>
+          <a:prstGeom prst="rect">
+            <a:avLst/>
+          </a:prstGeom>
+          <a:noFill/>
+        </p:spPr>
+        <p:txBody>
+          <a:bodyPr wrap="square" rtlCol="0">
+            <a:spAutoFit/>
+          </a:bodyPr>
+          <a:lstStyle/>
+          <a:p>
+            <a:pPr algn="ctr"/>
+            <a:r>
+              <a:rPr lang="en-GB" sz="1200" dirty="0"/>
+              <a:t>Longer-duration entrants (</a:t>
+            </a:r>
+            <a:r>
+              <a:rPr lang="en-GB" sz="1200" dirty="0" err="1"/>
+              <a:t>Daxxify</a:t>
+            </a:r>
+            <a:r>
+              <a:rPr lang="en-GB" sz="1200" dirty="0"/>
+              <a:t>) + aggressive Korean pricing compress Dysport's mid-tier position: drives Ipsen's next-gen toxin R&amp;D</a:t>
+            </a:r>
+            <a:endParaRPr lang="en-AU" sz="1200" dirty="0"/>
+          </a:p>
+        </p:txBody>
+      </p:sp>
+      <p:sp>
+        <p:nvSpPr>
+          <p:cNvPr id="62" name="TextBox 61">
+            <a:extLst>
+              <a:ext uri="{FF2B5EF4-FFF2-40B4-BE49-F238E27FC236}">
+                <a16:creationId xmlns:a16="http://schemas.microsoft.com/office/drawing/2014/main" id="{CAEE6A7F-65A0-F63F-9668-508269D514CF}"/>
+              </a:ext>
+            </a:extLst>
+          </p:cNvPr>
+          <p:cNvSpPr txBox="1"/>
+          <p:nvPr/>
+        </p:nvSpPr>
+        <p:spPr>
+          <a:xfrm>
+            <a:off x="8801645" y="2903688"/>
+            <a:ext cx="3312000" cy="461665"/>
+          </a:xfrm>
+          <a:prstGeom prst="rect">
+            <a:avLst/>
+          </a:prstGeom>
+          <a:noFill/>
+        </p:spPr>
+        <p:txBody>
+          <a:bodyPr wrap="square" rtlCol="0">
+            <a:spAutoFit/>
+          </a:bodyPr>
+          <a:lstStyle/>
+          <a:p>
+            <a:pPr algn="ctr"/>
+            <a:r>
+              <a:rPr lang="en-GB" sz="1200" dirty="0"/>
+              <a:t>Advanced RCC therapeutics ~$6bn (2024)</a:t>
+            </a:r>
+          </a:p>
+          <a:p>
+            <a:pPr algn="ctr"/>
+            <a:r>
+              <a:rPr lang="en-GB" sz="1200" dirty="0"/>
+              <a:t>Kidney cancer drugs ~$5.8bn</a:t>
+            </a:r>
+            <a:endParaRPr lang="en-AU" sz="1200" dirty="0"/>
+          </a:p>
+        </p:txBody>
+      </p:sp>
+      <p:sp>
+        <p:nvSpPr>
+          <p:cNvPr id="63" name="TextBox 62">
+            <a:extLst>
+              <a:ext uri="{FF2B5EF4-FFF2-40B4-BE49-F238E27FC236}">
+                <a16:creationId xmlns:a16="http://schemas.microsoft.com/office/drawing/2014/main" id="{444509C8-EA52-5AA6-25EF-D70856839B63}"/>
+              </a:ext>
+            </a:extLst>
+          </p:cNvPr>
+          <p:cNvSpPr txBox="1"/>
+          <p:nvPr/>
+        </p:nvSpPr>
+        <p:spPr>
+          <a:xfrm>
+            <a:off x="8801645" y="3459912"/>
+            <a:ext cx="3312000" cy="646331"/>
+          </a:xfrm>
+          <a:prstGeom prst="rect">
+            <a:avLst/>
+          </a:prstGeom>
+          <a:noFill/>
+        </p:spPr>
+        <p:txBody>
+          <a:bodyPr wrap="square" rtlCol="0">
+            <a:spAutoFit/>
+          </a:bodyPr>
+          <a:lstStyle/>
+          <a:p>
+            <a:pPr algn="ctr"/>
+            <a:r>
+              <a:rPr lang="en-GB" sz="1200" dirty="0"/>
+              <a:t>~81,800 new kidney cancer cases/yr (US), ~90% RCC</a:t>
+            </a:r>
+          </a:p>
+          <a:p>
+            <a:pPr algn="ctr"/>
+            <a:r>
+              <a:rPr lang="en-GB" sz="1200" dirty="0"/>
+              <a:t>~65% diagnosed at advanced stage</a:t>
+            </a:r>
+            <a:endParaRPr lang="en-AU" sz="1200" dirty="0"/>
+          </a:p>
+        </p:txBody>
+      </p:sp>
+      <p:sp>
+        <p:nvSpPr>
+          <p:cNvPr id="64" name="TextBox 63">
+            <a:extLst>
+              <a:ext uri="{FF2B5EF4-FFF2-40B4-BE49-F238E27FC236}">
+                <a16:creationId xmlns:a16="http://schemas.microsoft.com/office/drawing/2014/main" id="{6990CE10-F439-FF3D-92D5-12280210B731}"/>
+              </a:ext>
+            </a:extLst>
+          </p:cNvPr>
+          <p:cNvSpPr txBox="1"/>
+          <p:nvPr/>
+        </p:nvSpPr>
+        <p:spPr>
+          <a:xfrm>
+            <a:off x="8801645" y="4109836"/>
+            <a:ext cx="3312000" cy="276999"/>
+          </a:xfrm>
+          <a:prstGeom prst="rect">
+            <a:avLst/>
+          </a:prstGeom>
+          <a:noFill/>
+        </p:spPr>
+        <p:txBody>
+          <a:bodyPr wrap="square" rtlCol="0">
+            <a:spAutoFit/>
+          </a:bodyPr>
+          <a:lstStyle/>
+          <a:p>
+            <a:pPr algn="ctr"/>
+            <a:r>
+              <a:rPr lang="en-GB" sz="1200" dirty="0"/>
+              <a:t>~6%</a:t>
+            </a:r>
+            <a:endParaRPr lang="en-AU" sz="1200" dirty="0"/>
+          </a:p>
+        </p:txBody>
+      </p:sp>
+      <p:sp>
+        <p:nvSpPr>
+          <p:cNvPr id="65" name="TextBox 64">
+            <a:extLst>
+              <a:ext uri="{FF2B5EF4-FFF2-40B4-BE49-F238E27FC236}">
+                <a16:creationId xmlns:a16="http://schemas.microsoft.com/office/drawing/2014/main" id="{3537E143-6F55-699A-2E00-0E93F2622EEF}"/>
+              </a:ext>
+            </a:extLst>
+          </p:cNvPr>
+          <p:cNvSpPr txBox="1"/>
+          <p:nvPr/>
+        </p:nvSpPr>
+        <p:spPr>
+          <a:xfrm>
+            <a:off x="8801645" y="4396101"/>
+            <a:ext cx="3312000" cy="461665"/>
+          </a:xfrm>
+          <a:prstGeom prst="rect">
+            <a:avLst/>
+          </a:prstGeom>
+          <a:noFill/>
+        </p:spPr>
+        <p:txBody>
+          <a:bodyPr wrap="square" rtlCol="0">
+            <a:spAutoFit/>
+          </a:bodyPr>
+          <a:lstStyle/>
+          <a:p>
+            <a:pPr algn="ctr"/>
+            <a:r>
+              <a:rPr lang="en-GB" sz="1200" dirty="0"/>
+              <a:t>Challenger: </a:t>
+            </a:r>
+            <a:r>
+              <a:rPr lang="en-GB" sz="1200" dirty="0" err="1"/>
+              <a:t>Cabometyx</a:t>
+            </a:r>
+            <a:r>
+              <a:rPr lang="en-GB" sz="1200" dirty="0"/>
+              <a:t> from Exelixis (royalties), used 1L mono + combo with Opdivo</a:t>
+            </a:r>
+            <a:endParaRPr lang="en-AU" sz="1200" dirty="0"/>
+          </a:p>
+        </p:txBody>
+      </p:sp>
+      <p:sp>
+        <p:nvSpPr>
+          <p:cNvPr id="66" name="TextBox 65">
+            <a:extLst>
+              <a:ext uri="{FF2B5EF4-FFF2-40B4-BE49-F238E27FC236}">
+                <a16:creationId xmlns:a16="http://schemas.microsoft.com/office/drawing/2014/main" id="{4264BC64-11B2-ECD8-AAD9-E21F87B3A715}"/>
+              </a:ext>
+            </a:extLst>
+          </p:cNvPr>
+          <p:cNvSpPr txBox="1"/>
+          <p:nvPr/>
+        </p:nvSpPr>
+        <p:spPr>
+          <a:xfrm>
+            <a:off x="8801645" y="4857113"/>
+            <a:ext cx="3312000" cy="830997"/>
+          </a:xfrm>
+          <a:prstGeom prst="rect">
+            <a:avLst/>
+          </a:prstGeom>
+          <a:noFill/>
+        </p:spPr>
+        <p:txBody>
+          <a:bodyPr wrap="square" rtlCol="0">
+            <a:spAutoFit/>
+          </a:bodyPr>
+          <a:lstStyle/>
+          <a:p>
+            <a:pPr algn="ctr"/>
+            <a:r>
+              <a:rPr lang="en-GB" sz="1200" b="1" dirty="0"/>
+              <a:t>MSD </a:t>
+            </a:r>
+            <a:r>
+              <a:rPr lang="en-GB" sz="1200" dirty="0"/>
+              <a:t>(</a:t>
+            </a:r>
+            <a:r>
+              <a:rPr lang="en-GB" sz="1200" dirty="0" err="1"/>
+              <a:t>Keytruda+Lenvima</a:t>
+            </a:r>
+            <a:r>
+              <a:rPr lang="en-GB" sz="1200" dirty="0"/>
+              <a:t>/Inlyta &amp; </a:t>
+            </a:r>
+            <a:r>
+              <a:rPr lang="en-GB" sz="1200" dirty="0" err="1"/>
+              <a:t>Welireg</a:t>
+            </a:r>
+            <a:r>
+              <a:rPr lang="en-GB" sz="1200" dirty="0"/>
+              <a:t>/</a:t>
+            </a:r>
+            <a:r>
+              <a:rPr lang="en-GB" sz="1200" dirty="0" err="1"/>
+              <a:t>belzutifan</a:t>
+            </a:r>
+            <a:r>
+              <a:rPr lang="en-GB" sz="1200" dirty="0"/>
+              <a:t> next-gen) </a:t>
+            </a:r>
+            <a:endParaRPr lang="en-GB" sz="1200" b="1" dirty="0"/>
+          </a:p>
+          <a:p>
+            <a:pPr algn="ctr"/>
+            <a:r>
+              <a:rPr lang="en-GB" sz="1200" b="1" dirty="0"/>
+              <a:t>BMS </a:t>
+            </a:r>
+            <a:r>
+              <a:rPr lang="en-GB" sz="1200" dirty="0"/>
+              <a:t>(</a:t>
+            </a:r>
+            <a:r>
+              <a:rPr lang="en-GB" sz="1200" dirty="0" err="1"/>
+              <a:t>Opdivo+Yervoy</a:t>
+            </a:r>
+            <a:r>
+              <a:rPr lang="en-GB" sz="1200" dirty="0"/>
+              <a:t> &amp; </a:t>
+            </a:r>
+            <a:r>
+              <a:rPr lang="en-GB" sz="1200" dirty="0" err="1"/>
+              <a:t>Opdivo+Cabometyx</a:t>
+            </a:r>
+            <a:r>
+              <a:rPr lang="en-GB" sz="1200" dirty="0"/>
+              <a:t>)</a:t>
+            </a:r>
+          </a:p>
+          <a:p>
+            <a:pPr algn="ctr"/>
+            <a:r>
+              <a:rPr lang="en-GB" sz="1200" b="1" dirty="0"/>
+              <a:t>Eisai/Pfizer </a:t>
+            </a:r>
+            <a:r>
+              <a:rPr lang="en-GB" sz="1200" dirty="0"/>
+              <a:t>(</a:t>
+            </a:r>
+            <a:r>
+              <a:rPr lang="en-GB" sz="1200" dirty="0" err="1"/>
+              <a:t>Lenvima</a:t>
+            </a:r>
+            <a:r>
+              <a:rPr lang="en-GB" sz="1200" dirty="0"/>
+              <a:t>, Inlyta)</a:t>
+            </a:r>
+            <a:endParaRPr lang="en-AU" sz="1200" dirty="0"/>
+          </a:p>
+        </p:txBody>
+      </p:sp>
+      <p:sp>
+        <p:nvSpPr>
+          <p:cNvPr id="67" name="TextBox 66">
+            <a:extLst>
+              <a:ext uri="{FF2B5EF4-FFF2-40B4-BE49-F238E27FC236}">
+                <a16:creationId xmlns:a16="http://schemas.microsoft.com/office/drawing/2014/main" id="{A0AC0E9C-8F92-D544-29EC-446CF7CA6575}"/>
+              </a:ext>
+            </a:extLst>
+          </p:cNvPr>
+          <p:cNvSpPr txBox="1"/>
+          <p:nvPr/>
+        </p:nvSpPr>
+        <p:spPr>
+          <a:xfrm>
+            <a:off x="8801645" y="5691685"/>
+            <a:ext cx="3312000" cy="646331"/>
+          </a:xfrm>
+          <a:prstGeom prst="rect">
+            <a:avLst/>
+          </a:prstGeom>
+          <a:noFill/>
+        </p:spPr>
+        <p:txBody>
+          <a:bodyPr wrap="square" rtlCol="0">
+            <a:spAutoFit/>
+          </a:bodyPr>
+          <a:lstStyle/>
+          <a:p>
+            <a:pPr algn="ctr"/>
+            <a:r>
+              <a:rPr lang="en-GB" sz="1200" dirty="0"/>
+              <a:t>LOE 2029 + next-gen displacement: </a:t>
+            </a:r>
+            <a:r>
+              <a:rPr lang="en-GB" sz="1200" dirty="0" err="1"/>
+              <a:t>zanzalintinib</a:t>
+            </a:r>
+            <a:r>
+              <a:rPr lang="en-GB" sz="1200" dirty="0"/>
+              <a:t> (Exelixis' own successor) + </a:t>
+            </a:r>
+            <a:r>
+              <a:rPr lang="en-GB" sz="1200" dirty="0" err="1"/>
+              <a:t>belzutifan</a:t>
+            </a:r>
+            <a:r>
+              <a:rPr lang="en-GB" sz="1200" dirty="0"/>
+              <a:t> (MSD) target the post-PD-1 setting</a:t>
+            </a:r>
+            <a:endParaRPr lang="en-AU" sz="1200" dirty="0"/>
+          </a:p>
+        </p:txBody>
+      </p:sp>
+      <p:sp>
+        <p:nvSpPr>
+          <p:cNvPr id="69" name="TextBox 68">
+            <a:extLst>
+              <a:ext uri="{FF2B5EF4-FFF2-40B4-BE49-F238E27FC236}">
+                <a16:creationId xmlns:a16="http://schemas.microsoft.com/office/drawing/2014/main" id="{E33A3423-B10C-1F23-4560-2DB5A775BBA6}"/>
+              </a:ext>
+            </a:extLst>
+          </p:cNvPr>
+          <p:cNvSpPr txBox="1"/>
+          <p:nvPr/>
+        </p:nvSpPr>
+        <p:spPr>
+          <a:xfrm>
+            <a:off x="1410262" y="6642555"/>
+            <a:ext cx="9371476" cy="215444"/>
+          </a:xfrm>
+          <a:prstGeom prst="rect">
+            <a:avLst/>
+          </a:prstGeom>
+          <a:noFill/>
+        </p:spPr>
+        <p:txBody>
           <a:bodyPr wrap="none" rtlCol="0">
             <a:spAutoFit/>
           </a:bodyPr>
           <a:lstStyle/>
           <a:p>
             <a:r>
-              <a:rPr lang="en-AU" b="1" dirty="0">
-                <a:solidFill>
-                  <a:srgbClr val="163B5A"/>
-                </a:solidFill>
-              </a:rPr>
-              <a:t>PPAR </a:t>
-            </a:r>
-            <a:r>
-              <a:rPr lang="el-GR" b="1" dirty="0">
-                <a:solidFill>
-                  <a:srgbClr val="163B5A"/>
-                </a:solidFill>
-              </a:rPr>
-              <a:t>α/δ </a:t>
-            </a:r>
-            <a:r>
-              <a:rPr lang="en-AU" b="1" dirty="0">
-                <a:solidFill>
-                  <a:srgbClr val="163B5A"/>
-                </a:solidFill>
-              </a:rPr>
-              <a:t>agonist</a:t>
+              <a:rPr lang="en-AU" sz="800" i="1" dirty="0"/>
+              <a:t>Sources: Mordor Intelligence, Grand View Research, GM Insights, Clarivate, Credence Research, </a:t>
+            </a:r>
+            <a:r>
+              <a:rPr lang="en-AU" sz="800" i="1" dirty="0" err="1"/>
+              <a:t>DelveInsight</a:t>
+            </a:r>
+            <a:r>
+              <a:rPr lang="en-AU" sz="800" i="1" dirty="0"/>
+              <a:t>, company filings (2024-2025). Market sizes vary by scope (aesthetic vs total, advanced vs all-stage).</a:t>
             </a:r>
           </a:p>
         </p:txBody>
@@ -9648,11 +8336,19 @@
           <a:lstStyle/>
           <a:p>
             <a:r>
-              <a:rPr lang="en-US" sz="1400" dirty="0"/>
+              <a:rPr lang="en-US" sz="1400" dirty="0">
+                <a:solidFill>
+                  <a:srgbClr val="163B5A"/>
+                </a:solidFill>
+              </a:rPr>
               <a:t>Ipsen target a very diversified specialty-care portfolio to secure revenue and decrease dependency on few oncology </a:t>
             </a:r>
             <a:r>
-              <a:rPr lang="en-US" sz="1400" dirty="0" err="1"/>
+              <a:rPr lang="en-US" sz="1400" dirty="0" err="1">
+                <a:solidFill>
+                  <a:srgbClr val="163B5A"/>
+                </a:solidFill>
+              </a:rPr>
               <a:t>produtcs</a:t>
             </a:r>
             <a:endParaRPr lang="en-AU" sz="1400" dirty="0">
@@ -9769,13 +8465,13 @@
           <p:nvPr>
             <p:extLst>
               <p:ext uri="{D42A27DB-BD31-4B8C-83A1-F6EECF244321}">
-                <p14:modId xmlns:p14="http://schemas.microsoft.com/office/powerpoint/2010/main" val="3765648980"/>
+                <p14:modId xmlns:p14="http://schemas.microsoft.com/office/powerpoint/2010/main" val="2306614771"/>
               </p:ext>
             </p:extLst>
           </p:nvPr>
         </p:nvGraphicFramePr>
         <p:xfrm>
-          <a:off x="451104" y="1697532"/>
+          <a:off x="451104" y="1596054"/>
           <a:ext cx="6604001" cy="2882617"/>
         </p:xfrm>
         <a:graphic>
@@ -12082,7 +10778,7 @@
         </p:nvSpPr>
         <p:spPr>
           <a:xfrm>
-            <a:off x="451104" y="5121619"/>
+            <a:off x="451104" y="5931179"/>
             <a:ext cx="2900922" cy="45719"/>
           </a:xfrm>
           <a:prstGeom prst="rect">
@@ -12134,7 +10830,7 @@
         </p:nvSpPr>
         <p:spPr>
           <a:xfrm>
-            <a:off x="375258" y="4775146"/>
+            <a:off x="375258" y="5584706"/>
             <a:ext cx="2115451" cy="369332"/>
           </a:xfrm>
           <a:prstGeom prst="rect">
@@ -12264,8 +10960,8 @@
         </p:nvSpPr>
         <p:spPr>
           <a:xfrm>
-            <a:off x="451104" y="5167338"/>
-            <a:ext cx="6604001" cy="1569660"/>
+            <a:off x="451104" y="5976898"/>
+            <a:ext cx="6604001" cy="830997"/>
           </a:xfrm>
           <a:prstGeom prst="rect">
             <a:avLst/>
@@ -12284,8 +10980,21 @@
             </a:pPr>
             <a:r>
               <a:rPr lang="en-US" sz="1200" dirty="0"/>
-              <a:t>Diversified specialty-care portfolio, with Oncology as the revenue backbone</a:t>
-            </a:r>
+              <a:t>Rare Disease emerging as a second growth engine, led by </a:t>
+            </a:r>
+            <a:r>
+              <a:rPr lang="en-US" sz="1200" dirty="0" err="1"/>
+              <a:t>Iqirvo</a:t>
+            </a:r>
+            <a:r>
+              <a:rPr lang="en-US" sz="1200" dirty="0"/>
+              <a:t> and </a:t>
+            </a:r>
+            <a:r>
+              <a:rPr lang="en-US" sz="1200" dirty="0" err="1"/>
+              <a:t>Bylvay</a:t>
+            </a:r>
+            <a:endParaRPr lang="en-US" sz="1200" dirty="0"/>
           </a:p>
           <a:p>
             <a:pPr marL="285750" indent="-285750">
@@ -12294,37 +11003,16 @@
             </a:pPr>
             <a:r>
               <a:rPr lang="en-US" sz="1200" dirty="0"/>
-              <a:t>Oncology driven by mature but resilient franchises: </a:t>
+              <a:t>Neuroscience anchored by Dysport, with </a:t>
             </a:r>
             <a:r>
               <a:rPr lang="en-US" sz="1200" dirty="0" err="1"/>
-              <a:t>Somatuline</a:t>
+              <a:t>corabotase</a:t>
             </a:r>
             <a:r>
               <a:rPr lang="en-US" sz="1200" dirty="0"/>
-              <a:t>, </a:t>
-            </a:r>
-            <a:r>
-              <a:rPr lang="en-US" sz="1200" dirty="0" err="1"/>
-              <a:t>Cabometyx</a:t>
-            </a:r>
-            <a:r>
-              <a:rPr lang="en-US" sz="1200" dirty="0"/>
-              <a:t>, </a:t>
-            </a:r>
-            <a:r>
-              <a:rPr lang="en-US" sz="1200" dirty="0" err="1"/>
-              <a:t>Decapeptyl</a:t>
-            </a:r>
-            <a:r>
-              <a:rPr lang="en-US" sz="1200" dirty="0"/>
-              <a:t>, </a:t>
-            </a:r>
-            <a:r>
-              <a:rPr lang="en-US" sz="1200" dirty="0" err="1"/>
-              <a:t>Onivyde</a:t>
-            </a:r>
-            <a:endParaRPr lang="en-US" sz="1200" dirty="0"/>
+              <a:t> as next-generation growth relay</a:t>
+            </a:r>
           </a:p>
           <a:p>
             <a:pPr marL="285750" indent="-285750">
@@ -12333,58 +11021,7 @@
             </a:pPr>
             <a:r>
               <a:rPr lang="en-US" sz="1200" dirty="0"/>
-              <a:t>Rare Disease emerging as a second growth engine, led by </a:t>
-            </a:r>
-            <a:r>
-              <a:rPr lang="en-US" sz="1200" dirty="0" err="1"/>
-              <a:t>Iqirvo</a:t>
-            </a:r>
-            <a:r>
-              <a:rPr lang="en-US" sz="1200" dirty="0"/>
-              <a:t> and </a:t>
-            </a:r>
-            <a:r>
-              <a:rPr lang="en-US" sz="1200" dirty="0" err="1"/>
-              <a:t>Bylvay</a:t>
-            </a:r>
-            <a:endParaRPr lang="en-US" sz="1200" dirty="0"/>
-          </a:p>
-          <a:p>
-            <a:pPr marL="285750" indent="-285750">
-              <a:buFont typeface="Arial" panose="020B0604020202020204" pitchFamily="34" charset="0"/>
-              <a:buChar char="•"/>
-            </a:pPr>
-            <a:r>
-              <a:rPr lang="en-US" sz="1200" dirty="0"/>
-              <a:t>Neuroscience anchored by Dysport, with </a:t>
-            </a:r>
-            <a:r>
-              <a:rPr lang="en-US" sz="1200" dirty="0" err="1"/>
-              <a:t>corabotase</a:t>
-            </a:r>
-            <a:r>
-              <a:rPr lang="en-US" sz="1200" dirty="0"/>
-              <a:t> as next-generation growth relay</a:t>
-            </a:r>
-          </a:p>
-          <a:p>
-            <a:pPr marL="285750" indent="-285750">
-              <a:buFont typeface="Arial" panose="020B0604020202020204" pitchFamily="34" charset="0"/>
-              <a:buChar char="•"/>
-            </a:pPr>
-            <a:r>
-              <a:rPr lang="en-US" sz="1200" dirty="0"/>
               <a:t>Post-2020 external innovation engine: 30+ best-/first-in-class programs added through M&amp;A, licensing and partnerships</a:t>
-            </a:r>
-          </a:p>
-          <a:p>
-            <a:pPr marL="285750" indent="-285750">
-              <a:buFont typeface="Arial" panose="020B0604020202020204" pitchFamily="34" charset="0"/>
-              <a:buChar char="•"/>
-            </a:pPr>
-            <a:r>
-              <a:rPr lang="en-US" sz="1200" dirty="0"/>
-              <a:t>Strategic shift toward precision oncology, rare liver diseases and next-generation neurotoxins</a:t>
             </a:r>
           </a:p>
         </p:txBody>
@@ -12423,7 +11060,146 @@
             </a:r>
             <a:r>
               <a:rPr lang="en-US" sz="1200" dirty="0"/>
-              <a:t>Can Ipsen offset </a:t>
+              <a:t>With </a:t>
+            </a:r>
+            <a:r>
+              <a:rPr lang="en-US" sz="1200" dirty="0" err="1"/>
+              <a:t>Cabometyx</a:t>
+            </a:r>
+            <a:r>
+              <a:rPr lang="en-US" sz="1200" dirty="0"/>
+              <a:t> facing LOE in 2029 and next-gen displacement (</a:t>
+            </a:r>
+            <a:r>
+              <a:rPr lang="en-US" sz="1200" dirty="0" err="1"/>
+              <a:t>zanzalintinib</a:t>
+            </a:r>
+            <a:r>
+              <a:rPr lang="en-US" sz="1200" dirty="0"/>
+              <a:t>, </a:t>
+            </a:r>
+            <a:r>
+              <a:rPr lang="en-US" sz="1200" dirty="0" err="1"/>
+              <a:t>belzutifan</a:t>
+            </a:r>
+            <a:r>
+              <a:rPr lang="en-US" sz="1200" dirty="0"/>
+              <a:t>), can precision-oncology assets (</a:t>
+            </a:r>
+            <a:r>
+              <a:rPr lang="en-US" sz="1200" dirty="0" err="1"/>
+              <a:t>Ojemda</a:t>
+            </a:r>
+            <a:r>
+              <a:rPr lang="en-US" sz="1200" dirty="0"/>
+              <a:t>, IPN pipeline) offset the gap fast enough?</a:t>
+            </a:r>
+          </a:p>
+          <a:p>
+            <a:r>
+              <a:rPr lang="en-US" sz="1200" b="1" dirty="0"/>
+              <a:t>Rare Disease: </a:t>
+            </a:r>
+            <a:r>
+              <a:rPr lang="en-US" sz="1200" dirty="0"/>
+              <a:t>Rare grew +97% in FY25 (</a:t>
+            </a:r>
+            <a:r>
+              <a:rPr lang="en-US" sz="1200" dirty="0" err="1"/>
+              <a:t>Iqirvo</a:t>
+            </a:r>
+            <a:r>
+              <a:rPr lang="en-US" sz="1200" dirty="0"/>
+              <a:t>, </a:t>
+            </a:r>
+            <a:r>
+              <a:rPr lang="en-US" sz="1200" dirty="0" err="1"/>
+              <a:t>Bylvay</a:t>
+            </a:r>
+            <a:r>
+              <a:rPr lang="en-US" sz="1200" dirty="0"/>
+              <a:t>). Is Ipsen building a true second pillar, or still using Rare Disease as portfolio diversification without critical mass?</a:t>
+            </a:r>
+          </a:p>
+          <a:p>
+            <a:r>
+              <a:rPr lang="en-US" sz="1200" b="1" dirty="0"/>
+              <a:t>Neuroscience: </a:t>
+            </a:r>
+            <a:r>
+              <a:rPr lang="en-US" sz="1200" dirty="0"/>
+              <a:t>Is Dysport + next-gen toxin enough to defend the mid-tier position against </a:t>
+            </a:r>
+            <a:r>
+              <a:rPr lang="en-US" sz="1200" dirty="0" err="1"/>
+              <a:t>Daxxify</a:t>
+            </a:r>
+            <a:r>
+              <a:rPr lang="en-US" sz="1200" dirty="0"/>
+              <a:t> and Korean entrants</a:t>
+            </a:r>
+          </a:p>
+        </p:txBody>
+      </p:sp>
+      <p:sp>
+        <p:nvSpPr>
+          <p:cNvPr id="23" name="TextBox 22">
+            <a:extLst>
+              <a:ext uri="{FF2B5EF4-FFF2-40B4-BE49-F238E27FC236}">
+                <a16:creationId xmlns:a16="http://schemas.microsoft.com/office/drawing/2014/main" id="{A4927033-DC65-645C-9D64-363E24CD6EBB}"/>
+              </a:ext>
+            </a:extLst>
+          </p:cNvPr>
+          <p:cNvSpPr txBox="1"/>
+          <p:nvPr/>
+        </p:nvSpPr>
+        <p:spPr>
+          <a:xfrm>
+            <a:off x="451105" y="4524390"/>
+            <a:ext cx="6765764" cy="1015663"/>
+          </a:xfrm>
+          <a:prstGeom prst="rect">
+            <a:avLst/>
+          </a:prstGeom>
+          <a:noFill/>
+        </p:spPr>
+        <p:txBody>
+          <a:bodyPr wrap="square" rtlCol="0">
+            <a:spAutoFit/>
+          </a:bodyPr>
+          <a:lstStyle/>
+          <a:p>
+            <a:r>
+              <a:rPr lang="en-US" sz="1200" b="1" dirty="0"/>
+              <a:t>Cliff exposure:</a:t>
+            </a:r>
+          </a:p>
+          <a:p>
+            <a:pPr marL="628650" lvl="1" indent="-171450">
+              <a:buFont typeface="Arial" panose="020B0604020202020204" pitchFamily="34" charset="0"/>
+              <a:buChar char="•"/>
+            </a:pPr>
+            <a:r>
+              <a:rPr lang="en-FR" sz="1200" b="1" dirty="0"/>
+              <a:t>One acute cliff: Cabometyx 2029</a:t>
+            </a:r>
+            <a:r>
+              <a:rPr lang="en-FR" sz="1200" dirty="0"/>
+              <a:t> (~€0.6bn), exposed to next-gen displacement (zanzalintinib, belzutifan).</a:t>
+            </a:r>
+          </a:p>
+          <a:p>
+            <a:pPr marL="628650" lvl="1" indent="-171450">
+              <a:buFont typeface="Arial" panose="020B0604020202020204" pitchFamily="34" charset="0"/>
+              <a:buChar char="•"/>
+            </a:pPr>
+            <a:r>
+              <a:rPr lang="en-US" sz="1200" b="1" dirty="0"/>
+              <a:t>Makes diversification a need</a:t>
+            </a:r>
+            <a:r>
+              <a:rPr lang="en-US" sz="1200" dirty="0"/>
+              <a:t>: cash cows (</a:t>
             </a:r>
             <a:r>
               <a:rPr lang="en-US" sz="1200" dirty="0" err="1"/>
@@ -12431,59 +11207,15 @@
             </a:r>
             <a:r>
               <a:rPr lang="en-US" sz="1200" dirty="0"/>
-              <a:t> LOE risk fast enough through </a:t>
+              <a:t> (€1.1bn) + </a:t>
             </a:r>
             <a:r>
               <a:rPr lang="en-US" sz="1200" dirty="0" err="1"/>
-              <a:t>Cabometyx</a:t>
+              <a:t>Decapeptyl</a:t>
             </a:r>
             <a:r>
               <a:rPr lang="en-US" sz="1200" dirty="0"/>
-              <a:t> / </a:t>
-            </a:r>
-            <a:r>
-              <a:rPr lang="en-US" sz="1200" dirty="0" err="1"/>
-              <a:t>Onivyde</a:t>
-            </a:r>
-            <a:r>
-              <a:rPr lang="en-US" sz="1200" dirty="0"/>
-              <a:t> / </a:t>
-            </a:r>
-            <a:r>
-              <a:rPr lang="en-US" sz="1200" dirty="0" err="1"/>
-              <a:t>Ojemda</a:t>
-            </a:r>
-            <a:r>
-              <a:rPr lang="en-US" sz="1200" dirty="0"/>
-              <a:t> and new precision-oncology modalities?</a:t>
-            </a:r>
-          </a:p>
-          <a:p>
-            <a:r>
-              <a:rPr lang="en-US" sz="1200" b="1" dirty="0"/>
-              <a:t>Rare Disease: </a:t>
-            </a:r>
-            <a:r>
-              <a:rPr lang="en-US" sz="1200" dirty="0"/>
-              <a:t>Is Ipsen building a true second TA pillar, or still using Rare Disease as portfolio diversification?</a:t>
-            </a:r>
-          </a:p>
-          <a:p>
-            <a:r>
-              <a:rPr lang="en-US" sz="1200" b="1" dirty="0"/>
-              <a:t>Neuroscience: </a:t>
-            </a:r>
-            <a:r>
-              <a:rPr lang="en-US" sz="1200" dirty="0"/>
-              <a:t>Is Dysport/</a:t>
-            </a:r>
-            <a:r>
-              <a:rPr lang="en-US" sz="1200" dirty="0" err="1"/>
-              <a:t>corabotase</a:t>
-            </a:r>
-            <a:r>
-              <a:rPr lang="en-US" sz="1200" dirty="0"/>
-              <a:t> enough to secure long-term growth, or does Ipsen need external neuro assets beyond toxin lifecycle expansion?</a:t>
+              <a:t> (€0.5bn)) plateauing + one hard 2029 cliff.</a:t>
             </a:r>
           </a:p>
         </p:txBody>
